--- a/presentations/Признаки_наружного_кровотечения_и_кровопотери.pptx
+++ b/presentations/Признаки_наружного_кровотечения_и_кровопотери.pptx
@@ -17,6 +17,7 @@
     <p:sldId id="265" r:id="rId16"/>
     <p:sldId id="266" r:id="rId17"/>
     <p:sldId id="267" r:id="rId18"/>
+    <p:sldId id="268" r:id="rId19"/>
   </p:sldIdLst>
   <p:sldSz cx="12191695" cy="6858000" type="screen4x3"/>
   <p:notesSz cx="6858000" cy="9144000"/>
@@ -3431,7 +3432,7 @@
           <a:p>
             <a:pPr algn="l"/>
             <a:r>
-              <a:rPr sz="2400" b="1">
+              <a:rPr sz="2200" b="1">
                 <a:solidFill>
                   <a:srgbClr val="333333"/>
                 </a:solidFill>
@@ -3439,7 +3440,7 @@
                 <a:ea typeface="Open Sans"/>
                 <a:cs typeface="Open Sans"/>
               </a:rPr>
-              <a:t>ПРИЗНАКИ ИНТЕНСИВНОГО КРОВОТЕЧЕНИЯ</a:t>
+              <a:t>ЧТО МАСКИРУЕТ ПРИЗНАКИ КРОВОТЕЧЕНИЯ</a:t>
             </a:r>
           </a:p>
         </p:txBody>
@@ -3606,137 +3607,25 @@
       </p:sp>
       <p:sp>
         <p:nvSpPr>
-          <p:cNvPr id="8" name="TextBox 7"/>
-          <p:cNvSpPr txBox="1"/>
-          <p:nvPr/>
-        </p:nvSpPr>
-        <p:spPr>
-          <a:xfrm>
-            <a:off x="700000" y="1500000"/>
-            <a:ext cx="11000000" cy="800000"/>
-          </a:xfrm>
-          <a:prstGeom prst="rect">
-            <a:avLst/>
-          </a:prstGeom>
-          <a:noFill/>
-        </p:spPr>
-        <p:txBody>
-          <a:bodyPr wrap="square" anchor="t">
-            <a:spAutoFit/>
-          </a:bodyPr>
-          <a:lstStyle/>
-          <a:p>
-            <a:pPr algn="l"/>
-            <a:r>
-              <a:rPr sz="1600" b="1">
-                <a:solidFill>
-                  <a:srgbClr val="333333"/>
-                </a:solidFill>
-                <a:latin typeface="Open Sans"/>
-                <a:ea typeface="Open Sans"/>
-                <a:cs typeface="Open Sans"/>
-              </a:rPr>
-              <a:t>Сигнал к немедленной остановке кровотечения:</a:t>
-            </a:r>
-          </a:p>
-        </p:txBody>
-      </p:sp>
-      <p:sp>
-        <p:nvSpPr>
-          <p:cNvPr id="9" name="TextBox 8"/>
-          <p:cNvSpPr txBox="1"/>
-          <p:nvPr/>
-        </p:nvSpPr>
-        <p:spPr>
-          <a:xfrm>
-            <a:off x="700000" y="2400000"/>
-            <a:ext cx="11000000" cy="2500000"/>
-          </a:xfrm>
-          <a:prstGeom prst="rect">
-            <a:avLst/>
-          </a:prstGeom>
-          <a:noFill/>
-        </p:spPr>
-        <p:txBody>
-          <a:bodyPr wrap="square">
-            <a:spAutoFit/>
-          </a:bodyPr>
-          <a:lstStyle/>
-          <a:p>
-            <a:pPr algn="l">
-              <a:spcAft>
-                <a:spcPts val="800"/>
-              </a:spcAft>
-            </a:pPr>
-            <a:r>
-              <a:rPr sz="1700" b="0">
-                <a:solidFill>
-                  <a:srgbClr val="333333"/>
-                </a:solidFill>
-                <a:latin typeface="Open Sans"/>
-                <a:ea typeface="Open Sans"/>
-                <a:cs typeface="Open Sans"/>
-              </a:rPr>
-              <a:t>☐  одежда, пропитанная кровью;</a:t>
-            </a:r>
-          </a:p>
-          <a:p>
-            <a:pPr algn="l">
-              <a:spcAft>
-                <a:spcPts val="800"/>
-              </a:spcAft>
-            </a:pPr>
-            <a:r>
-              <a:rPr sz="1700" b="0">
-                <a:solidFill>
-                  <a:srgbClr val="333333"/>
-                </a:solidFill>
-                <a:latin typeface="Open Sans"/>
-                <a:ea typeface="Open Sans"/>
-                <a:cs typeface="Open Sans"/>
-              </a:rPr>
-              <a:t>☐  скопление значительного количества крови на земле возле пострадавшего;</a:t>
-            </a:r>
-          </a:p>
-          <a:p>
-            <a:pPr algn="l">
-              <a:spcAft>
-                <a:spcPts val="800"/>
-              </a:spcAft>
-            </a:pPr>
-            <a:r>
-              <a:rPr sz="1700" b="0">
-                <a:solidFill>
-                  <a:srgbClr val="333333"/>
-                </a:solidFill>
-                <a:latin typeface="Open Sans"/>
-                <a:ea typeface="Open Sans"/>
-                <a:cs typeface="Open Sans"/>
-              </a:rPr>
-              <a:t>☐  видимые раны с интенсивно вытекающей из них кровью.</a:t>
-            </a:r>
-          </a:p>
-        </p:txBody>
-      </p:sp>
-      <p:sp>
-        <p:nvSpPr>
-          <p:cNvPr id="10" name="Rounded Rectangle 9"/>
+          <p:cNvPr id="8" name="Rectangle 7"/>
           <p:cNvSpPr/>
           <p:nvPr/>
         </p:nvSpPr>
         <p:spPr>
           <a:xfrm>
-            <a:off x="700000" y="5200000"/>
+            <a:off x="700000" y="1450000"/>
             <a:ext cx="11000000" cy="1100000"/>
           </a:xfrm>
-          <a:prstGeom prst="roundRect">
+          <a:prstGeom prst="rect">
             <a:avLst/>
           </a:prstGeom>
           <a:solidFill>
-            <a:srgbClr val="F5F0E1"/>
+            <a:srgbClr val="FFFFFF"/>
           </a:solidFill>
-          <a:ln>
-            <a:noFill/>
+          <a:ln w="12700">
+            <a:solidFill>
+              <a:srgbClr val="999999"/>
+            </a:solidFill>
           </a:ln>
         </p:spPr>
         <p:style>
@@ -3763,14 +3652,14 @@
       </p:sp>
       <p:sp>
         <p:nvSpPr>
-          <p:cNvPr id="11" name="TextBox 10"/>
+          <p:cNvPr id="9" name="TextBox 8"/>
           <p:cNvSpPr txBox="1"/>
           <p:nvPr/>
         </p:nvSpPr>
         <p:spPr>
           <a:xfrm>
-            <a:off x="950000" y="5350000"/>
-            <a:ext cx="10500000" cy="800000"/>
+            <a:off x="950000" y="1570000"/>
+            <a:ext cx="10400000" cy="350000"/>
           </a:xfrm>
           <a:prstGeom prst="rect">
             <a:avLst/>
@@ -3778,22 +3667,416 @@
           <a:noFill/>
         </p:spPr>
         <p:txBody>
-          <a:bodyPr wrap="square" anchor="ctr">
+          <a:bodyPr wrap="square" anchor="t">
             <a:spAutoFit/>
           </a:bodyPr>
           <a:lstStyle/>
           <a:p>
             <a:pPr algn="l"/>
             <a:r>
-              <a:rPr sz="1600" b="1">
-                <a:solidFill>
-                  <a:srgbClr val="ED1C24"/>
+              <a:rPr sz="1500" b="1">
+                <a:solidFill>
+                  <a:srgbClr val="333333"/>
                 </a:solidFill>
                 <a:latin typeface="Open Sans"/>
                 <a:ea typeface="Open Sans"/>
                 <a:cs typeface="Open Sans"/>
               </a:rPr>
-              <a:t>Обнаружив такие признаки — сразу приступайте к остановке всеми доступными способами.</a:t>
+              <a:t>Тёмная / плотная одежда</a:t>
+            </a:r>
+          </a:p>
+        </p:txBody>
+      </p:sp>
+      <p:sp>
+        <p:nvSpPr>
+          <p:cNvPr id="10" name="TextBox 9"/>
+          <p:cNvSpPr txBox="1"/>
+          <p:nvPr/>
+        </p:nvSpPr>
+        <p:spPr>
+          <a:xfrm>
+            <a:off x="950000" y="1950000"/>
+            <a:ext cx="10400000" cy="450000"/>
+          </a:xfrm>
+          <a:prstGeom prst="rect">
+            <a:avLst/>
+          </a:prstGeom>
+          <a:noFill/>
+        </p:spPr>
+        <p:txBody>
+          <a:bodyPr wrap="square" anchor="t">
+            <a:spAutoFit/>
+          </a:bodyPr>
+          <a:lstStyle/>
+          <a:p>
+            <a:pPr algn="l"/>
+            <a:r>
+              <a:rPr sz="1300" b="0">
+                <a:solidFill>
+                  <a:srgbClr val="666666"/>
+                </a:solidFill>
+                <a:latin typeface="Open Sans"/>
+                <a:ea typeface="Open Sans"/>
+                <a:cs typeface="Open Sans"/>
+              </a:rPr>
+              <a:t>Кровь плохо видна — ощупайте, приподнимите одежду при осмотре.</a:t>
+            </a:r>
+          </a:p>
+        </p:txBody>
+      </p:sp>
+      <p:sp>
+        <p:nvSpPr>
+          <p:cNvPr id="11" name="Rectangle 10"/>
+          <p:cNvSpPr/>
+          <p:nvPr/>
+        </p:nvSpPr>
+        <p:spPr>
+          <a:xfrm>
+            <a:off x="700000" y="2650000"/>
+            <a:ext cx="11000000" cy="1100000"/>
+          </a:xfrm>
+          <a:prstGeom prst="rect">
+            <a:avLst/>
+          </a:prstGeom>
+          <a:solidFill>
+            <a:srgbClr val="FFFFFF"/>
+          </a:solidFill>
+          <a:ln w="12700">
+            <a:solidFill>
+              <a:srgbClr val="999999"/>
+            </a:solidFill>
+          </a:ln>
+        </p:spPr>
+        <p:style>
+          <a:lnRef idx="1">
+            <a:schemeClr val="accent1"/>
+          </a:lnRef>
+          <a:fillRef idx="3">
+            <a:schemeClr val="accent1"/>
+          </a:fillRef>
+          <a:effectRef idx="2">
+            <a:schemeClr val="accent1"/>
+          </a:effectRef>
+          <a:fontRef idx="minor">
+            <a:schemeClr val="lt1"/>
+          </a:fontRef>
+        </p:style>
+        <p:txBody>
+          <a:bodyPr rtlCol="0" anchor="ctr"/>
+          <a:lstStyle/>
+          <a:p>
+            <a:pPr algn="ctr"/>
+          </a:p>
+        </p:txBody>
+      </p:sp>
+      <p:sp>
+        <p:nvSpPr>
+          <p:cNvPr id="12" name="TextBox 11"/>
+          <p:cNvSpPr txBox="1"/>
+          <p:nvPr/>
+        </p:nvSpPr>
+        <p:spPr>
+          <a:xfrm>
+            <a:off x="950000" y="2770000"/>
+            <a:ext cx="10400000" cy="350000"/>
+          </a:xfrm>
+          <a:prstGeom prst="rect">
+            <a:avLst/>
+          </a:prstGeom>
+          <a:noFill/>
+        </p:spPr>
+        <p:txBody>
+          <a:bodyPr wrap="square" anchor="t">
+            <a:spAutoFit/>
+          </a:bodyPr>
+          <a:lstStyle/>
+          <a:p>
+            <a:pPr algn="l"/>
+            <a:r>
+              <a:rPr sz="1500" b="1">
+                <a:solidFill>
+                  <a:srgbClr val="333333"/>
+                </a:solidFill>
+                <a:latin typeface="Open Sans"/>
+                <a:ea typeface="Open Sans"/>
+                <a:cs typeface="Open Sans"/>
+              </a:rPr>
+              <a:t>Кровь под пострадавшим</a:t>
+            </a:r>
+          </a:p>
+        </p:txBody>
+      </p:sp>
+      <p:sp>
+        <p:nvSpPr>
+          <p:cNvPr id="13" name="TextBox 12"/>
+          <p:cNvSpPr txBox="1"/>
+          <p:nvPr/>
+        </p:nvSpPr>
+        <p:spPr>
+          <a:xfrm>
+            <a:off x="950000" y="3150000"/>
+            <a:ext cx="10400000" cy="450000"/>
+          </a:xfrm>
+          <a:prstGeom prst="rect">
+            <a:avLst/>
+          </a:prstGeom>
+          <a:noFill/>
+        </p:spPr>
+        <p:txBody>
+          <a:bodyPr wrap="square" anchor="t">
+            <a:spAutoFit/>
+          </a:bodyPr>
+          <a:lstStyle/>
+          <a:p>
+            <a:pPr algn="l"/>
+            <a:r>
+              <a:rPr sz="1300" b="0">
+                <a:solidFill>
+                  <a:srgbClr val="666666"/>
+                </a:solidFill>
+                <a:latin typeface="Open Sans"/>
+                <a:ea typeface="Open Sans"/>
+                <a:cs typeface="Open Sans"/>
+              </a:rPr>
+              <a:t>Лужа может быть сзади / под телом — осмотрите вокруг.</a:t>
+            </a:r>
+          </a:p>
+        </p:txBody>
+      </p:sp>
+      <p:sp>
+        <p:nvSpPr>
+          <p:cNvPr id="14" name="Rectangle 13"/>
+          <p:cNvSpPr/>
+          <p:nvPr/>
+        </p:nvSpPr>
+        <p:spPr>
+          <a:xfrm>
+            <a:off x="700000" y="3850000"/>
+            <a:ext cx="11000000" cy="1100000"/>
+          </a:xfrm>
+          <a:prstGeom prst="rect">
+            <a:avLst/>
+          </a:prstGeom>
+          <a:solidFill>
+            <a:srgbClr val="FFFFFF"/>
+          </a:solidFill>
+          <a:ln w="12700">
+            <a:solidFill>
+              <a:srgbClr val="999999"/>
+            </a:solidFill>
+          </a:ln>
+        </p:spPr>
+        <p:style>
+          <a:lnRef idx="1">
+            <a:schemeClr val="accent1"/>
+          </a:lnRef>
+          <a:fillRef idx="3">
+            <a:schemeClr val="accent1"/>
+          </a:fillRef>
+          <a:effectRef idx="2">
+            <a:schemeClr val="accent1"/>
+          </a:effectRef>
+          <a:fontRef idx="minor">
+            <a:schemeClr val="lt1"/>
+          </a:fontRef>
+        </p:style>
+        <p:txBody>
+          <a:bodyPr rtlCol="0" anchor="ctr"/>
+          <a:lstStyle/>
+          <a:p>
+            <a:pPr algn="ctr"/>
+          </a:p>
+        </p:txBody>
+      </p:sp>
+      <p:sp>
+        <p:nvSpPr>
+          <p:cNvPr id="15" name="TextBox 14"/>
+          <p:cNvSpPr txBox="1"/>
+          <p:nvPr/>
+        </p:nvSpPr>
+        <p:spPr>
+          <a:xfrm>
+            <a:off x="950000" y="3970000"/>
+            <a:ext cx="10400000" cy="350000"/>
+          </a:xfrm>
+          <a:prstGeom prst="rect">
+            <a:avLst/>
+          </a:prstGeom>
+          <a:noFill/>
+        </p:spPr>
+        <p:txBody>
+          <a:bodyPr wrap="square" anchor="t">
+            <a:spAutoFit/>
+          </a:bodyPr>
+          <a:lstStyle/>
+          <a:p>
+            <a:pPr algn="l"/>
+            <a:r>
+              <a:rPr sz="1500" b="1">
+                <a:solidFill>
+                  <a:srgbClr val="333333"/>
+                </a:solidFill>
+                <a:latin typeface="Open Sans"/>
+                <a:ea typeface="Open Sans"/>
+                <a:cs typeface="Open Sans"/>
+              </a:rPr>
+              <a:t>Холод, дождь, грязь</a:t>
+            </a:r>
+          </a:p>
+        </p:txBody>
+      </p:sp>
+      <p:sp>
+        <p:nvSpPr>
+          <p:cNvPr id="16" name="TextBox 15"/>
+          <p:cNvSpPr txBox="1"/>
+          <p:nvPr/>
+        </p:nvSpPr>
+        <p:spPr>
+          <a:xfrm>
+            <a:off x="950000" y="4350000"/>
+            <a:ext cx="10400000" cy="450000"/>
+          </a:xfrm>
+          <a:prstGeom prst="rect">
+            <a:avLst/>
+          </a:prstGeom>
+          <a:noFill/>
+        </p:spPr>
+        <p:txBody>
+          <a:bodyPr wrap="square" anchor="t">
+            <a:spAutoFit/>
+          </a:bodyPr>
+          <a:lstStyle/>
+          <a:p>
+            <a:pPr algn="l"/>
+            <a:r>
+              <a:rPr sz="1300" b="0">
+                <a:solidFill>
+                  <a:srgbClr val="666666"/>
+                </a:solidFill>
+                <a:latin typeface="Open Sans"/>
+                <a:ea typeface="Open Sans"/>
+                <a:cs typeface="Open Sans"/>
+              </a:rPr>
+              <a:t>Сложно оценить цвет кожи и объём крови — опирайтесь на слабость, пульс, дыхание.</a:t>
+            </a:r>
+          </a:p>
+        </p:txBody>
+      </p:sp>
+      <p:sp>
+        <p:nvSpPr>
+          <p:cNvPr id="17" name="Rectangle 16"/>
+          <p:cNvSpPr/>
+          <p:nvPr/>
+        </p:nvSpPr>
+        <p:spPr>
+          <a:xfrm>
+            <a:off x="700000" y="5050000"/>
+            <a:ext cx="11000000" cy="1100000"/>
+          </a:xfrm>
+          <a:prstGeom prst="rect">
+            <a:avLst/>
+          </a:prstGeom>
+          <a:solidFill>
+            <a:srgbClr val="FFFFFF"/>
+          </a:solidFill>
+          <a:ln w="12700">
+            <a:solidFill>
+              <a:srgbClr val="999999"/>
+            </a:solidFill>
+          </a:ln>
+        </p:spPr>
+        <p:style>
+          <a:lnRef idx="1">
+            <a:schemeClr val="accent1"/>
+          </a:lnRef>
+          <a:fillRef idx="3">
+            <a:schemeClr val="accent1"/>
+          </a:fillRef>
+          <a:effectRef idx="2">
+            <a:schemeClr val="accent1"/>
+          </a:effectRef>
+          <a:fontRef idx="minor">
+            <a:schemeClr val="lt1"/>
+          </a:fontRef>
+        </p:style>
+        <p:txBody>
+          <a:bodyPr rtlCol="0" anchor="ctr"/>
+          <a:lstStyle/>
+          <a:p>
+            <a:pPr algn="ctr"/>
+          </a:p>
+        </p:txBody>
+      </p:sp>
+      <p:sp>
+        <p:nvSpPr>
+          <p:cNvPr id="18" name="TextBox 17"/>
+          <p:cNvSpPr txBox="1"/>
+          <p:nvPr/>
+        </p:nvSpPr>
+        <p:spPr>
+          <a:xfrm>
+            <a:off x="950000" y="5170000"/>
+            <a:ext cx="10400000" cy="350000"/>
+          </a:xfrm>
+          <a:prstGeom prst="rect">
+            <a:avLst/>
+          </a:prstGeom>
+          <a:noFill/>
+        </p:spPr>
+        <p:txBody>
+          <a:bodyPr wrap="square" anchor="t">
+            <a:spAutoFit/>
+          </a:bodyPr>
+          <a:lstStyle/>
+          <a:p>
+            <a:pPr algn="l"/>
+            <a:r>
+              <a:rPr sz="1500" b="1">
+                <a:solidFill>
+                  <a:srgbClr val="333333"/>
+                </a:solidFill>
+                <a:latin typeface="Open Sans"/>
+                <a:ea typeface="Open Sans"/>
+                <a:cs typeface="Open Sans"/>
+              </a:rPr>
+              <a:t>Несколько пострадавших</a:t>
+            </a:r>
+          </a:p>
+        </p:txBody>
+      </p:sp>
+      <p:sp>
+        <p:nvSpPr>
+          <p:cNvPr id="19" name="TextBox 18"/>
+          <p:cNvSpPr txBox="1"/>
+          <p:nvPr/>
+        </p:nvSpPr>
+        <p:spPr>
+          <a:xfrm>
+            <a:off x="950000" y="5550000"/>
+            <a:ext cx="10400000" cy="450000"/>
+          </a:xfrm>
+          <a:prstGeom prst="rect">
+            <a:avLst/>
+          </a:prstGeom>
+          <a:noFill/>
+        </p:spPr>
+        <p:txBody>
+          <a:bodyPr wrap="square" anchor="t">
+            <a:spAutoFit/>
+          </a:bodyPr>
+          <a:lstStyle/>
+          <a:p>
+            <a:pPr algn="l"/>
+            <a:r>
+              <a:rPr sz="1300" b="0">
+                <a:solidFill>
+                  <a:srgbClr val="666666"/>
+                </a:solidFill>
+                <a:latin typeface="Open Sans"/>
+                <a:ea typeface="Open Sans"/>
+                <a:cs typeface="Open Sans"/>
+              </a:rPr>
+              <a:t>Интенсивное кровотечение ищите в первую очередь у каждого.</a:t>
             </a:r>
           </a:p>
         </p:txBody>
@@ -3883,7 +4166,7 @@
           <a:p>
             <a:pPr algn="l"/>
             <a:r>
-              <a:rPr sz="2400" b="1">
+              <a:rPr sz="2200" b="1">
                 <a:solidFill>
                   <a:srgbClr val="333333"/>
                 </a:solidFill>
@@ -3891,7 +4174,7 @@
                 <a:ea typeface="Open Sans"/>
                 <a:cs typeface="Open Sans"/>
               </a:rPr>
-              <a:t>ГЛАВНОЕ ЗАПОМНИТЬ</a:t>
+              <a:t>ОРИЕНТИРЫ ПО ОБЪЁМУ КРОВОПОТЕРИ</a:t>
             </a:r>
           </a:p>
         </p:txBody>
@@ -4056,104 +4339,413 @@
           </a:p>
         </p:txBody>
       </p:sp>
-      <p:sp>
-        <p:nvSpPr>
-          <p:cNvPr id="8" name="Rectangle 7"/>
-          <p:cNvSpPr/>
-          <p:nvPr/>
-        </p:nvSpPr>
-        <p:spPr>
-          <a:xfrm>
-            <a:off x="700000" y="1550000"/>
-            <a:ext cx="11000000" cy="1000000"/>
-          </a:xfrm>
-          <a:prstGeom prst="rect">
-            <a:avLst/>
-          </a:prstGeom>
-          <a:solidFill>
-            <a:srgbClr val="FFFFFF"/>
-          </a:solidFill>
-          <a:ln w="12700">
-            <a:solidFill>
-              <a:srgbClr val="999999"/>
-            </a:solidFill>
-          </a:ln>
-        </p:spPr>
-        <p:style>
-          <a:lnRef idx="1">
-            <a:schemeClr val="accent1"/>
-          </a:lnRef>
-          <a:fillRef idx="3">
-            <a:schemeClr val="accent1"/>
-          </a:fillRef>
-          <a:effectRef idx="2">
-            <a:schemeClr val="accent1"/>
-          </a:effectRef>
-          <a:fontRef idx="minor">
-            <a:schemeClr val="lt1"/>
-          </a:fontRef>
-        </p:style>
-        <p:txBody>
-          <a:bodyPr rtlCol="0" anchor="ctr"/>
-          <a:lstStyle/>
-          <a:p>
-            <a:pPr algn="ctr"/>
-          </a:p>
-        </p:txBody>
-      </p:sp>
-      <p:sp>
-        <p:nvSpPr>
-          <p:cNvPr id="9" name="Rectangle 8"/>
-          <p:cNvSpPr/>
-          <p:nvPr/>
-        </p:nvSpPr>
-        <p:spPr>
-          <a:xfrm>
-            <a:off x="700000" y="1550000"/>
-            <a:ext cx="90000" cy="1000000"/>
-          </a:xfrm>
-          <a:prstGeom prst="rect">
-            <a:avLst/>
-          </a:prstGeom>
-          <a:solidFill>
-            <a:srgbClr val="ED1C24"/>
-          </a:solidFill>
-          <a:ln>
-            <a:noFill/>
-          </a:ln>
-        </p:spPr>
-        <p:style>
-          <a:lnRef idx="1">
-            <a:schemeClr val="accent1"/>
-          </a:lnRef>
-          <a:fillRef idx="3">
-            <a:schemeClr val="accent1"/>
-          </a:fillRef>
-          <a:effectRef idx="2">
-            <a:schemeClr val="accent1"/>
-          </a:effectRef>
-          <a:fontRef idx="minor">
-            <a:schemeClr val="lt1"/>
-          </a:fontRef>
-        </p:style>
-        <p:txBody>
-          <a:bodyPr rtlCol="0" anchor="ctr"/>
-          <a:lstStyle/>
-          <a:p>
-            <a:pPr algn="ctr"/>
-          </a:p>
-        </p:txBody>
-      </p:sp>
-      <p:sp>
-        <p:nvSpPr>
-          <p:cNvPr id="10" name="TextBox 9"/>
+      <p:graphicFrame>
+        <p:nvGraphicFramePr>
+          <p:cNvPr id="8" name="Table 7"/>
+          <p:cNvGraphicFramePr>
+            <a:graphicFrameLocks noGrp="1"/>
+          </p:cNvGraphicFramePr>
+          <p:nvPr/>
+        </p:nvGraphicFramePr>
+        <p:xfrm>
+          <a:off x="700000" y="1550000"/>
+          <a:ext cx="11000000" cy="3800000"/>
+        </p:xfrm>
+        <a:graphic>
+          <a:graphicData uri="http://schemas.openxmlformats.org/drawingml/2006/table">
+            <a:tbl>
+              <a:tblPr firstRow="1" bandRow="1">
+                <a:tableStyleId>{5C22544A-7EE6-4342-B048-85BDC9FD1C3A}</a:tableStyleId>
+              </a:tblPr>
+              <a:tblGrid>
+                <a:gridCol w="3666666"/>
+                <a:gridCol w="3666666"/>
+                <a:gridCol w="3666668"/>
+              </a:tblGrid>
+              <a:tr h="760000">
+                <a:tc>
+                  <a:txBody>
+                    <a:bodyPr/>
+                    <a:lstStyle/>
+                    <a:p>
+                      <a:r>
+                        <a:rPr sz="1300" b="1">
+                          <a:solidFill>
+                            <a:srgbClr val="FFFFFF"/>
+                          </a:solidFill>
+                          <a:latin typeface="Open Sans"/>
+                          <a:ea typeface="Open Sans"/>
+                          <a:cs typeface="Open Sans"/>
+                        </a:rPr>
+                        <a:t>Объём (ориентир)</a:t>
+                      </a:r>
+                    </a:p>
+                  </a:txBody>
+                  <a:tcPr>
+                    <a:solidFill>
+                      <a:srgbClr val="444444"/>
+                    </a:solidFill>
+                  </a:tcPr>
+                </a:tc>
+                <a:tc>
+                  <a:txBody>
+                    <a:bodyPr/>
+                    <a:lstStyle/>
+                    <a:p>
+                      <a:r>
+                        <a:rPr sz="1300" b="1">
+                          <a:solidFill>
+                            <a:srgbClr val="FFFFFF"/>
+                          </a:solidFill>
+                          <a:latin typeface="Open Sans"/>
+                          <a:ea typeface="Open Sans"/>
+                          <a:cs typeface="Open Sans"/>
+                        </a:rPr>
+                        <a:t>Доля ОЦК</a:t>
+                      </a:r>
+                    </a:p>
+                  </a:txBody>
+                  <a:tcPr>
+                    <a:solidFill>
+                      <a:srgbClr val="444444"/>
+                    </a:solidFill>
+                  </a:tcPr>
+                </a:tc>
+                <a:tc>
+                  <a:txBody>
+                    <a:bodyPr/>
+                    <a:lstStyle/>
+                    <a:p>
+                      <a:r>
+                        <a:rPr sz="1300" b="1">
+                          <a:solidFill>
+                            <a:srgbClr val="FFFFFF"/>
+                          </a:solidFill>
+                          <a:latin typeface="Open Sans"/>
+                          <a:ea typeface="Open Sans"/>
+                          <a:cs typeface="Open Sans"/>
+                        </a:rPr>
+                        <a:t>Типичное состояние</a:t>
+                      </a:r>
+                    </a:p>
+                  </a:txBody>
+                  <a:tcPr>
+                    <a:solidFill>
+                      <a:srgbClr val="444444"/>
+                    </a:solidFill>
+                  </a:tcPr>
+                </a:tc>
+              </a:tr>
+              <a:tr h="760000">
+                <a:tc>
+                  <a:txBody>
+                    <a:bodyPr/>
+                    <a:lstStyle/>
+                    <a:p>
+                      <a:r>
+                        <a:rPr sz="1300" b="0">
+                          <a:solidFill>
+                            <a:srgbClr val="333333"/>
+                          </a:solidFill>
+                          <a:latin typeface="Open Sans"/>
+                          <a:ea typeface="Open Sans"/>
+                          <a:cs typeface="Open Sans"/>
+                        </a:rPr>
+                        <a:t>До ~500 мл</a:t>
+                      </a:r>
+                    </a:p>
+                  </a:txBody>
+                  <a:tcPr>
+                    <a:solidFill>
+                      <a:srgbClr val="FFFFFF"/>
+                    </a:solidFill>
+                  </a:tcPr>
+                </a:tc>
+                <a:tc>
+                  <a:txBody>
+                    <a:bodyPr/>
+                    <a:lstStyle/>
+                    <a:p>
+                      <a:r>
+                        <a:rPr sz="1300" b="0">
+                          <a:solidFill>
+                            <a:srgbClr val="333333"/>
+                          </a:solidFill>
+                          <a:latin typeface="Open Sans"/>
+                          <a:ea typeface="Open Sans"/>
+                          <a:cs typeface="Open Sans"/>
+                        </a:rPr>
+                        <a:t>≈ 10%</a:t>
+                      </a:r>
+                    </a:p>
+                  </a:txBody>
+                  <a:tcPr>
+                    <a:solidFill>
+                      <a:srgbClr val="FFFFFF"/>
+                    </a:solidFill>
+                  </a:tcPr>
+                </a:tc>
+                <a:tc>
+                  <a:txBody>
+                    <a:bodyPr/>
+                    <a:lstStyle/>
+                    <a:p>
+                      <a:r>
+                        <a:rPr sz="1300" b="0">
+                          <a:solidFill>
+                            <a:srgbClr val="333333"/>
+                          </a:solidFill>
+                          <a:latin typeface="Open Sans"/>
+                          <a:ea typeface="Open Sans"/>
+                          <a:cs typeface="Open Sans"/>
+                        </a:rPr>
+                        <a:t>Слабость, жажда</a:t>
+                      </a:r>
+                    </a:p>
+                  </a:txBody>
+                  <a:tcPr>
+                    <a:solidFill>
+                      <a:srgbClr val="FFFFFF"/>
+                    </a:solidFill>
+                  </a:tcPr>
+                </a:tc>
+              </a:tr>
+              <a:tr h="760000">
+                <a:tc>
+                  <a:txBody>
+                    <a:bodyPr/>
+                    <a:lstStyle/>
+                    <a:p>
+                      <a:r>
+                        <a:rPr sz="1300" b="0">
+                          <a:solidFill>
+                            <a:srgbClr val="333333"/>
+                          </a:solidFill>
+                          <a:latin typeface="Open Sans"/>
+                          <a:ea typeface="Open Sans"/>
+                          <a:cs typeface="Open Sans"/>
+                        </a:rPr>
+                        <a:t>500–1000 мл</a:t>
+                      </a:r>
+                    </a:p>
+                  </a:txBody>
+                  <a:tcPr>
+                    <a:solidFill>
+                      <a:srgbClr val="F5F5F5"/>
+                    </a:solidFill>
+                  </a:tcPr>
+                </a:tc>
+                <a:tc>
+                  <a:txBody>
+                    <a:bodyPr/>
+                    <a:lstStyle/>
+                    <a:p>
+                      <a:r>
+                        <a:rPr sz="1300" b="0">
+                          <a:solidFill>
+                            <a:srgbClr val="333333"/>
+                          </a:solidFill>
+                          <a:latin typeface="Open Sans"/>
+                          <a:ea typeface="Open Sans"/>
+                          <a:cs typeface="Open Sans"/>
+                        </a:rPr>
+                        <a:t>≈ 10–20%</a:t>
+                      </a:r>
+                    </a:p>
+                  </a:txBody>
+                  <a:tcPr>
+                    <a:solidFill>
+                      <a:srgbClr val="F5F5F5"/>
+                    </a:solidFill>
+                  </a:tcPr>
+                </a:tc>
+                <a:tc>
+                  <a:txBody>
+                    <a:bodyPr/>
+                    <a:lstStyle/>
+                    <a:p>
+                      <a:r>
+                        <a:rPr sz="1300" b="0">
+                          <a:solidFill>
+                            <a:srgbClr val="333333"/>
+                          </a:solidFill>
+                          <a:latin typeface="Open Sans"/>
+                          <a:ea typeface="Open Sans"/>
+                          <a:cs typeface="Open Sans"/>
+                        </a:rPr>
+                        <a:t>Бледность, учащённый пульс</a:t>
+                      </a:r>
+                    </a:p>
+                  </a:txBody>
+                  <a:tcPr>
+                    <a:solidFill>
+                      <a:srgbClr val="F5F5F5"/>
+                    </a:solidFill>
+                  </a:tcPr>
+                </a:tc>
+              </a:tr>
+              <a:tr h="760000">
+                <a:tc>
+                  <a:txBody>
+                    <a:bodyPr/>
+                    <a:lstStyle/>
+                    <a:p>
+                      <a:r>
+                        <a:rPr sz="1300" b="0">
+                          <a:solidFill>
+                            <a:srgbClr val="333333"/>
+                          </a:solidFill>
+                          <a:latin typeface="Open Sans"/>
+                          <a:ea typeface="Open Sans"/>
+                          <a:cs typeface="Open Sans"/>
+                        </a:rPr>
+                        <a:t>1000–1500 мл</a:t>
+                      </a:r>
+                    </a:p>
+                  </a:txBody>
+                  <a:tcPr>
+                    <a:solidFill>
+                      <a:srgbClr val="FFFFFF"/>
+                    </a:solidFill>
+                  </a:tcPr>
+                </a:tc>
+                <a:tc>
+                  <a:txBody>
+                    <a:bodyPr/>
+                    <a:lstStyle/>
+                    <a:p>
+                      <a:r>
+                        <a:rPr sz="1300" b="0">
+                          <a:solidFill>
+                            <a:srgbClr val="333333"/>
+                          </a:solidFill>
+                          <a:latin typeface="Open Sans"/>
+                          <a:ea typeface="Open Sans"/>
+                          <a:cs typeface="Open Sans"/>
+                        </a:rPr>
+                        <a:t>≈ 20–30%</a:t>
+                      </a:r>
+                    </a:p>
+                  </a:txBody>
+                  <a:tcPr>
+                    <a:solidFill>
+                      <a:srgbClr val="FFFFFF"/>
+                    </a:solidFill>
+                  </a:tcPr>
+                </a:tc>
+                <a:tc>
+                  <a:txBody>
+                    <a:bodyPr/>
+                    <a:lstStyle/>
+                    <a:p>
+                      <a:r>
+                        <a:rPr sz="1300" b="0">
+                          <a:solidFill>
+                            <a:srgbClr val="333333"/>
+                          </a:solidFill>
+                          <a:latin typeface="Open Sans"/>
+                          <a:ea typeface="Open Sans"/>
+                          <a:cs typeface="Open Sans"/>
+                        </a:rPr>
+                        <a:t>Обмороки, холодный пот</a:t>
+                      </a:r>
+                    </a:p>
+                  </a:txBody>
+                  <a:tcPr>
+                    <a:solidFill>
+                      <a:srgbClr val="FFFFFF"/>
+                    </a:solidFill>
+                  </a:tcPr>
+                </a:tc>
+              </a:tr>
+              <a:tr h="760000">
+                <a:tc>
+                  <a:txBody>
+                    <a:bodyPr/>
+                    <a:lstStyle/>
+                    <a:p>
+                      <a:r>
+                        <a:rPr sz="1300" b="1">
+                          <a:solidFill>
+                            <a:srgbClr val="ED1C24"/>
+                          </a:solidFill>
+                          <a:latin typeface="Open Sans"/>
+                          <a:ea typeface="Open Sans"/>
+                          <a:cs typeface="Open Sans"/>
+                        </a:rPr>
+                        <a:t>&gt;1500–2000 мл</a:t>
+                      </a:r>
+                    </a:p>
+                  </a:txBody>
+                  <a:tcPr>
+                    <a:solidFill>
+                      <a:srgbClr val="F5F5F5"/>
+                    </a:solidFill>
+                  </a:tcPr>
+                </a:tc>
+                <a:tc>
+                  <a:txBody>
+                    <a:bodyPr/>
+                    <a:lstStyle/>
+                    <a:p>
+                      <a:r>
+                        <a:rPr sz="1300" b="1">
+                          <a:solidFill>
+                            <a:srgbClr val="ED1C24"/>
+                          </a:solidFill>
+                          <a:latin typeface="Open Sans"/>
+                          <a:ea typeface="Open Sans"/>
+                          <a:cs typeface="Open Sans"/>
+                        </a:rPr>
+                        <a:t>&gt; 30%</a:t>
+                      </a:r>
+                    </a:p>
+                  </a:txBody>
+                  <a:tcPr>
+                    <a:solidFill>
+                      <a:srgbClr val="F5F5F5"/>
+                    </a:solidFill>
+                  </a:tcPr>
+                </a:tc>
+                <a:tc>
+                  <a:txBody>
+                    <a:bodyPr/>
+                    <a:lstStyle/>
+                    <a:p>
+                      <a:r>
+                        <a:rPr sz="1300" b="1">
+                          <a:solidFill>
+                            <a:srgbClr val="ED1C24"/>
+                          </a:solidFill>
+                          <a:latin typeface="Open Sans"/>
+                          <a:ea typeface="Open Sans"/>
+                          <a:cs typeface="Open Sans"/>
+                        </a:rPr>
+                        <a:t>Шок, угроза жизни</a:t>
+                      </a:r>
+                    </a:p>
+                  </a:txBody>
+                  <a:tcPr>
+                    <a:solidFill>
+                      <a:srgbClr val="F5F5F5"/>
+                    </a:solidFill>
+                  </a:tcPr>
+                </a:tc>
+              </a:tr>
+            </a:tbl>
+          </a:graphicData>
+        </a:graphic>
+      </p:graphicFrame>
+      <p:sp>
+        <p:nvSpPr>
+          <p:cNvPr id="9" name="TextBox 8"/>
           <p:cNvSpPr txBox="1"/>
           <p:nvPr/>
         </p:nvSpPr>
         <p:spPr>
           <a:xfrm>
-            <a:off x="1000000" y="1700000"/>
-            <a:ext cx="10400000" cy="700000"/>
+            <a:off x="700000" y="5600000"/>
+            <a:ext cx="11000000" cy="800000"/>
           </a:xfrm>
           <a:prstGeom prst="rect">
             <a:avLst/>
@@ -4161,397 +4753,22 @@
           <a:noFill/>
         </p:spPr>
         <p:txBody>
-          <a:bodyPr wrap="square" anchor="ctr">
+          <a:bodyPr wrap="square" anchor="t">
             <a:spAutoFit/>
           </a:bodyPr>
           <a:lstStyle/>
           <a:p>
             <a:pPr algn="l"/>
             <a:r>
-              <a:rPr sz="1500" b="0">
-                <a:solidFill>
-                  <a:srgbClr val="333333"/>
+              <a:rPr sz="1400" b="0">
+                <a:solidFill>
+                  <a:srgbClr val="666666"/>
                 </a:solidFill>
                 <a:latin typeface="Open Sans"/>
                 <a:ea typeface="Open Sans"/>
                 <a:cs typeface="Open Sans"/>
               </a:rPr>
-              <a:t>Кровотечение → кровопотеря → риск нарушения работы органов.</a:t>
-            </a:r>
-          </a:p>
-        </p:txBody>
-      </p:sp>
-      <p:sp>
-        <p:nvSpPr>
-          <p:cNvPr id="11" name="Rectangle 10"/>
-          <p:cNvSpPr/>
-          <p:nvPr/>
-        </p:nvSpPr>
-        <p:spPr>
-          <a:xfrm>
-            <a:off x="700000" y="2700000"/>
-            <a:ext cx="11000000" cy="1000000"/>
-          </a:xfrm>
-          <a:prstGeom prst="rect">
-            <a:avLst/>
-          </a:prstGeom>
-          <a:solidFill>
-            <a:srgbClr val="FFFFFF"/>
-          </a:solidFill>
-          <a:ln w="12700">
-            <a:solidFill>
-              <a:srgbClr val="999999"/>
-            </a:solidFill>
-          </a:ln>
-        </p:spPr>
-        <p:style>
-          <a:lnRef idx="1">
-            <a:schemeClr val="accent1"/>
-          </a:lnRef>
-          <a:fillRef idx="3">
-            <a:schemeClr val="accent1"/>
-          </a:fillRef>
-          <a:effectRef idx="2">
-            <a:schemeClr val="accent1"/>
-          </a:effectRef>
-          <a:fontRef idx="minor">
-            <a:schemeClr val="lt1"/>
-          </a:fontRef>
-        </p:style>
-        <p:txBody>
-          <a:bodyPr rtlCol="0" anchor="ctr"/>
-          <a:lstStyle/>
-          <a:p>
-            <a:pPr algn="ctr"/>
-          </a:p>
-        </p:txBody>
-      </p:sp>
-      <p:sp>
-        <p:nvSpPr>
-          <p:cNvPr id="12" name="Rectangle 11"/>
-          <p:cNvSpPr/>
-          <p:nvPr/>
-        </p:nvSpPr>
-        <p:spPr>
-          <a:xfrm>
-            <a:off x="700000" y="2700000"/>
-            <a:ext cx="90000" cy="1000000"/>
-          </a:xfrm>
-          <a:prstGeom prst="rect">
-            <a:avLst/>
-          </a:prstGeom>
-          <a:solidFill>
-            <a:srgbClr val="ED1C24"/>
-          </a:solidFill>
-          <a:ln>
-            <a:noFill/>
-          </a:ln>
-        </p:spPr>
-        <p:style>
-          <a:lnRef idx="1">
-            <a:schemeClr val="accent1"/>
-          </a:lnRef>
-          <a:fillRef idx="3">
-            <a:schemeClr val="accent1"/>
-          </a:fillRef>
-          <a:effectRef idx="2">
-            <a:schemeClr val="accent1"/>
-          </a:effectRef>
-          <a:fontRef idx="minor">
-            <a:schemeClr val="lt1"/>
-          </a:fontRef>
-        </p:style>
-        <p:txBody>
-          <a:bodyPr rtlCol="0" anchor="ctr"/>
-          <a:lstStyle/>
-          <a:p>
-            <a:pPr algn="ctr"/>
-          </a:p>
-        </p:txBody>
-      </p:sp>
-      <p:sp>
-        <p:nvSpPr>
-          <p:cNvPr id="13" name="TextBox 12"/>
-          <p:cNvSpPr txBox="1"/>
-          <p:nvPr/>
-        </p:nvSpPr>
-        <p:spPr>
-          <a:xfrm>
-            <a:off x="1000000" y="2850000"/>
-            <a:ext cx="10400000" cy="700000"/>
-          </a:xfrm>
-          <a:prstGeom prst="rect">
-            <a:avLst/>
-          </a:prstGeom>
-          <a:noFill/>
-        </p:spPr>
-        <p:txBody>
-          <a:bodyPr wrap="square" anchor="ctr">
-            <a:spAutoFit/>
-          </a:bodyPr>
-          <a:lstStyle/>
-          <a:p>
-            <a:pPr algn="l"/>
-            <a:r>
-              <a:rPr sz="1500" b="0">
-                <a:solidFill>
-                  <a:srgbClr val="333333"/>
-                </a:solidFill>
-                <a:latin typeface="Open Sans"/>
-                <a:ea typeface="Open Sans"/>
-                <a:cs typeface="Open Sans"/>
-              </a:rPr>
-              <a:t>Признаки кровопотери: слабость, жажда, бледность, холодный пот, учащённый пульс и дыхание, обморок.</a:t>
-            </a:r>
-          </a:p>
-        </p:txBody>
-      </p:sp>
-      <p:sp>
-        <p:nvSpPr>
-          <p:cNvPr id="14" name="Rectangle 13"/>
-          <p:cNvSpPr/>
-          <p:nvPr/>
-        </p:nvSpPr>
-        <p:spPr>
-          <a:xfrm>
-            <a:off x="700000" y="3850000"/>
-            <a:ext cx="11000000" cy="1000000"/>
-          </a:xfrm>
-          <a:prstGeom prst="rect">
-            <a:avLst/>
-          </a:prstGeom>
-          <a:solidFill>
-            <a:srgbClr val="FFFFFF"/>
-          </a:solidFill>
-          <a:ln w="12700">
-            <a:solidFill>
-              <a:srgbClr val="999999"/>
-            </a:solidFill>
-          </a:ln>
-        </p:spPr>
-        <p:style>
-          <a:lnRef idx="1">
-            <a:schemeClr val="accent1"/>
-          </a:lnRef>
-          <a:fillRef idx="3">
-            <a:schemeClr val="accent1"/>
-          </a:fillRef>
-          <a:effectRef idx="2">
-            <a:schemeClr val="accent1"/>
-          </a:effectRef>
-          <a:fontRef idx="minor">
-            <a:schemeClr val="lt1"/>
-          </a:fontRef>
-        </p:style>
-        <p:txBody>
-          <a:bodyPr rtlCol="0" anchor="ctr"/>
-          <a:lstStyle/>
-          <a:p>
-            <a:pPr algn="ctr"/>
-          </a:p>
-        </p:txBody>
-      </p:sp>
-      <p:sp>
-        <p:nvSpPr>
-          <p:cNvPr id="15" name="Rectangle 14"/>
-          <p:cNvSpPr/>
-          <p:nvPr/>
-        </p:nvSpPr>
-        <p:spPr>
-          <a:xfrm>
-            <a:off x="700000" y="3850000"/>
-            <a:ext cx="90000" cy="1000000"/>
-          </a:xfrm>
-          <a:prstGeom prst="rect">
-            <a:avLst/>
-          </a:prstGeom>
-          <a:solidFill>
-            <a:srgbClr val="ED1C24"/>
-          </a:solidFill>
-          <a:ln>
-            <a:noFill/>
-          </a:ln>
-        </p:spPr>
-        <p:style>
-          <a:lnRef idx="1">
-            <a:schemeClr val="accent1"/>
-          </a:lnRef>
-          <a:fillRef idx="3">
-            <a:schemeClr val="accent1"/>
-          </a:fillRef>
-          <a:effectRef idx="2">
-            <a:schemeClr val="accent1"/>
-          </a:effectRef>
-          <a:fontRef idx="minor">
-            <a:schemeClr val="lt1"/>
-          </a:fontRef>
-        </p:style>
-        <p:txBody>
-          <a:bodyPr rtlCol="0" anchor="ctr"/>
-          <a:lstStyle/>
-          <a:p>
-            <a:pPr algn="ctr"/>
-          </a:p>
-        </p:txBody>
-      </p:sp>
-      <p:sp>
-        <p:nvSpPr>
-          <p:cNvPr id="16" name="TextBox 15"/>
-          <p:cNvSpPr txBox="1"/>
-          <p:nvPr/>
-        </p:nvSpPr>
-        <p:spPr>
-          <a:xfrm>
-            <a:off x="1000000" y="4000000"/>
-            <a:ext cx="10400000" cy="700000"/>
-          </a:xfrm>
-          <a:prstGeom prst="rect">
-            <a:avLst/>
-          </a:prstGeom>
-          <a:noFill/>
-        </p:spPr>
-        <p:txBody>
-          <a:bodyPr wrap="square" anchor="ctr">
-            <a:spAutoFit/>
-          </a:bodyPr>
-          <a:lstStyle/>
-          <a:p>
-            <a:pPr algn="l"/>
-            <a:r>
-              <a:rPr sz="1500" b="0">
-                <a:solidFill>
-                  <a:srgbClr val="333333"/>
-                </a:solidFill>
-                <a:latin typeface="Open Sans"/>
-                <a:ea typeface="Open Sans"/>
-                <a:cs typeface="Open Sans"/>
-              </a:rPr>
-              <a:t>Артериальное — алая пульсирующая струя; венозное — тёмный «ручей»; капиллярное — сочение.</a:t>
-            </a:r>
-          </a:p>
-        </p:txBody>
-      </p:sp>
-      <p:sp>
-        <p:nvSpPr>
-          <p:cNvPr id="17" name="Rectangle 16"/>
-          <p:cNvSpPr/>
-          <p:nvPr/>
-        </p:nvSpPr>
-        <p:spPr>
-          <a:xfrm>
-            <a:off x="700000" y="5000000"/>
-            <a:ext cx="11000000" cy="1000000"/>
-          </a:xfrm>
-          <a:prstGeom prst="rect">
-            <a:avLst/>
-          </a:prstGeom>
-          <a:solidFill>
-            <a:srgbClr val="FFFFFF"/>
-          </a:solidFill>
-          <a:ln w="12700">
-            <a:solidFill>
-              <a:srgbClr val="999999"/>
-            </a:solidFill>
-          </a:ln>
-        </p:spPr>
-        <p:style>
-          <a:lnRef idx="1">
-            <a:schemeClr val="accent1"/>
-          </a:lnRef>
-          <a:fillRef idx="3">
-            <a:schemeClr val="accent1"/>
-          </a:fillRef>
-          <a:effectRef idx="2">
-            <a:schemeClr val="accent1"/>
-          </a:effectRef>
-          <a:fontRef idx="minor">
-            <a:schemeClr val="lt1"/>
-          </a:fontRef>
-        </p:style>
-        <p:txBody>
-          <a:bodyPr rtlCol="0" anchor="ctr"/>
-          <a:lstStyle/>
-          <a:p>
-            <a:pPr algn="ctr"/>
-          </a:p>
-        </p:txBody>
-      </p:sp>
-      <p:sp>
-        <p:nvSpPr>
-          <p:cNvPr id="18" name="Rectangle 17"/>
-          <p:cNvSpPr/>
-          <p:nvPr/>
-        </p:nvSpPr>
-        <p:spPr>
-          <a:xfrm>
-            <a:off x="700000" y="5000000"/>
-            <a:ext cx="90000" cy="1000000"/>
-          </a:xfrm>
-          <a:prstGeom prst="rect">
-            <a:avLst/>
-          </a:prstGeom>
-          <a:solidFill>
-            <a:srgbClr val="ED1C24"/>
-          </a:solidFill>
-          <a:ln>
-            <a:noFill/>
-          </a:ln>
-        </p:spPr>
-        <p:style>
-          <a:lnRef idx="1">
-            <a:schemeClr val="accent1"/>
-          </a:lnRef>
-          <a:fillRef idx="3">
-            <a:schemeClr val="accent1"/>
-          </a:fillRef>
-          <a:effectRef idx="2">
-            <a:schemeClr val="accent1"/>
-          </a:effectRef>
-          <a:fontRef idx="minor">
-            <a:schemeClr val="lt1"/>
-          </a:fontRef>
-        </p:style>
-        <p:txBody>
-          <a:bodyPr rtlCol="0" anchor="ctr"/>
-          <a:lstStyle/>
-          <a:p>
-            <a:pPr algn="ctr"/>
-          </a:p>
-        </p:txBody>
-      </p:sp>
-      <p:sp>
-        <p:nvSpPr>
-          <p:cNvPr id="19" name="TextBox 18"/>
-          <p:cNvSpPr txBox="1"/>
-          <p:nvPr/>
-        </p:nvSpPr>
-        <p:spPr>
-          <a:xfrm>
-            <a:off x="1000000" y="5150000"/>
-            <a:ext cx="10400000" cy="700000"/>
-          </a:xfrm>
-          <a:prstGeom prst="rect">
-            <a:avLst/>
-          </a:prstGeom>
-          <a:noFill/>
-        </p:spPr>
-        <p:txBody>
-          <a:bodyPr wrap="square" anchor="ctr">
-            <a:spAutoFit/>
-          </a:bodyPr>
-          <a:lstStyle/>
-          <a:p>
-            <a:pPr algn="l"/>
-            <a:r>
-              <a:rPr sz="1500" b="0">
-                <a:solidFill>
-                  <a:srgbClr val="333333"/>
-                </a:solidFill>
-                <a:latin typeface="Open Sans"/>
-                <a:ea typeface="Open Sans"/>
-                <a:cs typeface="Open Sans"/>
-              </a:rPr>
-              <a:t>Ориентир для первой помощи — интенсивность, а не точный вид сосуда.</a:t>
+              <a:t>На месте точный объём измерить нельзя — таблица помогает понять тяжесть по признакам состояния пострадавшего.</a:t>
             </a:r>
           </a:p>
         </p:txBody>
@@ -4583,6 +4800,764 @@
         <p:spPr>
           <a:xfrm>
             <a:off x="0" y="0"/>
+            <a:ext cx="12191695" cy="6858000"/>
+          </a:xfrm>
+          <a:prstGeom prst="rect">
+            <a:avLst/>
+          </a:prstGeom>
+          <a:solidFill>
+            <a:srgbClr val="FFFFFF"/>
+          </a:solidFill>
+          <a:ln>
+            <a:noFill/>
+          </a:ln>
+        </p:spPr>
+        <p:style>
+          <a:lnRef idx="1">
+            <a:schemeClr val="accent1"/>
+          </a:lnRef>
+          <a:fillRef idx="3">
+            <a:schemeClr val="accent1"/>
+          </a:fillRef>
+          <a:effectRef idx="2">
+            <a:schemeClr val="accent1"/>
+          </a:effectRef>
+          <a:fontRef idx="minor">
+            <a:schemeClr val="lt1"/>
+          </a:fontRef>
+        </p:style>
+        <p:txBody>
+          <a:bodyPr rtlCol="0" anchor="ctr"/>
+          <a:lstStyle/>
+          <a:p>
+            <a:pPr algn="ctr"/>
+          </a:p>
+        </p:txBody>
+      </p:sp>
+      <p:sp>
+        <p:nvSpPr>
+          <p:cNvPr id="3" name="TextBox 2"/>
+          <p:cNvSpPr txBox="1"/>
+          <p:nvPr/>
+        </p:nvSpPr>
+        <p:spPr>
+          <a:xfrm>
+            <a:off x="700000" y="280000"/>
+            <a:ext cx="11000000" cy="550000"/>
+          </a:xfrm>
+          <a:prstGeom prst="rect">
+            <a:avLst/>
+          </a:prstGeom>
+          <a:noFill/>
+        </p:spPr>
+        <p:txBody>
+          <a:bodyPr wrap="square" anchor="t">
+            <a:spAutoFit/>
+          </a:bodyPr>
+          <a:lstStyle/>
+          <a:p>
+            <a:pPr algn="l"/>
+            <a:r>
+              <a:rPr sz="2200" b="1">
+                <a:solidFill>
+                  <a:srgbClr val="333333"/>
+                </a:solidFill>
+                <a:latin typeface="Open Sans"/>
+                <a:ea typeface="Open Sans"/>
+                <a:cs typeface="Open Sans"/>
+              </a:rPr>
+              <a:t>ГЛАВНОЕ ЗАПОМНИТЬ</a:t>
+            </a:r>
+          </a:p>
+        </p:txBody>
+      </p:sp>
+      <p:sp>
+        <p:nvSpPr>
+          <p:cNvPr id="4" name="Rectangle 3"/>
+          <p:cNvSpPr/>
+          <p:nvPr/>
+        </p:nvSpPr>
+        <p:spPr>
+          <a:xfrm>
+            <a:off x="700000" y="880000"/>
+            <a:ext cx="9000000" cy="25000"/>
+          </a:xfrm>
+          <a:prstGeom prst="rect">
+            <a:avLst/>
+          </a:prstGeom>
+          <a:solidFill>
+            <a:srgbClr val="555555"/>
+          </a:solidFill>
+          <a:ln>
+            <a:noFill/>
+          </a:ln>
+        </p:spPr>
+        <p:style>
+          <a:lnRef idx="1">
+            <a:schemeClr val="accent1"/>
+          </a:lnRef>
+          <a:fillRef idx="3">
+            <a:schemeClr val="accent1"/>
+          </a:fillRef>
+          <a:effectRef idx="2">
+            <a:schemeClr val="accent1"/>
+          </a:effectRef>
+          <a:fontRef idx="minor">
+            <a:schemeClr val="lt1"/>
+          </a:fontRef>
+        </p:style>
+        <p:txBody>
+          <a:bodyPr rtlCol="0" anchor="ctr"/>
+          <a:lstStyle/>
+          <a:p>
+            <a:pPr algn="ctr"/>
+          </a:p>
+        </p:txBody>
+      </p:sp>
+      <p:sp>
+        <p:nvSpPr>
+          <p:cNvPr id="5" name="TextBox 4"/>
+          <p:cNvSpPr txBox="1"/>
+          <p:nvPr/>
+        </p:nvSpPr>
+        <p:spPr>
+          <a:xfrm>
+            <a:off x="700000" y="950000"/>
+            <a:ext cx="11000000" cy="350000"/>
+          </a:xfrm>
+          <a:prstGeom prst="rect">
+            <a:avLst/>
+          </a:prstGeom>
+          <a:noFill/>
+        </p:spPr>
+        <p:txBody>
+          <a:bodyPr wrap="square" anchor="t">
+            <a:spAutoFit/>
+          </a:bodyPr>
+          <a:lstStyle/>
+          <a:p>
+            <a:pPr algn="l"/>
+            <a:r>
+              <a:rPr sz="1200" b="0">
+                <a:solidFill>
+                  <a:srgbClr val="666666"/>
+                </a:solidFill>
+                <a:latin typeface="Open Sans"/>
+                <a:ea typeface="Open Sans"/>
+                <a:cs typeface="Open Sans"/>
+              </a:rPr>
+              <a:t>Оказание первой помощи при наружных кровотечениях</a:t>
+            </a:r>
+          </a:p>
+        </p:txBody>
+      </p:sp>
+      <p:sp>
+        <p:nvSpPr>
+          <p:cNvPr id="6" name="Rectangle 5"/>
+          <p:cNvSpPr/>
+          <p:nvPr/>
+        </p:nvSpPr>
+        <p:spPr>
+          <a:xfrm>
+            <a:off x="0" y="2800000"/>
+            <a:ext cx="420000" cy="420000"/>
+          </a:xfrm>
+          <a:prstGeom prst="rect">
+            <a:avLst/>
+          </a:prstGeom>
+          <a:solidFill>
+            <a:srgbClr val="555555"/>
+          </a:solidFill>
+          <a:ln>
+            <a:noFill/>
+          </a:ln>
+        </p:spPr>
+        <p:style>
+          <a:lnRef idx="1">
+            <a:schemeClr val="accent1"/>
+          </a:lnRef>
+          <a:fillRef idx="3">
+            <a:schemeClr val="accent1"/>
+          </a:fillRef>
+          <a:effectRef idx="2">
+            <a:schemeClr val="accent1"/>
+          </a:effectRef>
+          <a:fontRef idx="minor">
+            <a:schemeClr val="lt1"/>
+          </a:fontRef>
+        </p:style>
+        <p:txBody>
+          <a:bodyPr rtlCol="0" anchor="ctr"/>
+          <a:lstStyle/>
+          <a:p>
+            <a:pPr algn="ctr"/>
+          </a:p>
+        </p:txBody>
+      </p:sp>
+      <p:sp>
+        <p:nvSpPr>
+          <p:cNvPr id="7" name="TextBox 6"/>
+          <p:cNvSpPr txBox="1"/>
+          <p:nvPr/>
+        </p:nvSpPr>
+        <p:spPr>
+          <a:xfrm>
+            <a:off x="0" y="2800000"/>
+            <a:ext cx="420000" cy="420000"/>
+          </a:xfrm>
+          <a:prstGeom prst="rect">
+            <a:avLst/>
+          </a:prstGeom>
+          <a:noFill/>
+        </p:spPr>
+        <p:txBody>
+          <a:bodyPr wrap="square" anchor="ctr">
+            <a:spAutoFit/>
+          </a:bodyPr>
+          <a:lstStyle/>
+          <a:p>
+            <a:pPr algn="ctr"/>
+            <a:r>
+              <a:rPr sz="1400" b="1">
+                <a:solidFill>
+                  <a:srgbClr val="FFFFFF"/>
+                </a:solidFill>
+                <a:latin typeface="Open Sans"/>
+                <a:ea typeface="Open Sans"/>
+                <a:cs typeface="Open Sans"/>
+              </a:rPr>
+              <a:t>12</a:t>
+            </a:r>
+          </a:p>
+        </p:txBody>
+      </p:sp>
+      <p:sp>
+        <p:nvSpPr>
+          <p:cNvPr id="8" name="Rectangle 7"/>
+          <p:cNvSpPr/>
+          <p:nvPr/>
+        </p:nvSpPr>
+        <p:spPr>
+          <a:xfrm>
+            <a:off x="700000" y="1500000"/>
+            <a:ext cx="11000000" cy="1000000"/>
+          </a:xfrm>
+          <a:prstGeom prst="rect">
+            <a:avLst/>
+          </a:prstGeom>
+          <a:solidFill>
+            <a:srgbClr val="FFFFFF"/>
+          </a:solidFill>
+          <a:ln w="12700">
+            <a:solidFill>
+              <a:srgbClr val="999999"/>
+            </a:solidFill>
+          </a:ln>
+        </p:spPr>
+        <p:style>
+          <a:lnRef idx="1">
+            <a:schemeClr val="accent1"/>
+          </a:lnRef>
+          <a:fillRef idx="3">
+            <a:schemeClr val="accent1"/>
+          </a:fillRef>
+          <a:effectRef idx="2">
+            <a:schemeClr val="accent1"/>
+          </a:effectRef>
+          <a:fontRef idx="minor">
+            <a:schemeClr val="lt1"/>
+          </a:fontRef>
+        </p:style>
+        <p:txBody>
+          <a:bodyPr rtlCol="0" anchor="ctr"/>
+          <a:lstStyle/>
+          <a:p>
+            <a:pPr algn="ctr"/>
+          </a:p>
+        </p:txBody>
+      </p:sp>
+      <p:sp>
+        <p:nvSpPr>
+          <p:cNvPr id="9" name="Rectangle 8"/>
+          <p:cNvSpPr/>
+          <p:nvPr/>
+        </p:nvSpPr>
+        <p:spPr>
+          <a:xfrm>
+            <a:off x="700000" y="1500000"/>
+            <a:ext cx="90000" cy="1000000"/>
+          </a:xfrm>
+          <a:prstGeom prst="rect">
+            <a:avLst/>
+          </a:prstGeom>
+          <a:solidFill>
+            <a:srgbClr val="ED1C24"/>
+          </a:solidFill>
+          <a:ln>
+            <a:noFill/>
+          </a:ln>
+        </p:spPr>
+        <p:style>
+          <a:lnRef idx="1">
+            <a:schemeClr val="accent1"/>
+          </a:lnRef>
+          <a:fillRef idx="3">
+            <a:schemeClr val="accent1"/>
+          </a:fillRef>
+          <a:effectRef idx="2">
+            <a:schemeClr val="accent1"/>
+          </a:effectRef>
+          <a:fontRef idx="minor">
+            <a:schemeClr val="lt1"/>
+          </a:fontRef>
+        </p:style>
+        <p:txBody>
+          <a:bodyPr rtlCol="0" anchor="ctr"/>
+          <a:lstStyle/>
+          <a:p>
+            <a:pPr algn="ctr"/>
+          </a:p>
+        </p:txBody>
+      </p:sp>
+      <p:sp>
+        <p:nvSpPr>
+          <p:cNvPr id="10" name="TextBox 9"/>
+          <p:cNvSpPr txBox="1"/>
+          <p:nvPr/>
+        </p:nvSpPr>
+        <p:spPr>
+          <a:xfrm>
+            <a:off x="1000000" y="1650000"/>
+            <a:ext cx="10400000" cy="700000"/>
+          </a:xfrm>
+          <a:prstGeom prst="rect">
+            <a:avLst/>
+          </a:prstGeom>
+          <a:noFill/>
+        </p:spPr>
+        <p:txBody>
+          <a:bodyPr wrap="square" anchor="ctr">
+            <a:spAutoFit/>
+          </a:bodyPr>
+          <a:lstStyle/>
+          <a:p>
+            <a:pPr algn="l"/>
+            <a:r>
+              <a:rPr sz="1400" b="0">
+                <a:solidFill>
+                  <a:srgbClr val="333333"/>
+                </a:solidFill>
+                <a:latin typeface="Open Sans"/>
+                <a:ea typeface="Open Sans"/>
+                <a:cs typeface="Open Sans"/>
+              </a:rPr>
+              <a:t>Признаки кровопотери смотрите по самочувствию, коже, дыханию и пульсу.</a:t>
+            </a:r>
+          </a:p>
+        </p:txBody>
+      </p:sp>
+      <p:sp>
+        <p:nvSpPr>
+          <p:cNvPr id="11" name="Rectangle 10"/>
+          <p:cNvSpPr/>
+          <p:nvPr/>
+        </p:nvSpPr>
+        <p:spPr>
+          <a:xfrm>
+            <a:off x="700000" y="2650000"/>
+            <a:ext cx="11000000" cy="1000000"/>
+          </a:xfrm>
+          <a:prstGeom prst="rect">
+            <a:avLst/>
+          </a:prstGeom>
+          <a:solidFill>
+            <a:srgbClr val="FFFFFF"/>
+          </a:solidFill>
+          <a:ln w="12700">
+            <a:solidFill>
+              <a:srgbClr val="999999"/>
+            </a:solidFill>
+          </a:ln>
+        </p:spPr>
+        <p:style>
+          <a:lnRef idx="1">
+            <a:schemeClr val="accent1"/>
+          </a:lnRef>
+          <a:fillRef idx="3">
+            <a:schemeClr val="accent1"/>
+          </a:fillRef>
+          <a:effectRef idx="2">
+            <a:schemeClr val="accent1"/>
+          </a:effectRef>
+          <a:fontRef idx="minor">
+            <a:schemeClr val="lt1"/>
+          </a:fontRef>
+        </p:style>
+        <p:txBody>
+          <a:bodyPr rtlCol="0" anchor="ctr"/>
+          <a:lstStyle/>
+          <a:p>
+            <a:pPr algn="ctr"/>
+          </a:p>
+        </p:txBody>
+      </p:sp>
+      <p:sp>
+        <p:nvSpPr>
+          <p:cNvPr id="12" name="Rectangle 11"/>
+          <p:cNvSpPr/>
+          <p:nvPr/>
+        </p:nvSpPr>
+        <p:spPr>
+          <a:xfrm>
+            <a:off x="700000" y="2650000"/>
+            <a:ext cx="90000" cy="1000000"/>
+          </a:xfrm>
+          <a:prstGeom prst="rect">
+            <a:avLst/>
+          </a:prstGeom>
+          <a:solidFill>
+            <a:srgbClr val="ED1C24"/>
+          </a:solidFill>
+          <a:ln>
+            <a:noFill/>
+          </a:ln>
+        </p:spPr>
+        <p:style>
+          <a:lnRef idx="1">
+            <a:schemeClr val="accent1"/>
+          </a:lnRef>
+          <a:fillRef idx="3">
+            <a:schemeClr val="accent1"/>
+          </a:fillRef>
+          <a:effectRef idx="2">
+            <a:schemeClr val="accent1"/>
+          </a:effectRef>
+          <a:fontRef idx="minor">
+            <a:schemeClr val="lt1"/>
+          </a:fontRef>
+        </p:style>
+        <p:txBody>
+          <a:bodyPr rtlCol="0" anchor="ctr"/>
+          <a:lstStyle/>
+          <a:p>
+            <a:pPr algn="ctr"/>
+          </a:p>
+        </p:txBody>
+      </p:sp>
+      <p:sp>
+        <p:nvSpPr>
+          <p:cNvPr id="13" name="TextBox 12"/>
+          <p:cNvSpPr txBox="1"/>
+          <p:nvPr/>
+        </p:nvSpPr>
+        <p:spPr>
+          <a:xfrm>
+            <a:off x="1000000" y="2800000"/>
+            <a:ext cx="10400000" cy="700000"/>
+          </a:xfrm>
+          <a:prstGeom prst="rect">
+            <a:avLst/>
+          </a:prstGeom>
+          <a:noFill/>
+        </p:spPr>
+        <p:txBody>
+          <a:bodyPr wrap="square" anchor="ctr">
+            <a:spAutoFit/>
+          </a:bodyPr>
+          <a:lstStyle/>
+          <a:p>
+            <a:pPr algn="l"/>
+            <a:r>
+              <a:rPr sz="1400" b="0">
+                <a:solidFill>
+                  <a:srgbClr val="333333"/>
+                </a:solidFill>
+                <a:latin typeface="Open Sans"/>
+                <a:ea typeface="Open Sans"/>
+                <a:cs typeface="Open Sans"/>
+              </a:rPr>
+              <a:t>Признаки возможны и без видимой крови — думайте о скрытой кровопотере.</a:t>
+            </a:r>
+          </a:p>
+        </p:txBody>
+      </p:sp>
+      <p:sp>
+        <p:nvSpPr>
+          <p:cNvPr id="14" name="Rectangle 13"/>
+          <p:cNvSpPr/>
+          <p:nvPr/>
+        </p:nvSpPr>
+        <p:spPr>
+          <a:xfrm>
+            <a:off x="700000" y="3800000"/>
+            <a:ext cx="11000000" cy="1000000"/>
+          </a:xfrm>
+          <a:prstGeom prst="rect">
+            <a:avLst/>
+          </a:prstGeom>
+          <a:solidFill>
+            <a:srgbClr val="FFFFFF"/>
+          </a:solidFill>
+          <a:ln w="12700">
+            <a:solidFill>
+              <a:srgbClr val="999999"/>
+            </a:solidFill>
+          </a:ln>
+        </p:spPr>
+        <p:style>
+          <a:lnRef idx="1">
+            <a:schemeClr val="accent1"/>
+          </a:lnRef>
+          <a:fillRef idx="3">
+            <a:schemeClr val="accent1"/>
+          </a:fillRef>
+          <a:effectRef idx="2">
+            <a:schemeClr val="accent1"/>
+          </a:effectRef>
+          <a:fontRef idx="minor">
+            <a:schemeClr val="lt1"/>
+          </a:fontRef>
+        </p:style>
+        <p:txBody>
+          <a:bodyPr rtlCol="0" anchor="ctr"/>
+          <a:lstStyle/>
+          <a:p>
+            <a:pPr algn="ctr"/>
+          </a:p>
+        </p:txBody>
+      </p:sp>
+      <p:sp>
+        <p:nvSpPr>
+          <p:cNvPr id="15" name="Rectangle 14"/>
+          <p:cNvSpPr/>
+          <p:nvPr/>
+        </p:nvSpPr>
+        <p:spPr>
+          <a:xfrm>
+            <a:off x="700000" y="3800000"/>
+            <a:ext cx="90000" cy="1000000"/>
+          </a:xfrm>
+          <a:prstGeom prst="rect">
+            <a:avLst/>
+          </a:prstGeom>
+          <a:solidFill>
+            <a:srgbClr val="ED1C24"/>
+          </a:solidFill>
+          <a:ln>
+            <a:noFill/>
+          </a:ln>
+        </p:spPr>
+        <p:style>
+          <a:lnRef idx="1">
+            <a:schemeClr val="accent1"/>
+          </a:lnRef>
+          <a:fillRef idx="3">
+            <a:schemeClr val="accent1"/>
+          </a:fillRef>
+          <a:effectRef idx="2">
+            <a:schemeClr val="accent1"/>
+          </a:effectRef>
+          <a:fontRef idx="minor">
+            <a:schemeClr val="lt1"/>
+          </a:fontRef>
+        </p:style>
+        <p:txBody>
+          <a:bodyPr rtlCol="0" anchor="ctr"/>
+          <a:lstStyle/>
+          <a:p>
+            <a:pPr algn="ctr"/>
+          </a:p>
+        </p:txBody>
+      </p:sp>
+      <p:sp>
+        <p:nvSpPr>
+          <p:cNvPr id="16" name="TextBox 15"/>
+          <p:cNvSpPr txBox="1"/>
+          <p:nvPr/>
+        </p:nvSpPr>
+        <p:spPr>
+          <a:xfrm>
+            <a:off x="1000000" y="3950000"/>
+            <a:ext cx="10400000" cy="700000"/>
+          </a:xfrm>
+          <a:prstGeom prst="rect">
+            <a:avLst/>
+          </a:prstGeom>
+          <a:noFill/>
+        </p:spPr>
+        <p:txBody>
+          <a:bodyPr wrap="square" anchor="ctr">
+            <a:spAutoFit/>
+          </a:bodyPr>
+          <a:lstStyle/>
+          <a:p>
+            <a:pPr algn="l"/>
+            <a:r>
+              <a:rPr sz="1400" b="0">
+                <a:solidFill>
+                  <a:srgbClr val="333333"/>
+                </a:solidFill>
+                <a:latin typeface="Open Sans"/>
+                <a:ea typeface="Open Sans"/>
+                <a:cs typeface="Open Sans"/>
+              </a:rPr>
+              <a:t>Интенсивность важнее «точного вида сосуда» для решения об остановке.</a:t>
+            </a:r>
+          </a:p>
+        </p:txBody>
+      </p:sp>
+      <p:sp>
+        <p:nvSpPr>
+          <p:cNvPr id="17" name="Rectangle 16"/>
+          <p:cNvSpPr/>
+          <p:nvPr/>
+        </p:nvSpPr>
+        <p:spPr>
+          <a:xfrm>
+            <a:off x="700000" y="4950000"/>
+            <a:ext cx="11000000" cy="1000000"/>
+          </a:xfrm>
+          <a:prstGeom prst="rect">
+            <a:avLst/>
+          </a:prstGeom>
+          <a:solidFill>
+            <a:srgbClr val="FFFFFF"/>
+          </a:solidFill>
+          <a:ln w="12700">
+            <a:solidFill>
+              <a:srgbClr val="999999"/>
+            </a:solidFill>
+          </a:ln>
+        </p:spPr>
+        <p:style>
+          <a:lnRef idx="1">
+            <a:schemeClr val="accent1"/>
+          </a:lnRef>
+          <a:fillRef idx="3">
+            <a:schemeClr val="accent1"/>
+          </a:fillRef>
+          <a:effectRef idx="2">
+            <a:schemeClr val="accent1"/>
+          </a:effectRef>
+          <a:fontRef idx="minor">
+            <a:schemeClr val="lt1"/>
+          </a:fontRef>
+        </p:style>
+        <p:txBody>
+          <a:bodyPr rtlCol="0" anchor="ctr"/>
+          <a:lstStyle/>
+          <a:p>
+            <a:pPr algn="ctr"/>
+          </a:p>
+        </p:txBody>
+      </p:sp>
+      <p:sp>
+        <p:nvSpPr>
+          <p:cNvPr id="18" name="Rectangle 17"/>
+          <p:cNvSpPr/>
+          <p:nvPr/>
+        </p:nvSpPr>
+        <p:spPr>
+          <a:xfrm>
+            <a:off x="700000" y="4950000"/>
+            <a:ext cx="90000" cy="1000000"/>
+          </a:xfrm>
+          <a:prstGeom prst="rect">
+            <a:avLst/>
+          </a:prstGeom>
+          <a:solidFill>
+            <a:srgbClr val="ED1C24"/>
+          </a:solidFill>
+          <a:ln>
+            <a:noFill/>
+          </a:ln>
+        </p:spPr>
+        <p:style>
+          <a:lnRef idx="1">
+            <a:schemeClr val="accent1"/>
+          </a:lnRef>
+          <a:fillRef idx="3">
+            <a:schemeClr val="accent1"/>
+          </a:fillRef>
+          <a:effectRef idx="2">
+            <a:schemeClr val="accent1"/>
+          </a:effectRef>
+          <a:fontRef idx="minor">
+            <a:schemeClr val="lt1"/>
+          </a:fontRef>
+        </p:style>
+        <p:txBody>
+          <a:bodyPr rtlCol="0" anchor="ctr"/>
+          <a:lstStyle/>
+          <a:p>
+            <a:pPr algn="ctr"/>
+          </a:p>
+        </p:txBody>
+      </p:sp>
+      <p:sp>
+        <p:nvSpPr>
+          <p:cNvPr id="19" name="TextBox 18"/>
+          <p:cNvSpPr txBox="1"/>
+          <p:nvPr/>
+        </p:nvSpPr>
+        <p:spPr>
+          <a:xfrm>
+            <a:off x="1000000" y="5100000"/>
+            <a:ext cx="10400000" cy="700000"/>
+          </a:xfrm>
+          <a:prstGeom prst="rect">
+            <a:avLst/>
+          </a:prstGeom>
+          <a:noFill/>
+        </p:spPr>
+        <p:txBody>
+          <a:bodyPr wrap="square" anchor="ctr">
+            <a:spAutoFit/>
+          </a:bodyPr>
+          <a:lstStyle/>
+          <a:p>
+            <a:pPr algn="l"/>
+            <a:r>
+              <a:rPr sz="1400" b="0">
+                <a:solidFill>
+                  <a:srgbClr val="333333"/>
+                </a:solidFill>
+                <a:latin typeface="Open Sans"/>
+                <a:ea typeface="Open Sans"/>
+                <a:cs typeface="Open Sans"/>
+              </a:rPr>
+              <a:t>Тёмная одежда, положение тела и погода могут маскировать кровь — осматривайте внимательно.</a:t>
+            </a:r>
+          </a:p>
+        </p:txBody>
+      </p:sp>
+    </p:spTree>
+  </p:cSld>
+  <p:clrMapOvr>
+    <a:masterClrMapping/>
+  </p:clrMapOvr>
+</p:sld>
+</file>
+
+<file path=ppt/slides/slide13.xml><?xml version="1.0" encoding="utf-8"?>
+<p:sld xmlns:a="http://schemas.openxmlformats.org/drawingml/2006/main" xmlns:p="http://schemas.openxmlformats.org/presentationml/2006/main" xmlns:r="http://schemas.openxmlformats.org/officeDocument/2006/relationships">
+  <p:cSld>
+    <p:spTree>
+      <p:nvGrpSpPr>
+        <p:cNvPr id="1" name=""/>
+        <p:cNvGrpSpPr/>
+        <p:nvPr/>
+      </p:nvGrpSpPr>
+      <p:grpSpPr/>
+      <p:sp>
+        <p:nvSpPr>
+          <p:cNvPr id="2" name="Rectangle 1"/>
+          <p:cNvSpPr/>
+          <p:nvPr/>
+        </p:nvSpPr>
+        <p:spPr>
+          <a:xfrm>
+            <a:off x="0" y="0"/>
             <a:ext cx="3200000" cy="6858000"/>
           </a:xfrm>
           <a:prstGeom prst="rect">
@@ -4825,7 +5800,7 @@
           <a:p>
             <a:pPr algn="l"/>
             <a:r>
-              <a:rPr sz="2400" b="1">
+              <a:rPr sz="2200" b="1">
                 <a:solidFill>
                   <a:srgbClr val="333333"/>
                 </a:solidFill>
@@ -5006,8 +5981,8 @@
         </p:nvSpPr>
         <p:spPr>
           <a:xfrm>
-            <a:off x="700000" y="1550000"/>
-            <a:ext cx="550000" cy="550000"/>
+            <a:off x="700000" y="1500000"/>
+            <a:ext cx="500000" cy="500000"/>
           </a:xfrm>
           <a:prstGeom prst="ellipse">
             <a:avLst/>
@@ -5049,8 +6024,8 @@
         </p:nvSpPr>
         <p:spPr>
           <a:xfrm>
-            <a:off x="700000" y="1550000"/>
-            <a:ext cx="550000" cy="550000"/>
+            <a:off x="700000" y="1500000"/>
+            <a:ext cx="500000" cy="500000"/>
           </a:xfrm>
           <a:prstGeom prst="rect">
             <a:avLst/>
@@ -5065,7 +6040,7 @@
           <a:p>
             <a:pPr algn="ctr"/>
             <a:r>
-              <a:rPr sz="1600" b="1">
+              <a:rPr sz="1500" b="1">
                 <a:solidFill>
                   <a:srgbClr val="FFFFFF"/>
                 </a:solidFill>
@@ -5086,8 +6061,8 @@
         </p:nvSpPr>
         <p:spPr>
           <a:xfrm>
-            <a:off x="1450000" y="1550000"/>
-            <a:ext cx="10000000" cy="550000"/>
+            <a:off x="1400000" y="1500000"/>
+            <a:ext cx="10000000" cy="500000"/>
           </a:xfrm>
           <a:prstGeom prst="rect">
             <a:avLst/>
@@ -5102,7 +6077,7 @@
           <a:p>
             <a:pPr algn="l"/>
             <a:r>
-              <a:rPr sz="1700" b="0">
+              <a:rPr sz="1600" b="0">
                 <a:solidFill>
                   <a:srgbClr val="333333"/>
                 </a:solidFill>
@@ -5110,7 +6085,7 @@
                 <a:ea typeface="Open Sans"/>
                 <a:cs typeface="Open Sans"/>
               </a:rPr>
-              <a:t>Понятие кровотечения и кровопотери</a:t>
+              <a:t>Чем тема дополняет обзорный осмотр</a:t>
             </a:r>
           </a:p>
         </p:txBody>
@@ -5123,8 +6098,8 @@
         </p:nvSpPr>
         <p:spPr>
           <a:xfrm>
-            <a:off x="700000" y="2400000"/>
-            <a:ext cx="550000" cy="550000"/>
+            <a:off x="700000" y="2280000"/>
+            <a:ext cx="500000" cy="500000"/>
           </a:xfrm>
           <a:prstGeom prst="ellipse">
             <a:avLst/>
@@ -5166,8 +6141,8 @@
         </p:nvSpPr>
         <p:spPr>
           <a:xfrm>
-            <a:off x="700000" y="2400000"/>
-            <a:ext cx="550000" cy="550000"/>
+            <a:off x="700000" y="2280000"/>
+            <a:ext cx="500000" cy="500000"/>
           </a:xfrm>
           <a:prstGeom prst="rect">
             <a:avLst/>
@@ -5182,7 +6157,7 @@
           <a:p>
             <a:pPr algn="ctr"/>
             <a:r>
-              <a:rPr sz="1600" b="1">
+              <a:rPr sz="1500" b="1">
                 <a:solidFill>
                   <a:srgbClr val="FFFFFF"/>
                 </a:solidFill>
@@ -5203,8 +6178,8 @@
         </p:nvSpPr>
         <p:spPr>
           <a:xfrm>
-            <a:off x="1450000" y="2400000"/>
-            <a:ext cx="10000000" cy="550000"/>
+            <a:off x="1400000" y="2280000"/>
+            <a:ext cx="10000000" cy="500000"/>
           </a:xfrm>
           <a:prstGeom prst="rect">
             <a:avLst/>
@@ -5219,7 +6194,7 @@
           <a:p>
             <a:pPr algn="l"/>
             <a:r>
-              <a:rPr sz="1700" b="0">
+              <a:rPr sz="1600" b="0">
                 <a:solidFill>
                   <a:srgbClr val="333333"/>
                 </a:solidFill>
@@ -5227,7 +6202,7 @@
                 <a:ea typeface="Open Sans"/>
                 <a:cs typeface="Open Sans"/>
               </a:rPr>
-              <a:t>Признаки кровопотери</a:t>
+              <a:t>Признаки кровопотери по группам</a:t>
             </a:r>
           </a:p>
         </p:txBody>
@@ -5240,8 +6215,8 @@
         </p:nvSpPr>
         <p:spPr>
           <a:xfrm>
-            <a:off x="700000" y="3250000"/>
-            <a:ext cx="550000" cy="550000"/>
+            <a:off x="700000" y="3060000"/>
+            <a:ext cx="500000" cy="500000"/>
           </a:xfrm>
           <a:prstGeom prst="ellipse">
             <a:avLst/>
@@ -5283,8 +6258,8 @@
         </p:nvSpPr>
         <p:spPr>
           <a:xfrm>
-            <a:off x="700000" y="3250000"/>
-            <a:ext cx="550000" cy="550000"/>
+            <a:off x="700000" y="3060000"/>
+            <a:ext cx="500000" cy="500000"/>
           </a:xfrm>
           <a:prstGeom prst="rect">
             <a:avLst/>
@@ -5299,7 +6274,7 @@
           <a:p>
             <a:pPr algn="ctr"/>
             <a:r>
-              <a:rPr sz="1600" b="1">
+              <a:rPr sz="1500" b="1">
                 <a:solidFill>
                   <a:srgbClr val="FFFFFF"/>
                 </a:solidFill>
@@ -5320,8 +6295,8 @@
         </p:nvSpPr>
         <p:spPr>
           <a:xfrm>
-            <a:off x="1450000" y="3250000"/>
-            <a:ext cx="10000000" cy="550000"/>
+            <a:off x="1400000" y="3060000"/>
+            <a:ext cx="10000000" cy="500000"/>
           </a:xfrm>
           <a:prstGeom prst="rect">
             <a:avLst/>
@@ -5336,7 +6311,7 @@
           <a:p>
             <a:pPr algn="l"/>
             <a:r>
-              <a:rPr sz="1700" b="0">
+              <a:rPr sz="1600" b="0">
                 <a:solidFill>
                   <a:srgbClr val="333333"/>
                 </a:solidFill>
@@ -5344,7 +6319,7 @@
                 <a:ea typeface="Open Sans"/>
                 <a:cs typeface="Open Sans"/>
               </a:rPr>
-              <a:t>Острая массивная кровопотеря</a:t>
+              <a:t>Когда признаки есть без видимой крови</a:t>
             </a:r>
           </a:p>
         </p:txBody>
@@ -5357,8 +6332,8 @@
         </p:nvSpPr>
         <p:spPr>
           <a:xfrm>
-            <a:off x="700000" y="4100000"/>
-            <a:ext cx="550000" cy="550000"/>
+            <a:off x="700000" y="3840000"/>
+            <a:ext cx="500000" cy="500000"/>
           </a:xfrm>
           <a:prstGeom prst="ellipse">
             <a:avLst/>
@@ -5400,8 +6375,8 @@
         </p:nvSpPr>
         <p:spPr>
           <a:xfrm>
-            <a:off x="700000" y="4100000"/>
-            <a:ext cx="550000" cy="550000"/>
+            <a:off x="700000" y="3840000"/>
+            <a:ext cx="500000" cy="500000"/>
           </a:xfrm>
           <a:prstGeom prst="rect">
             <a:avLst/>
@@ -5416,7 +6391,7 @@
           <a:p>
             <a:pPr algn="ctr"/>
             <a:r>
-              <a:rPr sz="1600" b="1">
+              <a:rPr sz="1500" b="1">
                 <a:solidFill>
                   <a:srgbClr val="FFFFFF"/>
                 </a:solidFill>
@@ -5437,8 +6412,8 @@
         </p:nvSpPr>
         <p:spPr>
           <a:xfrm>
-            <a:off x="1450000" y="4100000"/>
-            <a:ext cx="10000000" cy="550000"/>
+            <a:off x="1400000" y="3840000"/>
+            <a:ext cx="10000000" cy="500000"/>
           </a:xfrm>
           <a:prstGeom prst="rect">
             <a:avLst/>
@@ -5453,7 +6428,7 @@
           <a:p>
             <a:pPr algn="l"/>
             <a:r>
-              <a:rPr sz="1700" b="0">
+              <a:rPr sz="1600" b="0">
                 <a:solidFill>
                   <a:srgbClr val="333333"/>
                 </a:solidFill>
@@ -5461,7 +6436,7 @@
                 <a:ea typeface="Open Sans"/>
                 <a:cs typeface="Open Sans"/>
               </a:rPr>
-              <a:t>Виды наружного кровотечения и их признаки</a:t>
+              <a:t>Оценка интенсивности и сравнение видов</a:t>
             </a:r>
           </a:p>
         </p:txBody>
@@ -5474,8 +6449,8 @@
         </p:nvSpPr>
         <p:spPr>
           <a:xfrm>
-            <a:off x="700000" y="4950000"/>
-            <a:ext cx="550000" cy="550000"/>
+            <a:off x="700000" y="4620000"/>
+            <a:ext cx="500000" cy="500000"/>
           </a:xfrm>
           <a:prstGeom prst="ellipse">
             <a:avLst/>
@@ -5517,8 +6492,8 @@
         </p:nvSpPr>
         <p:spPr>
           <a:xfrm>
-            <a:off x="700000" y="4950000"/>
-            <a:ext cx="550000" cy="550000"/>
+            <a:off x="700000" y="4620000"/>
+            <a:ext cx="500000" cy="500000"/>
           </a:xfrm>
           <a:prstGeom prst="rect">
             <a:avLst/>
@@ -5533,7 +6508,7 @@
           <a:p>
             <a:pPr algn="ctr"/>
             <a:r>
-              <a:rPr sz="1600" b="1">
+              <a:rPr sz="1500" b="1">
                 <a:solidFill>
                   <a:srgbClr val="FFFFFF"/>
                 </a:solidFill>
@@ -5554,8 +6529,8 @@
         </p:nvSpPr>
         <p:spPr>
           <a:xfrm>
-            <a:off x="1450000" y="4950000"/>
-            <a:ext cx="10000000" cy="550000"/>
+            <a:off x="1400000" y="4620000"/>
+            <a:ext cx="10000000" cy="500000"/>
           </a:xfrm>
           <a:prstGeom prst="rect">
             <a:avLst/>
@@ -5570,7 +6545,7 @@
           <a:p>
             <a:pPr algn="l"/>
             <a:r>
-              <a:rPr sz="1700" b="0">
+              <a:rPr sz="1600" b="0">
                 <a:solidFill>
                   <a:srgbClr val="333333"/>
                 </a:solidFill>
@@ -5578,7 +6553,7 @@
                 <a:ea typeface="Open Sans"/>
                 <a:cs typeface="Open Sans"/>
               </a:rPr>
-              <a:t>Интенсивность как главный ориентир</a:t>
+              <a:t>Смешанное кровотечение, маскировка, объём</a:t>
             </a:r>
           </a:p>
         </p:txBody>
@@ -5668,7 +6643,7 @@
           <a:p>
             <a:pPr algn="l"/>
             <a:r>
-              <a:rPr sz="2400" b="1">
+              <a:rPr sz="2200" b="1">
                 <a:solidFill>
                   <a:srgbClr val="333333"/>
                 </a:solidFill>
@@ -5676,7 +6651,7 @@
                 <a:ea typeface="Open Sans"/>
                 <a:cs typeface="Open Sans"/>
               </a:rPr>
-              <a:t>ПОНЯТИЕ «КРОВОТЕЧЕНИЕ» И КРОВОПОТЕРЯ</a:t>
+              <a:t>ЧЕМ ЭТА ТЕМА ДОПОЛНЯЕТ ОБЗОРНЫЙ ОСМОТР</a:t>
             </a:r>
           </a:p>
         </p:txBody>
@@ -5841,49 +6816,27 @@
           </a:p>
         </p:txBody>
       </p:sp>
-      <p:pic>
-        <p:nvPicPr>
-          <p:cNvPr id="8" name="Picture 7" descr="def_man.png"/>
-          <p:cNvPicPr>
-            <a:picLocks noChangeAspect="1"/>
-          </p:cNvPicPr>
-          <p:nvPr/>
-        </p:nvPicPr>
-        <p:blipFill>
-          <a:blip r:embed="rId2"/>
-          <a:stretch>
-            <a:fillRect/>
-          </a:stretch>
-        </p:blipFill>
-        <p:spPr>
-          <a:xfrm>
-            <a:off x="752000" y="1500000"/>
-            <a:ext cx="2496000" cy="5200000"/>
-          </a:xfrm>
-          <a:prstGeom prst="rect">
-            <a:avLst/>
-          </a:prstGeom>
-        </p:spPr>
-      </p:pic>
-      <p:sp>
-        <p:nvSpPr>
-          <p:cNvPr id="9" name="Rounded Rectangle 8"/>
+      <p:sp>
+        <p:nvSpPr>
+          <p:cNvPr id="8" name="Rectangle 7"/>
           <p:cNvSpPr/>
           <p:nvPr/>
         </p:nvSpPr>
         <p:spPr>
           <a:xfrm>
-            <a:off x="3300000" y="1600000"/>
-            <a:ext cx="8600000" cy="2800000"/>
-          </a:xfrm>
-          <a:prstGeom prst="roundRect">
+            <a:off x="700000" y="1500000"/>
+            <a:ext cx="5400000" cy="4800000"/>
+          </a:xfrm>
+          <a:prstGeom prst="rect">
             <a:avLst/>
           </a:prstGeom>
           <a:solidFill>
-            <a:srgbClr val="F5F0E1"/>
+            <a:srgbClr val="FFFFFF"/>
           </a:solidFill>
-          <a:ln>
-            <a:noFill/>
+          <a:ln w="12700">
+            <a:solidFill>
+              <a:srgbClr val="999999"/>
+            </a:solidFill>
           </a:ln>
         </p:spPr>
         <p:style>
@@ -5910,14 +6863,57 @@
       </p:sp>
       <p:sp>
         <p:nvSpPr>
+          <p:cNvPr id="9" name="Rectangle 8"/>
+          <p:cNvSpPr/>
+          <p:nvPr/>
+        </p:nvSpPr>
+        <p:spPr>
+          <a:xfrm>
+            <a:off x="700000" y="1500000"/>
+            <a:ext cx="5400000" cy="700000"/>
+          </a:xfrm>
+          <a:prstGeom prst="rect">
+            <a:avLst/>
+          </a:prstGeom>
+          <a:solidFill>
+            <a:srgbClr val="DDDDDD"/>
+          </a:solidFill>
+          <a:ln>
+            <a:noFill/>
+          </a:ln>
+        </p:spPr>
+        <p:style>
+          <a:lnRef idx="1">
+            <a:schemeClr val="accent1"/>
+          </a:lnRef>
+          <a:fillRef idx="3">
+            <a:schemeClr val="accent1"/>
+          </a:fillRef>
+          <a:effectRef idx="2">
+            <a:schemeClr val="accent1"/>
+          </a:effectRef>
+          <a:fontRef idx="minor">
+            <a:schemeClr val="lt1"/>
+          </a:fontRef>
+        </p:style>
+        <p:txBody>
+          <a:bodyPr rtlCol="0" anchor="ctr"/>
+          <a:lstStyle/>
+          <a:p>
+            <a:pPr algn="ctr"/>
+          </a:p>
+        </p:txBody>
+      </p:sp>
+      <p:sp>
+        <p:nvSpPr>
           <p:cNvPr id="10" name="TextBox 9"/>
           <p:cNvSpPr txBox="1"/>
           <p:nvPr/>
         </p:nvSpPr>
         <p:spPr>
           <a:xfrm>
-            <a:off x="3600000" y="1800000"/>
-            <a:ext cx="8000000" cy="2400000"/>
+            <a:off x="900000" y="1600000"/>
+            <a:ext cx="5000000" cy="500000"/>
           </a:xfrm>
           <a:prstGeom prst="rect">
             <a:avLst/>
@@ -5930,9 +6926,9 @@
           </a:bodyPr>
           <a:lstStyle/>
           <a:p>
-            <a:pPr algn="l"/>
-            <a:r>
-              <a:rPr sz="1500" b="0">
+            <a:pPr algn="ctr"/>
+            <a:r>
+              <a:rPr sz="1500" b="1">
                 <a:solidFill>
                   <a:srgbClr val="333333"/>
                 </a:solidFill>
@@ -5940,10 +6936,40 @@
                 <a:ea typeface="Open Sans"/>
                 <a:cs typeface="Open Sans"/>
               </a:rPr>
-              <a:t>Под </a:t>
-            </a:r>
-            <a:r>
-              <a:rPr sz="1500" b="1">
+              <a:t>Уже в теме «Обзорный осмотр»</a:t>
+            </a:r>
+          </a:p>
+        </p:txBody>
+      </p:sp>
+      <p:sp>
+        <p:nvSpPr>
+          <p:cNvPr id="11" name="TextBox 10"/>
+          <p:cNvSpPr txBox="1"/>
+          <p:nvPr/>
+        </p:nvSpPr>
+        <p:spPr>
+          <a:xfrm>
+            <a:off x="950000" y="2450000"/>
+            <a:ext cx="4900000" cy="3500000"/>
+          </a:xfrm>
+          <a:prstGeom prst="rect">
+            <a:avLst/>
+          </a:prstGeom>
+          <a:noFill/>
+        </p:spPr>
+        <p:txBody>
+          <a:bodyPr wrap="square">
+            <a:spAutoFit/>
+          </a:bodyPr>
+          <a:lstStyle/>
+          <a:p>
+            <a:pPr algn="l">
+              <a:spcAft>
+                <a:spcPts val="800"/>
+              </a:spcAft>
+            </a:pPr>
+            <a:r>
+              <a:rPr sz="1500" b="0">
                 <a:solidFill>
                   <a:srgbClr val="333333"/>
                 </a:solidFill>
@@ -5951,8 +6977,15 @@
                 <a:ea typeface="Open Sans"/>
                 <a:cs typeface="Open Sans"/>
               </a:rPr>
-              <a:t>кровотечением понимают</a:t>
-            </a:r>
+              <a:t>•  понятие кровотечения;</a:t>
+            </a:r>
+          </a:p>
+          <a:p>
+            <a:pPr algn="l">
+              <a:spcAft>
+                <a:spcPts val="800"/>
+              </a:spcAft>
+            </a:pPr>
             <a:r>
               <a:rPr sz="1500" b="0">
                 <a:solidFill>
@@ -5962,10 +6995,17 @@
                 <a:ea typeface="Open Sans"/>
                 <a:cs typeface="Open Sans"/>
               </a:rPr>
-              <a:t> ситуацию, когда кровь по разным причинам (чаще всего в результате травмы) покидает сосудистое русло, что приводит к </a:t>
-            </a:r>
-            <a:r>
-              <a:rPr sz="1500" b="1">
+              <a:t>•  как выглядят виды кровотечения;</a:t>
+            </a:r>
+          </a:p>
+          <a:p>
+            <a:pPr algn="l">
+              <a:spcAft>
+                <a:spcPts val="800"/>
+              </a:spcAft>
+            </a:pPr>
+            <a:r>
+              <a:rPr sz="1500" b="0">
                 <a:solidFill>
                   <a:srgbClr val="333333"/>
                 </a:solidFill>
@@ -5973,8 +7013,15 @@
                 <a:ea typeface="Open Sans"/>
                 <a:cs typeface="Open Sans"/>
               </a:rPr>
-              <a:t>кровопотере</a:t>
-            </a:r>
+              <a:t>•  как провести обзорный осмотр;</a:t>
+            </a:r>
+          </a:p>
+          <a:p>
+            <a:pPr algn="l">
+              <a:spcAft>
+                <a:spcPts val="800"/>
+              </a:spcAft>
+            </a:pPr>
             <a:r>
               <a:rPr sz="1500" b="0">
                 <a:solidFill>
@@ -5984,21 +7031,109 @@
                 <a:ea typeface="Open Sans"/>
                 <a:cs typeface="Open Sans"/>
               </a:rPr>
-              <a:t> — безвозвратной утрате части крови.</a:t>
-            </a:r>
-          </a:p>
-        </p:txBody>
-      </p:sp>
-      <p:sp>
-        <p:nvSpPr>
-          <p:cNvPr id="11" name="TextBox 10"/>
+              <a:t>•  что делать при обнаружении крови.</a:t>
+            </a:r>
+          </a:p>
+        </p:txBody>
+      </p:sp>
+      <p:sp>
+        <p:nvSpPr>
+          <p:cNvPr id="12" name="Rectangle 11"/>
+          <p:cNvSpPr/>
+          <p:nvPr/>
+        </p:nvSpPr>
+        <p:spPr>
+          <a:xfrm>
+            <a:off x="6500000" y="1500000"/>
+            <a:ext cx="5400000" cy="4800000"/>
+          </a:xfrm>
+          <a:prstGeom prst="rect">
+            <a:avLst/>
+          </a:prstGeom>
+          <a:solidFill>
+            <a:srgbClr val="FFFFFF"/>
+          </a:solidFill>
+          <a:ln w="12700">
+            <a:solidFill>
+              <a:srgbClr val="999999"/>
+            </a:solidFill>
+          </a:ln>
+        </p:spPr>
+        <p:style>
+          <a:lnRef idx="1">
+            <a:schemeClr val="accent1"/>
+          </a:lnRef>
+          <a:fillRef idx="3">
+            <a:schemeClr val="accent1"/>
+          </a:fillRef>
+          <a:effectRef idx="2">
+            <a:schemeClr val="accent1"/>
+          </a:effectRef>
+          <a:fontRef idx="minor">
+            <a:schemeClr val="lt1"/>
+          </a:fontRef>
+        </p:style>
+        <p:txBody>
+          <a:bodyPr rtlCol="0" anchor="ctr"/>
+          <a:lstStyle/>
+          <a:p>
+            <a:pPr algn="ctr"/>
+          </a:p>
+        </p:txBody>
+      </p:sp>
+      <p:sp>
+        <p:nvSpPr>
+          <p:cNvPr id="13" name="Rectangle 12"/>
+          <p:cNvSpPr/>
+          <p:nvPr/>
+        </p:nvSpPr>
+        <p:spPr>
+          <a:xfrm>
+            <a:off x="6500000" y="1500000"/>
+            <a:ext cx="5400000" cy="700000"/>
+          </a:xfrm>
+          <a:prstGeom prst="rect">
+            <a:avLst/>
+          </a:prstGeom>
+          <a:solidFill>
+            <a:srgbClr val="555555"/>
+          </a:solidFill>
+          <a:ln>
+            <a:noFill/>
+          </a:ln>
+        </p:spPr>
+        <p:style>
+          <a:lnRef idx="1">
+            <a:schemeClr val="accent1"/>
+          </a:lnRef>
+          <a:fillRef idx="3">
+            <a:schemeClr val="accent1"/>
+          </a:fillRef>
+          <a:effectRef idx="2">
+            <a:schemeClr val="accent1"/>
+          </a:effectRef>
+          <a:fontRef idx="minor">
+            <a:schemeClr val="lt1"/>
+          </a:fontRef>
+        </p:style>
+        <p:txBody>
+          <a:bodyPr rtlCol="0" anchor="ctr"/>
+          <a:lstStyle/>
+          <a:p>
+            <a:pPr algn="ctr"/>
+          </a:p>
+        </p:txBody>
+      </p:sp>
+      <p:sp>
+        <p:nvSpPr>
+          <p:cNvPr id="14" name="TextBox 13"/>
           <p:cNvSpPr txBox="1"/>
           <p:nvPr/>
         </p:nvSpPr>
         <p:spPr>
           <a:xfrm>
-            <a:off x="3300000" y="4700000"/>
-            <a:ext cx="8600000" cy="1800000"/>
+            <a:off x="6700000" y="1600000"/>
+            <a:ext cx="5000000" cy="500000"/>
           </a:xfrm>
           <a:prstGeom prst="rect">
             <a:avLst/>
@@ -6011,17 +7146,130 @@
           </a:bodyPr>
           <a:lstStyle/>
           <a:p>
-            <a:pPr algn="l"/>
-            <a:r>
-              <a:rPr sz="1500" b="0">
-                <a:solidFill>
-                  <a:srgbClr val="333333"/>
+            <a:pPr algn="ctr"/>
+            <a:r>
+              <a:rPr sz="1500" b="1">
+                <a:solidFill>
+                  <a:srgbClr val="FFFFFF"/>
                 </a:solidFill>
                 <a:latin typeface="Open Sans"/>
                 <a:ea typeface="Open Sans"/>
                 <a:cs typeface="Open Sans"/>
               </a:rPr>
-              <a:t>Это сопровождается снижением функции системы кровообращения по переносу кислорода и питательных веществ к органам, что ведет к ухудшению или прекращению их деятельности.</a:t>
+              <a:t>Разбираем сейчас</a:t>
+            </a:r>
+          </a:p>
+        </p:txBody>
+      </p:sp>
+      <p:sp>
+        <p:nvSpPr>
+          <p:cNvPr id="15" name="TextBox 14"/>
+          <p:cNvSpPr txBox="1"/>
+          <p:nvPr/>
+        </p:nvSpPr>
+        <p:spPr>
+          <a:xfrm>
+            <a:off x="6750000" y="2450000"/>
+            <a:ext cx="4900000" cy="3500000"/>
+          </a:xfrm>
+          <a:prstGeom prst="rect">
+            <a:avLst/>
+          </a:prstGeom>
+          <a:noFill/>
+        </p:spPr>
+        <p:txBody>
+          <a:bodyPr wrap="square">
+            <a:spAutoFit/>
+          </a:bodyPr>
+          <a:lstStyle/>
+          <a:p>
+            <a:pPr algn="l">
+              <a:spcAft>
+                <a:spcPts val="800"/>
+              </a:spcAft>
+            </a:pPr>
+            <a:r>
+              <a:rPr sz="1500" b="0">
+                <a:solidFill>
+                  <a:srgbClr val="333333"/>
+                </a:solidFill>
+                <a:latin typeface="Open Sans"/>
+                <a:ea typeface="Open Sans"/>
+                <a:cs typeface="Open Sans"/>
+              </a:rPr>
+              <a:t>•  как читать признаки кровопотери;</a:t>
+            </a:r>
+          </a:p>
+          <a:p>
+            <a:pPr algn="l">
+              <a:spcAft>
+                <a:spcPts val="800"/>
+              </a:spcAft>
+            </a:pPr>
+            <a:r>
+              <a:rPr sz="1500" b="0">
+                <a:solidFill>
+                  <a:srgbClr val="333333"/>
+                </a:solidFill>
+                <a:latin typeface="Open Sans"/>
+                <a:ea typeface="Open Sans"/>
+                <a:cs typeface="Open Sans"/>
+              </a:rPr>
+              <a:t>•  когда крови «не видно», а угроза есть;</a:t>
+            </a:r>
+          </a:p>
+          <a:p>
+            <a:pPr algn="l">
+              <a:spcAft>
+                <a:spcPts val="800"/>
+              </a:spcAft>
+            </a:pPr>
+            <a:r>
+              <a:rPr sz="1500" b="0">
+                <a:solidFill>
+                  <a:srgbClr val="333333"/>
+                </a:solidFill>
+                <a:latin typeface="Open Sans"/>
+                <a:ea typeface="Open Sans"/>
+                <a:cs typeface="Open Sans"/>
+              </a:rPr>
+              <a:t>•  как оценить интенсивность;</a:t>
+            </a:r>
+          </a:p>
+          <a:p>
+            <a:pPr algn="l">
+              <a:spcAft>
+                <a:spcPts val="800"/>
+              </a:spcAft>
+            </a:pPr>
+            <a:r>
+              <a:rPr sz="1500" b="0">
+                <a:solidFill>
+                  <a:srgbClr val="333333"/>
+                </a:solidFill>
+                <a:latin typeface="Open Sans"/>
+                <a:ea typeface="Open Sans"/>
+                <a:cs typeface="Open Sans"/>
+              </a:rPr>
+              <a:t>•  сравнение видов и смешанное кровотечение;</a:t>
+            </a:r>
+          </a:p>
+          <a:p>
+            <a:pPr algn="l">
+              <a:spcAft>
+                <a:spcPts val="800"/>
+              </a:spcAft>
+            </a:pPr>
+            <a:r>
+              <a:rPr sz="1500" b="0">
+                <a:solidFill>
+                  <a:srgbClr val="333333"/>
+                </a:solidFill>
+                <a:latin typeface="Open Sans"/>
+                <a:ea typeface="Open Sans"/>
+                <a:cs typeface="Open Sans"/>
+              </a:rPr>
+              <a:t>•  что маскирует признаки.</a:t>
             </a:r>
           </a:p>
         </p:txBody>
@@ -6111,7 +7359,7 @@
           <a:p>
             <a:pPr algn="l"/>
             <a:r>
-              <a:rPr sz="2400" b="1">
+              <a:rPr sz="2200" b="1">
                 <a:solidFill>
                   <a:srgbClr val="333333"/>
                 </a:solidFill>
@@ -6119,7 +7367,7 @@
                 <a:ea typeface="Open Sans"/>
                 <a:cs typeface="Open Sans"/>
               </a:rPr>
-              <a:t>ПРИЗНАКИ КРОВОПОТЕРИ</a:t>
+              <a:t>ПРИЗНАКИ КРОВОПОТЕРИ — ПО ГРУППАМ</a:t>
             </a:r>
           </a:p>
         </p:txBody>
@@ -6286,14 +7534,139 @@
       </p:sp>
       <p:sp>
         <p:nvSpPr>
-          <p:cNvPr id="8" name="TextBox 7"/>
+          <p:cNvPr id="8" name="Rectangle 7"/>
+          <p:cNvSpPr/>
+          <p:nvPr/>
+        </p:nvSpPr>
+        <p:spPr>
+          <a:xfrm>
+            <a:off x="700000" y="1500000"/>
+            <a:ext cx="4000000" cy="4800000"/>
+          </a:xfrm>
+          <a:prstGeom prst="rect">
+            <a:avLst/>
+          </a:prstGeom>
+          <a:solidFill>
+            <a:srgbClr val="FFFFFF"/>
+          </a:solidFill>
+          <a:ln w="12700">
+            <a:solidFill>
+              <a:srgbClr val="999999"/>
+            </a:solidFill>
+          </a:ln>
+        </p:spPr>
+        <p:style>
+          <a:lnRef idx="1">
+            <a:schemeClr val="accent1"/>
+          </a:lnRef>
+          <a:fillRef idx="3">
+            <a:schemeClr val="accent1"/>
+          </a:fillRef>
+          <a:effectRef idx="2">
+            <a:schemeClr val="accent1"/>
+          </a:effectRef>
+          <a:fontRef idx="minor">
+            <a:schemeClr val="lt1"/>
+          </a:fontRef>
+        </p:style>
+        <p:txBody>
+          <a:bodyPr rtlCol="0" anchor="ctr"/>
+          <a:lstStyle/>
+          <a:p>
+            <a:pPr algn="ctr"/>
+          </a:p>
+        </p:txBody>
+      </p:sp>
+      <p:sp>
+        <p:nvSpPr>
+          <p:cNvPr id="9" name="Rectangle 8"/>
+          <p:cNvSpPr/>
+          <p:nvPr/>
+        </p:nvSpPr>
+        <p:spPr>
+          <a:xfrm>
+            <a:off x="700000" y="1500000"/>
+            <a:ext cx="4000000" cy="700000"/>
+          </a:xfrm>
+          <a:prstGeom prst="rect">
+            <a:avLst/>
+          </a:prstGeom>
+          <a:solidFill>
+            <a:srgbClr val="555555"/>
+          </a:solidFill>
+          <a:ln>
+            <a:noFill/>
+          </a:ln>
+        </p:spPr>
+        <p:style>
+          <a:lnRef idx="1">
+            <a:schemeClr val="accent1"/>
+          </a:lnRef>
+          <a:fillRef idx="3">
+            <a:schemeClr val="accent1"/>
+          </a:fillRef>
+          <a:effectRef idx="2">
+            <a:schemeClr val="accent1"/>
+          </a:effectRef>
+          <a:fontRef idx="minor">
+            <a:schemeClr val="lt1"/>
+          </a:fontRef>
+        </p:style>
+        <p:txBody>
+          <a:bodyPr rtlCol="0" anchor="ctr"/>
+          <a:lstStyle/>
+          <a:p>
+            <a:pPr algn="ctr"/>
+          </a:p>
+        </p:txBody>
+      </p:sp>
+      <p:sp>
+        <p:nvSpPr>
+          <p:cNvPr id="10" name="TextBox 9"/>
           <p:cNvSpPr txBox="1"/>
           <p:nvPr/>
         </p:nvSpPr>
         <p:spPr>
           <a:xfrm>
-            <a:off x="700000" y="1600000"/>
-            <a:ext cx="5400000" cy="3200000"/>
+            <a:off x="800000" y="1600000"/>
+            <a:ext cx="3800000" cy="500000"/>
+          </a:xfrm>
+          <a:prstGeom prst="rect">
+            <a:avLst/>
+          </a:prstGeom>
+          <a:noFill/>
+        </p:spPr>
+        <p:txBody>
+          <a:bodyPr wrap="square" anchor="t">
+            <a:spAutoFit/>
+          </a:bodyPr>
+          <a:lstStyle/>
+          <a:p>
+            <a:pPr algn="ctr"/>
+            <a:r>
+              <a:rPr sz="1500" b="1">
+                <a:solidFill>
+                  <a:srgbClr val="FFFFFF"/>
+                </a:solidFill>
+                <a:latin typeface="Open Sans"/>
+                <a:ea typeface="Open Sans"/>
+                <a:cs typeface="Open Sans"/>
+              </a:rPr>
+              <a:t>Самочувствие</a:t>
+            </a:r>
+          </a:p>
+        </p:txBody>
+      </p:sp>
+      <p:sp>
+        <p:nvSpPr>
+          <p:cNvPr id="11" name="TextBox 10"/>
+          <p:cNvSpPr txBox="1"/>
+          <p:nvPr/>
+        </p:nvSpPr>
+        <p:spPr>
+          <a:xfrm>
+            <a:off x="850000" y="2450000"/>
+            <a:ext cx="3700000" cy="3500000"/>
           </a:xfrm>
           <a:prstGeom prst="rect">
             <a:avLst/>
@@ -6312,7 +7685,7 @@
               </a:spcAft>
             </a:pPr>
             <a:r>
-              <a:rPr sz="1700" b="0">
+              <a:rPr sz="1400" b="0">
                 <a:solidFill>
                   <a:srgbClr val="333333"/>
                 </a:solidFill>
@@ -6330,7 +7703,7 @@
               </a:spcAft>
             </a:pPr>
             <a:r>
-              <a:rPr sz="1700" b="0">
+              <a:rPr sz="1400" b="0">
                 <a:solidFill>
                   <a:srgbClr val="333333"/>
                 </a:solidFill>
@@ -6348,7 +7721,7 @@
               </a:spcAft>
             </a:pPr>
             <a:r>
-              <a:rPr sz="1700" b="0">
+              <a:rPr sz="1400" b="0">
                 <a:solidFill>
                   <a:srgbClr val="333333"/>
                 </a:solidFill>
@@ -6366,7 +7739,7 @@
               </a:spcAft>
             </a:pPr>
             <a:r>
-              <a:rPr sz="1700" b="0">
+              <a:rPr sz="1400" b="0">
                 <a:solidFill>
                   <a:srgbClr val="333333"/>
                 </a:solidFill>
@@ -6377,29 +7750,6 @@
               <a:t>☐  мелькание «мушек» перед глазами;</a:t>
             </a:r>
           </a:p>
-        </p:txBody>
-      </p:sp>
-      <p:sp>
-        <p:nvSpPr>
-          <p:cNvPr id="9" name="TextBox 8"/>
-          <p:cNvSpPr txBox="1"/>
-          <p:nvPr/>
-        </p:nvSpPr>
-        <p:spPr>
-          <a:xfrm>
-            <a:off x="6500000" y="1600000"/>
-            <a:ext cx="5400000" cy="3200000"/>
-          </a:xfrm>
-          <a:prstGeom prst="rect">
-            <a:avLst/>
-          </a:prstGeom>
-          <a:noFill/>
-        </p:spPr>
-        <p:txBody>
-          <a:bodyPr wrap="square">
-            <a:spAutoFit/>
-          </a:bodyPr>
-          <a:lstStyle/>
           <a:p>
             <a:pPr algn="l">
               <a:spcAft>
@@ -6407,7 +7757,7 @@
               </a:spcAft>
             </a:pPr>
             <a:r>
-              <a:rPr sz="1700" b="0">
+              <a:rPr sz="1400" b="0">
                 <a:solidFill>
                   <a:srgbClr val="333333"/>
                 </a:solidFill>
@@ -6415,9 +7765,157 @@
                 <a:ea typeface="Open Sans"/>
                 <a:cs typeface="Open Sans"/>
               </a:rPr>
-              <a:t>☐  обморок (чаще при попытке встать);</a:t>
-            </a:r>
-          </a:p>
+              <a:t>☐  обморок (чаще при попытке встать).</a:t>
+            </a:r>
+          </a:p>
+        </p:txBody>
+      </p:sp>
+      <p:sp>
+        <p:nvSpPr>
+          <p:cNvPr id="12" name="Rectangle 11"/>
+          <p:cNvSpPr/>
+          <p:nvPr/>
+        </p:nvSpPr>
+        <p:spPr>
+          <a:xfrm>
+            <a:off x="4950000" y="1500000"/>
+            <a:ext cx="3200000" cy="4800000"/>
+          </a:xfrm>
+          <a:prstGeom prst="rect">
+            <a:avLst/>
+          </a:prstGeom>
+          <a:solidFill>
+            <a:srgbClr val="FFFFFF"/>
+          </a:solidFill>
+          <a:ln w="12700">
+            <a:solidFill>
+              <a:srgbClr val="999999"/>
+            </a:solidFill>
+          </a:ln>
+        </p:spPr>
+        <p:style>
+          <a:lnRef idx="1">
+            <a:schemeClr val="accent1"/>
+          </a:lnRef>
+          <a:fillRef idx="3">
+            <a:schemeClr val="accent1"/>
+          </a:fillRef>
+          <a:effectRef idx="2">
+            <a:schemeClr val="accent1"/>
+          </a:effectRef>
+          <a:fontRef idx="minor">
+            <a:schemeClr val="lt1"/>
+          </a:fontRef>
+        </p:style>
+        <p:txBody>
+          <a:bodyPr rtlCol="0" anchor="ctr"/>
+          <a:lstStyle/>
+          <a:p>
+            <a:pPr algn="ctr"/>
+          </a:p>
+        </p:txBody>
+      </p:sp>
+      <p:sp>
+        <p:nvSpPr>
+          <p:cNvPr id="13" name="Rectangle 12"/>
+          <p:cNvSpPr/>
+          <p:nvPr/>
+        </p:nvSpPr>
+        <p:spPr>
+          <a:xfrm>
+            <a:off x="4950000" y="1500000"/>
+            <a:ext cx="3200000" cy="700000"/>
+          </a:xfrm>
+          <a:prstGeom prst="rect">
+            <a:avLst/>
+          </a:prstGeom>
+          <a:solidFill>
+            <a:srgbClr val="555555"/>
+          </a:solidFill>
+          <a:ln>
+            <a:noFill/>
+          </a:ln>
+        </p:spPr>
+        <p:style>
+          <a:lnRef idx="1">
+            <a:schemeClr val="accent1"/>
+          </a:lnRef>
+          <a:fillRef idx="3">
+            <a:schemeClr val="accent1"/>
+          </a:fillRef>
+          <a:effectRef idx="2">
+            <a:schemeClr val="accent1"/>
+          </a:effectRef>
+          <a:fontRef idx="minor">
+            <a:schemeClr val="lt1"/>
+          </a:fontRef>
+        </p:style>
+        <p:txBody>
+          <a:bodyPr rtlCol="0" anchor="ctr"/>
+          <a:lstStyle/>
+          <a:p>
+            <a:pPr algn="ctr"/>
+          </a:p>
+        </p:txBody>
+      </p:sp>
+      <p:sp>
+        <p:nvSpPr>
+          <p:cNvPr id="14" name="TextBox 13"/>
+          <p:cNvSpPr txBox="1"/>
+          <p:nvPr/>
+        </p:nvSpPr>
+        <p:spPr>
+          <a:xfrm>
+            <a:off x="5050000" y="1600000"/>
+            <a:ext cx="3000000" cy="500000"/>
+          </a:xfrm>
+          <a:prstGeom prst="rect">
+            <a:avLst/>
+          </a:prstGeom>
+          <a:noFill/>
+        </p:spPr>
+        <p:txBody>
+          <a:bodyPr wrap="square" anchor="t">
+            <a:spAutoFit/>
+          </a:bodyPr>
+          <a:lstStyle/>
+          <a:p>
+            <a:pPr algn="ctr"/>
+            <a:r>
+              <a:rPr sz="1500" b="1">
+                <a:solidFill>
+                  <a:srgbClr val="FFFFFF"/>
+                </a:solidFill>
+                <a:latin typeface="Open Sans"/>
+                <a:ea typeface="Open Sans"/>
+                <a:cs typeface="Open Sans"/>
+              </a:rPr>
+              <a:t>Кожа</a:t>
+            </a:r>
+          </a:p>
+        </p:txBody>
+      </p:sp>
+      <p:sp>
+        <p:nvSpPr>
+          <p:cNvPr id="15" name="TextBox 14"/>
+          <p:cNvSpPr txBox="1"/>
+          <p:nvPr/>
+        </p:nvSpPr>
+        <p:spPr>
+          <a:xfrm>
+            <a:off x="5100000" y="2450000"/>
+            <a:ext cx="2900000" cy="3500000"/>
+          </a:xfrm>
+          <a:prstGeom prst="rect">
+            <a:avLst/>
+          </a:prstGeom>
+          <a:noFill/>
+        </p:spPr>
+        <p:txBody>
+          <a:bodyPr wrap="square">
+            <a:spAutoFit/>
+          </a:bodyPr>
+          <a:lstStyle/>
           <a:p>
             <a:pPr algn="l">
               <a:spcAft>
@@ -6425,7 +7923,7 @@
               </a:spcAft>
             </a:pPr>
             <a:r>
-              <a:rPr sz="1700" b="0">
+              <a:rPr sz="1400" b="0">
                 <a:solidFill>
                   <a:srgbClr val="333333"/>
                 </a:solidFill>
@@ -6433,7 +7931,7 @@
                 <a:ea typeface="Open Sans"/>
                 <a:cs typeface="Open Sans"/>
               </a:rPr>
-              <a:t>☐  бледная, влажная и холодная кожа;</a:t>
+              <a:t>☐  бледная;</a:t>
             </a:r>
           </a:p>
           <a:p>
@@ -6443,7 +7941,191 @@
               </a:spcAft>
             </a:pPr>
             <a:r>
-              <a:rPr sz="1700" b="0">
+              <a:rPr sz="1400" b="0">
+                <a:solidFill>
+                  <a:srgbClr val="333333"/>
+                </a:solidFill>
+                <a:latin typeface="Open Sans"/>
+                <a:ea typeface="Open Sans"/>
+                <a:cs typeface="Open Sans"/>
+              </a:rPr>
+              <a:t>☐  влажная;</a:t>
+            </a:r>
+          </a:p>
+          <a:p>
+            <a:pPr algn="l">
+              <a:spcAft>
+                <a:spcPts val="800"/>
+              </a:spcAft>
+            </a:pPr>
+            <a:r>
+              <a:rPr sz="1400" b="0">
+                <a:solidFill>
+                  <a:srgbClr val="333333"/>
+                </a:solidFill>
+                <a:latin typeface="Open Sans"/>
+                <a:ea typeface="Open Sans"/>
+                <a:cs typeface="Open Sans"/>
+              </a:rPr>
+              <a:t>☐  холодная на ощупь.</a:t>
+            </a:r>
+          </a:p>
+        </p:txBody>
+      </p:sp>
+      <p:sp>
+        <p:nvSpPr>
+          <p:cNvPr id="16" name="Rectangle 15"/>
+          <p:cNvSpPr/>
+          <p:nvPr/>
+        </p:nvSpPr>
+        <p:spPr>
+          <a:xfrm>
+            <a:off x="8400000" y="1500000"/>
+            <a:ext cx="3400000" cy="4800000"/>
+          </a:xfrm>
+          <a:prstGeom prst="rect">
+            <a:avLst/>
+          </a:prstGeom>
+          <a:solidFill>
+            <a:srgbClr val="FFFFFF"/>
+          </a:solidFill>
+          <a:ln w="12700">
+            <a:solidFill>
+              <a:srgbClr val="999999"/>
+            </a:solidFill>
+          </a:ln>
+        </p:spPr>
+        <p:style>
+          <a:lnRef idx="1">
+            <a:schemeClr val="accent1"/>
+          </a:lnRef>
+          <a:fillRef idx="3">
+            <a:schemeClr val="accent1"/>
+          </a:fillRef>
+          <a:effectRef idx="2">
+            <a:schemeClr val="accent1"/>
+          </a:effectRef>
+          <a:fontRef idx="minor">
+            <a:schemeClr val="lt1"/>
+          </a:fontRef>
+        </p:style>
+        <p:txBody>
+          <a:bodyPr rtlCol="0" anchor="ctr"/>
+          <a:lstStyle/>
+          <a:p>
+            <a:pPr algn="ctr"/>
+          </a:p>
+        </p:txBody>
+      </p:sp>
+      <p:sp>
+        <p:nvSpPr>
+          <p:cNvPr id="17" name="Rectangle 16"/>
+          <p:cNvSpPr/>
+          <p:nvPr/>
+        </p:nvSpPr>
+        <p:spPr>
+          <a:xfrm>
+            <a:off x="8400000" y="1500000"/>
+            <a:ext cx="3400000" cy="700000"/>
+          </a:xfrm>
+          <a:prstGeom prst="rect">
+            <a:avLst/>
+          </a:prstGeom>
+          <a:solidFill>
+            <a:srgbClr val="555555"/>
+          </a:solidFill>
+          <a:ln>
+            <a:noFill/>
+          </a:ln>
+        </p:spPr>
+        <p:style>
+          <a:lnRef idx="1">
+            <a:schemeClr val="accent1"/>
+          </a:lnRef>
+          <a:fillRef idx="3">
+            <a:schemeClr val="accent1"/>
+          </a:fillRef>
+          <a:effectRef idx="2">
+            <a:schemeClr val="accent1"/>
+          </a:effectRef>
+          <a:fontRef idx="minor">
+            <a:schemeClr val="lt1"/>
+          </a:fontRef>
+        </p:style>
+        <p:txBody>
+          <a:bodyPr rtlCol="0" anchor="ctr"/>
+          <a:lstStyle/>
+          <a:p>
+            <a:pPr algn="ctr"/>
+          </a:p>
+        </p:txBody>
+      </p:sp>
+      <p:sp>
+        <p:nvSpPr>
+          <p:cNvPr id="18" name="TextBox 17"/>
+          <p:cNvSpPr txBox="1"/>
+          <p:nvPr/>
+        </p:nvSpPr>
+        <p:spPr>
+          <a:xfrm>
+            <a:off x="8500000" y="1600000"/>
+            <a:ext cx="3200000" cy="500000"/>
+          </a:xfrm>
+          <a:prstGeom prst="rect">
+            <a:avLst/>
+          </a:prstGeom>
+          <a:noFill/>
+        </p:spPr>
+        <p:txBody>
+          <a:bodyPr wrap="square" anchor="t">
+            <a:spAutoFit/>
+          </a:bodyPr>
+          <a:lstStyle/>
+          <a:p>
+            <a:pPr algn="ctr"/>
+            <a:r>
+              <a:rPr sz="1500" b="1">
+                <a:solidFill>
+                  <a:srgbClr val="FFFFFF"/>
+                </a:solidFill>
+                <a:latin typeface="Open Sans"/>
+                <a:ea typeface="Open Sans"/>
+                <a:cs typeface="Open Sans"/>
+              </a:rPr>
+              <a:t>Дыхание и сердце</a:t>
+            </a:r>
+          </a:p>
+        </p:txBody>
+      </p:sp>
+      <p:sp>
+        <p:nvSpPr>
+          <p:cNvPr id="19" name="TextBox 18"/>
+          <p:cNvSpPr txBox="1"/>
+          <p:nvPr/>
+        </p:nvSpPr>
+        <p:spPr>
+          <a:xfrm>
+            <a:off x="8550000" y="2450000"/>
+            <a:ext cx="3100000" cy="3500000"/>
+          </a:xfrm>
+          <a:prstGeom prst="rect">
+            <a:avLst/>
+          </a:prstGeom>
+          <a:noFill/>
+        </p:spPr>
+        <p:txBody>
+          <a:bodyPr wrap="square">
+            <a:spAutoFit/>
+          </a:bodyPr>
+          <a:lstStyle/>
+          <a:p>
+            <a:pPr algn="l">
+              <a:spcAft>
+                <a:spcPts val="800"/>
+              </a:spcAft>
+            </a:pPr>
+            <a:r>
+              <a:rPr sz="1400" b="0">
                 <a:solidFill>
                   <a:srgbClr val="333333"/>
                 </a:solidFill>
@@ -6461,7 +8143,7 @@
               </a:spcAft>
             </a:pPr>
             <a:r>
-              <a:rPr sz="1700" b="0">
+              <a:rPr sz="1400" b="0">
                 <a:solidFill>
                   <a:srgbClr val="333333"/>
                 </a:solidFill>
@@ -6470,129 +8152,6 @@
                 <a:cs typeface="Open Sans"/>
               </a:rPr>
               <a:t>☐  частое дыхание.</a:t>
-            </a:r>
-          </a:p>
-        </p:txBody>
-      </p:sp>
-      <p:sp>
-        <p:nvSpPr>
-          <p:cNvPr id="10" name="Rounded Rectangle 9"/>
-          <p:cNvSpPr/>
-          <p:nvPr/>
-        </p:nvSpPr>
-        <p:spPr>
-          <a:xfrm>
-            <a:off x="700000" y="5000000"/>
-            <a:ext cx="11000000" cy="1400000"/>
-          </a:xfrm>
-          <a:prstGeom prst="roundRect">
-            <a:avLst/>
-          </a:prstGeom>
-          <a:solidFill>
-            <a:srgbClr val="F5F0E1"/>
-          </a:solidFill>
-          <a:ln>
-            <a:noFill/>
-          </a:ln>
-        </p:spPr>
-        <p:style>
-          <a:lnRef idx="1">
-            <a:schemeClr val="accent1"/>
-          </a:lnRef>
-          <a:fillRef idx="3">
-            <a:schemeClr val="accent1"/>
-          </a:fillRef>
-          <a:effectRef idx="2">
-            <a:schemeClr val="accent1"/>
-          </a:effectRef>
-          <a:fontRef idx="minor">
-            <a:schemeClr val="lt1"/>
-          </a:fontRef>
-        </p:style>
-        <p:txBody>
-          <a:bodyPr rtlCol="0" anchor="ctr"/>
-          <a:lstStyle/>
-          <a:p>
-            <a:pPr algn="ctr"/>
-          </a:p>
-        </p:txBody>
-      </p:sp>
-      <p:sp>
-        <p:nvSpPr>
-          <p:cNvPr id="11" name="Rectangle 10"/>
-          <p:cNvSpPr/>
-          <p:nvPr/>
-        </p:nvSpPr>
-        <p:spPr>
-          <a:xfrm>
-            <a:off x="700000" y="5000000"/>
-            <a:ext cx="100000" cy="1400000"/>
-          </a:xfrm>
-          <a:prstGeom prst="rect">
-            <a:avLst/>
-          </a:prstGeom>
-          <a:solidFill>
-            <a:srgbClr val="ED1C24"/>
-          </a:solidFill>
-          <a:ln>
-            <a:noFill/>
-          </a:ln>
-        </p:spPr>
-        <p:style>
-          <a:lnRef idx="1">
-            <a:schemeClr val="accent1"/>
-          </a:lnRef>
-          <a:fillRef idx="3">
-            <a:schemeClr val="accent1"/>
-          </a:fillRef>
-          <a:effectRef idx="2">
-            <a:schemeClr val="accent1"/>
-          </a:effectRef>
-          <a:fontRef idx="minor">
-            <a:schemeClr val="lt1"/>
-          </a:fontRef>
-        </p:style>
-        <p:txBody>
-          <a:bodyPr rtlCol="0" anchor="ctr"/>
-          <a:lstStyle/>
-          <a:p>
-            <a:pPr algn="ctr"/>
-          </a:p>
-        </p:txBody>
-      </p:sp>
-      <p:sp>
-        <p:nvSpPr>
-          <p:cNvPr id="12" name="TextBox 11"/>
-          <p:cNvSpPr txBox="1"/>
-          <p:nvPr/>
-        </p:nvSpPr>
-        <p:spPr>
-          <a:xfrm>
-            <a:off x="1000000" y="5200000"/>
-            <a:ext cx="10400000" cy="1000000"/>
-          </a:xfrm>
-          <a:prstGeom prst="rect">
-            <a:avLst/>
-          </a:prstGeom>
-          <a:noFill/>
-        </p:spPr>
-        <p:txBody>
-          <a:bodyPr wrap="square" anchor="ctr">
-            <a:spAutoFit/>
-          </a:bodyPr>
-          <a:lstStyle/>
-          <a:p>
-            <a:pPr algn="l"/>
-            <a:r>
-              <a:rPr sz="1500" b="0">
-                <a:solidFill>
-                  <a:srgbClr val="333333"/>
-                </a:solidFill>
-                <a:latin typeface="Open Sans"/>
-                <a:ea typeface="Open Sans"/>
-                <a:cs typeface="Open Sans"/>
-              </a:rPr>
-              <a:t>Эти признаки возможны при продолжающемся кровотечении, при уже остановленном кровотечении и при отсутствии видимой крови (в том числе при внутреннем кровотечении).</a:t>
             </a:r>
           </a:p>
         </p:txBody>
@@ -6682,7 +8241,7 @@
           <a:p>
             <a:pPr algn="l"/>
             <a:r>
-              <a:rPr sz="2400" b="1">
+              <a:rPr sz="2200" b="1">
                 <a:solidFill>
                   <a:srgbClr val="333333"/>
                 </a:solidFill>
@@ -6690,7 +8249,7 @@
                 <a:ea typeface="Open Sans"/>
                 <a:cs typeface="Open Sans"/>
               </a:rPr>
-              <a:t>ОСТРАЯ МАССИВНАЯ КРОВОПОТЕРЯ</a:t>
+              <a:t>КОГДА ПОЯВЛЯЮТСЯ ПРИЗНАКИ КРОВОПОТЕРИ</a:t>
             </a:r>
           </a:p>
         </p:txBody>
@@ -6857,23 +8416,25 @@
       </p:sp>
       <p:sp>
         <p:nvSpPr>
-          <p:cNvPr id="8" name="Rounded Rectangle 7"/>
+          <p:cNvPr id="8" name="Rectangle 7"/>
           <p:cNvSpPr/>
           <p:nvPr/>
         </p:nvSpPr>
         <p:spPr>
           <a:xfrm>
             <a:off x="700000" y="1550000"/>
-            <a:ext cx="11000000" cy="1400000"/>
-          </a:xfrm>
-          <a:prstGeom prst="roundRect">
+            <a:ext cx="11000000" cy="1300000"/>
+          </a:xfrm>
+          <a:prstGeom prst="rect">
             <a:avLst/>
           </a:prstGeom>
           <a:solidFill>
-            <a:srgbClr val="F5F0E1"/>
+            <a:srgbClr val="FFFFFF"/>
           </a:solidFill>
-          <a:ln>
-            <a:noFill/>
+          <a:ln w="12700">
+            <a:solidFill>
+              <a:srgbClr val="999999"/>
+            </a:solidFill>
           </a:ln>
         </p:spPr>
         <p:style>
@@ -6900,14 +8461,57 @@
       </p:sp>
       <p:sp>
         <p:nvSpPr>
-          <p:cNvPr id="9" name="TextBox 8"/>
+          <p:cNvPr id="9" name="Rectangle 8"/>
+          <p:cNvSpPr/>
+          <p:nvPr/>
+        </p:nvSpPr>
+        <p:spPr>
+          <a:xfrm>
+            <a:off x="700000" y="1550000"/>
+            <a:ext cx="90000" cy="1300000"/>
+          </a:xfrm>
+          <a:prstGeom prst="rect">
+            <a:avLst/>
+          </a:prstGeom>
+          <a:solidFill>
+            <a:srgbClr val="ED1C24"/>
+          </a:solidFill>
+          <a:ln>
+            <a:noFill/>
+          </a:ln>
+        </p:spPr>
+        <p:style>
+          <a:lnRef idx="1">
+            <a:schemeClr val="accent1"/>
+          </a:lnRef>
+          <a:fillRef idx="3">
+            <a:schemeClr val="accent1"/>
+          </a:fillRef>
+          <a:effectRef idx="2">
+            <a:schemeClr val="accent1"/>
+          </a:effectRef>
+          <a:fontRef idx="minor">
+            <a:schemeClr val="lt1"/>
+          </a:fontRef>
+        </p:style>
+        <p:txBody>
+          <a:bodyPr rtlCol="0" anchor="ctr"/>
+          <a:lstStyle/>
+          <a:p>
+            <a:pPr algn="ctr"/>
+          </a:p>
+        </p:txBody>
+      </p:sp>
+      <p:sp>
+        <p:nvSpPr>
+          <p:cNvPr id="10" name="TextBox 9"/>
           <p:cNvSpPr txBox="1"/>
           <p:nvPr/>
         </p:nvSpPr>
         <p:spPr>
           <a:xfrm>
-            <a:off x="950000" y="1700000"/>
-            <a:ext cx="10500000" cy="1100000"/>
+            <a:off x="1000000" y="1700000"/>
+            <a:ext cx="10400000" cy="400000"/>
           </a:xfrm>
           <a:prstGeom prst="rect">
             <a:avLst/>
@@ -6915,14 +8519,14 @@
           <a:noFill/>
         </p:spPr>
         <p:txBody>
-          <a:bodyPr wrap="square" anchor="ctr">
+          <a:bodyPr wrap="square" anchor="t">
             <a:spAutoFit/>
           </a:bodyPr>
           <a:lstStyle/>
           <a:p>
             <a:pPr algn="l"/>
             <a:r>
-              <a:rPr sz="1700" b="1">
+              <a:rPr sz="1600" b="1">
                 <a:solidFill>
                   <a:srgbClr val="333333"/>
                 </a:solidFill>
@@ -6930,21 +8534,21 @@
                 <a:ea typeface="Open Sans"/>
                 <a:cs typeface="Open Sans"/>
               </a:rPr>
-              <a:t>Наиболее опасно интенсивное кровотечение, приводящее к быстрой потере большого количества крови, — острая массивная кровопотеря.</a:t>
-            </a:r>
-          </a:p>
-        </p:txBody>
-      </p:sp>
-      <p:sp>
-        <p:nvSpPr>
-          <p:cNvPr id="10" name="TextBox 9"/>
+              <a:t>Кровотечение продолжается</a:t>
+            </a:r>
+          </a:p>
+        </p:txBody>
+      </p:sp>
+      <p:sp>
+        <p:nvSpPr>
+          <p:cNvPr id="11" name="TextBox 10"/>
           <p:cNvSpPr txBox="1"/>
           <p:nvPr/>
         </p:nvSpPr>
         <p:spPr>
           <a:xfrm>
-            <a:off x="700000" y="3300000"/>
-            <a:ext cx="11000000" cy="3200000"/>
+            <a:off x="1000000" y="2150000"/>
+            <a:ext cx="10400000" cy="500000"/>
           </a:xfrm>
           <a:prstGeom prst="rect">
             <a:avLst/>
@@ -6952,36 +8556,139 @@
           <a:noFill/>
         </p:spPr>
         <p:txBody>
-          <a:bodyPr wrap="square">
+          <a:bodyPr wrap="square" anchor="t">
             <a:spAutoFit/>
           </a:bodyPr>
           <a:lstStyle/>
           <a:p>
-            <a:pPr algn="l">
-              <a:spcAft>
-                <a:spcPts val="800"/>
-              </a:spcAft>
-            </a:pPr>
-            <a:r>
-              <a:rPr sz="1600" b="0">
-                <a:solidFill>
-                  <a:srgbClr val="333333"/>
+            <a:pPr algn="l"/>
+            <a:r>
+              <a:rPr sz="1400" b="0">
+                <a:solidFill>
+                  <a:srgbClr val="666666"/>
                 </a:solidFill>
                 <a:latin typeface="Open Sans"/>
                 <a:ea typeface="Open Sans"/>
                 <a:cs typeface="Open Sans"/>
               </a:rPr>
-              <a:t>•  При повреждении крупных сосудов без остановки кровотечения гибель может наступить в течение нескольких минут.</a:t>
-            </a:r>
-          </a:p>
-          <a:p>
-            <a:pPr algn="l">
-              <a:spcAft>
-                <a:spcPts val="800"/>
-              </a:spcAft>
-            </a:pPr>
-            <a:r>
-              <a:rPr sz="1600" b="0">
+              <a:t>Признаки нарастают на фоне видимой крови.</a:t>
+            </a:r>
+          </a:p>
+        </p:txBody>
+      </p:sp>
+      <p:sp>
+        <p:nvSpPr>
+          <p:cNvPr id="12" name="Rectangle 11"/>
+          <p:cNvSpPr/>
+          <p:nvPr/>
+        </p:nvSpPr>
+        <p:spPr>
+          <a:xfrm>
+            <a:off x="700000" y="3050000"/>
+            <a:ext cx="11000000" cy="1300000"/>
+          </a:xfrm>
+          <a:prstGeom prst="rect">
+            <a:avLst/>
+          </a:prstGeom>
+          <a:solidFill>
+            <a:srgbClr val="FFFFFF"/>
+          </a:solidFill>
+          <a:ln w="12700">
+            <a:solidFill>
+              <a:srgbClr val="999999"/>
+            </a:solidFill>
+          </a:ln>
+        </p:spPr>
+        <p:style>
+          <a:lnRef idx="1">
+            <a:schemeClr val="accent1"/>
+          </a:lnRef>
+          <a:fillRef idx="3">
+            <a:schemeClr val="accent1"/>
+          </a:fillRef>
+          <a:effectRef idx="2">
+            <a:schemeClr val="accent1"/>
+          </a:effectRef>
+          <a:fontRef idx="minor">
+            <a:schemeClr val="lt1"/>
+          </a:fontRef>
+        </p:style>
+        <p:txBody>
+          <a:bodyPr rtlCol="0" anchor="ctr"/>
+          <a:lstStyle/>
+          <a:p>
+            <a:pPr algn="ctr"/>
+          </a:p>
+        </p:txBody>
+      </p:sp>
+      <p:sp>
+        <p:nvSpPr>
+          <p:cNvPr id="13" name="Rectangle 12"/>
+          <p:cNvSpPr/>
+          <p:nvPr/>
+        </p:nvSpPr>
+        <p:spPr>
+          <a:xfrm>
+            <a:off x="700000" y="3050000"/>
+            <a:ext cx="90000" cy="1300000"/>
+          </a:xfrm>
+          <a:prstGeom prst="rect">
+            <a:avLst/>
+          </a:prstGeom>
+          <a:solidFill>
+            <a:srgbClr val="ED1C24"/>
+          </a:solidFill>
+          <a:ln>
+            <a:noFill/>
+          </a:ln>
+        </p:spPr>
+        <p:style>
+          <a:lnRef idx="1">
+            <a:schemeClr val="accent1"/>
+          </a:lnRef>
+          <a:fillRef idx="3">
+            <a:schemeClr val="accent1"/>
+          </a:fillRef>
+          <a:effectRef idx="2">
+            <a:schemeClr val="accent1"/>
+          </a:effectRef>
+          <a:fontRef idx="minor">
+            <a:schemeClr val="lt1"/>
+          </a:fontRef>
+        </p:style>
+        <p:txBody>
+          <a:bodyPr rtlCol="0" anchor="ctr"/>
+          <a:lstStyle/>
+          <a:p>
+            <a:pPr algn="ctr"/>
+          </a:p>
+        </p:txBody>
+      </p:sp>
+      <p:sp>
+        <p:nvSpPr>
+          <p:cNvPr id="14" name="TextBox 13"/>
+          <p:cNvSpPr txBox="1"/>
+          <p:nvPr/>
+        </p:nvSpPr>
+        <p:spPr>
+          <a:xfrm>
+            <a:off x="1000000" y="3200000"/>
+            <a:ext cx="10400000" cy="400000"/>
+          </a:xfrm>
+          <a:prstGeom prst="rect">
+            <a:avLst/>
+          </a:prstGeom>
+          <a:noFill/>
+        </p:spPr>
+        <p:txBody>
+          <a:bodyPr wrap="square" anchor="t">
+            <a:spAutoFit/>
+          </a:bodyPr>
+          <a:lstStyle/>
+          <a:p>
+            <a:pPr algn="l"/>
+            <a:r>
+              <a:rPr sz="1600" b="1">
                 <a:solidFill>
                   <a:srgbClr val="333333"/>
                 </a:solidFill>
@@ -6989,25 +8696,206 @@
                 <a:ea typeface="Open Sans"/>
                 <a:cs typeface="Open Sans"/>
               </a:rPr>
-              <a:t>•  При кровотечении слабой и средней интенсивности организм обычно способен поддерживать жизнь, но кровотечение всё равно нужно остановить.</a:t>
-            </a:r>
-          </a:p>
-          <a:p>
-            <a:pPr algn="l">
-              <a:spcAft>
-                <a:spcPts val="800"/>
-              </a:spcAft>
-            </a:pPr>
-            <a:r>
-              <a:rPr sz="1600" b="0">
-                <a:solidFill>
-                  <a:srgbClr val="333333"/>
+              <a:t>Кровотечение уже остановлено</a:t>
+            </a:r>
+          </a:p>
+        </p:txBody>
+      </p:sp>
+      <p:sp>
+        <p:nvSpPr>
+          <p:cNvPr id="15" name="TextBox 14"/>
+          <p:cNvSpPr txBox="1"/>
+          <p:nvPr/>
+        </p:nvSpPr>
+        <p:spPr>
+          <a:xfrm>
+            <a:off x="1000000" y="3650000"/>
+            <a:ext cx="10400000" cy="500000"/>
+          </a:xfrm>
+          <a:prstGeom prst="rect">
+            <a:avLst/>
+          </a:prstGeom>
+          <a:noFill/>
+        </p:spPr>
+        <p:txBody>
+          <a:bodyPr wrap="square" anchor="t">
+            <a:spAutoFit/>
+          </a:bodyPr>
+          <a:lstStyle/>
+          <a:p>
+            <a:pPr algn="l"/>
+            <a:r>
+              <a:rPr sz="1400" b="0">
+                <a:solidFill>
+                  <a:srgbClr val="666666"/>
                 </a:solidFill>
                 <a:latin typeface="Open Sans"/>
                 <a:ea typeface="Open Sans"/>
                 <a:cs typeface="Open Sans"/>
               </a:rPr>
-              <a:t>•  Даже «неинтенсивная» кровопотеря может привести к поздним осложнениям травмы и ухудшить исход.</a:t>
+              <a:t>Признаки могут сохраняться — потерянная кровь не возвращается сразу.</a:t>
+            </a:r>
+          </a:p>
+        </p:txBody>
+      </p:sp>
+      <p:sp>
+        <p:nvSpPr>
+          <p:cNvPr id="16" name="Rectangle 15"/>
+          <p:cNvSpPr/>
+          <p:nvPr/>
+        </p:nvSpPr>
+        <p:spPr>
+          <a:xfrm>
+            <a:off x="700000" y="4550000"/>
+            <a:ext cx="11000000" cy="1300000"/>
+          </a:xfrm>
+          <a:prstGeom prst="rect">
+            <a:avLst/>
+          </a:prstGeom>
+          <a:solidFill>
+            <a:srgbClr val="FFFFFF"/>
+          </a:solidFill>
+          <a:ln w="12700">
+            <a:solidFill>
+              <a:srgbClr val="999999"/>
+            </a:solidFill>
+          </a:ln>
+        </p:spPr>
+        <p:style>
+          <a:lnRef idx="1">
+            <a:schemeClr val="accent1"/>
+          </a:lnRef>
+          <a:fillRef idx="3">
+            <a:schemeClr val="accent1"/>
+          </a:fillRef>
+          <a:effectRef idx="2">
+            <a:schemeClr val="accent1"/>
+          </a:effectRef>
+          <a:fontRef idx="minor">
+            <a:schemeClr val="lt1"/>
+          </a:fontRef>
+        </p:style>
+        <p:txBody>
+          <a:bodyPr rtlCol="0" anchor="ctr"/>
+          <a:lstStyle/>
+          <a:p>
+            <a:pPr algn="ctr"/>
+          </a:p>
+        </p:txBody>
+      </p:sp>
+      <p:sp>
+        <p:nvSpPr>
+          <p:cNvPr id="17" name="Rectangle 16"/>
+          <p:cNvSpPr/>
+          <p:nvPr/>
+        </p:nvSpPr>
+        <p:spPr>
+          <a:xfrm>
+            <a:off x="700000" y="4550000"/>
+            <a:ext cx="90000" cy="1300000"/>
+          </a:xfrm>
+          <a:prstGeom prst="rect">
+            <a:avLst/>
+          </a:prstGeom>
+          <a:solidFill>
+            <a:srgbClr val="ED1C24"/>
+          </a:solidFill>
+          <a:ln>
+            <a:noFill/>
+          </a:ln>
+        </p:spPr>
+        <p:style>
+          <a:lnRef idx="1">
+            <a:schemeClr val="accent1"/>
+          </a:lnRef>
+          <a:fillRef idx="3">
+            <a:schemeClr val="accent1"/>
+          </a:fillRef>
+          <a:effectRef idx="2">
+            <a:schemeClr val="accent1"/>
+          </a:effectRef>
+          <a:fontRef idx="minor">
+            <a:schemeClr val="lt1"/>
+          </a:fontRef>
+        </p:style>
+        <p:txBody>
+          <a:bodyPr rtlCol="0" anchor="ctr"/>
+          <a:lstStyle/>
+          <a:p>
+            <a:pPr algn="ctr"/>
+          </a:p>
+        </p:txBody>
+      </p:sp>
+      <p:sp>
+        <p:nvSpPr>
+          <p:cNvPr id="18" name="TextBox 17"/>
+          <p:cNvSpPr txBox="1"/>
+          <p:nvPr/>
+        </p:nvSpPr>
+        <p:spPr>
+          <a:xfrm>
+            <a:off x="1000000" y="4700000"/>
+            <a:ext cx="10400000" cy="400000"/>
+          </a:xfrm>
+          <a:prstGeom prst="rect">
+            <a:avLst/>
+          </a:prstGeom>
+          <a:noFill/>
+        </p:spPr>
+        <p:txBody>
+          <a:bodyPr wrap="square" anchor="t">
+            <a:spAutoFit/>
+          </a:bodyPr>
+          <a:lstStyle/>
+          <a:p>
+            <a:pPr algn="l"/>
+            <a:r>
+              <a:rPr sz="1600" b="1">
+                <a:solidFill>
+                  <a:srgbClr val="333333"/>
+                </a:solidFill>
+                <a:latin typeface="Open Sans"/>
+                <a:ea typeface="Open Sans"/>
+                <a:cs typeface="Open Sans"/>
+              </a:rPr>
+              <a:t>Видимой крови нет</a:t>
+            </a:r>
+          </a:p>
+        </p:txBody>
+      </p:sp>
+      <p:sp>
+        <p:nvSpPr>
+          <p:cNvPr id="19" name="TextBox 18"/>
+          <p:cNvSpPr txBox="1"/>
+          <p:nvPr/>
+        </p:nvSpPr>
+        <p:spPr>
+          <a:xfrm>
+            <a:off x="1000000" y="5150000"/>
+            <a:ext cx="10400000" cy="500000"/>
+          </a:xfrm>
+          <a:prstGeom prst="rect">
+            <a:avLst/>
+          </a:prstGeom>
+          <a:noFill/>
+        </p:spPr>
+        <p:txBody>
+          <a:bodyPr wrap="square" anchor="t">
+            <a:spAutoFit/>
+          </a:bodyPr>
+          <a:lstStyle/>
+          <a:p>
+            <a:pPr algn="l"/>
+            <a:r>
+              <a:rPr sz="1400" b="0">
+                <a:solidFill>
+                  <a:srgbClr val="666666"/>
+                </a:solidFill>
+                <a:latin typeface="Open Sans"/>
+                <a:ea typeface="Open Sans"/>
+                <a:cs typeface="Open Sans"/>
+              </a:rPr>
+              <a:t>Возможно внутреннее (скрытое) кровотечение — оценивайте состояние.</a:t>
             </a:r>
           </a:p>
         </p:txBody>
@@ -7097,7 +8985,7 @@
           <a:p>
             <a:pPr algn="l"/>
             <a:r>
-              <a:rPr sz="2400" b="1">
+              <a:rPr sz="2200" b="1">
                 <a:solidFill>
                   <a:srgbClr val="333333"/>
                 </a:solidFill>
@@ -7105,7 +8993,7 @@
                 <a:ea typeface="Open Sans"/>
                 <a:cs typeface="Open Sans"/>
               </a:rPr>
-              <a:t>ЧТО ТАКОЕ НАРУЖНОЕ КРОВОТЕЧЕНИЕ</a:t>
+              <a:t>СКРЫТАЯ (ВНУТРЕННЯЯ) КРОВОПОТЕРЯ</a:t>
             </a:r>
           </a:p>
         </p:txBody>
@@ -7278,8 +9166,8 @@
         </p:nvSpPr>
         <p:spPr>
           <a:xfrm>
-            <a:off x="700000" y="1600000"/>
-            <a:ext cx="11000000" cy="1200000"/>
+            <a:off x="700000" y="1500000"/>
+            <a:ext cx="11000000" cy="900000"/>
           </a:xfrm>
           <a:prstGeom prst="rect">
             <a:avLst/>
@@ -7294,7 +9182,7 @@
           <a:p>
             <a:pPr algn="l"/>
             <a:r>
-              <a:rPr sz="1800" b="0">
+              <a:rPr sz="1600" b="0">
                 <a:solidFill>
                   <a:srgbClr val="333333"/>
                 </a:solidFill>
@@ -7302,7 +9190,7 @@
                 <a:ea typeface="Open Sans"/>
                 <a:cs typeface="Open Sans"/>
               </a:rPr>
-              <a:t>Наружное кровотечение сопровождается повреждением кожных покровов и слизистых оболочек, при этом кровь изливается наружу в окружающую среду.</a:t>
+              <a:t>Снаружи крови может не быть видно, но состояние ухудшается. Ориентируйтесь на признаки кровопотери и механизм травмы.</a:t>
             </a:r>
           </a:p>
         </p:txBody>
@@ -7315,8 +9203,8 @@
         </p:nvSpPr>
         <p:spPr>
           <a:xfrm>
-            <a:off x="700000" y="3100000"/>
-            <a:ext cx="11000000" cy="500000"/>
+            <a:off x="700000" y="2600000"/>
+            <a:ext cx="11000000" cy="2800000"/>
           </a:xfrm>
           <a:prstGeom prst="rect">
             <a:avLst/>
@@ -7324,14 +9212,18 @@
           <a:noFill/>
         </p:spPr>
         <p:txBody>
-          <a:bodyPr wrap="square" anchor="t">
+          <a:bodyPr wrap="square">
             <a:spAutoFit/>
           </a:bodyPr>
           <a:lstStyle/>
           <a:p>
-            <a:pPr algn="l"/>
-            <a:r>
-              <a:rPr sz="1600" b="1">
+            <a:pPr algn="l">
+              <a:spcAft>
+                <a:spcPts val="800"/>
+              </a:spcAft>
+            </a:pPr>
+            <a:r>
+              <a:rPr sz="1500" b="0">
                 <a:solidFill>
                   <a:srgbClr val="333333"/>
                 </a:solidFill>
@@ -7339,7 +9231,43 @@
                 <a:ea typeface="Open Sans"/>
                 <a:cs typeface="Open Sans"/>
               </a:rPr>
-              <a:t>По виду повреждённых сосудов кровотечения бывают:</a:t>
+              <a:t>•  Настораживающие ситуации: удар в живот / грудь, падение с высоты, ДТП.</a:t>
+            </a:r>
+          </a:p>
+          <a:p>
+            <a:pPr algn="l">
+              <a:spcAft>
+                <a:spcPts val="800"/>
+              </a:spcAft>
+            </a:pPr>
+            <a:r>
+              <a:rPr sz="1500" b="0">
+                <a:solidFill>
+                  <a:srgbClr val="333333"/>
+                </a:solidFill>
+                <a:latin typeface="Open Sans"/>
+                <a:ea typeface="Open Sans"/>
+                <a:cs typeface="Open Sans"/>
+              </a:rPr>
+              <a:t>•  Боль и напряжение живота, нарастающая слабость, холодный пот, жажда.</a:t>
+            </a:r>
+          </a:p>
+          <a:p>
+            <a:pPr algn="l">
+              <a:spcAft>
+                <a:spcPts val="800"/>
+              </a:spcAft>
+            </a:pPr>
+            <a:r>
+              <a:rPr sz="1500" b="0">
+                <a:solidFill>
+                  <a:srgbClr val="333333"/>
+                </a:solidFill>
+                <a:latin typeface="Open Sans"/>
+                <a:ea typeface="Open Sans"/>
+                <a:cs typeface="Open Sans"/>
+              </a:rPr>
+              <a:t>•  На месте происшествия внутреннее кровотечение не останавливают — нужны вызов СМП, покой, положение, контроль состояния.</a:t>
             </a:r>
           </a:p>
         </p:txBody>
@@ -7352,14 +9280,14 @@
         </p:nvSpPr>
         <p:spPr>
           <a:xfrm>
-            <a:off x="700000" y="3900000"/>
-            <a:ext cx="2600000" cy="900000"/>
+            <a:off x="700000" y="5600000"/>
+            <a:ext cx="11000000" cy="900000"/>
           </a:xfrm>
           <a:prstGeom prst="roundRect">
             <a:avLst/>
           </a:prstGeom>
           <a:solidFill>
-            <a:srgbClr val="DDDDDD"/>
+            <a:srgbClr val="F5F0E1"/>
           </a:solidFill>
           <a:ln>
             <a:noFill/>
@@ -7395,8 +9323,8 @@
         </p:nvSpPr>
         <p:spPr>
           <a:xfrm>
-            <a:off x="700000" y="3900000"/>
-            <a:ext cx="2600000" cy="900000"/>
+            <a:off x="950000" y="5750000"/>
+            <a:ext cx="10500000" cy="600000"/>
           </a:xfrm>
           <a:prstGeom prst="rect">
             <a:avLst/>
@@ -7409,294 +9337,17 @@
           </a:bodyPr>
           <a:lstStyle/>
           <a:p>
-            <a:pPr algn="ctr"/>
-            <a:r>
-              <a:rPr sz="1600" b="1">
-                <a:solidFill>
-                  <a:srgbClr val="333333"/>
+            <a:pPr algn="l"/>
+            <a:r>
+              <a:rPr sz="1500" b="1">
+                <a:solidFill>
+                  <a:srgbClr val="ED1C24"/>
                 </a:solidFill>
                 <a:latin typeface="Open Sans"/>
                 <a:ea typeface="Open Sans"/>
                 <a:cs typeface="Open Sans"/>
               </a:rPr>
-              <a:t>Артериальное</a:t>
-            </a:r>
-          </a:p>
-        </p:txBody>
-      </p:sp>
-      <p:sp>
-        <p:nvSpPr>
-          <p:cNvPr id="12" name="Rounded Rectangle 11"/>
-          <p:cNvSpPr/>
-          <p:nvPr/>
-        </p:nvSpPr>
-        <p:spPr>
-          <a:xfrm>
-            <a:off x="3500000" y="3900000"/>
-            <a:ext cx="2600000" cy="900000"/>
-          </a:xfrm>
-          <a:prstGeom prst="roundRect">
-            <a:avLst/>
-          </a:prstGeom>
-          <a:solidFill>
-            <a:srgbClr val="DDDDDD"/>
-          </a:solidFill>
-          <a:ln>
-            <a:noFill/>
-          </a:ln>
-        </p:spPr>
-        <p:style>
-          <a:lnRef idx="1">
-            <a:schemeClr val="accent1"/>
-          </a:lnRef>
-          <a:fillRef idx="3">
-            <a:schemeClr val="accent1"/>
-          </a:fillRef>
-          <a:effectRef idx="2">
-            <a:schemeClr val="accent1"/>
-          </a:effectRef>
-          <a:fontRef idx="minor">
-            <a:schemeClr val="lt1"/>
-          </a:fontRef>
-        </p:style>
-        <p:txBody>
-          <a:bodyPr rtlCol="0" anchor="ctr"/>
-          <a:lstStyle/>
-          <a:p>
-            <a:pPr algn="ctr"/>
-          </a:p>
-        </p:txBody>
-      </p:sp>
-      <p:sp>
-        <p:nvSpPr>
-          <p:cNvPr id="13" name="TextBox 12"/>
-          <p:cNvSpPr txBox="1"/>
-          <p:nvPr/>
-        </p:nvSpPr>
-        <p:spPr>
-          <a:xfrm>
-            <a:off x="3500000" y="3900000"/>
-            <a:ext cx="2600000" cy="900000"/>
-          </a:xfrm>
-          <a:prstGeom prst="rect">
-            <a:avLst/>
-          </a:prstGeom>
-          <a:noFill/>
-        </p:spPr>
-        <p:txBody>
-          <a:bodyPr wrap="square" anchor="ctr">
-            <a:spAutoFit/>
-          </a:bodyPr>
-          <a:lstStyle/>
-          <a:p>
-            <a:pPr algn="ctr"/>
-            <a:r>
-              <a:rPr sz="1600" b="1">
-                <a:solidFill>
-                  <a:srgbClr val="333333"/>
-                </a:solidFill>
-                <a:latin typeface="Open Sans"/>
-                <a:ea typeface="Open Sans"/>
-                <a:cs typeface="Open Sans"/>
-              </a:rPr>
-              <a:t>Венозное</a:t>
-            </a:r>
-          </a:p>
-        </p:txBody>
-      </p:sp>
-      <p:sp>
-        <p:nvSpPr>
-          <p:cNvPr id="14" name="Rounded Rectangle 13"/>
-          <p:cNvSpPr/>
-          <p:nvPr/>
-        </p:nvSpPr>
-        <p:spPr>
-          <a:xfrm>
-            <a:off x="6300000" y="3900000"/>
-            <a:ext cx="2600000" cy="900000"/>
-          </a:xfrm>
-          <a:prstGeom prst="roundRect">
-            <a:avLst/>
-          </a:prstGeom>
-          <a:solidFill>
-            <a:srgbClr val="DDDDDD"/>
-          </a:solidFill>
-          <a:ln>
-            <a:noFill/>
-          </a:ln>
-        </p:spPr>
-        <p:style>
-          <a:lnRef idx="1">
-            <a:schemeClr val="accent1"/>
-          </a:lnRef>
-          <a:fillRef idx="3">
-            <a:schemeClr val="accent1"/>
-          </a:fillRef>
-          <a:effectRef idx="2">
-            <a:schemeClr val="accent1"/>
-          </a:effectRef>
-          <a:fontRef idx="minor">
-            <a:schemeClr val="lt1"/>
-          </a:fontRef>
-        </p:style>
-        <p:txBody>
-          <a:bodyPr rtlCol="0" anchor="ctr"/>
-          <a:lstStyle/>
-          <a:p>
-            <a:pPr algn="ctr"/>
-          </a:p>
-        </p:txBody>
-      </p:sp>
-      <p:sp>
-        <p:nvSpPr>
-          <p:cNvPr id="15" name="TextBox 14"/>
-          <p:cNvSpPr txBox="1"/>
-          <p:nvPr/>
-        </p:nvSpPr>
-        <p:spPr>
-          <a:xfrm>
-            <a:off x="6300000" y="3900000"/>
-            <a:ext cx="2600000" cy="900000"/>
-          </a:xfrm>
-          <a:prstGeom prst="rect">
-            <a:avLst/>
-          </a:prstGeom>
-          <a:noFill/>
-        </p:spPr>
-        <p:txBody>
-          <a:bodyPr wrap="square" anchor="ctr">
-            <a:spAutoFit/>
-          </a:bodyPr>
-          <a:lstStyle/>
-          <a:p>
-            <a:pPr algn="ctr"/>
-            <a:r>
-              <a:rPr sz="1600" b="1">
-                <a:solidFill>
-                  <a:srgbClr val="333333"/>
-                </a:solidFill>
-                <a:latin typeface="Open Sans"/>
-                <a:ea typeface="Open Sans"/>
-                <a:cs typeface="Open Sans"/>
-              </a:rPr>
-              <a:t>Капиллярное</a:t>
-            </a:r>
-          </a:p>
-        </p:txBody>
-      </p:sp>
-      <p:sp>
-        <p:nvSpPr>
-          <p:cNvPr id="16" name="Rounded Rectangle 15"/>
-          <p:cNvSpPr/>
-          <p:nvPr/>
-        </p:nvSpPr>
-        <p:spPr>
-          <a:xfrm>
-            <a:off x="9100000" y="3900000"/>
-            <a:ext cx="2600000" cy="900000"/>
-          </a:xfrm>
-          <a:prstGeom prst="roundRect">
-            <a:avLst/>
-          </a:prstGeom>
-          <a:solidFill>
-            <a:srgbClr val="DDDDDD"/>
-          </a:solidFill>
-          <a:ln>
-            <a:noFill/>
-          </a:ln>
-        </p:spPr>
-        <p:style>
-          <a:lnRef idx="1">
-            <a:schemeClr val="accent1"/>
-          </a:lnRef>
-          <a:fillRef idx="3">
-            <a:schemeClr val="accent1"/>
-          </a:fillRef>
-          <a:effectRef idx="2">
-            <a:schemeClr val="accent1"/>
-          </a:effectRef>
-          <a:fontRef idx="minor">
-            <a:schemeClr val="lt1"/>
-          </a:fontRef>
-        </p:style>
-        <p:txBody>
-          <a:bodyPr rtlCol="0" anchor="ctr"/>
-          <a:lstStyle/>
-          <a:p>
-            <a:pPr algn="ctr"/>
-          </a:p>
-        </p:txBody>
-      </p:sp>
-      <p:sp>
-        <p:nvSpPr>
-          <p:cNvPr id="17" name="TextBox 16"/>
-          <p:cNvSpPr txBox="1"/>
-          <p:nvPr/>
-        </p:nvSpPr>
-        <p:spPr>
-          <a:xfrm>
-            <a:off x="9100000" y="3900000"/>
-            <a:ext cx="2600000" cy="900000"/>
-          </a:xfrm>
-          <a:prstGeom prst="rect">
-            <a:avLst/>
-          </a:prstGeom>
-          <a:noFill/>
-        </p:spPr>
-        <p:txBody>
-          <a:bodyPr wrap="square" anchor="ctr">
-            <a:spAutoFit/>
-          </a:bodyPr>
-          <a:lstStyle/>
-          <a:p>
-            <a:pPr algn="ctr"/>
-            <a:r>
-              <a:rPr sz="1600" b="1">
-                <a:solidFill>
-                  <a:srgbClr val="333333"/>
-                </a:solidFill>
-                <a:latin typeface="Open Sans"/>
-                <a:ea typeface="Open Sans"/>
-                <a:cs typeface="Open Sans"/>
-              </a:rPr>
-              <a:t>Смешанное</a:t>
-            </a:r>
-          </a:p>
-        </p:txBody>
-      </p:sp>
-      <p:sp>
-        <p:nvSpPr>
-          <p:cNvPr id="18" name="TextBox 17"/>
-          <p:cNvSpPr txBox="1"/>
-          <p:nvPr/>
-        </p:nvSpPr>
-        <p:spPr>
-          <a:xfrm>
-            <a:off x="700000" y="5200000"/>
-            <a:ext cx="11000000" cy="1000000"/>
-          </a:xfrm>
-          <a:prstGeom prst="rect">
-            <a:avLst/>
-          </a:prstGeom>
-          <a:noFill/>
-        </p:spPr>
-        <p:txBody>
-          <a:bodyPr wrap="square" anchor="t">
-            <a:spAutoFit/>
-          </a:bodyPr>
-          <a:lstStyle/>
-          <a:p>
-            <a:pPr algn="l"/>
-            <a:r>
-              <a:rPr sz="1500" b="0">
-                <a:solidFill>
-                  <a:srgbClr val="666666"/>
-                </a:solidFill>
-                <a:latin typeface="Open Sans"/>
-                <a:ea typeface="Open Sans"/>
-                <a:cs typeface="Open Sans"/>
-              </a:rPr>
-              <a:t>При оказании первой помощи вид определить сложно — ориентируйтесь на интенсивность кровотечения.</a:t>
+              <a:t>Нет видимой крови ≠ нет угрозы. Смотрите на состояние пострадавшего.</a:t>
             </a:r>
           </a:p>
         </p:txBody>
@@ -7786,7 +9437,7 @@
           <a:p>
             <a:pPr algn="l"/>
             <a:r>
-              <a:rPr sz="2400" b="1">
+              <a:rPr sz="2200" b="1">
                 <a:solidFill>
                   <a:srgbClr val="333333"/>
                 </a:solidFill>
@@ -7794,7 +9445,7 @@
                 <a:ea typeface="Open Sans"/>
                 <a:cs typeface="Open Sans"/>
               </a:rPr>
-              <a:t>ПРИЗНАКИ ВИДОВ НАРУЖНОГО КРОВОТЕЧЕНИЯ</a:t>
+              <a:t>КАК ОЦЕНИТЬ ИНТЕНСИВНОСТЬ КРОВОТЕЧЕНИЯ</a:t>
             </a:r>
           </a:p>
         </p:txBody>
@@ -7961,14 +9612,57 @@
       </p:sp>
       <p:sp>
         <p:nvSpPr>
-          <p:cNvPr id="8" name="TextBox 7"/>
+          <p:cNvPr id="8" name="Oval 7"/>
+          <p:cNvSpPr/>
+          <p:nvPr/>
+        </p:nvSpPr>
+        <p:spPr>
+          <a:xfrm>
+            <a:off x="700000" y="1650000"/>
+            <a:ext cx="550000" cy="550000"/>
+          </a:xfrm>
+          <a:prstGeom prst="ellipse">
+            <a:avLst/>
+          </a:prstGeom>
+          <a:solidFill>
+            <a:srgbClr val="0055AA"/>
+          </a:solidFill>
+          <a:ln>
+            <a:noFill/>
+          </a:ln>
+        </p:spPr>
+        <p:style>
+          <a:lnRef idx="1">
+            <a:schemeClr val="accent1"/>
+          </a:lnRef>
+          <a:fillRef idx="3">
+            <a:schemeClr val="accent1"/>
+          </a:fillRef>
+          <a:effectRef idx="2">
+            <a:schemeClr val="accent1"/>
+          </a:effectRef>
+          <a:fontRef idx="minor">
+            <a:schemeClr val="lt1"/>
+          </a:fontRef>
+        </p:style>
+        <p:txBody>
+          <a:bodyPr rtlCol="0" anchor="ctr"/>
+          <a:lstStyle/>
+          <a:p>
+            <a:pPr algn="ctr"/>
+          </a:p>
+        </p:txBody>
+      </p:sp>
+      <p:sp>
+        <p:nvSpPr>
+          <p:cNvPr id="9" name="TextBox 8"/>
           <p:cNvSpPr txBox="1"/>
           <p:nvPr/>
         </p:nvSpPr>
         <p:spPr>
           <a:xfrm>
-            <a:off x="700000" y="1450000"/>
-            <a:ext cx="3600000" cy="450000"/>
+            <a:off x="700000" y="1650000"/>
+            <a:ext cx="550000" cy="550000"/>
           </a:xfrm>
           <a:prstGeom prst="rect">
             <a:avLst/>
@@ -7976,7 +9670,7 @@
           <a:noFill/>
         </p:spPr>
         <p:txBody>
-          <a:bodyPr wrap="square" anchor="t">
+          <a:bodyPr wrap="square" anchor="ctr">
             <a:spAutoFit/>
           </a:bodyPr>
           <a:lstStyle/>
@@ -7985,41 +9679,17 @@
             <a:r>
               <a:rPr sz="1600" b="1">
                 <a:solidFill>
-                  <a:srgbClr val="333333"/>
+                  <a:srgbClr val="FFFFFF"/>
                 </a:solidFill>
                 <a:latin typeface="Open Sans"/>
                 <a:ea typeface="Open Sans"/>
                 <a:cs typeface="Open Sans"/>
               </a:rPr>
-              <a:t>Артериальное</a:t>
-            </a:r>
-          </a:p>
-        </p:txBody>
-      </p:sp>
-      <p:pic>
-        <p:nvPicPr>
-          <p:cNvPr id="9" name="Picture 8" descr="bleed_arterial.png"/>
-          <p:cNvPicPr>
-            <a:picLocks noChangeAspect="1"/>
-          </p:cNvPicPr>
-          <p:nvPr/>
-        </p:nvPicPr>
-        <p:blipFill>
-          <a:blip r:embed="rId2"/>
-          <a:stretch>
-            <a:fillRect/>
-          </a:stretch>
-        </p:blipFill>
-        <p:spPr>
-          <a:xfrm>
-            <a:off x="1319672" y="2000000"/>
-            <a:ext cx="2360655" cy="2999999"/>
-          </a:xfrm>
-          <a:prstGeom prst="rect">
-            <a:avLst/>
-          </a:prstGeom>
-        </p:spPr>
-      </p:pic>
+              <a:t>С</a:t>
+            </a:r>
+          </a:p>
+        </p:txBody>
+      </p:sp>
       <p:sp>
         <p:nvSpPr>
           <p:cNvPr id="10" name="TextBox 9"/>
@@ -8028,8 +9698,8 @@
         </p:nvSpPr>
         <p:spPr>
           <a:xfrm>
-            <a:off x="700000" y="5200000"/>
-            <a:ext cx="3600000" cy="1400000"/>
+            <a:off x="1450000" y="1500000"/>
+            <a:ext cx="10000000" cy="400000"/>
           </a:xfrm>
           <a:prstGeom prst="rect">
             <a:avLst/>
@@ -8042,9 +9712,9 @@
           </a:bodyPr>
           <a:lstStyle/>
           <a:p>
-            <a:pPr algn="ctr"/>
-            <a:r>
-              <a:rPr sz="1200" b="0">
+            <a:pPr algn="l"/>
+            <a:r>
+              <a:rPr sz="1600" b="1">
                 <a:solidFill>
                   <a:srgbClr val="333333"/>
                 </a:solidFill>
@@ -8052,7 +9722,7 @@
                 <a:ea typeface="Open Sans"/>
                 <a:cs typeface="Open Sans"/>
               </a:rPr>
-              <a:t>Пульсирующая алая струя; быстро растекающаяся лужа алого цвета; одежда быстро пропитывается кровью. Наиболее опасно.</a:t>
+              <a:t>Слабая</a:t>
             </a:r>
           </a:p>
         </p:txBody>
@@ -8065,8 +9735,8 @@
         </p:nvSpPr>
         <p:spPr>
           <a:xfrm>
-            <a:off x="4600000" y="1450000"/>
-            <a:ext cx="3600000" cy="450000"/>
+            <a:off x="1450000" y="1950000"/>
+            <a:ext cx="10000000" cy="700000"/>
           </a:xfrm>
           <a:prstGeom prst="rect">
             <a:avLst/>
@@ -8079,45 +9749,64 @@
           </a:bodyPr>
           <a:lstStyle/>
           <a:p>
-            <a:pPr algn="ctr"/>
-            <a:r>
-              <a:rPr sz="1600" b="1">
-                <a:solidFill>
-                  <a:srgbClr val="333333"/>
+            <a:pPr algn="l"/>
+            <a:r>
+              <a:rPr sz="1400" b="0">
+                <a:solidFill>
+                  <a:srgbClr val="666666"/>
                 </a:solidFill>
                 <a:latin typeface="Open Sans"/>
                 <a:ea typeface="Open Sans"/>
                 <a:cs typeface="Open Sans"/>
               </a:rPr>
-              <a:t>Венозное</a:t>
-            </a:r>
-          </a:p>
-        </p:txBody>
-      </p:sp>
-      <p:pic>
-        <p:nvPicPr>
-          <p:cNvPr id="12" name="Picture 11" descr="bleed_venous.png"/>
-          <p:cNvPicPr>
-            <a:picLocks noChangeAspect="1"/>
-          </p:cNvPicPr>
-          <p:nvPr/>
-        </p:nvPicPr>
-        <p:blipFill>
-          <a:blip r:embed="rId3"/>
-          <a:stretch>
-            <a:fillRect/>
-          </a:stretch>
-        </p:blipFill>
-        <p:spPr>
-          <a:xfrm>
-            <a:off x="5219672" y="2000000"/>
-            <a:ext cx="2360655" cy="2999999"/>
-          </a:xfrm>
-          <a:prstGeom prst="rect">
-            <a:avLst/>
-          </a:prstGeom>
-        </p:spPr>
-      </p:pic>
+              <a:t>Капиллярное сочение, небольшие ссадины/порезы. Угрозы жизни обычно нет, но остановить нужно.</a:t>
+            </a:r>
+          </a:p>
+        </p:txBody>
+      </p:sp>
+      <p:sp>
+        <p:nvSpPr>
+          <p:cNvPr id="12" name="Oval 11"/>
+          <p:cNvSpPr/>
+          <p:nvPr/>
+        </p:nvSpPr>
+        <p:spPr>
+          <a:xfrm>
+            <a:off x="700000" y="3100000"/>
+            <a:ext cx="550000" cy="550000"/>
+          </a:xfrm>
+          <a:prstGeom prst="ellipse">
+            <a:avLst/>
+          </a:prstGeom>
+          <a:solidFill>
+            <a:srgbClr val="555555"/>
+          </a:solidFill>
+          <a:ln>
+            <a:noFill/>
+          </a:ln>
+        </p:spPr>
+        <p:style>
+          <a:lnRef idx="1">
+            <a:schemeClr val="accent1"/>
+          </a:lnRef>
+          <a:fillRef idx="3">
+            <a:schemeClr val="accent1"/>
+          </a:fillRef>
+          <a:effectRef idx="2">
+            <a:schemeClr val="accent1"/>
+          </a:effectRef>
+          <a:fontRef idx="minor">
+            <a:schemeClr val="lt1"/>
+          </a:fontRef>
+        </p:style>
+        <p:txBody>
+          <a:bodyPr rtlCol="0" anchor="ctr"/>
+          <a:lstStyle/>
+          <a:p>
+            <a:pPr algn="ctr"/>
+          </a:p>
+        </p:txBody>
+      </p:sp>
       <p:sp>
         <p:nvSpPr>
           <p:cNvPr id="13" name="TextBox 12"/>
@@ -8126,8 +9815,8 @@
         </p:nvSpPr>
         <p:spPr>
           <a:xfrm>
-            <a:off x="4600000" y="5200000"/>
-            <a:ext cx="3600000" cy="1400000"/>
+            <a:off x="700000" y="3100000"/>
+            <a:ext cx="550000" cy="550000"/>
           </a:xfrm>
           <a:prstGeom prst="rect">
             <a:avLst/>
@@ -8135,22 +9824,22 @@
           <a:noFill/>
         </p:spPr>
         <p:txBody>
-          <a:bodyPr wrap="square" anchor="t">
+          <a:bodyPr wrap="square" anchor="ctr">
             <a:spAutoFit/>
           </a:bodyPr>
           <a:lstStyle/>
           <a:p>
             <a:pPr algn="ctr"/>
             <a:r>
-              <a:rPr sz="1200" b="0">
-                <a:solidFill>
-                  <a:srgbClr val="333333"/>
+              <a:rPr sz="1600" b="1">
+                <a:solidFill>
+                  <a:srgbClr val="FFFFFF"/>
                 </a:solidFill>
                 <a:latin typeface="Open Sans"/>
                 <a:ea typeface="Open Sans"/>
                 <a:cs typeface="Open Sans"/>
               </a:rPr>
-              <a:t>Кровь тёмно-вишнёвая, вытекает «ручьём». Скорость кровопотери меньше, но остановка обязательна.</a:t>
+              <a:t>С</a:t>
             </a:r>
           </a:p>
         </p:txBody>
@@ -8163,8 +9852,8 @@
         </p:nvSpPr>
         <p:spPr>
           <a:xfrm>
-            <a:off x="8500000" y="1450000"/>
-            <a:ext cx="3600000" cy="450000"/>
+            <a:off x="1450000" y="2950000"/>
+            <a:ext cx="10000000" cy="400000"/>
           </a:xfrm>
           <a:prstGeom prst="rect">
             <a:avLst/>
@@ -8177,7 +9866,7 @@
           </a:bodyPr>
           <a:lstStyle/>
           <a:p>
-            <a:pPr algn="ctr"/>
+            <a:pPr algn="l"/>
             <a:r>
               <a:rPr sz="1600" b="1">
                 <a:solidFill>
@@ -8187,45 +9876,21 @@
                 <a:ea typeface="Open Sans"/>
                 <a:cs typeface="Open Sans"/>
               </a:rPr>
-              <a:t>Капиллярное</a:t>
-            </a:r>
-          </a:p>
-        </p:txBody>
-      </p:sp>
-      <p:pic>
-        <p:nvPicPr>
-          <p:cNvPr id="15" name="Picture 14" descr="bleed_capillary.png"/>
-          <p:cNvPicPr>
-            <a:picLocks noChangeAspect="1"/>
-          </p:cNvPicPr>
-          <p:nvPr/>
-        </p:nvPicPr>
-        <p:blipFill>
-          <a:blip r:embed="rId4"/>
-          <a:stretch>
-            <a:fillRect/>
-          </a:stretch>
-        </p:blipFill>
-        <p:spPr>
-          <a:xfrm>
-            <a:off x="9021311" y="2000000"/>
-            <a:ext cx="2557377" cy="2999999"/>
-          </a:xfrm>
-          <a:prstGeom prst="rect">
-            <a:avLst/>
-          </a:prstGeom>
-        </p:spPr>
-      </p:pic>
-      <p:sp>
-        <p:nvSpPr>
-          <p:cNvPr id="16" name="TextBox 15"/>
+              <a:t>Средняя</a:t>
+            </a:r>
+          </a:p>
+        </p:txBody>
+      </p:sp>
+      <p:sp>
+        <p:nvSpPr>
+          <p:cNvPr id="15" name="TextBox 14"/>
           <p:cNvSpPr txBox="1"/>
           <p:nvPr/>
         </p:nvSpPr>
         <p:spPr>
           <a:xfrm>
-            <a:off x="8500000" y="5200000"/>
-            <a:ext cx="3600000" cy="1400000"/>
+            <a:off x="1450000" y="3400000"/>
+            <a:ext cx="10000000" cy="700000"/>
           </a:xfrm>
           <a:prstGeom prst="rect">
             <a:avLst/>
@@ -8238,17 +9903,171 @@
           </a:bodyPr>
           <a:lstStyle/>
           <a:p>
-            <a:pPr algn="ctr"/>
-            <a:r>
-              <a:rPr sz="1200" b="0">
-                <a:solidFill>
-                  <a:srgbClr val="333333"/>
+            <a:pPr algn="l"/>
+            <a:r>
+              <a:rPr sz="1400" b="0">
+                <a:solidFill>
+                  <a:srgbClr val="666666"/>
                 </a:solidFill>
                 <a:latin typeface="Open Sans"/>
                 <a:ea typeface="Open Sans"/>
                 <a:cs typeface="Open Sans"/>
               </a:rPr>
-              <a:t>Ссадины, порезы, царапины. Как правило, непосредственной угрозы жизни не представляет.</a:t>
+              <a:t>Стойкий «ручей», пропитывание повязки/ткани. Без остановки возможна значительная кровопотеря.</a:t>
+            </a:r>
+          </a:p>
+        </p:txBody>
+      </p:sp>
+      <p:sp>
+        <p:nvSpPr>
+          <p:cNvPr id="16" name="Oval 15"/>
+          <p:cNvSpPr/>
+          <p:nvPr/>
+        </p:nvSpPr>
+        <p:spPr>
+          <a:xfrm>
+            <a:off x="700000" y="4550000"/>
+            <a:ext cx="550000" cy="550000"/>
+          </a:xfrm>
+          <a:prstGeom prst="ellipse">
+            <a:avLst/>
+          </a:prstGeom>
+          <a:solidFill>
+            <a:srgbClr val="ED1C24"/>
+          </a:solidFill>
+          <a:ln>
+            <a:noFill/>
+          </a:ln>
+        </p:spPr>
+        <p:style>
+          <a:lnRef idx="1">
+            <a:schemeClr val="accent1"/>
+          </a:lnRef>
+          <a:fillRef idx="3">
+            <a:schemeClr val="accent1"/>
+          </a:fillRef>
+          <a:effectRef idx="2">
+            <a:schemeClr val="accent1"/>
+          </a:effectRef>
+          <a:fontRef idx="minor">
+            <a:schemeClr val="lt1"/>
+          </a:fontRef>
+        </p:style>
+        <p:txBody>
+          <a:bodyPr rtlCol="0" anchor="ctr"/>
+          <a:lstStyle/>
+          <a:p>
+            <a:pPr algn="ctr"/>
+          </a:p>
+        </p:txBody>
+      </p:sp>
+      <p:sp>
+        <p:nvSpPr>
+          <p:cNvPr id="17" name="TextBox 16"/>
+          <p:cNvSpPr txBox="1"/>
+          <p:nvPr/>
+        </p:nvSpPr>
+        <p:spPr>
+          <a:xfrm>
+            <a:off x="700000" y="4550000"/>
+            <a:ext cx="550000" cy="550000"/>
+          </a:xfrm>
+          <a:prstGeom prst="rect">
+            <a:avLst/>
+          </a:prstGeom>
+          <a:noFill/>
+        </p:spPr>
+        <p:txBody>
+          <a:bodyPr wrap="square" anchor="ctr">
+            <a:spAutoFit/>
+          </a:bodyPr>
+          <a:lstStyle/>
+          <a:p>
+            <a:pPr algn="ctr"/>
+            <a:r>
+              <a:rPr sz="1600" b="1">
+                <a:solidFill>
+                  <a:srgbClr val="FFFFFF"/>
+                </a:solidFill>
+                <a:latin typeface="Open Sans"/>
+                <a:ea typeface="Open Sans"/>
+                <a:cs typeface="Open Sans"/>
+              </a:rPr>
+              <a:t>И</a:t>
+            </a:r>
+          </a:p>
+        </p:txBody>
+      </p:sp>
+      <p:sp>
+        <p:nvSpPr>
+          <p:cNvPr id="18" name="TextBox 17"/>
+          <p:cNvSpPr txBox="1"/>
+          <p:nvPr/>
+        </p:nvSpPr>
+        <p:spPr>
+          <a:xfrm>
+            <a:off x="1450000" y="4400000"/>
+            <a:ext cx="10000000" cy="400000"/>
+          </a:xfrm>
+          <a:prstGeom prst="rect">
+            <a:avLst/>
+          </a:prstGeom>
+          <a:noFill/>
+        </p:spPr>
+        <p:txBody>
+          <a:bodyPr wrap="square" anchor="t">
+            <a:spAutoFit/>
+          </a:bodyPr>
+          <a:lstStyle/>
+          <a:p>
+            <a:pPr algn="l"/>
+            <a:r>
+              <a:rPr sz="1600" b="1">
+                <a:solidFill>
+                  <a:srgbClr val="333333"/>
+                </a:solidFill>
+                <a:latin typeface="Open Sans"/>
+                <a:ea typeface="Open Sans"/>
+                <a:cs typeface="Open Sans"/>
+              </a:rPr>
+              <a:t>Интенсивная</a:t>
+            </a:r>
+          </a:p>
+        </p:txBody>
+      </p:sp>
+      <p:sp>
+        <p:nvSpPr>
+          <p:cNvPr id="19" name="TextBox 18"/>
+          <p:cNvSpPr txBox="1"/>
+          <p:nvPr/>
+        </p:nvSpPr>
+        <p:spPr>
+          <a:xfrm>
+            <a:off x="1450000" y="4850000"/>
+            <a:ext cx="10000000" cy="700000"/>
+          </a:xfrm>
+          <a:prstGeom prst="rect">
+            <a:avLst/>
+          </a:prstGeom>
+          <a:noFill/>
+        </p:spPr>
+        <p:txBody>
+          <a:bodyPr wrap="square" anchor="t">
+            <a:spAutoFit/>
+          </a:bodyPr>
+          <a:lstStyle/>
+          <a:p>
+            <a:pPr algn="l"/>
+            <a:r>
+              <a:rPr sz="1400" b="0">
+                <a:solidFill>
+                  <a:srgbClr val="666666"/>
+                </a:solidFill>
+                <a:latin typeface="Open Sans"/>
+                <a:ea typeface="Open Sans"/>
+                <a:cs typeface="Open Sans"/>
+              </a:rPr>
+              <a:t>Струя / быстрое пропитывание одежды, лужа крови, рана с сильным истечением — останавливать немедленно.</a:t>
             </a:r>
           </a:p>
         </p:txBody>
@@ -8338,7 +10157,7 @@
           <a:p>
             <a:pPr algn="l"/>
             <a:r>
-              <a:rPr sz="2400" b="1">
+              <a:rPr sz="2200" b="1">
                 <a:solidFill>
                   <a:srgbClr val="333333"/>
                 </a:solidFill>
@@ -8346,7 +10165,7 @@
                 <a:ea typeface="Open Sans"/>
                 <a:cs typeface="Open Sans"/>
               </a:rPr>
-              <a:t>СМЕШАННОЕ КРОВОТЕЧЕНИЕ</a:t>
+              <a:t>СРАВНЕНИЕ ПРИЗНАКОВ ПО ВИДАМ</a:t>
             </a:r>
           </a:p>
         </p:txBody>
@@ -8519,8 +10338,8 @@
         </p:nvSpPr>
         <p:spPr>
           <a:xfrm>
-            <a:off x="700000" y="1600000"/>
-            <a:ext cx="11000000" cy="2800000"/>
+            <a:off x="700000" y="1400000"/>
+            <a:ext cx="11000000" cy="400000"/>
           </a:xfrm>
           <a:prstGeom prst="rect">
             <a:avLst/>
@@ -8528,458 +10347,37 @@
           <a:noFill/>
         </p:spPr>
         <p:txBody>
-          <a:bodyPr wrap="square">
+          <a:bodyPr wrap="square" anchor="t">
             <a:spAutoFit/>
           </a:bodyPr>
           <a:lstStyle/>
           <a:p>
-            <a:pPr algn="l">
-              <a:spcAft>
-                <a:spcPts val="800"/>
-              </a:spcAft>
-            </a:pPr>
-            <a:r>
-              <a:rPr sz="1700" b="0">
-                <a:solidFill>
-                  <a:srgbClr val="333333"/>
+            <a:pPr algn="l"/>
+            <a:r>
+              <a:rPr sz="1300" b="0">
+                <a:solidFill>
+                  <a:srgbClr val="666666"/>
                 </a:solidFill>
                 <a:latin typeface="Open Sans"/>
                 <a:ea typeface="Open Sans"/>
                 <a:cs typeface="Open Sans"/>
               </a:rPr>
-              <a:t>•  Одновременно артериальное, венозное и капиллярное кровотечение.</a:t>
-            </a:r>
-          </a:p>
-          <a:p>
-            <a:pPr algn="l">
-              <a:spcAft>
-                <a:spcPts val="800"/>
-              </a:spcAft>
-            </a:pPr>
-            <a:r>
-              <a:rPr sz="1700" b="0">
-                <a:solidFill>
-                  <a:srgbClr val="333333"/>
-                </a:solidFill>
-                <a:latin typeface="Open Sans"/>
-                <a:ea typeface="Open Sans"/>
-                <a:cs typeface="Open Sans"/>
-              </a:rPr>
-              <a:t>•  Наблюдается, например, при отрыве конечности.</a:t>
-            </a:r>
-          </a:p>
-          <a:p>
-            <a:pPr algn="l">
-              <a:spcAft>
-                <a:spcPts val="800"/>
-              </a:spcAft>
-            </a:pPr>
-            <a:r>
-              <a:rPr sz="1700" b="0">
-                <a:solidFill>
-                  <a:srgbClr val="333333"/>
-                </a:solidFill>
-                <a:latin typeface="Open Sans"/>
-                <a:ea typeface="Open Sans"/>
-                <a:cs typeface="Open Sans"/>
-              </a:rPr>
-              <a:t>•  Опасно вследствие наличия артериального компонента.</a:t>
-            </a:r>
-          </a:p>
-        </p:txBody>
-      </p:sp>
-      <p:sp>
-        <p:nvSpPr>
-          <p:cNvPr id="9" name="Rounded Rectangle 8"/>
-          <p:cNvSpPr/>
-          <p:nvPr/>
-        </p:nvSpPr>
-        <p:spPr>
-          <a:xfrm>
-            <a:off x="700000" y="4600000"/>
-            <a:ext cx="11000000" cy="1600000"/>
-          </a:xfrm>
-          <a:prstGeom prst="roundRect">
-            <a:avLst/>
-          </a:prstGeom>
-          <a:solidFill>
-            <a:srgbClr val="F5F0E1"/>
-          </a:solidFill>
-          <a:ln>
-            <a:noFill/>
-          </a:ln>
-        </p:spPr>
-        <p:style>
-          <a:lnRef idx="1">
-            <a:schemeClr val="accent1"/>
-          </a:lnRef>
-          <a:fillRef idx="3">
-            <a:schemeClr val="accent1"/>
-          </a:fillRef>
-          <a:effectRef idx="2">
-            <a:schemeClr val="accent1"/>
-          </a:effectRef>
-          <a:fontRef idx="minor">
-            <a:schemeClr val="lt1"/>
-          </a:fontRef>
-        </p:style>
-        <p:txBody>
-          <a:bodyPr rtlCol="0" anchor="ctr"/>
-          <a:lstStyle/>
-          <a:p>
-            <a:pPr algn="ctr"/>
-          </a:p>
-        </p:txBody>
-      </p:sp>
-      <p:sp>
-        <p:nvSpPr>
-          <p:cNvPr id="10" name="Rectangle 9"/>
-          <p:cNvSpPr/>
-          <p:nvPr/>
-        </p:nvSpPr>
-        <p:spPr>
-          <a:xfrm>
-            <a:off x="700000" y="4600000"/>
-            <a:ext cx="100000" cy="1600000"/>
-          </a:xfrm>
-          <a:prstGeom prst="rect">
-            <a:avLst/>
-          </a:prstGeom>
-          <a:solidFill>
-            <a:srgbClr val="ED1C24"/>
-          </a:solidFill>
-          <a:ln>
-            <a:noFill/>
-          </a:ln>
-        </p:spPr>
-        <p:style>
-          <a:lnRef idx="1">
-            <a:schemeClr val="accent1"/>
-          </a:lnRef>
-          <a:fillRef idx="3">
-            <a:schemeClr val="accent1"/>
-          </a:fillRef>
-          <a:effectRef idx="2">
-            <a:schemeClr val="accent1"/>
-          </a:effectRef>
-          <a:fontRef idx="minor">
-            <a:schemeClr val="lt1"/>
-          </a:fontRef>
-        </p:style>
-        <p:txBody>
-          <a:bodyPr rtlCol="0" anchor="ctr"/>
-          <a:lstStyle/>
-          <a:p>
-            <a:pPr algn="ctr"/>
-          </a:p>
-        </p:txBody>
-      </p:sp>
-      <p:sp>
-        <p:nvSpPr>
-          <p:cNvPr id="11" name="TextBox 10"/>
-          <p:cNvSpPr txBox="1"/>
-          <p:nvPr/>
-        </p:nvSpPr>
-        <p:spPr>
-          <a:xfrm>
-            <a:off x="1000000" y="4850000"/>
-            <a:ext cx="10400000" cy="1100000"/>
-          </a:xfrm>
-          <a:prstGeom prst="rect">
-            <a:avLst/>
-          </a:prstGeom>
-          <a:noFill/>
-        </p:spPr>
-        <p:txBody>
-          <a:bodyPr wrap="square" anchor="ctr">
-            <a:spAutoFit/>
-          </a:bodyPr>
-          <a:lstStyle/>
-          <a:p>
-            <a:pPr algn="l"/>
-            <a:r>
-              <a:rPr sz="1600" b="1">
-                <a:solidFill>
-                  <a:srgbClr val="333333"/>
-                </a:solidFill>
-                <a:latin typeface="Open Sans"/>
-                <a:ea typeface="Open Sans"/>
-                <a:cs typeface="Open Sans"/>
-              </a:rPr>
-              <a:t>При наличии кровотечения останавливайте его любым доступным способом или их комбинацией — не тратьте время на точное определение вида.</a:t>
-            </a:r>
-          </a:p>
-        </p:txBody>
-      </p:sp>
-    </p:spTree>
-  </p:cSld>
-  <p:clrMapOvr>
-    <a:masterClrMapping/>
-  </p:clrMapOvr>
-</p:sld>
-</file>
-
-<file path=ppt/slides/slide9.xml><?xml version="1.0" encoding="utf-8"?>
-<p:sld xmlns:a="http://schemas.openxmlformats.org/drawingml/2006/main" xmlns:p="http://schemas.openxmlformats.org/presentationml/2006/main" xmlns:r="http://schemas.openxmlformats.org/officeDocument/2006/relationships">
-  <p:cSld>
-    <p:spTree>
-      <p:nvGrpSpPr>
-        <p:cNvPr id="1" name=""/>
-        <p:cNvGrpSpPr/>
-        <p:nvPr/>
-      </p:nvGrpSpPr>
-      <p:grpSpPr/>
-      <p:sp>
-        <p:nvSpPr>
-          <p:cNvPr id="2" name="Rectangle 1"/>
-          <p:cNvSpPr/>
-          <p:nvPr/>
-        </p:nvSpPr>
-        <p:spPr>
-          <a:xfrm>
-            <a:off x="0" y="0"/>
-            <a:ext cx="12191695" cy="6858000"/>
-          </a:xfrm>
-          <a:prstGeom prst="rect">
-            <a:avLst/>
-          </a:prstGeom>
-          <a:solidFill>
-            <a:srgbClr val="FFFFFF"/>
-          </a:solidFill>
-          <a:ln>
-            <a:noFill/>
-          </a:ln>
-        </p:spPr>
-        <p:style>
-          <a:lnRef idx="1">
-            <a:schemeClr val="accent1"/>
-          </a:lnRef>
-          <a:fillRef idx="3">
-            <a:schemeClr val="accent1"/>
-          </a:fillRef>
-          <a:effectRef idx="2">
-            <a:schemeClr val="accent1"/>
-          </a:effectRef>
-          <a:fontRef idx="minor">
-            <a:schemeClr val="lt1"/>
-          </a:fontRef>
-        </p:style>
-        <p:txBody>
-          <a:bodyPr rtlCol="0" anchor="ctr"/>
-          <a:lstStyle/>
-          <a:p>
-            <a:pPr algn="ctr"/>
-          </a:p>
-        </p:txBody>
-      </p:sp>
-      <p:sp>
-        <p:nvSpPr>
-          <p:cNvPr id="3" name="TextBox 2"/>
-          <p:cNvSpPr txBox="1"/>
-          <p:nvPr/>
-        </p:nvSpPr>
-        <p:spPr>
-          <a:xfrm>
-            <a:off x="700000" y="280000"/>
-            <a:ext cx="11000000" cy="550000"/>
-          </a:xfrm>
-          <a:prstGeom prst="rect">
-            <a:avLst/>
-          </a:prstGeom>
-          <a:noFill/>
-        </p:spPr>
-        <p:txBody>
-          <a:bodyPr wrap="square" anchor="t">
-            <a:spAutoFit/>
-          </a:bodyPr>
-          <a:lstStyle/>
-          <a:p>
-            <a:pPr algn="l"/>
-            <a:r>
-              <a:rPr sz="2400" b="1">
-                <a:solidFill>
-                  <a:srgbClr val="333333"/>
-                </a:solidFill>
-                <a:latin typeface="Open Sans"/>
-                <a:ea typeface="Open Sans"/>
-                <a:cs typeface="Open Sans"/>
-              </a:rPr>
-              <a:t>СРАВНЕНИЕ ВИДОВ КРОВОТЕЧЕНИЯ</a:t>
-            </a:r>
-          </a:p>
-        </p:txBody>
-      </p:sp>
-      <p:sp>
-        <p:nvSpPr>
-          <p:cNvPr id="4" name="Rectangle 3"/>
-          <p:cNvSpPr/>
-          <p:nvPr/>
-        </p:nvSpPr>
-        <p:spPr>
-          <a:xfrm>
-            <a:off x="700000" y="880000"/>
-            <a:ext cx="9000000" cy="25000"/>
-          </a:xfrm>
-          <a:prstGeom prst="rect">
-            <a:avLst/>
-          </a:prstGeom>
-          <a:solidFill>
-            <a:srgbClr val="555555"/>
-          </a:solidFill>
-          <a:ln>
-            <a:noFill/>
-          </a:ln>
-        </p:spPr>
-        <p:style>
-          <a:lnRef idx="1">
-            <a:schemeClr val="accent1"/>
-          </a:lnRef>
-          <a:fillRef idx="3">
-            <a:schemeClr val="accent1"/>
-          </a:fillRef>
-          <a:effectRef idx="2">
-            <a:schemeClr val="accent1"/>
-          </a:effectRef>
-          <a:fontRef idx="minor">
-            <a:schemeClr val="lt1"/>
-          </a:fontRef>
-        </p:style>
-        <p:txBody>
-          <a:bodyPr rtlCol="0" anchor="ctr"/>
-          <a:lstStyle/>
-          <a:p>
-            <a:pPr algn="ctr"/>
-          </a:p>
-        </p:txBody>
-      </p:sp>
-      <p:sp>
-        <p:nvSpPr>
-          <p:cNvPr id="5" name="TextBox 4"/>
-          <p:cNvSpPr txBox="1"/>
-          <p:nvPr/>
-        </p:nvSpPr>
-        <p:spPr>
-          <a:xfrm>
-            <a:off x="700000" y="950000"/>
-            <a:ext cx="11000000" cy="350000"/>
-          </a:xfrm>
-          <a:prstGeom prst="rect">
-            <a:avLst/>
-          </a:prstGeom>
-          <a:noFill/>
-        </p:spPr>
-        <p:txBody>
-          <a:bodyPr wrap="square" anchor="t">
-            <a:spAutoFit/>
-          </a:bodyPr>
-          <a:lstStyle/>
-          <a:p>
-            <a:pPr algn="l"/>
-            <a:r>
-              <a:rPr sz="1200" b="0">
-                <a:solidFill>
-                  <a:srgbClr val="666666"/>
-                </a:solidFill>
-                <a:latin typeface="Open Sans"/>
-                <a:ea typeface="Open Sans"/>
-                <a:cs typeface="Open Sans"/>
-              </a:rPr>
-              <a:t>Оказание первой помощи при наружных кровотечениях</a:t>
-            </a:r>
-          </a:p>
-        </p:txBody>
-      </p:sp>
-      <p:sp>
-        <p:nvSpPr>
-          <p:cNvPr id="6" name="Rectangle 5"/>
-          <p:cNvSpPr/>
-          <p:nvPr/>
-        </p:nvSpPr>
-        <p:spPr>
-          <a:xfrm>
-            <a:off x="0" y="2800000"/>
-            <a:ext cx="420000" cy="420000"/>
-          </a:xfrm>
-          <a:prstGeom prst="rect">
-            <a:avLst/>
-          </a:prstGeom>
-          <a:solidFill>
-            <a:srgbClr val="555555"/>
-          </a:solidFill>
-          <a:ln>
-            <a:noFill/>
-          </a:ln>
-        </p:spPr>
-        <p:style>
-          <a:lnRef idx="1">
-            <a:schemeClr val="accent1"/>
-          </a:lnRef>
-          <a:fillRef idx="3">
-            <a:schemeClr val="accent1"/>
-          </a:fillRef>
-          <a:effectRef idx="2">
-            <a:schemeClr val="accent1"/>
-          </a:effectRef>
-          <a:fontRef idx="minor">
-            <a:schemeClr val="lt1"/>
-          </a:fontRef>
-        </p:style>
-        <p:txBody>
-          <a:bodyPr rtlCol="0" anchor="ctr"/>
-          <a:lstStyle/>
-          <a:p>
-            <a:pPr algn="ctr"/>
-          </a:p>
-        </p:txBody>
-      </p:sp>
-      <p:sp>
-        <p:nvSpPr>
-          <p:cNvPr id="7" name="TextBox 6"/>
-          <p:cNvSpPr txBox="1"/>
-          <p:nvPr/>
-        </p:nvSpPr>
-        <p:spPr>
-          <a:xfrm>
-            <a:off x="0" y="2800000"/>
-            <a:ext cx="420000" cy="420000"/>
-          </a:xfrm>
-          <a:prstGeom prst="rect">
-            <a:avLst/>
-          </a:prstGeom>
-          <a:noFill/>
-        </p:spPr>
-        <p:txBody>
-          <a:bodyPr wrap="square" anchor="ctr">
-            <a:spAutoFit/>
-          </a:bodyPr>
-          <a:lstStyle/>
-          <a:p>
-            <a:pPr algn="ctr"/>
-            <a:r>
-              <a:rPr sz="1400" b="1">
-                <a:solidFill>
-                  <a:srgbClr val="FFFFFF"/>
-                </a:solidFill>
-                <a:latin typeface="Open Sans"/>
-                <a:ea typeface="Open Sans"/>
-                <a:cs typeface="Open Sans"/>
-              </a:rPr>
-              <a:t>9</a:t>
+              <a:t>Детализация к уже известным видам (артериальное / венозное / капиллярное).</a:t>
             </a:r>
           </a:p>
         </p:txBody>
       </p:sp>
       <p:graphicFrame>
         <p:nvGraphicFramePr>
-          <p:cNvPr id="8" name="Table 7"/>
+          <p:cNvPr id="9" name="Table 8"/>
           <p:cNvGraphicFramePr>
             <a:graphicFrameLocks noGrp="1"/>
           </p:cNvGraphicFramePr>
           <p:nvPr/>
         </p:nvGraphicFramePr>
         <p:xfrm>
-          <a:off x="700000" y="1550000"/>
-          <a:ext cx="11000000" cy="4500000"/>
+          <a:off x="700000" y="1900000"/>
+          <a:ext cx="11000000" cy="4300000"/>
         </p:xfrm>
         <a:graphic>
           <a:graphicData uri="http://schemas.openxmlformats.org/drawingml/2006/table">
@@ -8993,14 +10391,14 @@
                 <a:gridCol w="2750000"/>
                 <a:gridCol w="2750000"/>
               </a:tblGrid>
-              <a:tr h="900000">
+              <a:tr h="716666">
                 <a:tc>
                   <a:txBody>
                     <a:bodyPr/>
                     <a:lstStyle/>
                     <a:p>
                       <a:r>
-                        <a:rPr sz="1300" b="1">
+                        <a:rPr sz="1200" b="1">
                           <a:solidFill>
                             <a:srgbClr val="FFFFFF"/>
                           </a:solidFill>
@@ -9024,7 +10422,7 @@
                     <a:lstStyle/>
                     <a:p>
                       <a:r>
-                        <a:rPr sz="1300" b="1">
+                        <a:rPr sz="1200" b="1">
                           <a:solidFill>
                             <a:srgbClr val="FFFFFF"/>
                           </a:solidFill>
@@ -9048,7 +10446,7 @@
                     <a:lstStyle/>
                     <a:p>
                       <a:r>
-                        <a:rPr sz="1300" b="1">
+                        <a:rPr sz="1200" b="1">
                           <a:solidFill>
                             <a:srgbClr val="FFFFFF"/>
                           </a:solidFill>
@@ -9072,7 +10470,7 @@
                     <a:lstStyle/>
                     <a:p>
                       <a:r>
-                        <a:rPr sz="1300" b="1">
+                        <a:rPr sz="1200" b="1">
                           <a:solidFill>
                             <a:srgbClr val="FFFFFF"/>
                           </a:solidFill>
@@ -9091,14 +10489,14 @@
                   </a:tcPr>
                 </a:tc>
               </a:tr>
-              <a:tr h="900000">
+              <a:tr h="716666">
                 <a:tc>
                   <a:txBody>
                     <a:bodyPr/>
                     <a:lstStyle/>
                     <a:p>
                       <a:r>
-                        <a:rPr sz="1300" b="0">
+                        <a:rPr sz="1100" b="0">
                           <a:solidFill>
                             <a:srgbClr val="333333"/>
                           </a:solidFill>
@@ -9106,7 +10504,7 @@
                           <a:ea typeface="Open Sans"/>
                           <a:cs typeface="Open Sans"/>
                         </a:rPr>
-                        <a:t>Цвет крови</a:t>
+                        <a:t>Цвет</a:t>
                       </a:r>
                     </a:p>
                   </a:txBody>
@@ -9122,7 +10520,7 @@
                     <a:lstStyle/>
                     <a:p>
                       <a:r>
-                        <a:rPr sz="1300" b="1">
+                        <a:rPr sz="1100" b="1">
                           <a:solidFill>
                             <a:srgbClr val="ED1C24"/>
                           </a:solidFill>
@@ -9146,7 +10544,7 @@
                     <a:lstStyle/>
                     <a:p>
                       <a:r>
-                        <a:rPr sz="1300" b="0">
+                        <a:rPr sz="1100" b="0">
                           <a:solidFill>
                             <a:srgbClr val="333333"/>
                           </a:solidFill>
@@ -9170,7 +10568,7 @@
                     <a:lstStyle/>
                     <a:p>
                       <a:r>
-                        <a:rPr sz="1300" b="0">
+                        <a:rPr sz="1100" b="0">
                           <a:solidFill>
                             <a:srgbClr val="333333"/>
                           </a:solidFill>
@@ -9189,14 +10587,14 @@
                   </a:tcPr>
                 </a:tc>
               </a:tr>
-              <a:tr h="900000">
+              <a:tr h="716666">
                 <a:tc>
                   <a:txBody>
                     <a:bodyPr/>
                     <a:lstStyle/>
                     <a:p>
                       <a:r>
-                        <a:rPr sz="1300" b="0">
+                        <a:rPr sz="1100" b="0">
                           <a:solidFill>
                             <a:srgbClr val="333333"/>
                           </a:solidFill>
@@ -9220,7 +10618,7 @@
                     <a:lstStyle/>
                     <a:p>
                       <a:r>
-                        <a:rPr sz="1300" b="1">
+                        <a:rPr sz="1100" b="1">
                           <a:solidFill>
                             <a:srgbClr val="ED1C24"/>
                           </a:solidFill>
@@ -9228,7 +10626,7 @@
                           <a:ea typeface="Open Sans"/>
                           <a:cs typeface="Open Sans"/>
                         </a:rPr>
-                        <a:t>Пульсирующей струёй</a:t>
+                        <a:t>Пульсирующая струя</a:t>
                       </a:r>
                     </a:p>
                   </a:txBody>
@@ -9244,7 +10642,7 @@
                     <a:lstStyle/>
                     <a:p>
                       <a:r>
-                        <a:rPr sz="1300" b="0">
+                        <a:rPr sz="1100" b="0">
                           <a:solidFill>
                             <a:srgbClr val="333333"/>
                           </a:solidFill>
@@ -9252,7 +10650,7 @@
                           <a:ea typeface="Open Sans"/>
                           <a:cs typeface="Open Sans"/>
                         </a:rPr>
-                        <a:t>Равномерным «ручьём»</a:t>
+                        <a:t>Равномерный «ручей»</a:t>
                       </a:r>
                     </a:p>
                   </a:txBody>
@@ -9268,7 +10666,7 @@
                     <a:lstStyle/>
                     <a:p>
                       <a:r>
-                        <a:rPr sz="1300" b="0">
+                        <a:rPr sz="1100" b="0">
                           <a:solidFill>
                             <a:srgbClr val="333333"/>
                           </a:solidFill>
@@ -9287,14 +10685,14 @@
                   </a:tcPr>
                 </a:tc>
               </a:tr>
-              <a:tr h="900000">
+              <a:tr h="716666">
                 <a:tc>
                   <a:txBody>
                     <a:bodyPr/>
                     <a:lstStyle/>
                     <a:p>
                       <a:r>
-                        <a:rPr sz="1300" b="0">
+                        <a:rPr sz="1100" b="0">
                           <a:solidFill>
                             <a:srgbClr val="333333"/>
                           </a:solidFill>
@@ -9302,7 +10700,7 @@
                           <a:ea typeface="Open Sans"/>
                           <a:cs typeface="Open Sans"/>
                         </a:rPr>
-                        <a:t>Скорость</a:t>
+                        <a:t>Скорость потери</a:t>
                       </a:r>
                     </a:p>
                   </a:txBody>
@@ -9318,7 +10716,7 @@
                     <a:lstStyle/>
                     <a:p>
                       <a:r>
-                        <a:rPr sz="1300" b="1">
+                        <a:rPr sz="1100" b="1">
                           <a:solidFill>
                             <a:srgbClr val="ED1C24"/>
                           </a:solidFill>
@@ -9342,7 +10740,7 @@
                     <a:lstStyle/>
                     <a:p>
                       <a:r>
-                        <a:rPr sz="1300" b="0">
+                        <a:rPr sz="1100" b="0">
                           <a:solidFill>
                             <a:srgbClr val="333333"/>
                           </a:solidFill>
@@ -9366,7 +10764,7 @@
                     <a:lstStyle/>
                     <a:p>
                       <a:r>
-                        <a:rPr sz="1300" b="0">
+                        <a:rPr sz="1100" b="0">
                           <a:solidFill>
                             <a:srgbClr val="333333"/>
                           </a:solidFill>
@@ -9385,14 +10783,14 @@
                   </a:tcPr>
                 </a:tc>
               </a:tr>
-              <a:tr h="900000">
+              <a:tr h="716666">
                 <a:tc>
                   <a:txBody>
                     <a:bodyPr/>
                     <a:lstStyle/>
                     <a:p>
                       <a:r>
-                        <a:rPr sz="1300" b="0">
+                        <a:rPr sz="1100" b="0">
                           <a:solidFill>
                             <a:srgbClr val="333333"/>
                           </a:solidFill>
@@ -9416,7 +10814,7 @@
                     <a:lstStyle/>
                     <a:p>
                       <a:r>
-                        <a:rPr sz="1300" b="1">
+                        <a:rPr sz="1100" b="1">
                           <a:solidFill>
                             <a:srgbClr val="ED1C24"/>
                           </a:solidFill>
@@ -9440,7 +10838,7 @@
                     <a:lstStyle/>
                     <a:p>
                       <a:r>
-                        <a:rPr sz="1300" b="0">
+                        <a:rPr sz="1100" b="0">
                           <a:solidFill>
                             <a:srgbClr val="333333"/>
                           </a:solidFill>
@@ -9464,7 +10862,7 @@
                     <a:lstStyle/>
                     <a:p>
                       <a:r>
-                        <a:rPr sz="1300" b="0">
+                        <a:rPr sz="1100" b="0">
                           <a:solidFill>
                             <a:srgbClr val="333333"/>
                           </a:solidFill>
@@ -9483,10 +10881,584 @@
                   </a:tcPr>
                 </a:tc>
               </a:tr>
+              <a:tr h="716670">
+                <a:tc>
+                  <a:txBody>
+                    <a:bodyPr/>
+                    <a:lstStyle/>
+                    <a:p>
+                      <a:r>
+                        <a:rPr sz="1100" b="0">
+                          <a:solidFill>
+                            <a:srgbClr val="333333"/>
+                          </a:solidFill>
+                          <a:latin typeface="Open Sans"/>
+                          <a:ea typeface="Open Sans"/>
+                          <a:cs typeface="Open Sans"/>
+                        </a:rPr>
+                        <a:t>Типичная картина</a:t>
+                      </a:r>
+                    </a:p>
+                  </a:txBody>
+                  <a:tcPr>
+                    <a:solidFill>
+                      <a:srgbClr val="FFFFFF"/>
+                    </a:solidFill>
+                  </a:tcPr>
+                </a:tc>
+                <a:tc>
+                  <a:txBody>
+                    <a:bodyPr/>
+                    <a:lstStyle/>
+                    <a:p>
+                      <a:r>
+                        <a:rPr sz="1100" b="0">
+                          <a:solidFill>
+                            <a:srgbClr val="333333"/>
+                          </a:solidFill>
+                          <a:latin typeface="Open Sans"/>
+                          <a:ea typeface="Open Sans"/>
+                          <a:cs typeface="Open Sans"/>
+                        </a:rPr>
+                        <a:t>Лужа алого цвета, одежда быстро мокнет</a:t>
+                      </a:r>
+                    </a:p>
+                  </a:txBody>
+                  <a:tcPr>
+                    <a:solidFill>
+                      <a:srgbClr val="FFFFFF"/>
+                    </a:solidFill>
+                  </a:tcPr>
+                </a:tc>
+                <a:tc>
+                  <a:txBody>
+                    <a:bodyPr/>
+                    <a:lstStyle/>
+                    <a:p>
+                      <a:r>
+                        <a:rPr sz="1100" b="0">
+                          <a:solidFill>
+                            <a:srgbClr val="333333"/>
+                          </a:solidFill>
+                          <a:latin typeface="Open Sans"/>
+                          <a:ea typeface="Open Sans"/>
+                          <a:cs typeface="Open Sans"/>
+                        </a:rPr>
+                        <a:t>Стойкое истечение без пульсации</a:t>
+                      </a:r>
+                    </a:p>
+                  </a:txBody>
+                  <a:tcPr>
+                    <a:solidFill>
+                      <a:srgbClr val="FFFFFF"/>
+                    </a:solidFill>
+                  </a:tcPr>
+                </a:tc>
+                <a:tc>
+                  <a:txBody>
+                    <a:bodyPr/>
+                    <a:lstStyle/>
+                    <a:p>
+                      <a:r>
+                        <a:rPr sz="1100" b="0">
+                          <a:solidFill>
+                            <a:srgbClr val="333333"/>
+                          </a:solidFill>
+                          <a:latin typeface="Open Sans"/>
+                          <a:ea typeface="Open Sans"/>
+                          <a:cs typeface="Open Sans"/>
+                        </a:rPr>
+                        <a:t>Ссадина, порез, царапина</a:t>
+                      </a:r>
+                    </a:p>
+                  </a:txBody>
+                  <a:tcPr>
+                    <a:solidFill>
+                      <a:srgbClr val="FFFFFF"/>
+                    </a:solidFill>
+                  </a:tcPr>
+                </a:tc>
+              </a:tr>
             </a:tbl>
           </a:graphicData>
         </a:graphic>
       </p:graphicFrame>
+    </p:spTree>
+  </p:cSld>
+  <p:clrMapOvr>
+    <a:masterClrMapping/>
+  </p:clrMapOvr>
+</p:sld>
+</file>
+
+<file path=ppt/slides/slide9.xml><?xml version="1.0" encoding="utf-8"?>
+<p:sld xmlns:a="http://schemas.openxmlformats.org/drawingml/2006/main" xmlns:p="http://schemas.openxmlformats.org/presentationml/2006/main" xmlns:r="http://schemas.openxmlformats.org/officeDocument/2006/relationships">
+  <p:cSld>
+    <p:spTree>
+      <p:nvGrpSpPr>
+        <p:cNvPr id="1" name=""/>
+        <p:cNvGrpSpPr/>
+        <p:nvPr/>
+      </p:nvGrpSpPr>
+      <p:grpSpPr/>
+      <p:sp>
+        <p:nvSpPr>
+          <p:cNvPr id="2" name="Rectangle 1"/>
+          <p:cNvSpPr/>
+          <p:nvPr/>
+        </p:nvSpPr>
+        <p:spPr>
+          <a:xfrm>
+            <a:off x="0" y="0"/>
+            <a:ext cx="12191695" cy="6858000"/>
+          </a:xfrm>
+          <a:prstGeom prst="rect">
+            <a:avLst/>
+          </a:prstGeom>
+          <a:solidFill>
+            <a:srgbClr val="FFFFFF"/>
+          </a:solidFill>
+          <a:ln>
+            <a:noFill/>
+          </a:ln>
+        </p:spPr>
+        <p:style>
+          <a:lnRef idx="1">
+            <a:schemeClr val="accent1"/>
+          </a:lnRef>
+          <a:fillRef idx="3">
+            <a:schemeClr val="accent1"/>
+          </a:fillRef>
+          <a:effectRef idx="2">
+            <a:schemeClr val="accent1"/>
+          </a:effectRef>
+          <a:fontRef idx="minor">
+            <a:schemeClr val="lt1"/>
+          </a:fontRef>
+        </p:style>
+        <p:txBody>
+          <a:bodyPr rtlCol="0" anchor="ctr"/>
+          <a:lstStyle/>
+          <a:p>
+            <a:pPr algn="ctr"/>
+          </a:p>
+        </p:txBody>
+      </p:sp>
+      <p:sp>
+        <p:nvSpPr>
+          <p:cNvPr id="3" name="TextBox 2"/>
+          <p:cNvSpPr txBox="1"/>
+          <p:nvPr/>
+        </p:nvSpPr>
+        <p:spPr>
+          <a:xfrm>
+            <a:off x="700000" y="280000"/>
+            <a:ext cx="11000000" cy="550000"/>
+          </a:xfrm>
+          <a:prstGeom prst="rect">
+            <a:avLst/>
+          </a:prstGeom>
+          <a:noFill/>
+        </p:spPr>
+        <p:txBody>
+          <a:bodyPr wrap="square" anchor="t">
+            <a:spAutoFit/>
+          </a:bodyPr>
+          <a:lstStyle/>
+          <a:p>
+            <a:pPr algn="l"/>
+            <a:r>
+              <a:rPr sz="2200" b="1">
+                <a:solidFill>
+                  <a:srgbClr val="333333"/>
+                </a:solidFill>
+                <a:latin typeface="Open Sans"/>
+                <a:ea typeface="Open Sans"/>
+                <a:cs typeface="Open Sans"/>
+              </a:rPr>
+              <a:t>СМЕШАННОЕ КРОВОТЕЧЕНИЕ — КОГДА ПОДОЗРЕВАТЬ</a:t>
+            </a:r>
+          </a:p>
+        </p:txBody>
+      </p:sp>
+      <p:sp>
+        <p:nvSpPr>
+          <p:cNvPr id="4" name="Rectangle 3"/>
+          <p:cNvSpPr/>
+          <p:nvPr/>
+        </p:nvSpPr>
+        <p:spPr>
+          <a:xfrm>
+            <a:off x="700000" y="880000"/>
+            <a:ext cx="9000000" cy="25000"/>
+          </a:xfrm>
+          <a:prstGeom prst="rect">
+            <a:avLst/>
+          </a:prstGeom>
+          <a:solidFill>
+            <a:srgbClr val="555555"/>
+          </a:solidFill>
+          <a:ln>
+            <a:noFill/>
+          </a:ln>
+        </p:spPr>
+        <p:style>
+          <a:lnRef idx="1">
+            <a:schemeClr val="accent1"/>
+          </a:lnRef>
+          <a:fillRef idx="3">
+            <a:schemeClr val="accent1"/>
+          </a:fillRef>
+          <a:effectRef idx="2">
+            <a:schemeClr val="accent1"/>
+          </a:effectRef>
+          <a:fontRef idx="minor">
+            <a:schemeClr val="lt1"/>
+          </a:fontRef>
+        </p:style>
+        <p:txBody>
+          <a:bodyPr rtlCol="0" anchor="ctr"/>
+          <a:lstStyle/>
+          <a:p>
+            <a:pPr algn="ctr"/>
+          </a:p>
+        </p:txBody>
+      </p:sp>
+      <p:sp>
+        <p:nvSpPr>
+          <p:cNvPr id="5" name="TextBox 4"/>
+          <p:cNvSpPr txBox="1"/>
+          <p:nvPr/>
+        </p:nvSpPr>
+        <p:spPr>
+          <a:xfrm>
+            <a:off x="700000" y="950000"/>
+            <a:ext cx="11000000" cy="350000"/>
+          </a:xfrm>
+          <a:prstGeom prst="rect">
+            <a:avLst/>
+          </a:prstGeom>
+          <a:noFill/>
+        </p:spPr>
+        <p:txBody>
+          <a:bodyPr wrap="square" anchor="t">
+            <a:spAutoFit/>
+          </a:bodyPr>
+          <a:lstStyle/>
+          <a:p>
+            <a:pPr algn="l"/>
+            <a:r>
+              <a:rPr sz="1200" b="0">
+                <a:solidFill>
+                  <a:srgbClr val="666666"/>
+                </a:solidFill>
+                <a:latin typeface="Open Sans"/>
+                <a:ea typeface="Open Sans"/>
+                <a:cs typeface="Open Sans"/>
+              </a:rPr>
+              <a:t>Оказание первой помощи при наружных кровотечениях</a:t>
+            </a:r>
+          </a:p>
+        </p:txBody>
+      </p:sp>
+      <p:sp>
+        <p:nvSpPr>
+          <p:cNvPr id="6" name="Rectangle 5"/>
+          <p:cNvSpPr/>
+          <p:nvPr/>
+        </p:nvSpPr>
+        <p:spPr>
+          <a:xfrm>
+            <a:off x="0" y="2800000"/>
+            <a:ext cx="420000" cy="420000"/>
+          </a:xfrm>
+          <a:prstGeom prst="rect">
+            <a:avLst/>
+          </a:prstGeom>
+          <a:solidFill>
+            <a:srgbClr val="555555"/>
+          </a:solidFill>
+          <a:ln>
+            <a:noFill/>
+          </a:ln>
+        </p:spPr>
+        <p:style>
+          <a:lnRef idx="1">
+            <a:schemeClr val="accent1"/>
+          </a:lnRef>
+          <a:fillRef idx="3">
+            <a:schemeClr val="accent1"/>
+          </a:fillRef>
+          <a:effectRef idx="2">
+            <a:schemeClr val="accent1"/>
+          </a:effectRef>
+          <a:fontRef idx="minor">
+            <a:schemeClr val="lt1"/>
+          </a:fontRef>
+        </p:style>
+        <p:txBody>
+          <a:bodyPr rtlCol="0" anchor="ctr"/>
+          <a:lstStyle/>
+          <a:p>
+            <a:pPr algn="ctr"/>
+          </a:p>
+        </p:txBody>
+      </p:sp>
+      <p:sp>
+        <p:nvSpPr>
+          <p:cNvPr id="7" name="TextBox 6"/>
+          <p:cNvSpPr txBox="1"/>
+          <p:nvPr/>
+        </p:nvSpPr>
+        <p:spPr>
+          <a:xfrm>
+            <a:off x="0" y="2800000"/>
+            <a:ext cx="420000" cy="420000"/>
+          </a:xfrm>
+          <a:prstGeom prst="rect">
+            <a:avLst/>
+          </a:prstGeom>
+          <a:noFill/>
+        </p:spPr>
+        <p:txBody>
+          <a:bodyPr wrap="square" anchor="ctr">
+            <a:spAutoFit/>
+          </a:bodyPr>
+          <a:lstStyle/>
+          <a:p>
+            <a:pPr algn="ctr"/>
+            <a:r>
+              <a:rPr sz="1400" b="1">
+                <a:solidFill>
+                  <a:srgbClr val="FFFFFF"/>
+                </a:solidFill>
+                <a:latin typeface="Open Sans"/>
+                <a:ea typeface="Open Sans"/>
+                <a:cs typeface="Open Sans"/>
+              </a:rPr>
+              <a:t>9</a:t>
+            </a:r>
+          </a:p>
+        </p:txBody>
+      </p:sp>
+      <p:sp>
+        <p:nvSpPr>
+          <p:cNvPr id="8" name="TextBox 7"/>
+          <p:cNvSpPr txBox="1"/>
+          <p:nvPr/>
+        </p:nvSpPr>
+        <p:spPr>
+          <a:xfrm>
+            <a:off x="700000" y="1550000"/>
+            <a:ext cx="11000000" cy="2800000"/>
+          </a:xfrm>
+          <a:prstGeom prst="rect">
+            <a:avLst/>
+          </a:prstGeom>
+          <a:noFill/>
+        </p:spPr>
+        <p:txBody>
+          <a:bodyPr wrap="square">
+            <a:spAutoFit/>
+          </a:bodyPr>
+          <a:lstStyle/>
+          <a:p>
+            <a:pPr algn="l">
+              <a:spcAft>
+                <a:spcPts val="800"/>
+              </a:spcAft>
+            </a:pPr>
+            <a:r>
+              <a:rPr sz="1500" b="0">
+                <a:solidFill>
+                  <a:srgbClr val="333333"/>
+                </a:solidFill>
+                <a:latin typeface="Open Sans"/>
+                <a:ea typeface="Open Sans"/>
+                <a:cs typeface="Open Sans"/>
+              </a:rPr>
+              <a:t>•  Одновременно признаки артериального, венозного и капиллярного кровотечения.</a:t>
+            </a:r>
+          </a:p>
+          <a:p>
+            <a:pPr algn="l">
+              <a:spcAft>
+                <a:spcPts val="800"/>
+              </a:spcAft>
+            </a:pPr>
+            <a:r>
+              <a:rPr sz="1500" b="0">
+                <a:solidFill>
+                  <a:srgbClr val="333333"/>
+                </a:solidFill>
+                <a:latin typeface="Open Sans"/>
+                <a:ea typeface="Open Sans"/>
+                <a:cs typeface="Open Sans"/>
+              </a:rPr>
+              <a:t>•  Частый пример — отрыв (ампутация) конечности или обширное размозжение.</a:t>
+            </a:r>
+          </a:p>
+          <a:p>
+            <a:pPr algn="l">
+              <a:spcAft>
+                <a:spcPts val="800"/>
+              </a:spcAft>
+            </a:pPr>
+            <a:r>
+              <a:rPr sz="1500" b="0">
+                <a:solidFill>
+                  <a:srgbClr val="333333"/>
+                </a:solidFill>
+                <a:latin typeface="Open Sans"/>
+                <a:ea typeface="Open Sans"/>
+                <a:cs typeface="Open Sans"/>
+              </a:rPr>
+              <a:t>•  Опасно из‑за артериального компонента: быстрая массивная кровопотеря.</a:t>
+            </a:r>
+          </a:p>
+          <a:p>
+            <a:pPr algn="l">
+              <a:spcAft>
+                <a:spcPts val="800"/>
+              </a:spcAft>
+            </a:pPr>
+            <a:r>
+              <a:rPr sz="1500" b="0">
+                <a:solidFill>
+                  <a:srgbClr val="333333"/>
+                </a:solidFill>
+                <a:latin typeface="Open Sans"/>
+                <a:ea typeface="Open Sans"/>
+                <a:cs typeface="Open Sans"/>
+              </a:rPr>
+              <a:t>•  Не тратьте время на «точную классификацию» — останавливайте по интенсивности.</a:t>
+            </a:r>
+          </a:p>
+        </p:txBody>
+      </p:sp>
+      <p:sp>
+        <p:nvSpPr>
+          <p:cNvPr id="9" name="Rounded Rectangle 8"/>
+          <p:cNvSpPr/>
+          <p:nvPr/>
+        </p:nvSpPr>
+        <p:spPr>
+          <a:xfrm>
+            <a:off x="700000" y="4700000"/>
+            <a:ext cx="11000000" cy="1500000"/>
+          </a:xfrm>
+          <a:prstGeom prst="roundRect">
+            <a:avLst/>
+          </a:prstGeom>
+          <a:solidFill>
+            <a:srgbClr val="F5F0E1"/>
+          </a:solidFill>
+          <a:ln>
+            <a:noFill/>
+          </a:ln>
+        </p:spPr>
+        <p:style>
+          <a:lnRef idx="1">
+            <a:schemeClr val="accent1"/>
+          </a:lnRef>
+          <a:fillRef idx="3">
+            <a:schemeClr val="accent1"/>
+          </a:fillRef>
+          <a:effectRef idx="2">
+            <a:schemeClr val="accent1"/>
+          </a:effectRef>
+          <a:fontRef idx="minor">
+            <a:schemeClr val="lt1"/>
+          </a:fontRef>
+        </p:style>
+        <p:txBody>
+          <a:bodyPr rtlCol="0" anchor="ctr"/>
+          <a:lstStyle/>
+          <a:p>
+            <a:pPr algn="ctr"/>
+          </a:p>
+        </p:txBody>
+      </p:sp>
+      <p:sp>
+        <p:nvSpPr>
+          <p:cNvPr id="10" name="Rectangle 9"/>
+          <p:cNvSpPr/>
+          <p:nvPr/>
+        </p:nvSpPr>
+        <p:spPr>
+          <a:xfrm>
+            <a:off x="700000" y="4700000"/>
+            <a:ext cx="100000" cy="1500000"/>
+          </a:xfrm>
+          <a:prstGeom prst="rect">
+            <a:avLst/>
+          </a:prstGeom>
+          <a:solidFill>
+            <a:srgbClr val="ED1C24"/>
+          </a:solidFill>
+          <a:ln>
+            <a:noFill/>
+          </a:ln>
+        </p:spPr>
+        <p:style>
+          <a:lnRef idx="1">
+            <a:schemeClr val="accent1"/>
+          </a:lnRef>
+          <a:fillRef idx="3">
+            <a:schemeClr val="accent1"/>
+          </a:fillRef>
+          <a:effectRef idx="2">
+            <a:schemeClr val="accent1"/>
+          </a:effectRef>
+          <a:fontRef idx="minor">
+            <a:schemeClr val="lt1"/>
+          </a:fontRef>
+        </p:style>
+        <p:txBody>
+          <a:bodyPr rtlCol="0" anchor="ctr"/>
+          <a:lstStyle/>
+          <a:p>
+            <a:pPr algn="ctr"/>
+          </a:p>
+        </p:txBody>
+      </p:sp>
+      <p:sp>
+        <p:nvSpPr>
+          <p:cNvPr id="11" name="TextBox 10"/>
+          <p:cNvSpPr txBox="1"/>
+          <p:nvPr/>
+        </p:nvSpPr>
+        <p:spPr>
+          <a:xfrm>
+            <a:off x="1000000" y="4950000"/>
+            <a:ext cx="10400000" cy="1000000"/>
+          </a:xfrm>
+          <a:prstGeom prst="rect">
+            <a:avLst/>
+          </a:prstGeom>
+          <a:noFill/>
+        </p:spPr>
+        <p:txBody>
+          <a:bodyPr wrap="square" anchor="ctr">
+            <a:spAutoFit/>
+          </a:bodyPr>
+          <a:lstStyle/>
+          <a:p>
+            <a:pPr algn="l"/>
+            <a:r>
+              <a:rPr sz="1600" b="1">
+                <a:solidFill>
+                  <a:srgbClr val="333333"/>
+                </a:solidFill>
+                <a:latin typeface="Open Sans"/>
+                <a:ea typeface="Open Sans"/>
+                <a:cs typeface="Open Sans"/>
+              </a:rPr>
+              <a:t>Правило: есть интенсивное истечение крови — действуйте как при угрозе жизни.</a:t>
+            </a:r>
+          </a:p>
+        </p:txBody>
+      </p:sp>
     </p:spTree>
   </p:cSld>
   <p:clrMapOvr>

--- a/presentations/Признаки_наружного_кровотечения_и_кровопотери.pptx
+++ b/presentations/Признаки_наружного_кровотечения_и_кровопотери.pptx
@@ -3100,12 +3100,20 @@
         <p:nvPr/>
       </p:nvGrpSpPr>
       <p:grpSpPr/>
-      <p:sp>
-        <p:nvSpPr>
-          <p:cNvPr id="2" name="Rectangle 1"/>
-          <p:cNvSpPr/>
-          <p:nvPr/>
-        </p:nvSpPr>
+      <p:pic>
+        <p:nvPicPr>
+          <p:cNvPr id="2" name="Picture 1" descr="suot_title_bg.png"/>
+          <p:cNvPicPr>
+            <a:picLocks noChangeAspect="1"/>
+          </p:cNvPicPr>
+          <p:nvPr/>
+        </p:nvPicPr>
+        <p:blipFill>
+          <a:blip r:embed="rId2"/>
+          <a:stretch>
+            <a:fillRect/>
+          </a:stretch>
+        </p:blipFill>
         <p:spPr>
           <a:xfrm>
             <a:off x="0" y="0"/>
@@ -3114,8 +3122,26 @@
           <a:prstGeom prst="rect">
             <a:avLst/>
           </a:prstGeom>
+        </p:spPr>
+      </p:pic>
+      <p:sp>
+        <p:nvSpPr>
+          <p:cNvPr id="3" name="Rectangle 2"/>
+          <p:cNvSpPr/>
+          <p:nvPr/>
+        </p:nvSpPr>
+        <p:spPr>
+          <a:xfrm>
+            <a:off x="0" y="2600000"/>
+            <a:ext cx="12191695" cy="2000000"/>
+          </a:xfrm>
+          <a:prstGeom prst="rect">
+            <a:avLst/>
+          </a:prstGeom>
           <a:solidFill>
-            <a:srgbClr val="F8F8F8"/>
+            <a:srgbClr val="415762">
+              <a:alpha val="85000"/>
+            </a:srgbClr>
           </a:solidFill>
           <a:ln>
             <a:noFill/>
@@ -3145,100 +3171,14 @@
       </p:sp>
       <p:sp>
         <p:nvSpPr>
-          <p:cNvPr id="3" name="Rectangle 2"/>
-          <p:cNvSpPr/>
-          <p:nvPr/>
-        </p:nvSpPr>
-        <p:spPr>
-          <a:xfrm>
-            <a:off x="8800000" y="0"/>
-            <a:ext cx="3400000" cy="6858000"/>
-          </a:xfrm>
-          <a:prstGeom prst="rect">
-            <a:avLst/>
-          </a:prstGeom>
-          <a:solidFill>
-            <a:srgbClr val="DDDDDD"/>
-          </a:solidFill>
-          <a:ln>
-            <a:noFill/>
-          </a:ln>
-        </p:spPr>
-        <p:style>
-          <a:lnRef idx="1">
-            <a:schemeClr val="accent1"/>
-          </a:lnRef>
-          <a:fillRef idx="3">
-            <a:schemeClr val="accent1"/>
-          </a:fillRef>
-          <a:effectRef idx="2">
-            <a:schemeClr val="accent1"/>
-          </a:effectRef>
-          <a:fontRef idx="minor">
-            <a:schemeClr val="lt1"/>
-          </a:fontRef>
-        </p:style>
-        <p:txBody>
-          <a:bodyPr rtlCol="0" anchor="ctr"/>
-          <a:lstStyle/>
-          <a:p>
-            <a:pPr algn="ctr"/>
-          </a:p>
-        </p:txBody>
-      </p:sp>
-      <p:sp>
-        <p:nvSpPr>
-          <p:cNvPr id="4" name="Rectangle 3"/>
-          <p:cNvSpPr/>
-          <p:nvPr/>
-        </p:nvSpPr>
-        <p:spPr>
-          <a:xfrm>
-            <a:off x="0" y="2800000"/>
-            <a:ext cx="2800000" cy="1800000"/>
-          </a:xfrm>
-          <a:prstGeom prst="rect">
-            <a:avLst/>
-          </a:prstGeom>
-          <a:solidFill>
-            <a:srgbClr val="DDDDDD"/>
-          </a:solidFill>
-          <a:ln>
-            <a:noFill/>
-          </a:ln>
-        </p:spPr>
-        <p:style>
-          <a:lnRef idx="1">
-            <a:schemeClr val="accent1"/>
-          </a:lnRef>
-          <a:fillRef idx="3">
-            <a:schemeClr val="accent1"/>
-          </a:fillRef>
-          <a:effectRef idx="2">
-            <a:schemeClr val="accent1"/>
-          </a:effectRef>
-          <a:fontRef idx="minor">
-            <a:schemeClr val="lt1"/>
-          </a:fontRef>
-        </p:style>
-        <p:txBody>
-          <a:bodyPr rtlCol="0" anchor="ctr"/>
-          <a:lstStyle/>
-          <a:p>
-            <a:pPr algn="ctr"/>
-          </a:p>
-        </p:txBody>
-      </p:sp>
-      <p:sp>
-        <p:nvSpPr>
-          <p:cNvPr id="5" name="TextBox 4"/>
+          <p:cNvPr id="4" name="TextBox 3"/>
           <p:cNvSpPr txBox="1"/>
           <p:nvPr/>
         </p:nvSpPr>
         <p:spPr>
           <a:xfrm>
-            <a:off x="700000" y="3000000"/>
-            <a:ext cx="7800000" cy="1400000"/>
+            <a:off x="800000" y="2900000"/>
+            <a:ext cx="10500000" cy="1400000"/>
           </a:xfrm>
           <a:prstGeom prst="rect">
             <a:avLst/>
@@ -3246,103 +3186,23 @@
           <a:noFill/>
         </p:spPr>
         <p:txBody>
-          <a:bodyPr wrap="square" anchor="t">
+          <a:bodyPr wrap="square" anchor="ctr">
             <a:spAutoFit/>
           </a:bodyPr>
           <a:lstStyle/>
           <a:p>
-            <a:pPr algn="l"/>
+            <a:pPr algn="ctr"/>
             <a:r>
               <a:rPr sz="2800" b="1">
                 <a:solidFill>
-                  <a:srgbClr val="333333"/>
-                </a:solidFill>
-                <a:latin typeface="Open Sans"/>
-                <a:ea typeface="Open Sans"/>
-                <a:cs typeface="Open Sans"/>
+                  <a:srgbClr val="FFFFFF"/>
+                </a:solidFill>
+                <a:latin typeface="Calibri"/>
+                <a:ea typeface="Calibri"/>
+                <a:cs typeface="Calibri"/>
               </a:rPr>
               <a:t>ПРИЗНАКИ НАРУЖНОГО
 КРОВОТЕЧЕНИЯ И КРОВОПОТЕРИ</a:t>
-            </a:r>
-          </a:p>
-        </p:txBody>
-      </p:sp>
-      <p:sp>
-        <p:nvSpPr>
-          <p:cNvPr id="6" name="Rectangle 5"/>
-          <p:cNvSpPr/>
-          <p:nvPr/>
-        </p:nvSpPr>
-        <p:spPr>
-          <a:xfrm>
-            <a:off x="700000" y="4600000"/>
-            <a:ext cx="5500000" cy="30000"/>
-          </a:xfrm>
-          <a:prstGeom prst="rect">
-            <a:avLst/>
-          </a:prstGeom>
-          <a:solidFill>
-            <a:srgbClr val="333333"/>
-          </a:solidFill>
-          <a:ln>
-            <a:noFill/>
-          </a:ln>
-        </p:spPr>
-        <p:style>
-          <a:lnRef idx="1">
-            <a:schemeClr val="accent1"/>
-          </a:lnRef>
-          <a:fillRef idx="3">
-            <a:schemeClr val="accent1"/>
-          </a:fillRef>
-          <a:effectRef idx="2">
-            <a:schemeClr val="accent1"/>
-          </a:effectRef>
-          <a:fontRef idx="minor">
-            <a:schemeClr val="lt1"/>
-          </a:fontRef>
-        </p:style>
-        <p:txBody>
-          <a:bodyPr rtlCol="0" anchor="ctr"/>
-          <a:lstStyle/>
-          <a:p>
-            <a:pPr algn="ctr"/>
-          </a:p>
-        </p:txBody>
-      </p:sp>
-      <p:sp>
-        <p:nvSpPr>
-          <p:cNvPr id="7" name="TextBox 6"/>
-          <p:cNvSpPr txBox="1"/>
-          <p:nvPr/>
-        </p:nvSpPr>
-        <p:spPr>
-          <a:xfrm>
-            <a:off x="700000" y="4800000"/>
-            <a:ext cx="7500000" cy="500000"/>
-          </a:xfrm>
-          <a:prstGeom prst="rect">
-            <a:avLst/>
-          </a:prstGeom>
-          <a:noFill/>
-        </p:spPr>
-        <p:txBody>
-          <a:bodyPr wrap="square" anchor="t">
-            <a:spAutoFit/>
-          </a:bodyPr>
-          <a:lstStyle/>
-          <a:p>
-            <a:pPr algn="l"/>
-            <a:r>
-              <a:rPr sz="1400" b="0">
-                <a:solidFill>
-                  <a:srgbClr val="666666"/>
-                </a:solidFill>
-                <a:latin typeface="Open Sans"/>
-                <a:ea typeface="Open Sans"/>
-                <a:cs typeface="Open Sans"/>
-              </a:rPr>
-              <a:t>Тема 2 · Оказание первой помощи при наружных кровотечениях</a:t>
             </a:r>
           </a:p>
         </p:txBody>
@@ -3410,57 +3270,20 @@
       </p:sp>
       <p:sp>
         <p:nvSpPr>
-          <p:cNvPr id="3" name="TextBox 2"/>
-          <p:cNvSpPr txBox="1"/>
-          <p:nvPr/>
-        </p:nvSpPr>
-        <p:spPr>
-          <a:xfrm>
-            <a:off x="700000" y="280000"/>
-            <a:ext cx="11000000" cy="550000"/>
-          </a:xfrm>
-          <a:prstGeom prst="rect">
-            <a:avLst/>
-          </a:prstGeom>
-          <a:noFill/>
-        </p:spPr>
-        <p:txBody>
-          <a:bodyPr wrap="square" anchor="t">
-            <a:spAutoFit/>
-          </a:bodyPr>
-          <a:lstStyle/>
-          <a:p>
-            <a:pPr algn="l"/>
-            <a:r>
-              <a:rPr sz="2200" b="1">
-                <a:solidFill>
-                  <a:srgbClr val="333333"/>
-                </a:solidFill>
-                <a:latin typeface="Open Sans"/>
-                <a:ea typeface="Open Sans"/>
-                <a:cs typeface="Open Sans"/>
-              </a:rPr>
-              <a:t>ЧТО МАСКИРУЕТ ПРИЗНАКИ КРОВОТЕЧЕНИЯ</a:t>
-            </a:r>
-          </a:p>
-        </p:txBody>
-      </p:sp>
-      <p:sp>
-        <p:nvSpPr>
-          <p:cNvPr id="4" name="Rectangle 3"/>
+          <p:cNvPr id="3" name="Rectangle 2"/>
           <p:cNvSpPr/>
           <p:nvPr/>
         </p:nvSpPr>
         <p:spPr>
           <a:xfrm>
-            <a:off x="700000" y="880000"/>
-            <a:ext cx="9000000" cy="25000"/>
+            <a:off x="0" y="0"/>
+            <a:ext cx="12191695" cy="1300000"/>
           </a:xfrm>
           <a:prstGeom prst="rect">
             <a:avLst/>
           </a:prstGeom>
           <a:solidFill>
-            <a:srgbClr val="555555"/>
+            <a:srgbClr val="F8F8F8"/>
           </a:solidFill>
           <a:ln>
             <a:noFill/>
@@ -3490,14 +3313,14 @@
       </p:sp>
       <p:sp>
         <p:nvSpPr>
-          <p:cNvPr id="5" name="TextBox 4"/>
+          <p:cNvPr id="4" name="TextBox 3"/>
           <p:cNvSpPr txBox="1"/>
           <p:nvPr/>
         </p:nvSpPr>
         <p:spPr>
           <a:xfrm>
-            <a:off x="700000" y="950000"/>
-            <a:ext cx="11000000" cy="350000"/>
+            <a:off x="700000" y="220000"/>
+            <a:ext cx="11200000" cy="550000"/>
           </a:xfrm>
           <a:prstGeom prst="rect">
             <a:avLst/>
@@ -3512,35 +3335,35 @@
           <a:p>
             <a:pPr algn="l"/>
             <a:r>
-              <a:rPr sz="1200" b="0">
-                <a:solidFill>
-                  <a:srgbClr val="666666"/>
-                </a:solidFill>
-                <a:latin typeface="Open Sans"/>
-                <a:ea typeface="Open Sans"/>
-                <a:cs typeface="Open Sans"/>
+              <a:rPr sz="2000" b="1">
+                <a:solidFill>
+                  <a:srgbClr val="333333"/>
+                </a:solidFill>
+                <a:latin typeface="Calibri"/>
+                <a:ea typeface="Calibri"/>
+                <a:cs typeface="Calibri"/>
               </a:rPr>
-              <a:t>Оказание первой помощи при наружных кровотечениях</a:t>
-            </a:r>
-          </a:p>
-        </p:txBody>
-      </p:sp>
-      <p:sp>
-        <p:nvSpPr>
-          <p:cNvPr id="6" name="Rectangle 5"/>
+              <a:t>ЧТО МАСКИРУЕТ ПРИЗНАКИ КРОВОТЕЧЕНИЯ</a:t>
+            </a:r>
+          </a:p>
+        </p:txBody>
+      </p:sp>
+      <p:sp>
+        <p:nvSpPr>
+          <p:cNvPr id="5" name="Rectangle 4"/>
           <p:cNvSpPr/>
           <p:nvPr/>
         </p:nvSpPr>
         <p:spPr>
           <a:xfrm>
-            <a:off x="0" y="2800000"/>
-            <a:ext cx="420000" cy="420000"/>
+            <a:off x="700000" y="820000"/>
+            <a:ext cx="8500000" cy="28000"/>
           </a:xfrm>
           <a:prstGeom prst="rect">
             <a:avLst/>
           </a:prstGeom>
           <a:solidFill>
-            <a:srgbClr val="555555"/>
+            <a:srgbClr val="606060"/>
           </a:solidFill>
           <a:ln>
             <a:noFill/>
@@ -3570,14 +3393,14 @@
       </p:sp>
       <p:sp>
         <p:nvSpPr>
-          <p:cNvPr id="7" name="TextBox 6"/>
+          <p:cNvPr id="6" name="TextBox 5"/>
           <p:cNvSpPr txBox="1"/>
           <p:nvPr/>
         </p:nvSpPr>
         <p:spPr>
           <a:xfrm>
-            <a:off x="0" y="2800000"/>
-            <a:ext cx="420000" cy="420000"/>
+            <a:off x="700000" y="880000"/>
+            <a:ext cx="11000000" cy="320000"/>
           </a:xfrm>
           <a:prstGeom prst="rect">
             <a:avLst/>
@@ -3585,47 +3408,45 @@
           <a:noFill/>
         </p:spPr>
         <p:txBody>
-          <a:bodyPr wrap="square" anchor="ctr">
+          <a:bodyPr wrap="square" anchor="t">
             <a:spAutoFit/>
           </a:bodyPr>
           <a:lstStyle/>
           <a:p>
-            <a:pPr algn="ctr"/>
-            <a:r>
-              <a:rPr sz="1400" b="1">
-                <a:solidFill>
-                  <a:srgbClr val="FFFFFF"/>
-                </a:solidFill>
-                <a:latin typeface="Open Sans"/>
-                <a:ea typeface="Open Sans"/>
-                <a:cs typeface="Open Sans"/>
+            <a:pPr algn="l"/>
+            <a:r>
+              <a:rPr sz="1100" b="0">
+                <a:solidFill>
+                  <a:srgbClr val="777777"/>
+                </a:solidFill>
+                <a:latin typeface="Calibri"/>
+                <a:ea typeface="Calibri"/>
+                <a:cs typeface="Calibri"/>
               </a:rPr>
-              <a:t>10</a:t>
-            </a:r>
-          </a:p>
-        </p:txBody>
-      </p:sp>
-      <p:sp>
-        <p:nvSpPr>
-          <p:cNvPr id="8" name="Rectangle 7"/>
+              <a:t>Оказание первой помощи при наружных кровотечениях</a:t>
+            </a:r>
+          </a:p>
+        </p:txBody>
+      </p:sp>
+      <p:sp>
+        <p:nvSpPr>
+          <p:cNvPr id="7" name="Rectangle 6"/>
           <p:cNvSpPr/>
           <p:nvPr/>
         </p:nvSpPr>
         <p:spPr>
           <a:xfrm>
-            <a:off x="700000" y="1450000"/>
-            <a:ext cx="11000000" cy="1100000"/>
+            <a:off x="0" y="2700000"/>
+            <a:ext cx="400000" cy="400000"/>
           </a:xfrm>
           <a:prstGeom prst="rect">
             <a:avLst/>
           </a:prstGeom>
           <a:solidFill>
-            <a:srgbClr val="FFFFFF"/>
+            <a:srgbClr val="606060"/>
           </a:solidFill>
-          <a:ln w="12700">
-            <a:solidFill>
-              <a:srgbClr val="999999"/>
-            </a:solidFill>
+          <a:ln>
+            <a:noFill/>
           </a:ln>
         </p:spPr>
         <p:style>
@@ -3652,14 +3473,14 @@
       </p:sp>
       <p:sp>
         <p:nvSpPr>
-          <p:cNvPr id="9" name="TextBox 8"/>
+          <p:cNvPr id="8" name="TextBox 7"/>
           <p:cNvSpPr txBox="1"/>
           <p:nvPr/>
         </p:nvSpPr>
         <p:spPr>
           <a:xfrm>
-            <a:off x="950000" y="1570000"/>
-            <a:ext cx="10400000" cy="350000"/>
+            <a:off x="0" y="2700000"/>
+            <a:ext cx="400000" cy="400000"/>
           </a:xfrm>
           <a:prstGeom prst="rect">
             <a:avLst/>
@@ -3667,84 +3488,45 @@
           <a:noFill/>
         </p:spPr>
         <p:txBody>
-          <a:bodyPr wrap="square" anchor="t">
+          <a:bodyPr wrap="square" anchor="ctr">
             <a:spAutoFit/>
           </a:bodyPr>
           <a:lstStyle/>
           <a:p>
-            <a:pPr algn="l"/>
-            <a:r>
-              <a:rPr sz="1500" b="1">
-                <a:solidFill>
-                  <a:srgbClr val="333333"/>
-                </a:solidFill>
-                <a:latin typeface="Open Sans"/>
-                <a:ea typeface="Open Sans"/>
-                <a:cs typeface="Open Sans"/>
+            <a:pPr algn="ctr"/>
+            <a:r>
+              <a:rPr sz="1300" b="1">
+                <a:solidFill>
+                  <a:srgbClr val="FFFFFF"/>
+                </a:solidFill>
+                <a:latin typeface="Calibri"/>
+                <a:ea typeface="Calibri"/>
+                <a:cs typeface="Calibri"/>
               </a:rPr>
-              <a:t>Тёмная / плотная одежда</a:t>
-            </a:r>
-          </a:p>
-        </p:txBody>
-      </p:sp>
-      <p:sp>
-        <p:nvSpPr>
-          <p:cNvPr id="10" name="TextBox 9"/>
-          <p:cNvSpPr txBox="1"/>
-          <p:nvPr/>
-        </p:nvSpPr>
-        <p:spPr>
-          <a:xfrm>
-            <a:off x="950000" y="1950000"/>
-            <a:ext cx="10400000" cy="450000"/>
-          </a:xfrm>
-          <a:prstGeom prst="rect">
-            <a:avLst/>
-          </a:prstGeom>
-          <a:noFill/>
-        </p:spPr>
-        <p:txBody>
-          <a:bodyPr wrap="square" anchor="t">
-            <a:spAutoFit/>
-          </a:bodyPr>
-          <a:lstStyle/>
-          <a:p>
-            <a:pPr algn="l"/>
-            <a:r>
-              <a:rPr sz="1300" b="0">
-                <a:solidFill>
-                  <a:srgbClr val="666666"/>
-                </a:solidFill>
-                <a:latin typeface="Open Sans"/>
-                <a:ea typeface="Open Sans"/>
-                <a:cs typeface="Open Sans"/>
-              </a:rPr>
-              <a:t>Кровь плохо видна — ощупайте, приподнимите одежду при осмотре.</a:t>
-            </a:r>
-          </a:p>
-        </p:txBody>
-      </p:sp>
-      <p:sp>
-        <p:nvSpPr>
-          <p:cNvPr id="11" name="Rectangle 10"/>
+              <a:t>10</a:t>
+            </a:r>
+          </a:p>
+        </p:txBody>
+      </p:sp>
+      <p:sp>
+        <p:nvSpPr>
+          <p:cNvPr id="9" name="Rounded Rectangle 8"/>
           <p:cNvSpPr/>
           <p:nvPr/>
         </p:nvSpPr>
         <p:spPr>
           <a:xfrm>
-            <a:off x="700000" y="2650000"/>
+            <a:off x="700000" y="1450000"/>
             <a:ext cx="11000000" cy="1100000"/>
           </a:xfrm>
-          <a:prstGeom prst="rect">
+          <a:prstGeom prst="roundRect">
             <a:avLst/>
           </a:prstGeom>
           <a:solidFill>
-            <a:srgbClr val="FFFFFF"/>
+            <a:srgbClr val="F0F0F0"/>
           </a:solidFill>
-          <a:ln w="12700">
-            <a:solidFill>
-              <a:srgbClr val="999999"/>
-            </a:solidFill>
+          <a:ln>
+            <a:noFill/>
           </a:ln>
         </p:spPr>
         <p:style>
@@ -3771,13 +3553,13 @@
       </p:sp>
       <p:sp>
         <p:nvSpPr>
-          <p:cNvPr id="12" name="TextBox 11"/>
+          <p:cNvPr id="10" name="TextBox 9"/>
           <p:cNvSpPr txBox="1"/>
           <p:nvPr/>
         </p:nvSpPr>
         <p:spPr>
           <a:xfrm>
-            <a:off x="950000" y="2770000"/>
+            <a:off x="950000" y="1570000"/>
             <a:ext cx="10400000" cy="350000"/>
           </a:xfrm>
           <a:prstGeom prst="rect">
@@ -3793,28 +3575,28 @@
           <a:p>
             <a:pPr algn="l"/>
             <a:r>
-              <a:rPr sz="1500" b="1">
-                <a:solidFill>
-                  <a:srgbClr val="333333"/>
-                </a:solidFill>
-                <a:latin typeface="Open Sans"/>
-                <a:ea typeface="Open Sans"/>
-                <a:cs typeface="Open Sans"/>
+              <a:rPr sz="1400" b="1">
+                <a:solidFill>
+                  <a:srgbClr val="1AA090"/>
+                </a:solidFill>
+                <a:latin typeface="Calibri"/>
+                <a:ea typeface="Calibri"/>
+                <a:cs typeface="Calibri"/>
               </a:rPr>
-              <a:t>Кровь под пострадавшим</a:t>
-            </a:r>
-          </a:p>
-        </p:txBody>
-      </p:sp>
-      <p:sp>
-        <p:nvSpPr>
-          <p:cNvPr id="13" name="TextBox 12"/>
+              <a:t>Тёмная / плотная одежда</a:t>
+            </a:r>
+          </a:p>
+        </p:txBody>
+      </p:sp>
+      <p:sp>
+        <p:nvSpPr>
+          <p:cNvPr id="11" name="TextBox 10"/>
           <p:cNvSpPr txBox="1"/>
           <p:nvPr/>
         </p:nvSpPr>
         <p:spPr>
           <a:xfrm>
-            <a:off x="950000" y="3150000"/>
+            <a:off x="950000" y="1950000"/>
             <a:ext cx="10400000" cy="450000"/>
           </a:xfrm>
           <a:prstGeom prst="rect">
@@ -3830,40 +3612,38 @@
           <a:p>
             <a:pPr algn="l"/>
             <a:r>
-              <a:rPr sz="1300" b="0">
-                <a:solidFill>
-                  <a:srgbClr val="666666"/>
-                </a:solidFill>
-                <a:latin typeface="Open Sans"/>
-                <a:ea typeface="Open Sans"/>
-                <a:cs typeface="Open Sans"/>
+              <a:rPr sz="1200" b="0">
+                <a:solidFill>
+                  <a:srgbClr val="777777"/>
+                </a:solidFill>
+                <a:latin typeface="Calibri"/>
+                <a:ea typeface="Calibri"/>
+                <a:cs typeface="Calibri"/>
               </a:rPr>
-              <a:t>Лужа может быть сзади / под телом — осмотрите вокруг.</a:t>
-            </a:r>
-          </a:p>
-        </p:txBody>
-      </p:sp>
-      <p:sp>
-        <p:nvSpPr>
-          <p:cNvPr id="14" name="Rectangle 13"/>
+              <a:t>Кровь плохо видна — ощупайте, приподнимите одежду при осмотре.</a:t>
+            </a:r>
+          </a:p>
+        </p:txBody>
+      </p:sp>
+      <p:sp>
+        <p:nvSpPr>
+          <p:cNvPr id="12" name="Rounded Rectangle 11"/>
           <p:cNvSpPr/>
           <p:nvPr/>
         </p:nvSpPr>
         <p:spPr>
           <a:xfrm>
-            <a:off x="700000" y="3850000"/>
+            <a:off x="700000" y="2650000"/>
             <a:ext cx="11000000" cy="1100000"/>
           </a:xfrm>
-          <a:prstGeom prst="rect">
+          <a:prstGeom prst="roundRect">
             <a:avLst/>
           </a:prstGeom>
           <a:solidFill>
-            <a:srgbClr val="FFFFFF"/>
+            <a:srgbClr val="F0F0F0"/>
           </a:solidFill>
-          <a:ln w="12700">
-            <a:solidFill>
-              <a:srgbClr val="999999"/>
-            </a:solidFill>
+          <a:ln>
+            <a:noFill/>
           </a:ln>
         </p:spPr>
         <p:style>
@@ -3890,13 +3670,13 @@
       </p:sp>
       <p:sp>
         <p:nvSpPr>
-          <p:cNvPr id="15" name="TextBox 14"/>
+          <p:cNvPr id="13" name="TextBox 12"/>
           <p:cNvSpPr txBox="1"/>
           <p:nvPr/>
         </p:nvSpPr>
         <p:spPr>
           <a:xfrm>
-            <a:off x="950000" y="3970000"/>
+            <a:off x="950000" y="2770000"/>
             <a:ext cx="10400000" cy="350000"/>
           </a:xfrm>
           <a:prstGeom prst="rect">
@@ -3912,28 +3692,28 @@
           <a:p>
             <a:pPr algn="l"/>
             <a:r>
-              <a:rPr sz="1500" b="1">
-                <a:solidFill>
-                  <a:srgbClr val="333333"/>
-                </a:solidFill>
-                <a:latin typeface="Open Sans"/>
-                <a:ea typeface="Open Sans"/>
-                <a:cs typeface="Open Sans"/>
+              <a:rPr sz="1400" b="1">
+                <a:solidFill>
+                  <a:srgbClr val="1AA090"/>
+                </a:solidFill>
+                <a:latin typeface="Calibri"/>
+                <a:ea typeface="Calibri"/>
+                <a:cs typeface="Calibri"/>
               </a:rPr>
-              <a:t>Холод, дождь, грязь</a:t>
-            </a:r>
-          </a:p>
-        </p:txBody>
-      </p:sp>
-      <p:sp>
-        <p:nvSpPr>
-          <p:cNvPr id="16" name="TextBox 15"/>
+              <a:t>Кровь под пострадавшим</a:t>
+            </a:r>
+          </a:p>
+        </p:txBody>
+      </p:sp>
+      <p:sp>
+        <p:nvSpPr>
+          <p:cNvPr id="14" name="TextBox 13"/>
           <p:cNvSpPr txBox="1"/>
           <p:nvPr/>
         </p:nvSpPr>
         <p:spPr>
           <a:xfrm>
-            <a:off x="950000" y="4350000"/>
+            <a:off x="950000" y="3150000"/>
             <a:ext cx="10400000" cy="450000"/>
           </a:xfrm>
           <a:prstGeom prst="rect">
@@ -3949,40 +3729,38 @@
           <a:p>
             <a:pPr algn="l"/>
             <a:r>
-              <a:rPr sz="1300" b="0">
-                <a:solidFill>
-                  <a:srgbClr val="666666"/>
-                </a:solidFill>
-                <a:latin typeface="Open Sans"/>
-                <a:ea typeface="Open Sans"/>
-                <a:cs typeface="Open Sans"/>
+              <a:rPr sz="1200" b="0">
+                <a:solidFill>
+                  <a:srgbClr val="777777"/>
+                </a:solidFill>
+                <a:latin typeface="Calibri"/>
+                <a:ea typeface="Calibri"/>
+                <a:cs typeface="Calibri"/>
               </a:rPr>
-              <a:t>Сложно оценить цвет кожи и объём крови — опирайтесь на слабость, пульс, дыхание.</a:t>
-            </a:r>
-          </a:p>
-        </p:txBody>
-      </p:sp>
-      <p:sp>
-        <p:nvSpPr>
-          <p:cNvPr id="17" name="Rectangle 16"/>
+              <a:t>Лужа может быть сзади / под телом — осмотрите вокруг.</a:t>
+            </a:r>
+          </a:p>
+        </p:txBody>
+      </p:sp>
+      <p:sp>
+        <p:nvSpPr>
+          <p:cNvPr id="15" name="Rounded Rectangle 14"/>
           <p:cNvSpPr/>
           <p:nvPr/>
         </p:nvSpPr>
         <p:spPr>
           <a:xfrm>
-            <a:off x="700000" y="5050000"/>
+            <a:off x="700000" y="3850000"/>
             <a:ext cx="11000000" cy="1100000"/>
           </a:xfrm>
-          <a:prstGeom prst="rect">
+          <a:prstGeom prst="roundRect">
             <a:avLst/>
           </a:prstGeom>
           <a:solidFill>
-            <a:srgbClr val="FFFFFF"/>
+            <a:srgbClr val="F0F0F0"/>
           </a:solidFill>
-          <a:ln w="12700">
-            <a:solidFill>
-              <a:srgbClr val="999999"/>
-            </a:solidFill>
+          <a:ln>
+            <a:noFill/>
           </a:ln>
         </p:spPr>
         <p:style>
@@ -4009,13 +3787,13 @@
       </p:sp>
       <p:sp>
         <p:nvSpPr>
-          <p:cNvPr id="18" name="TextBox 17"/>
+          <p:cNvPr id="16" name="TextBox 15"/>
           <p:cNvSpPr txBox="1"/>
           <p:nvPr/>
         </p:nvSpPr>
         <p:spPr>
           <a:xfrm>
-            <a:off x="950000" y="5170000"/>
+            <a:off x="950000" y="3970000"/>
             <a:ext cx="10400000" cy="350000"/>
           </a:xfrm>
           <a:prstGeom prst="rect">
@@ -4031,28 +3809,28 @@
           <a:p>
             <a:pPr algn="l"/>
             <a:r>
-              <a:rPr sz="1500" b="1">
-                <a:solidFill>
-                  <a:srgbClr val="333333"/>
-                </a:solidFill>
-                <a:latin typeface="Open Sans"/>
-                <a:ea typeface="Open Sans"/>
-                <a:cs typeface="Open Sans"/>
+              <a:rPr sz="1400" b="1">
+                <a:solidFill>
+                  <a:srgbClr val="1AA090"/>
+                </a:solidFill>
+                <a:latin typeface="Calibri"/>
+                <a:ea typeface="Calibri"/>
+                <a:cs typeface="Calibri"/>
               </a:rPr>
-              <a:t>Несколько пострадавших</a:t>
-            </a:r>
-          </a:p>
-        </p:txBody>
-      </p:sp>
-      <p:sp>
-        <p:nvSpPr>
-          <p:cNvPr id="19" name="TextBox 18"/>
+              <a:t>Холод, дождь, грязь</a:t>
+            </a:r>
+          </a:p>
+        </p:txBody>
+      </p:sp>
+      <p:sp>
+        <p:nvSpPr>
+          <p:cNvPr id="17" name="TextBox 16"/>
           <p:cNvSpPr txBox="1"/>
           <p:nvPr/>
         </p:nvSpPr>
         <p:spPr>
           <a:xfrm>
-            <a:off x="950000" y="5550000"/>
+            <a:off x="950000" y="4350000"/>
             <a:ext cx="10400000" cy="450000"/>
           </a:xfrm>
           <a:prstGeom prst="rect">
@@ -4068,13 +3846,130 @@
           <a:p>
             <a:pPr algn="l"/>
             <a:r>
-              <a:rPr sz="1300" b="0">
-                <a:solidFill>
-                  <a:srgbClr val="666666"/>
-                </a:solidFill>
-                <a:latin typeface="Open Sans"/>
-                <a:ea typeface="Open Sans"/>
-                <a:cs typeface="Open Sans"/>
+              <a:rPr sz="1200" b="0">
+                <a:solidFill>
+                  <a:srgbClr val="777777"/>
+                </a:solidFill>
+                <a:latin typeface="Calibri"/>
+                <a:ea typeface="Calibri"/>
+                <a:cs typeface="Calibri"/>
+              </a:rPr>
+              <a:t>Сложно оценить цвет кожи — опирайтесь на слабость, пульс, дыхание.</a:t>
+            </a:r>
+          </a:p>
+        </p:txBody>
+      </p:sp>
+      <p:sp>
+        <p:nvSpPr>
+          <p:cNvPr id="18" name="Rounded Rectangle 17"/>
+          <p:cNvSpPr/>
+          <p:nvPr/>
+        </p:nvSpPr>
+        <p:spPr>
+          <a:xfrm>
+            <a:off x="700000" y="5050000"/>
+            <a:ext cx="11000000" cy="1100000"/>
+          </a:xfrm>
+          <a:prstGeom prst="roundRect">
+            <a:avLst/>
+          </a:prstGeom>
+          <a:solidFill>
+            <a:srgbClr val="F0F0F0"/>
+          </a:solidFill>
+          <a:ln>
+            <a:noFill/>
+          </a:ln>
+        </p:spPr>
+        <p:style>
+          <a:lnRef idx="1">
+            <a:schemeClr val="accent1"/>
+          </a:lnRef>
+          <a:fillRef idx="3">
+            <a:schemeClr val="accent1"/>
+          </a:fillRef>
+          <a:effectRef idx="2">
+            <a:schemeClr val="accent1"/>
+          </a:effectRef>
+          <a:fontRef idx="minor">
+            <a:schemeClr val="lt1"/>
+          </a:fontRef>
+        </p:style>
+        <p:txBody>
+          <a:bodyPr rtlCol="0" anchor="ctr"/>
+          <a:lstStyle/>
+          <a:p>
+            <a:pPr algn="ctr"/>
+          </a:p>
+        </p:txBody>
+      </p:sp>
+      <p:sp>
+        <p:nvSpPr>
+          <p:cNvPr id="19" name="TextBox 18"/>
+          <p:cNvSpPr txBox="1"/>
+          <p:nvPr/>
+        </p:nvSpPr>
+        <p:spPr>
+          <a:xfrm>
+            <a:off x="950000" y="5170000"/>
+            <a:ext cx="10400000" cy="350000"/>
+          </a:xfrm>
+          <a:prstGeom prst="rect">
+            <a:avLst/>
+          </a:prstGeom>
+          <a:noFill/>
+        </p:spPr>
+        <p:txBody>
+          <a:bodyPr wrap="square" anchor="t">
+            <a:spAutoFit/>
+          </a:bodyPr>
+          <a:lstStyle/>
+          <a:p>
+            <a:pPr algn="l"/>
+            <a:r>
+              <a:rPr sz="1400" b="1">
+                <a:solidFill>
+                  <a:srgbClr val="1AA090"/>
+                </a:solidFill>
+                <a:latin typeface="Calibri"/>
+                <a:ea typeface="Calibri"/>
+                <a:cs typeface="Calibri"/>
+              </a:rPr>
+              <a:t>Несколько пострадавших</a:t>
+            </a:r>
+          </a:p>
+        </p:txBody>
+      </p:sp>
+      <p:sp>
+        <p:nvSpPr>
+          <p:cNvPr id="20" name="TextBox 19"/>
+          <p:cNvSpPr txBox="1"/>
+          <p:nvPr/>
+        </p:nvSpPr>
+        <p:spPr>
+          <a:xfrm>
+            <a:off x="950000" y="5550000"/>
+            <a:ext cx="10400000" cy="450000"/>
+          </a:xfrm>
+          <a:prstGeom prst="rect">
+            <a:avLst/>
+          </a:prstGeom>
+          <a:noFill/>
+        </p:spPr>
+        <p:txBody>
+          <a:bodyPr wrap="square" anchor="t">
+            <a:spAutoFit/>
+          </a:bodyPr>
+          <a:lstStyle/>
+          <a:p>
+            <a:pPr algn="l"/>
+            <a:r>
+              <a:rPr sz="1200" b="0">
+                <a:solidFill>
+                  <a:srgbClr val="777777"/>
+                </a:solidFill>
+                <a:latin typeface="Calibri"/>
+                <a:ea typeface="Calibri"/>
+                <a:cs typeface="Calibri"/>
               </a:rPr>
               <a:t>Интенсивное кровотечение ищите в первую очередь у каждого.</a:t>
             </a:r>
@@ -4144,57 +4039,20 @@
       </p:sp>
       <p:sp>
         <p:nvSpPr>
-          <p:cNvPr id="3" name="TextBox 2"/>
-          <p:cNvSpPr txBox="1"/>
-          <p:nvPr/>
-        </p:nvSpPr>
-        <p:spPr>
-          <a:xfrm>
-            <a:off x="700000" y="280000"/>
-            <a:ext cx="11000000" cy="550000"/>
-          </a:xfrm>
-          <a:prstGeom prst="rect">
-            <a:avLst/>
-          </a:prstGeom>
-          <a:noFill/>
-        </p:spPr>
-        <p:txBody>
-          <a:bodyPr wrap="square" anchor="t">
-            <a:spAutoFit/>
-          </a:bodyPr>
-          <a:lstStyle/>
-          <a:p>
-            <a:pPr algn="l"/>
-            <a:r>
-              <a:rPr sz="2200" b="1">
-                <a:solidFill>
-                  <a:srgbClr val="333333"/>
-                </a:solidFill>
-                <a:latin typeface="Open Sans"/>
-                <a:ea typeface="Open Sans"/>
-                <a:cs typeface="Open Sans"/>
-              </a:rPr>
-              <a:t>ОРИЕНТИРЫ ПО ОБЪЁМУ КРОВОПОТЕРИ</a:t>
-            </a:r>
-          </a:p>
-        </p:txBody>
-      </p:sp>
-      <p:sp>
-        <p:nvSpPr>
-          <p:cNvPr id="4" name="Rectangle 3"/>
+          <p:cNvPr id="3" name="Rectangle 2"/>
           <p:cNvSpPr/>
           <p:nvPr/>
         </p:nvSpPr>
         <p:spPr>
           <a:xfrm>
-            <a:off x="700000" y="880000"/>
-            <a:ext cx="9000000" cy="25000"/>
+            <a:off x="0" y="0"/>
+            <a:ext cx="12191695" cy="1300000"/>
           </a:xfrm>
           <a:prstGeom prst="rect">
             <a:avLst/>
           </a:prstGeom>
           <a:solidFill>
-            <a:srgbClr val="555555"/>
+            <a:srgbClr val="F8F8F8"/>
           </a:solidFill>
           <a:ln>
             <a:noFill/>
@@ -4224,14 +4082,14 @@
       </p:sp>
       <p:sp>
         <p:nvSpPr>
-          <p:cNvPr id="5" name="TextBox 4"/>
+          <p:cNvPr id="4" name="TextBox 3"/>
           <p:cNvSpPr txBox="1"/>
           <p:nvPr/>
         </p:nvSpPr>
         <p:spPr>
           <a:xfrm>
-            <a:off x="700000" y="950000"/>
-            <a:ext cx="11000000" cy="350000"/>
+            <a:off x="700000" y="220000"/>
+            <a:ext cx="11200000" cy="550000"/>
           </a:xfrm>
           <a:prstGeom prst="rect">
             <a:avLst/>
@@ -4246,35 +4104,35 @@
           <a:p>
             <a:pPr algn="l"/>
             <a:r>
-              <a:rPr sz="1200" b="0">
-                <a:solidFill>
-                  <a:srgbClr val="666666"/>
-                </a:solidFill>
-                <a:latin typeface="Open Sans"/>
-                <a:ea typeface="Open Sans"/>
-                <a:cs typeface="Open Sans"/>
+              <a:rPr sz="2000" b="1">
+                <a:solidFill>
+                  <a:srgbClr val="333333"/>
+                </a:solidFill>
+                <a:latin typeface="Calibri"/>
+                <a:ea typeface="Calibri"/>
+                <a:cs typeface="Calibri"/>
               </a:rPr>
-              <a:t>Оказание первой помощи при наружных кровотечениях</a:t>
-            </a:r>
-          </a:p>
-        </p:txBody>
-      </p:sp>
-      <p:sp>
-        <p:nvSpPr>
-          <p:cNvPr id="6" name="Rectangle 5"/>
+              <a:t>ОРИЕНТИРЫ ПО ОБЪЁМУ КРОВОПОТЕРИ</a:t>
+            </a:r>
+          </a:p>
+        </p:txBody>
+      </p:sp>
+      <p:sp>
+        <p:nvSpPr>
+          <p:cNvPr id="5" name="Rectangle 4"/>
           <p:cNvSpPr/>
           <p:nvPr/>
         </p:nvSpPr>
         <p:spPr>
           <a:xfrm>
-            <a:off x="0" y="2800000"/>
-            <a:ext cx="420000" cy="420000"/>
+            <a:off x="700000" y="820000"/>
+            <a:ext cx="8500000" cy="28000"/>
           </a:xfrm>
           <a:prstGeom prst="rect">
             <a:avLst/>
           </a:prstGeom>
           <a:solidFill>
-            <a:srgbClr val="555555"/>
+            <a:srgbClr val="606060"/>
           </a:solidFill>
           <a:ln>
             <a:noFill/>
@@ -4304,14 +4162,94 @@
       </p:sp>
       <p:sp>
         <p:nvSpPr>
-          <p:cNvPr id="7" name="TextBox 6"/>
+          <p:cNvPr id="6" name="TextBox 5"/>
           <p:cNvSpPr txBox="1"/>
           <p:nvPr/>
         </p:nvSpPr>
         <p:spPr>
           <a:xfrm>
-            <a:off x="0" y="2800000"/>
-            <a:ext cx="420000" cy="420000"/>
+            <a:off x="700000" y="880000"/>
+            <a:ext cx="11000000" cy="320000"/>
+          </a:xfrm>
+          <a:prstGeom prst="rect">
+            <a:avLst/>
+          </a:prstGeom>
+          <a:noFill/>
+        </p:spPr>
+        <p:txBody>
+          <a:bodyPr wrap="square" anchor="t">
+            <a:spAutoFit/>
+          </a:bodyPr>
+          <a:lstStyle/>
+          <a:p>
+            <a:pPr algn="l"/>
+            <a:r>
+              <a:rPr sz="1100" b="0">
+                <a:solidFill>
+                  <a:srgbClr val="777777"/>
+                </a:solidFill>
+                <a:latin typeface="Calibri"/>
+                <a:ea typeface="Calibri"/>
+                <a:cs typeface="Calibri"/>
+              </a:rPr>
+              <a:t>Оказание первой помощи при наружных кровотечениях</a:t>
+            </a:r>
+          </a:p>
+        </p:txBody>
+      </p:sp>
+      <p:sp>
+        <p:nvSpPr>
+          <p:cNvPr id="7" name="Rectangle 6"/>
+          <p:cNvSpPr/>
+          <p:nvPr/>
+        </p:nvSpPr>
+        <p:spPr>
+          <a:xfrm>
+            <a:off x="0" y="2700000"/>
+            <a:ext cx="400000" cy="400000"/>
+          </a:xfrm>
+          <a:prstGeom prst="rect">
+            <a:avLst/>
+          </a:prstGeom>
+          <a:solidFill>
+            <a:srgbClr val="606060"/>
+          </a:solidFill>
+          <a:ln>
+            <a:noFill/>
+          </a:ln>
+        </p:spPr>
+        <p:style>
+          <a:lnRef idx="1">
+            <a:schemeClr val="accent1"/>
+          </a:lnRef>
+          <a:fillRef idx="3">
+            <a:schemeClr val="accent1"/>
+          </a:fillRef>
+          <a:effectRef idx="2">
+            <a:schemeClr val="accent1"/>
+          </a:effectRef>
+          <a:fontRef idx="minor">
+            <a:schemeClr val="lt1"/>
+          </a:fontRef>
+        </p:style>
+        <p:txBody>
+          <a:bodyPr rtlCol="0" anchor="ctr"/>
+          <a:lstStyle/>
+          <a:p>
+            <a:pPr algn="ctr"/>
+          </a:p>
+        </p:txBody>
+      </p:sp>
+      <p:sp>
+        <p:nvSpPr>
+          <p:cNvPr id="8" name="TextBox 7"/>
+          <p:cNvSpPr txBox="1"/>
+          <p:nvPr/>
+        </p:nvSpPr>
+        <p:spPr>
+          <a:xfrm>
+            <a:off x="0" y="2700000"/>
+            <a:ext cx="400000" cy="400000"/>
           </a:xfrm>
           <a:prstGeom prst="rect">
             <a:avLst/>
@@ -4326,13 +4264,13 @@
           <a:p>
             <a:pPr algn="ctr"/>
             <a:r>
-              <a:rPr sz="1400" b="1">
+              <a:rPr sz="1300" b="1">
                 <a:solidFill>
                   <a:srgbClr val="FFFFFF"/>
                 </a:solidFill>
-                <a:latin typeface="Open Sans"/>
-                <a:ea typeface="Open Sans"/>
-                <a:cs typeface="Open Sans"/>
+                <a:latin typeface="Calibri"/>
+                <a:ea typeface="Calibri"/>
+                <a:cs typeface="Calibri"/>
               </a:rPr>
               <a:t>11</a:t>
             </a:r>
@@ -4341,7 +4279,7 @@
       </p:sp>
       <p:graphicFrame>
         <p:nvGraphicFramePr>
-          <p:cNvPr id="8" name="Table 7"/>
+          <p:cNvPr id="9" name="Table 8"/>
           <p:cNvGraphicFramePr>
             <a:graphicFrameLocks noGrp="1"/>
           </p:cNvGraphicFramePr>
@@ -4373,9 +4311,9 @@
                           <a:solidFill>
                             <a:srgbClr val="FFFFFF"/>
                           </a:solidFill>
-                          <a:latin typeface="Open Sans"/>
-                          <a:ea typeface="Open Sans"/>
-                          <a:cs typeface="Open Sans"/>
+                          <a:latin typeface="Calibri"/>
+                          <a:ea typeface="Calibri"/>
+                          <a:cs typeface="Calibri"/>
                         </a:rPr>
                         <a:t>Объём (ориентир)</a:t>
                       </a:r>
@@ -4383,7 +4321,7 @@
                   </a:txBody>
                   <a:tcPr>
                     <a:solidFill>
-                      <a:srgbClr val="444444"/>
+                      <a:srgbClr val="1AA090"/>
                     </a:solidFill>
                   </a:tcPr>
                 </a:tc>
@@ -4397,9 +4335,9 @@
                           <a:solidFill>
                             <a:srgbClr val="FFFFFF"/>
                           </a:solidFill>
-                          <a:latin typeface="Open Sans"/>
-                          <a:ea typeface="Open Sans"/>
-                          <a:cs typeface="Open Sans"/>
+                          <a:latin typeface="Calibri"/>
+                          <a:ea typeface="Calibri"/>
+                          <a:cs typeface="Calibri"/>
                         </a:rPr>
                         <a:t>Доля ОЦК</a:t>
                       </a:r>
@@ -4407,7 +4345,7 @@
                   </a:txBody>
                   <a:tcPr>
                     <a:solidFill>
-                      <a:srgbClr val="444444"/>
+                      <a:srgbClr val="1AA090"/>
                     </a:solidFill>
                   </a:tcPr>
                 </a:tc>
@@ -4421,9 +4359,9 @@
                           <a:solidFill>
                             <a:srgbClr val="FFFFFF"/>
                           </a:solidFill>
-                          <a:latin typeface="Open Sans"/>
-                          <a:ea typeface="Open Sans"/>
-                          <a:cs typeface="Open Sans"/>
+                          <a:latin typeface="Calibri"/>
+                          <a:ea typeface="Calibri"/>
+                          <a:cs typeface="Calibri"/>
                         </a:rPr>
                         <a:t>Типичное состояние</a:t>
                       </a:r>
@@ -4431,7 +4369,7 @@
                   </a:txBody>
                   <a:tcPr>
                     <a:solidFill>
-                      <a:srgbClr val="444444"/>
+                      <a:srgbClr val="1AA090"/>
                     </a:solidFill>
                   </a:tcPr>
                 </a:tc>
@@ -4447,9 +4385,9 @@
                           <a:solidFill>
                             <a:srgbClr val="333333"/>
                           </a:solidFill>
-                          <a:latin typeface="Open Sans"/>
-                          <a:ea typeface="Open Sans"/>
-                          <a:cs typeface="Open Sans"/>
+                          <a:latin typeface="Calibri"/>
+                          <a:ea typeface="Calibri"/>
+                          <a:cs typeface="Calibri"/>
                         </a:rPr>
                         <a:t>До ~500 мл</a:t>
                       </a:r>
@@ -4471,9 +4409,9 @@
                           <a:solidFill>
                             <a:srgbClr val="333333"/>
                           </a:solidFill>
-                          <a:latin typeface="Open Sans"/>
-                          <a:ea typeface="Open Sans"/>
-                          <a:cs typeface="Open Sans"/>
+                          <a:latin typeface="Calibri"/>
+                          <a:ea typeface="Calibri"/>
+                          <a:cs typeface="Calibri"/>
                         </a:rPr>
                         <a:t>≈ 10%</a:t>
                       </a:r>
@@ -4495,9 +4433,9 @@
                           <a:solidFill>
                             <a:srgbClr val="333333"/>
                           </a:solidFill>
-                          <a:latin typeface="Open Sans"/>
-                          <a:ea typeface="Open Sans"/>
-                          <a:cs typeface="Open Sans"/>
+                          <a:latin typeface="Calibri"/>
+                          <a:ea typeface="Calibri"/>
+                          <a:cs typeface="Calibri"/>
                         </a:rPr>
                         <a:t>Слабость, жажда</a:t>
                       </a:r>
@@ -4521,9 +4459,9 @@
                           <a:solidFill>
                             <a:srgbClr val="333333"/>
                           </a:solidFill>
-                          <a:latin typeface="Open Sans"/>
-                          <a:ea typeface="Open Sans"/>
-                          <a:cs typeface="Open Sans"/>
+                          <a:latin typeface="Calibri"/>
+                          <a:ea typeface="Calibri"/>
+                          <a:cs typeface="Calibri"/>
                         </a:rPr>
                         <a:t>500–1000 мл</a:t>
                       </a:r>
@@ -4531,7 +4469,7 @@
                   </a:txBody>
                   <a:tcPr>
                     <a:solidFill>
-                      <a:srgbClr val="F5F5F5"/>
+                      <a:srgbClr val="F0FAF8"/>
                     </a:solidFill>
                   </a:tcPr>
                 </a:tc>
@@ -4545,9 +4483,9 @@
                           <a:solidFill>
                             <a:srgbClr val="333333"/>
                           </a:solidFill>
-                          <a:latin typeface="Open Sans"/>
-                          <a:ea typeface="Open Sans"/>
-                          <a:cs typeface="Open Sans"/>
+                          <a:latin typeface="Calibri"/>
+                          <a:ea typeface="Calibri"/>
+                          <a:cs typeface="Calibri"/>
                         </a:rPr>
                         <a:t>≈ 10–20%</a:t>
                       </a:r>
@@ -4555,7 +4493,7 @@
                   </a:txBody>
                   <a:tcPr>
                     <a:solidFill>
-                      <a:srgbClr val="F5F5F5"/>
+                      <a:srgbClr val="F0FAF8"/>
                     </a:solidFill>
                   </a:tcPr>
                 </a:tc>
@@ -4569,9 +4507,9 @@
                           <a:solidFill>
                             <a:srgbClr val="333333"/>
                           </a:solidFill>
-                          <a:latin typeface="Open Sans"/>
-                          <a:ea typeface="Open Sans"/>
-                          <a:cs typeface="Open Sans"/>
+                          <a:latin typeface="Calibri"/>
+                          <a:ea typeface="Calibri"/>
+                          <a:cs typeface="Calibri"/>
                         </a:rPr>
                         <a:t>Бледность, учащённый пульс</a:t>
                       </a:r>
@@ -4579,7 +4517,7 @@
                   </a:txBody>
                   <a:tcPr>
                     <a:solidFill>
-                      <a:srgbClr val="F5F5F5"/>
+                      <a:srgbClr val="F0FAF8"/>
                     </a:solidFill>
                   </a:tcPr>
                 </a:tc>
@@ -4595,9 +4533,9 @@
                           <a:solidFill>
                             <a:srgbClr val="333333"/>
                           </a:solidFill>
-                          <a:latin typeface="Open Sans"/>
-                          <a:ea typeface="Open Sans"/>
-                          <a:cs typeface="Open Sans"/>
+                          <a:latin typeface="Calibri"/>
+                          <a:ea typeface="Calibri"/>
+                          <a:cs typeface="Calibri"/>
                         </a:rPr>
                         <a:t>1000–1500 мл</a:t>
                       </a:r>
@@ -4619,9 +4557,9 @@
                           <a:solidFill>
                             <a:srgbClr val="333333"/>
                           </a:solidFill>
-                          <a:latin typeface="Open Sans"/>
-                          <a:ea typeface="Open Sans"/>
-                          <a:cs typeface="Open Sans"/>
+                          <a:latin typeface="Calibri"/>
+                          <a:ea typeface="Calibri"/>
+                          <a:cs typeface="Calibri"/>
                         </a:rPr>
                         <a:t>≈ 20–30%</a:t>
                       </a:r>
@@ -4643,9 +4581,9 @@
                           <a:solidFill>
                             <a:srgbClr val="333333"/>
                           </a:solidFill>
-                          <a:latin typeface="Open Sans"/>
-                          <a:ea typeface="Open Sans"/>
-                          <a:cs typeface="Open Sans"/>
+                          <a:latin typeface="Calibri"/>
+                          <a:ea typeface="Calibri"/>
+                          <a:cs typeface="Calibri"/>
                         </a:rPr>
                         <a:t>Обмороки, холодный пот</a:t>
                       </a:r>
@@ -4669,9 +4607,9 @@
                           <a:solidFill>
                             <a:srgbClr val="ED1C24"/>
                           </a:solidFill>
-                          <a:latin typeface="Open Sans"/>
-                          <a:ea typeface="Open Sans"/>
-                          <a:cs typeface="Open Sans"/>
+                          <a:latin typeface="Calibri"/>
+                          <a:ea typeface="Calibri"/>
+                          <a:cs typeface="Calibri"/>
                         </a:rPr>
                         <a:t>&gt;1500–2000 мл</a:t>
                       </a:r>
@@ -4679,7 +4617,7 @@
                   </a:txBody>
                   <a:tcPr>
                     <a:solidFill>
-                      <a:srgbClr val="F5F5F5"/>
+                      <a:srgbClr val="F0FAF8"/>
                     </a:solidFill>
                   </a:tcPr>
                 </a:tc>
@@ -4693,9 +4631,9 @@
                           <a:solidFill>
                             <a:srgbClr val="ED1C24"/>
                           </a:solidFill>
-                          <a:latin typeface="Open Sans"/>
-                          <a:ea typeface="Open Sans"/>
-                          <a:cs typeface="Open Sans"/>
+                          <a:latin typeface="Calibri"/>
+                          <a:ea typeface="Calibri"/>
+                          <a:cs typeface="Calibri"/>
                         </a:rPr>
                         <a:t>&gt; 30%</a:t>
                       </a:r>
@@ -4703,7 +4641,7 @@
                   </a:txBody>
                   <a:tcPr>
                     <a:solidFill>
-                      <a:srgbClr val="F5F5F5"/>
+                      <a:srgbClr val="F0FAF8"/>
                     </a:solidFill>
                   </a:tcPr>
                 </a:tc>
@@ -4717,9 +4655,9 @@
                           <a:solidFill>
                             <a:srgbClr val="ED1C24"/>
                           </a:solidFill>
-                          <a:latin typeface="Open Sans"/>
-                          <a:ea typeface="Open Sans"/>
-                          <a:cs typeface="Open Sans"/>
+                          <a:latin typeface="Calibri"/>
+                          <a:ea typeface="Calibri"/>
+                          <a:cs typeface="Calibri"/>
                         </a:rPr>
                         <a:t>Шок, угроза жизни</a:t>
                       </a:r>
@@ -4727,7 +4665,7 @@
                   </a:txBody>
                   <a:tcPr>
                     <a:solidFill>
-                      <a:srgbClr val="F5F5F5"/>
+                      <a:srgbClr val="F0FAF8"/>
                     </a:solidFill>
                   </a:tcPr>
                 </a:tc>
@@ -4738,7 +4676,7 @@
       </p:graphicFrame>
       <p:sp>
         <p:nvSpPr>
-          <p:cNvPr id="9" name="TextBox 8"/>
+          <p:cNvPr id="10" name="TextBox 9"/>
           <p:cNvSpPr txBox="1"/>
           <p:nvPr/>
         </p:nvSpPr>
@@ -4760,15 +4698,15 @@
           <a:p>
             <a:pPr algn="l"/>
             <a:r>
-              <a:rPr sz="1400" b="0">
-                <a:solidFill>
-                  <a:srgbClr val="666666"/>
-                </a:solidFill>
-                <a:latin typeface="Open Sans"/>
-                <a:ea typeface="Open Sans"/>
-                <a:cs typeface="Open Sans"/>
+              <a:rPr sz="1300" b="0">
+                <a:solidFill>
+                  <a:srgbClr val="777777"/>
+                </a:solidFill>
+                <a:latin typeface="Calibri"/>
+                <a:ea typeface="Calibri"/>
+                <a:cs typeface="Calibri"/>
               </a:rPr>
-              <a:t>На месте точный объём измерить нельзя — таблица помогает понять тяжесть по признакам состояния пострадавшего.</a:t>
+              <a:t>На месте точный объём измерить нельзя — таблица помогает понять тяжесть по признакам состояния.</a:t>
             </a:r>
           </a:p>
         </p:txBody>
@@ -4836,57 +4774,20 @@
       </p:sp>
       <p:sp>
         <p:nvSpPr>
-          <p:cNvPr id="3" name="TextBox 2"/>
-          <p:cNvSpPr txBox="1"/>
-          <p:nvPr/>
-        </p:nvSpPr>
-        <p:spPr>
-          <a:xfrm>
-            <a:off x="700000" y="280000"/>
-            <a:ext cx="11000000" cy="550000"/>
-          </a:xfrm>
-          <a:prstGeom prst="rect">
-            <a:avLst/>
-          </a:prstGeom>
-          <a:noFill/>
-        </p:spPr>
-        <p:txBody>
-          <a:bodyPr wrap="square" anchor="t">
-            <a:spAutoFit/>
-          </a:bodyPr>
-          <a:lstStyle/>
-          <a:p>
-            <a:pPr algn="l"/>
-            <a:r>
-              <a:rPr sz="2200" b="1">
-                <a:solidFill>
-                  <a:srgbClr val="333333"/>
-                </a:solidFill>
-                <a:latin typeface="Open Sans"/>
-                <a:ea typeface="Open Sans"/>
-                <a:cs typeface="Open Sans"/>
-              </a:rPr>
-              <a:t>ГЛАВНОЕ ЗАПОМНИТЬ</a:t>
-            </a:r>
-          </a:p>
-        </p:txBody>
-      </p:sp>
-      <p:sp>
-        <p:nvSpPr>
-          <p:cNvPr id="4" name="Rectangle 3"/>
+          <p:cNvPr id="3" name="Rectangle 2"/>
           <p:cNvSpPr/>
           <p:nvPr/>
         </p:nvSpPr>
         <p:spPr>
           <a:xfrm>
-            <a:off x="700000" y="880000"/>
-            <a:ext cx="9000000" cy="25000"/>
+            <a:off x="0" y="0"/>
+            <a:ext cx="12191695" cy="1300000"/>
           </a:xfrm>
           <a:prstGeom prst="rect">
             <a:avLst/>
           </a:prstGeom>
           <a:solidFill>
-            <a:srgbClr val="555555"/>
+            <a:srgbClr val="F8F8F8"/>
           </a:solidFill>
           <a:ln>
             <a:noFill/>
@@ -4916,14 +4817,14 @@
       </p:sp>
       <p:sp>
         <p:nvSpPr>
-          <p:cNvPr id="5" name="TextBox 4"/>
+          <p:cNvPr id="4" name="TextBox 3"/>
           <p:cNvSpPr txBox="1"/>
           <p:nvPr/>
         </p:nvSpPr>
         <p:spPr>
           <a:xfrm>
-            <a:off x="700000" y="950000"/>
-            <a:ext cx="11000000" cy="350000"/>
+            <a:off x="700000" y="220000"/>
+            <a:ext cx="11200000" cy="550000"/>
           </a:xfrm>
           <a:prstGeom prst="rect">
             <a:avLst/>
@@ -4938,35 +4839,35 @@
           <a:p>
             <a:pPr algn="l"/>
             <a:r>
-              <a:rPr sz="1200" b="0">
-                <a:solidFill>
-                  <a:srgbClr val="666666"/>
-                </a:solidFill>
-                <a:latin typeface="Open Sans"/>
-                <a:ea typeface="Open Sans"/>
-                <a:cs typeface="Open Sans"/>
+              <a:rPr sz="2000" b="1">
+                <a:solidFill>
+                  <a:srgbClr val="333333"/>
+                </a:solidFill>
+                <a:latin typeface="Calibri"/>
+                <a:ea typeface="Calibri"/>
+                <a:cs typeface="Calibri"/>
               </a:rPr>
-              <a:t>Оказание первой помощи при наружных кровотечениях</a:t>
-            </a:r>
-          </a:p>
-        </p:txBody>
-      </p:sp>
-      <p:sp>
-        <p:nvSpPr>
-          <p:cNvPr id="6" name="Rectangle 5"/>
+              <a:t>ГЛАВНОЕ ЗАПОМНИТЬ</a:t>
+            </a:r>
+          </a:p>
+        </p:txBody>
+      </p:sp>
+      <p:sp>
+        <p:nvSpPr>
+          <p:cNvPr id="5" name="Rectangle 4"/>
           <p:cNvSpPr/>
           <p:nvPr/>
         </p:nvSpPr>
         <p:spPr>
           <a:xfrm>
-            <a:off x="0" y="2800000"/>
-            <a:ext cx="420000" cy="420000"/>
+            <a:off x="700000" y="820000"/>
+            <a:ext cx="8500000" cy="28000"/>
           </a:xfrm>
           <a:prstGeom prst="rect">
             <a:avLst/>
           </a:prstGeom>
           <a:solidFill>
-            <a:srgbClr val="555555"/>
+            <a:srgbClr val="606060"/>
           </a:solidFill>
           <a:ln>
             <a:noFill/>
@@ -4996,14 +4897,14 @@
       </p:sp>
       <p:sp>
         <p:nvSpPr>
-          <p:cNvPr id="7" name="TextBox 6"/>
+          <p:cNvPr id="6" name="TextBox 5"/>
           <p:cNvSpPr txBox="1"/>
           <p:nvPr/>
         </p:nvSpPr>
         <p:spPr>
           <a:xfrm>
-            <a:off x="0" y="2800000"/>
-            <a:ext cx="420000" cy="420000"/>
+            <a:off x="700000" y="880000"/>
+            <a:ext cx="11000000" cy="320000"/>
           </a:xfrm>
           <a:prstGeom prst="rect">
             <a:avLst/>
@@ -5011,47 +4912,45 @@
           <a:noFill/>
         </p:spPr>
         <p:txBody>
-          <a:bodyPr wrap="square" anchor="ctr">
+          <a:bodyPr wrap="square" anchor="t">
             <a:spAutoFit/>
           </a:bodyPr>
           <a:lstStyle/>
           <a:p>
-            <a:pPr algn="ctr"/>
-            <a:r>
-              <a:rPr sz="1400" b="1">
-                <a:solidFill>
-                  <a:srgbClr val="FFFFFF"/>
-                </a:solidFill>
-                <a:latin typeface="Open Sans"/>
-                <a:ea typeface="Open Sans"/>
-                <a:cs typeface="Open Sans"/>
+            <a:pPr algn="l"/>
+            <a:r>
+              <a:rPr sz="1100" b="0">
+                <a:solidFill>
+                  <a:srgbClr val="777777"/>
+                </a:solidFill>
+                <a:latin typeface="Calibri"/>
+                <a:ea typeface="Calibri"/>
+                <a:cs typeface="Calibri"/>
               </a:rPr>
-              <a:t>12</a:t>
-            </a:r>
-          </a:p>
-        </p:txBody>
-      </p:sp>
-      <p:sp>
-        <p:nvSpPr>
-          <p:cNvPr id="8" name="Rectangle 7"/>
+              <a:t>Оказание первой помощи при наружных кровотечениях</a:t>
+            </a:r>
+          </a:p>
+        </p:txBody>
+      </p:sp>
+      <p:sp>
+        <p:nvSpPr>
+          <p:cNvPr id="7" name="Rectangle 6"/>
           <p:cNvSpPr/>
           <p:nvPr/>
         </p:nvSpPr>
         <p:spPr>
           <a:xfrm>
-            <a:off x="700000" y="1500000"/>
-            <a:ext cx="11000000" cy="1000000"/>
+            <a:off x="0" y="2700000"/>
+            <a:ext cx="400000" cy="400000"/>
           </a:xfrm>
           <a:prstGeom prst="rect">
             <a:avLst/>
           </a:prstGeom>
           <a:solidFill>
-            <a:srgbClr val="FFFFFF"/>
+            <a:srgbClr val="606060"/>
           </a:solidFill>
-          <a:ln w="12700">
-            <a:solidFill>
-              <a:srgbClr val="999999"/>
-            </a:solidFill>
+          <a:ln>
+            <a:noFill/>
           </a:ln>
         </p:spPr>
         <p:style>
@@ -5078,20 +4977,57 @@
       </p:sp>
       <p:sp>
         <p:nvSpPr>
-          <p:cNvPr id="9" name="Rectangle 8"/>
+          <p:cNvPr id="8" name="TextBox 7"/>
+          <p:cNvSpPr txBox="1"/>
+          <p:nvPr/>
+        </p:nvSpPr>
+        <p:spPr>
+          <a:xfrm>
+            <a:off x="0" y="2700000"/>
+            <a:ext cx="400000" cy="400000"/>
+          </a:xfrm>
+          <a:prstGeom prst="rect">
+            <a:avLst/>
+          </a:prstGeom>
+          <a:noFill/>
+        </p:spPr>
+        <p:txBody>
+          <a:bodyPr wrap="square" anchor="ctr">
+            <a:spAutoFit/>
+          </a:bodyPr>
+          <a:lstStyle/>
+          <a:p>
+            <a:pPr algn="ctr"/>
+            <a:r>
+              <a:rPr sz="1300" b="1">
+                <a:solidFill>
+                  <a:srgbClr val="FFFFFF"/>
+                </a:solidFill>
+                <a:latin typeface="Calibri"/>
+                <a:ea typeface="Calibri"/>
+                <a:cs typeface="Calibri"/>
+              </a:rPr>
+              <a:t>12</a:t>
+            </a:r>
+          </a:p>
+        </p:txBody>
+      </p:sp>
+      <p:sp>
+        <p:nvSpPr>
+          <p:cNvPr id="9" name="Rounded Rectangle 8"/>
           <p:cNvSpPr/>
           <p:nvPr/>
         </p:nvSpPr>
         <p:spPr>
           <a:xfrm>
             <a:off x="700000" y="1500000"/>
-            <a:ext cx="90000" cy="1000000"/>
-          </a:xfrm>
-          <a:prstGeom prst="rect">
+            <a:ext cx="11000000" cy="1000000"/>
+          </a:xfrm>
+          <a:prstGeom prst="roundRect">
             <a:avLst/>
           </a:prstGeom>
           <a:solidFill>
-            <a:srgbClr val="ED1C24"/>
+            <a:srgbClr val="F0F0F0"/>
           </a:solidFill>
           <a:ln>
             <a:noFill/>
@@ -5121,62 +5057,23 @@
       </p:sp>
       <p:sp>
         <p:nvSpPr>
-          <p:cNvPr id="10" name="TextBox 9"/>
-          <p:cNvSpPr txBox="1"/>
-          <p:nvPr/>
-        </p:nvSpPr>
-        <p:spPr>
-          <a:xfrm>
-            <a:off x="1000000" y="1650000"/>
-            <a:ext cx="10400000" cy="700000"/>
-          </a:xfrm>
-          <a:prstGeom prst="rect">
-            <a:avLst/>
-          </a:prstGeom>
-          <a:noFill/>
-        </p:spPr>
-        <p:txBody>
-          <a:bodyPr wrap="square" anchor="ctr">
-            <a:spAutoFit/>
-          </a:bodyPr>
-          <a:lstStyle/>
-          <a:p>
-            <a:pPr algn="l"/>
-            <a:r>
-              <a:rPr sz="1400" b="0">
-                <a:solidFill>
-                  <a:srgbClr val="333333"/>
-                </a:solidFill>
-                <a:latin typeface="Open Sans"/>
-                <a:ea typeface="Open Sans"/>
-                <a:cs typeface="Open Sans"/>
-              </a:rPr>
-              <a:t>Признаки кровопотери смотрите по самочувствию, коже, дыханию и пульсу.</a:t>
-            </a:r>
-          </a:p>
-        </p:txBody>
-      </p:sp>
-      <p:sp>
-        <p:nvSpPr>
-          <p:cNvPr id="11" name="Rectangle 10"/>
+          <p:cNvPr id="10" name="Oval 9"/>
           <p:cNvSpPr/>
           <p:nvPr/>
         </p:nvSpPr>
         <p:spPr>
           <a:xfrm>
-            <a:off x="700000" y="2650000"/>
-            <a:ext cx="11000000" cy="1000000"/>
-          </a:xfrm>
-          <a:prstGeom prst="rect">
+            <a:off x="900000" y="1750000"/>
+            <a:ext cx="500000" cy="500000"/>
+          </a:xfrm>
+          <a:prstGeom prst="ellipse">
             <a:avLst/>
           </a:prstGeom>
           <a:solidFill>
-            <a:srgbClr val="FFFFFF"/>
+            <a:srgbClr val="8DDBCD"/>
           </a:solidFill>
-          <a:ln w="12700">
-            <a:solidFill>
-              <a:srgbClr val="999999"/>
-            </a:solidFill>
+          <a:ln>
+            <a:noFill/>
           </a:ln>
         </p:spPr>
         <p:style>
@@ -5203,20 +5100,57 @@
       </p:sp>
       <p:sp>
         <p:nvSpPr>
-          <p:cNvPr id="12" name="Rectangle 11"/>
+          <p:cNvPr id="11" name="TextBox 10"/>
+          <p:cNvSpPr txBox="1"/>
+          <p:nvPr/>
+        </p:nvSpPr>
+        <p:spPr>
+          <a:xfrm>
+            <a:off x="1600000" y="1700000"/>
+            <a:ext cx="9800000" cy="600000"/>
+          </a:xfrm>
+          <a:prstGeom prst="rect">
+            <a:avLst/>
+          </a:prstGeom>
+          <a:noFill/>
+        </p:spPr>
+        <p:txBody>
+          <a:bodyPr wrap="square" anchor="ctr">
+            <a:spAutoFit/>
+          </a:bodyPr>
+          <a:lstStyle/>
+          <a:p>
+            <a:pPr algn="l"/>
+            <a:r>
+              <a:rPr sz="1300" b="0">
+                <a:solidFill>
+                  <a:srgbClr val="333333"/>
+                </a:solidFill>
+                <a:latin typeface="Calibri"/>
+                <a:ea typeface="Calibri"/>
+                <a:cs typeface="Calibri"/>
+              </a:rPr>
+              <a:t>Признаки кровопотери — по самочувствию, коже, дыханию и пульсу.</a:t>
+            </a:r>
+          </a:p>
+        </p:txBody>
+      </p:sp>
+      <p:sp>
+        <p:nvSpPr>
+          <p:cNvPr id="12" name="Rounded Rectangle 11"/>
           <p:cNvSpPr/>
           <p:nvPr/>
         </p:nvSpPr>
         <p:spPr>
           <a:xfrm>
             <a:off x="700000" y="2650000"/>
-            <a:ext cx="90000" cy="1000000"/>
-          </a:xfrm>
-          <a:prstGeom prst="rect">
+            <a:ext cx="11000000" cy="1000000"/>
+          </a:xfrm>
+          <a:prstGeom prst="roundRect">
             <a:avLst/>
           </a:prstGeom>
           <a:solidFill>
-            <a:srgbClr val="ED1C24"/>
+            <a:srgbClr val="F0F0F0"/>
           </a:solidFill>
           <a:ln>
             <a:noFill/>
@@ -5246,62 +5180,23 @@
       </p:sp>
       <p:sp>
         <p:nvSpPr>
-          <p:cNvPr id="13" name="TextBox 12"/>
-          <p:cNvSpPr txBox="1"/>
-          <p:nvPr/>
-        </p:nvSpPr>
-        <p:spPr>
-          <a:xfrm>
-            <a:off x="1000000" y="2800000"/>
-            <a:ext cx="10400000" cy="700000"/>
-          </a:xfrm>
-          <a:prstGeom prst="rect">
-            <a:avLst/>
-          </a:prstGeom>
-          <a:noFill/>
-        </p:spPr>
-        <p:txBody>
-          <a:bodyPr wrap="square" anchor="ctr">
-            <a:spAutoFit/>
-          </a:bodyPr>
-          <a:lstStyle/>
-          <a:p>
-            <a:pPr algn="l"/>
-            <a:r>
-              <a:rPr sz="1400" b="0">
-                <a:solidFill>
-                  <a:srgbClr val="333333"/>
-                </a:solidFill>
-                <a:latin typeface="Open Sans"/>
-                <a:ea typeface="Open Sans"/>
-                <a:cs typeface="Open Sans"/>
-              </a:rPr>
-              <a:t>Признаки возможны и без видимой крови — думайте о скрытой кровопотере.</a:t>
-            </a:r>
-          </a:p>
-        </p:txBody>
-      </p:sp>
-      <p:sp>
-        <p:nvSpPr>
-          <p:cNvPr id="14" name="Rectangle 13"/>
+          <p:cNvPr id="13" name="Oval 12"/>
           <p:cNvSpPr/>
           <p:nvPr/>
         </p:nvSpPr>
         <p:spPr>
           <a:xfrm>
-            <a:off x="700000" y="3800000"/>
-            <a:ext cx="11000000" cy="1000000"/>
-          </a:xfrm>
-          <a:prstGeom prst="rect">
+            <a:off x="900000" y="2900000"/>
+            <a:ext cx="500000" cy="500000"/>
+          </a:xfrm>
+          <a:prstGeom prst="ellipse">
             <a:avLst/>
           </a:prstGeom>
           <a:solidFill>
-            <a:srgbClr val="FFFFFF"/>
+            <a:srgbClr val="8DDBCD"/>
           </a:solidFill>
-          <a:ln w="12700">
-            <a:solidFill>
-              <a:srgbClr val="999999"/>
-            </a:solidFill>
+          <a:ln>
+            <a:noFill/>
           </a:ln>
         </p:spPr>
         <p:style>
@@ -5328,20 +5223,57 @@
       </p:sp>
       <p:sp>
         <p:nvSpPr>
-          <p:cNvPr id="15" name="Rectangle 14"/>
+          <p:cNvPr id="14" name="TextBox 13"/>
+          <p:cNvSpPr txBox="1"/>
+          <p:nvPr/>
+        </p:nvSpPr>
+        <p:spPr>
+          <a:xfrm>
+            <a:off x="1600000" y="2850000"/>
+            <a:ext cx="9800000" cy="600000"/>
+          </a:xfrm>
+          <a:prstGeom prst="rect">
+            <a:avLst/>
+          </a:prstGeom>
+          <a:noFill/>
+        </p:spPr>
+        <p:txBody>
+          <a:bodyPr wrap="square" anchor="ctr">
+            <a:spAutoFit/>
+          </a:bodyPr>
+          <a:lstStyle/>
+          <a:p>
+            <a:pPr algn="l"/>
+            <a:r>
+              <a:rPr sz="1300" b="0">
+                <a:solidFill>
+                  <a:srgbClr val="333333"/>
+                </a:solidFill>
+                <a:latin typeface="Calibri"/>
+                <a:ea typeface="Calibri"/>
+                <a:cs typeface="Calibri"/>
+              </a:rPr>
+              <a:t>Признаки возможны и без видимой крови — думайте о скрытой кровопотере.</a:t>
+            </a:r>
+          </a:p>
+        </p:txBody>
+      </p:sp>
+      <p:sp>
+        <p:nvSpPr>
+          <p:cNvPr id="15" name="Rounded Rectangle 14"/>
           <p:cNvSpPr/>
           <p:nvPr/>
         </p:nvSpPr>
         <p:spPr>
           <a:xfrm>
             <a:off x="700000" y="3800000"/>
-            <a:ext cx="90000" cy="1000000"/>
-          </a:xfrm>
-          <a:prstGeom prst="rect">
+            <a:ext cx="11000000" cy="1000000"/>
+          </a:xfrm>
+          <a:prstGeom prst="roundRect">
             <a:avLst/>
           </a:prstGeom>
           <a:solidFill>
-            <a:srgbClr val="ED1C24"/>
+            <a:srgbClr val="F0F0F0"/>
           </a:solidFill>
           <a:ln>
             <a:noFill/>
@@ -5371,62 +5303,23 @@
       </p:sp>
       <p:sp>
         <p:nvSpPr>
-          <p:cNvPr id="16" name="TextBox 15"/>
-          <p:cNvSpPr txBox="1"/>
-          <p:nvPr/>
-        </p:nvSpPr>
-        <p:spPr>
-          <a:xfrm>
-            <a:off x="1000000" y="3950000"/>
-            <a:ext cx="10400000" cy="700000"/>
-          </a:xfrm>
-          <a:prstGeom prst="rect">
-            <a:avLst/>
-          </a:prstGeom>
-          <a:noFill/>
-        </p:spPr>
-        <p:txBody>
-          <a:bodyPr wrap="square" anchor="ctr">
-            <a:spAutoFit/>
-          </a:bodyPr>
-          <a:lstStyle/>
-          <a:p>
-            <a:pPr algn="l"/>
-            <a:r>
-              <a:rPr sz="1400" b="0">
-                <a:solidFill>
-                  <a:srgbClr val="333333"/>
-                </a:solidFill>
-                <a:latin typeface="Open Sans"/>
-                <a:ea typeface="Open Sans"/>
-                <a:cs typeface="Open Sans"/>
-              </a:rPr>
-              <a:t>Интенсивность важнее «точного вида сосуда» для решения об остановке.</a:t>
-            </a:r>
-          </a:p>
-        </p:txBody>
-      </p:sp>
-      <p:sp>
-        <p:nvSpPr>
-          <p:cNvPr id="17" name="Rectangle 16"/>
+          <p:cNvPr id="16" name="Oval 15"/>
           <p:cNvSpPr/>
           <p:nvPr/>
         </p:nvSpPr>
         <p:spPr>
           <a:xfrm>
-            <a:off x="700000" y="4950000"/>
-            <a:ext cx="11000000" cy="1000000"/>
-          </a:xfrm>
-          <a:prstGeom prst="rect">
+            <a:off x="900000" y="4050000"/>
+            <a:ext cx="500000" cy="500000"/>
+          </a:xfrm>
+          <a:prstGeom prst="ellipse">
             <a:avLst/>
           </a:prstGeom>
           <a:solidFill>
-            <a:srgbClr val="FFFFFF"/>
+            <a:srgbClr val="8DDBCD"/>
           </a:solidFill>
-          <a:ln w="12700">
-            <a:solidFill>
-              <a:srgbClr val="999999"/>
-            </a:solidFill>
+          <a:ln>
+            <a:noFill/>
           </a:ln>
         </p:spPr>
         <p:style>
@@ -5453,20 +5346,57 @@
       </p:sp>
       <p:sp>
         <p:nvSpPr>
-          <p:cNvPr id="18" name="Rectangle 17"/>
+          <p:cNvPr id="17" name="TextBox 16"/>
+          <p:cNvSpPr txBox="1"/>
+          <p:nvPr/>
+        </p:nvSpPr>
+        <p:spPr>
+          <a:xfrm>
+            <a:off x="1600000" y="4000000"/>
+            <a:ext cx="9800000" cy="600000"/>
+          </a:xfrm>
+          <a:prstGeom prst="rect">
+            <a:avLst/>
+          </a:prstGeom>
+          <a:noFill/>
+        </p:spPr>
+        <p:txBody>
+          <a:bodyPr wrap="square" anchor="ctr">
+            <a:spAutoFit/>
+          </a:bodyPr>
+          <a:lstStyle/>
+          <a:p>
+            <a:pPr algn="l"/>
+            <a:r>
+              <a:rPr sz="1300" b="0">
+                <a:solidFill>
+                  <a:srgbClr val="333333"/>
+                </a:solidFill>
+                <a:latin typeface="Calibri"/>
+                <a:ea typeface="Calibri"/>
+                <a:cs typeface="Calibri"/>
+              </a:rPr>
+              <a:t>Интенсивность важнее «точного вида сосуда» для решения об остановке.</a:t>
+            </a:r>
+          </a:p>
+        </p:txBody>
+      </p:sp>
+      <p:sp>
+        <p:nvSpPr>
+          <p:cNvPr id="18" name="Rounded Rectangle 17"/>
           <p:cNvSpPr/>
           <p:nvPr/>
         </p:nvSpPr>
         <p:spPr>
           <a:xfrm>
             <a:off x="700000" y="4950000"/>
-            <a:ext cx="90000" cy="1000000"/>
-          </a:xfrm>
-          <a:prstGeom prst="rect">
+            <a:ext cx="11000000" cy="1000000"/>
+          </a:xfrm>
+          <a:prstGeom prst="roundRect">
             <a:avLst/>
           </a:prstGeom>
           <a:solidFill>
-            <a:srgbClr val="ED1C24"/>
+            <a:srgbClr val="F0F0F0"/>
           </a:solidFill>
           <a:ln>
             <a:noFill/>
@@ -5496,14 +5426,57 @@
       </p:sp>
       <p:sp>
         <p:nvSpPr>
-          <p:cNvPr id="19" name="TextBox 18"/>
+          <p:cNvPr id="19" name="Oval 18"/>
+          <p:cNvSpPr/>
+          <p:nvPr/>
+        </p:nvSpPr>
+        <p:spPr>
+          <a:xfrm>
+            <a:off x="900000" y="5200000"/>
+            <a:ext cx="500000" cy="500000"/>
+          </a:xfrm>
+          <a:prstGeom prst="ellipse">
+            <a:avLst/>
+          </a:prstGeom>
+          <a:solidFill>
+            <a:srgbClr val="8DDBCD"/>
+          </a:solidFill>
+          <a:ln>
+            <a:noFill/>
+          </a:ln>
+        </p:spPr>
+        <p:style>
+          <a:lnRef idx="1">
+            <a:schemeClr val="accent1"/>
+          </a:lnRef>
+          <a:fillRef idx="3">
+            <a:schemeClr val="accent1"/>
+          </a:fillRef>
+          <a:effectRef idx="2">
+            <a:schemeClr val="accent1"/>
+          </a:effectRef>
+          <a:fontRef idx="minor">
+            <a:schemeClr val="lt1"/>
+          </a:fontRef>
+        </p:style>
+        <p:txBody>
+          <a:bodyPr rtlCol="0" anchor="ctr"/>
+          <a:lstStyle/>
+          <a:p>
+            <a:pPr algn="ctr"/>
+          </a:p>
+        </p:txBody>
+      </p:sp>
+      <p:sp>
+        <p:nvSpPr>
+          <p:cNvPr id="20" name="TextBox 19"/>
           <p:cNvSpPr txBox="1"/>
           <p:nvPr/>
         </p:nvSpPr>
         <p:spPr>
           <a:xfrm>
-            <a:off x="1000000" y="5100000"/>
-            <a:ext cx="10400000" cy="700000"/>
+            <a:off x="1600000" y="5150000"/>
+            <a:ext cx="9800000" cy="600000"/>
           </a:xfrm>
           <a:prstGeom prst="rect">
             <a:avLst/>
@@ -5518,15 +5491,15 @@
           <a:p>
             <a:pPr algn="l"/>
             <a:r>
-              <a:rPr sz="1400" b="0">
+              <a:rPr sz="1300" b="0">
                 <a:solidFill>
                   <a:srgbClr val="333333"/>
                 </a:solidFill>
-                <a:latin typeface="Open Sans"/>
-                <a:ea typeface="Open Sans"/>
-                <a:cs typeface="Open Sans"/>
+                <a:latin typeface="Calibri"/>
+                <a:ea typeface="Calibri"/>
+                <a:cs typeface="Calibri"/>
               </a:rPr>
-              <a:t>Тёмная одежда, положение тела и погода могут маскировать кровь — осматривайте внимательно.</a:t>
+              <a:t>Одежда, положение тела и погода могут маскировать кровь — осматривайте внимательно.</a:t>
             </a:r>
           </a:p>
         </p:txBody>
@@ -5558,13 +5531,13 @@
         <p:spPr>
           <a:xfrm>
             <a:off x="0" y="0"/>
-            <a:ext cx="3200000" cy="6858000"/>
+            <a:ext cx="3600000" cy="6858000"/>
           </a:xfrm>
           <a:prstGeom prst="rect">
             <a:avLst/>
           </a:prstGeom>
           <a:solidFill>
-            <a:srgbClr val="DDDDDD"/>
+            <a:srgbClr val="8A8A8A"/>
           </a:solidFill>
           <a:ln>
             <a:noFill/>
@@ -5600,8 +5573,8 @@
         </p:nvSpPr>
         <p:spPr>
           <a:xfrm>
-            <a:off x="3200000" y="0"/>
-            <a:ext cx="9000000" cy="6858000"/>
+            <a:off x="3600000" y="0"/>
+            <a:ext cx="8600000" cy="6858000"/>
           </a:xfrm>
           <a:prstGeom prst="rect">
             <a:avLst/>
@@ -5643,8 +5616,8 @@
         </p:nvSpPr>
         <p:spPr>
           <a:xfrm>
-            <a:off x="3800000" y="3000000"/>
-            <a:ext cx="7500000" cy="1000000"/>
+            <a:off x="4200000" y="3000000"/>
+            <a:ext cx="7200000" cy="1000000"/>
           </a:xfrm>
           <a:prstGeom prst="rect">
             <a:avLst/>
@@ -5659,59 +5632,16 @@
           <a:p>
             <a:pPr algn="l"/>
             <a:r>
-              <a:rPr sz="3200" b="1">
+              <a:rPr sz="3000" b="1">
                 <a:solidFill>
                   <a:srgbClr val="333333"/>
                 </a:solidFill>
-                <a:latin typeface="Open Sans"/>
-                <a:ea typeface="Open Sans"/>
-                <a:cs typeface="Open Sans"/>
+                <a:latin typeface="Calibri"/>
+                <a:ea typeface="Calibri"/>
+                <a:cs typeface="Calibri"/>
               </a:rPr>
               <a:t>БЛАГОДАРИМ ЗА ВНИМАНИЕ</a:t>
             </a:r>
-          </a:p>
-        </p:txBody>
-      </p:sp>
-      <p:sp>
-        <p:nvSpPr>
-          <p:cNvPr id="5" name="Rectangle 4"/>
-          <p:cNvSpPr/>
-          <p:nvPr/>
-        </p:nvSpPr>
-        <p:spPr>
-          <a:xfrm>
-            <a:off x="3800000" y="4100000"/>
-            <a:ext cx="4500000" cy="30000"/>
-          </a:xfrm>
-          <a:prstGeom prst="rect">
-            <a:avLst/>
-          </a:prstGeom>
-          <a:solidFill>
-            <a:srgbClr val="333333"/>
-          </a:solidFill>
-          <a:ln>
-            <a:noFill/>
-          </a:ln>
-        </p:spPr>
-        <p:style>
-          <a:lnRef idx="1">
-            <a:schemeClr val="accent1"/>
-          </a:lnRef>
-          <a:fillRef idx="3">
-            <a:schemeClr val="accent1"/>
-          </a:fillRef>
-          <a:effectRef idx="2">
-            <a:schemeClr val="accent1"/>
-          </a:effectRef>
-          <a:fontRef idx="minor">
-            <a:schemeClr val="lt1"/>
-          </a:fontRef>
-        </p:style>
-        <p:txBody>
-          <a:bodyPr rtlCol="0" anchor="ctr"/>
-          <a:lstStyle/>
-          <a:p>
-            <a:pPr algn="ctr"/>
           </a:p>
         </p:txBody>
       </p:sp>
@@ -5778,57 +5708,20 @@
       </p:sp>
       <p:sp>
         <p:nvSpPr>
-          <p:cNvPr id="3" name="TextBox 2"/>
-          <p:cNvSpPr txBox="1"/>
-          <p:nvPr/>
-        </p:nvSpPr>
-        <p:spPr>
-          <a:xfrm>
-            <a:off x="700000" y="280000"/>
-            <a:ext cx="11000000" cy="550000"/>
-          </a:xfrm>
-          <a:prstGeom prst="rect">
-            <a:avLst/>
-          </a:prstGeom>
-          <a:noFill/>
-        </p:spPr>
-        <p:txBody>
-          <a:bodyPr wrap="square" anchor="t">
-            <a:spAutoFit/>
-          </a:bodyPr>
-          <a:lstStyle/>
-          <a:p>
-            <a:pPr algn="l"/>
-            <a:r>
-              <a:rPr sz="2200" b="1">
-                <a:solidFill>
-                  <a:srgbClr val="333333"/>
-                </a:solidFill>
-                <a:latin typeface="Open Sans"/>
-                <a:ea typeface="Open Sans"/>
-                <a:cs typeface="Open Sans"/>
-              </a:rPr>
-              <a:t>СОДЕРЖАНИЕ</a:t>
-            </a:r>
-          </a:p>
-        </p:txBody>
-      </p:sp>
-      <p:sp>
-        <p:nvSpPr>
-          <p:cNvPr id="4" name="Rectangle 3"/>
+          <p:cNvPr id="3" name="Rectangle 2"/>
           <p:cNvSpPr/>
           <p:nvPr/>
         </p:nvSpPr>
         <p:spPr>
           <a:xfrm>
-            <a:off x="700000" y="880000"/>
-            <a:ext cx="9000000" cy="25000"/>
+            <a:off x="0" y="0"/>
+            <a:ext cx="12191695" cy="1300000"/>
           </a:xfrm>
           <a:prstGeom prst="rect">
             <a:avLst/>
           </a:prstGeom>
           <a:solidFill>
-            <a:srgbClr val="555555"/>
+            <a:srgbClr val="F8F8F8"/>
           </a:solidFill>
           <a:ln>
             <a:noFill/>
@@ -5858,14 +5751,14 @@
       </p:sp>
       <p:sp>
         <p:nvSpPr>
-          <p:cNvPr id="5" name="TextBox 4"/>
+          <p:cNvPr id="4" name="TextBox 3"/>
           <p:cNvSpPr txBox="1"/>
           <p:nvPr/>
         </p:nvSpPr>
         <p:spPr>
           <a:xfrm>
-            <a:off x="700000" y="950000"/>
-            <a:ext cx="11000000" cy="350000"/>
+            <a:off x="700000" y="220000"/>
+            <a:ext cx="11200000" cy="550000"/>
           </a:xfrm>
           <a:prstGeom prst="rect">
             <a:avLst/>
@@ -5880,35 +5773,35 @@
           <a:p>
             <a:pPr algn="l"/>
             <a:r>
-              <a:rPr sz="1200" b="0">
-                <a:solidFill>
-                  <a:srgbClr val="666666"/>
-                </a:solidFill>
-                <a:latin typeface="Open Sans"/>
-                <a:ea typeface="Open Sans"/>
-                <a:cs typeface="Open Sans"/>
+              <a:rPr sz="2000" b="1">
+                <a:solidFill>
+                  <a:srgbClr val="333333"/>
+                </a:solidFill>
+                <a:latin typeface="Calibri"/>
+                <a:ea typeface="Calibri"/>
+                <a:cs typeface="Calibri"/>
               </a:rPr>
-              <a:t>Оказание первой помощи при наружных кровотечениях</a:t>
-            </a:r>
-          </a:p>
-        </p:txBody>
-      </p:sp>
-      <p:sp>
-        <p:nvSpPr>
-          <p:cNvPr id="6" name="Rectangle 5"/>
+              <a:t>СОДЕРЖАНИЕ</a:t>
+            </a:r>
+          </a:p>
+        </p:txBody>
+      </p:sp>
+      <p:sp>
+        <p:nvSpPr>
+          <p:cNvPr id="5" name="Rectangle 4"/>
           <p:cNvSpPr/>
           <p:nvPr/>
         </p:nvSpPr>
         <p:spPr>
           <a:xfrm>
-            <a:off x="0" y="2800000"/>
-            <a:ext cx="420000" cy="420000"/>
+            <a:off x="700000" y="820000"/>
+            <a:ext cx="8500000" cy="28000"/>
           </a:xfrm>
           <a:prstGeom prst="rect">
             <a:avLst/>
           </a:prstGeom>
           <a:solidFill>
-            <a:srgbClr val="555555"/>
+            <a:srgbClr val="606060"/>
           </a:solidFill>
           <a:ln>
             <a:noFill/>
@@ -5938,14 +5831,14 @@
       </p:sp>
       <p:sp>
         <p:nvSpPr>
-          <p:cNvPr id="7" name="TextBox 6"/>
+          <p:cNvPr id="6" name="TextBox 5"/>
           <p:cNvSpPr txBox="1"/>
           <p:nvPr/>
         </p:nvSpPr>
         <p:spPr>
           <a:xfrm>
-            <a:off x="0" y="2800000"/>
-            <a:ext cx="420000" cy="420000"/>
+            <a:off x="700000" y="880000"/>
+            <a:ext cx="11000000" cy="320000"/>
           </a:xfrm>
           <a:prstGeom prst="rect">
             <a:avLst/>
@@ -5953,42 +5846,42 @@
           <a:noFill/>
         </p:spPr>
         <p:txBody>
-          <a:bodyPr wrap="square" anchor="ctr">
+          <a:bodyPr wrap="square" anchor="t">
             <a:spAutoFit/>
           </a:bodyPr>
           <a:lstStyle/>
           <a:p>
-            <a:pPr algn="ctr"/>
-            <a:r>
-              <a:rPr sz="1400" b="1">
-                <a:solidFill>
-                  <a:srgbClr val="FFFFFF"/>
-                </a:solidFill>
-                <a:latin typeface="Open Sans"/>
-                <a:ea typeface="Open Sans"/>
-                <a:cs typeface="Open Sans"/>
+            <a:pPr algn="l"/>
+            <a:r>
+              <a:rPr sz="1100" b="0">
+                <a:solidFill>
+                  <a:srgbClr val="777777"/>
+                </a:solidFill>
+                <a:latin typeface="Calibri"/>
+                <a:ea typeface="Calibri"/>
+                <a:cs typeface="Calibri"/>
               </a:rPr>
-              <a:t>2</a:t>
-            </a:r>
-          </a:p>
-        </p:txBody>
-      </p:sp>
-      <p:sp>
-        <p:nvSpPr>
-          <p:cNvPr id="8" name="Oval 7"/>
+              <a:t>Оказание первой помощи при наружных кровотечениях</a:t>
+            </a:r>
+          </a:p>
+        </p:txBody>
+      </p:sp>
+      <p:sp>
+        <p:nvSpPr>
+          <p:cNvPr id="7" name="Rectangle 6"/>
           <p:cNvSpPr/>
           <p:nvPr/>
         </p:nvSpPr>
         <p:spPr>
           <a:xfrm>
-            <a:off x="700000" y="1500000"/>
-            <a:ext cx="500000" cy="500000"/>
-          </a:xfrm>
-          <a:prstGeom prst="ellipse">
+            <a:off x="0" y="2700000"/>
+            <a:ext cx="400000" cy="400000"/>
+          </a:xfrm>
+          <a:prstGeom prst="rect">
             <a:avLst/>
           </a:prstGeom>
           <a:solidFill>
-            <a:srgbClr val="555555"/>
+            <a:srgbClr val="606060"/>
           </a:solidFill>
           <a:ln>
             <a:noFill/>
@@ -6018,14 +5911,14 @@
       </p:sp>
       <p:sp>
         <p:nvSpPr>
-          <p:cNvPr id="9" name="TextBox 8"/>
+          <p:cNvPr id="8" name="TextBox 7"/>
           <p:cNvSpPr txBox="1"/>
           <p:nvPr/>
         </p:nvSpPr>
         <p:spPr>
           <a:xfrm>
-            <a:off x="700000" y="1500000"/>
-            <a:ext cx="500000" cy="500000"/>
+            <a:off x="0" y="2700000"/>
+            <a:ext cx="400000" cy="400000"/>
           </a:xfrm>
           <a:prstGeom prst="rect">
             <a:avLst/>
@@ -6040,75 +5933,40 @@
           <a:p>
             <a:pPr algn="ctr"/>
             <a:r>
-              <a:rPr sz="1500" b="1">
+              <a:rPr sz="1300" b="1">
                 <a:solidFill>
                   <a:srgbClr val="FFFFFF"/>
                 </a:solidFill>
-                <a:latin typeface="Open Sans"/>
-                <a:ea typeface="Open Sans"/>
-                <a:cs typeface="Open Sans"/>
+                <a:latin typeface="Calibri"/>
+                <a:ea typeface="Calibri"/>
+                <a:cs typeface="Calibri"/>
               </a:rPr>
-              <a:t>1</a:t>
-            </a:r>
-          </a:p>
-        </p:txBody>
-      </p:sp>
-      <p:sp>
-        <p:nvSpPr>
-          <p:cNvPr id="10" name="TextBox 9"/>
-          <p:cNvSpPr txBox="1"/>
-          <p:nvPr/>
-        </p:nvSpPr>
-        <p:spPr>
-          <a:xfrm>
-            <a:off x="1400000" y="1500000"/>
-            <a:ext cx="10000000" cy="500000"/>
-          </a:xfrm>
-          <a:prstGeom prst="rect">
-            <a:avLst/>
-          </a:prstGeom>
-          <a:noFill/>
-        </p:spPr>
-        <p:txBody>
-          <a:bodyPr wrap="square" anchor="ctr">
-            <a:spAutoFit/>
-          </a:bodyPr>
-          <a:lstStyle/>
-          <a:p>
-            <a:pPr algn="l"/>
-            <a:r>
-              <a:rPr sz="1600" b="0">
-                <a:solidFill>
-                  <a:srgbClr val="333333"/>
-                </a:solidFill>
-                <a:latin typeface="Open Sans"/>
-                <a:ea typeface="Open Sans"/>
-                <a:cs typeface="Open Sans"/>
-              </a:rPr>
-              <a:t>Чем тема дополняет обзорный осмотр</a:t>
-            </a:r>
-          </a:p>
-        </p:txBody>
-      </p:sp>
-      <p:sp>
-        <p:nvSpPr>
-          <p:cNvPr id="11" name="Oval 10"/>
+              <a:t>2</a:t>
+            </a:r>
+          </a:p>
+        </p:txBody>
+      </p:sp>
+      <p:sp>
+        <p:nvSpPr>
+          <p:cNvPr id="9" name="Oval 8"/>
           <p:cNvSpPr/>
           <p:nvPr/>
         </p:nvSpPr>
         <p:spPr>
           <a:xfrm>
-            <a:off x="700000" y="2280000"/>
-            <a:ext cx="500000" cy="500000"/>
+            <a:off x="700000" y="1550000"/>
+            <a:ext cx="520000" cy="520000"/>
           </a:xfrm>
           <a:prstGeom prst="ellipse">
             <a:avLst/>
           </a:prstGeom>
           <a:solidFill>
-            <a:srgbClr val="555555"/>
+            <a:srgbClr val="8DDBCD"/>
           </a:solidFill>
-          <a:ln>
-            <a:noFill/>
+          <a:ln w="12700">
+            <a:solidFill>
+              <a:srgbClr val="1AA090"/>
+            </a:solidFill>
           </a:ln>
         </p:spPr>
         <p:style>
@@ -6135,14 +5993,14 @@
       </p:sp>
       <p:sp>
         <p:nvSpPr>
-          <p:cNvPr id="12" name="TextBox 11"/>
+          <p:cNvPr id="10" name="TextBox 9"/>
           <p:cNvSpPr txBox="1"/>
           <p:nvPr/>
         </p:nvSpPr>
         <p:spPr>
           <a:xfrm>
-            <a:off x="700000" y="2280000"/>
-            <a:ext cx="500000" cy="500000"/>
+            <a:off x="700000" y="1550000"/>
+            <a:ext cx="520000" cy="520000"/>
           </a:xfrm>
           <a:prstGeom prst="rect">
             <a:avLst/>
@@ -6159,70 +6017,33 @@
             <a:r>
               <a:rPr sz="1500" b="1">
                 <a:solidFill>
-                  <a:srgbClr val="FFFFFF"/>
-                </a:solidFill>
-                <a:latin typeface="Open Sans"/>
-                <a:ea typeface="Open Sans"/>
-                <a:cs typeface="Open Sans"/>
+                  <a:srgbClr val="0D6B60"/>
+                </a:solidFill>
+                <a:latin typeface="Calibri"/>
+                <a:ea typeface="Calibri"/>
+                <a:cs typeface="Calibri"/>
               </a:rPr>
-              <a:t>2</a:t>
-            </a:r>
-          </a:p>
-        </p:txBody>
-      </p:sp>
-      <p:sp>
-        <p:nvSpPr>
-          <p:cNvPr id="13" name="TextBox 12"/>
-          <p:cNvSpPr txBox="1"/>
-          <p:nvPr/>
-        </p:nvSpPr>
-        <p:spPr>
-          <a:xfrm>
-            <a:off x="1400000" y="2280000"/>
-            <a:ext cx="10000000" cy="500000"/>
-          </a:xfrm>
-          <a:prstGeom prst="rect">
-            <a:avLst/>
-          </a:prstGeom>
-          <a:noFill/>
-        </p:spPr>
-        <p:txBody>
-          <a:bodyPr wrap="square" anchor="ctr">
-            <a:spAutoFit/>
-          </a:bodyPr>
-          <a:lstStyle/>
-          <a:p>
-            <a:pPr algn="l"/>
-            <a:r>
-              <a:rPr sz="1600" b="0">
-                <a:solidFill>
-                  <a:srgbClr val="333333"/>
-                </a:solidFill>
-                <a:latin typeface="Open Sans"/>
-                <a:ea typeface="Open Sans"/>
-                <a:cs typeface="Open Sans"/>
-              </a:rPr>
-              <a:t>Признаки кровопотери по группам</a:t>
-            </a:r>
-          </a:p>
-        </p:txBody>
-      </p:sp>
-      <p:sp>
-        <p:nvSpPr>
-          <p:cNvPr id="14" name="Oval 13"/>
+              <a:t>1</a:t>
+            </a:r>
+          </a:p>
+        </p:txBody>
+      </p:sp>
+      <p:sp>
+        <p:nvSpPr>
+          <p:cNvPr id="11" name="Rounded Rectangle 10"/>
           <p:cNvSpPr/>
           <p:nvPr/>
         </p:nvSpPr>
         <p:spPr>
           <a:xfrm>
-            <a:off x="700000" y="3060000"/>
-            <a:ext cx="500000" cy="500000"/>
-          </a:xfrm>
-          <a:prstGeom prst="ellipse">
+            <a:off x="1400000" y="1550000"/>
+            <a:ext cx="10000000" cy="520000"/>
+          </a:xfrm>
+          <a:prstGeom prst="roundRect">
             <a:avLst/>
           </a:prstGeom>
           <a:solidFill>
-            <a:srgbClr val="555555"/>
+            <a:srgbClr val="F0F0F0"/>
           </a:solidFill>
           <a:ln>
             <a:noFill/>
@@ -6252,14 +6073,14 @@
       </p:sp>
       <p:sp>
         <p:nvSpPr>
-          <p:cNvPr id="15" name="TextBox 14"/>
+          <p:cNvPr id="12" name="TextBox 11"/>
           <p:cNvSpPr txBox="1"/>
           <p:nvPr/>
         </p:nvSpPr>
         <p:spPr>
           <a:xfrm>
-            <a:off x="700000" y="3060000"/>
-            <a:ext cx="500000" cy="500000"/>
+            <a:off x="1650000" y="1550000"/>
+            <a:ext cx="9500000" cy="520000"/>
           </a:xfrm>
           <a:prstGeom prst="rect">
             <a:avLst/>
@@ -6272,77 +6093,42 @@
           </a:bodyPr>
           <a:lstStyle/>
           <a:p>
-            <a:pPr algn="ctr"/>
-            <a:r>
-              <a:rPr sz="1500" b="1">
-                <a:solidFill>
-                  <a:srgbClr val="FFFFFF"/>
-                </a:solidFill>
-                <a:latin typeface="Open Sans"/>
-                <a:ea typeface="Open Sans"/>
-                <a:cs typeface="Open Sans"/>
+            <a:pPr algn="l"/>
+            <a:r>
+              <a:rPr sz="1500" b="0">
+                <a:solidFill>
+                  <a:srgbClr val="333333"/>
+                </a:solidFill>
+                <a:latin typeface="Calibri"/>
+                <a:ea typeface="Calibri"/>
+                <a:cs typeface="Calibri"/>
               </a:rPr>
-              <a:t>3</a:t>
-            </a:r>
-          </a:p>
-        </p:txBody>
-      </p:sp>
-      <p:sp>
-        <p:nvSpPr>
-          <p:cNvPr id="16" name="TextBox 15"/>
-          <p:cNvSpPr txBox="1"/>
-          <p:nvPr/>
-        </p:nvSpPr>
-        <p:spPr>
-          <a:xfrm>
-            <a:off x="1400000" y="3060000"/>
-            <a:ext cx="10000000" cy="500000"/>
-          </a:xfrm>
-          <a:prstGeom prst="rect">
-            <a:avLst/>
-          </a:prstGeom>
-          <a:noFill/>
-        </p:spPr>
-        <p:txBody>
-          <a:bodyPr wrap="square" anchor="ctr">
-            <a:spAutoFit/>
-          </a:bodyPr>
-          <a:lstStyle/>
-          <a:p>
-            <a:pPr algn="l"/>
-            <a:r>
-              <a:rPr sz="1600" b="0">
-                <a:solidFill>
-                  <a:srgbClr val="333333"/>
-                </a:solidFill>
-                <a:latin typeface="Open Sans"/>
-                <a:ea typeface="Open Sans"/>
-                <a:cs typeface="Open Sans"/>
-              </a:rPr>
-              <a:t>Когда признаки есть без видимой крови</a:t>
-            </a:r>
-          </a:p>
-        </p:txBody>
-      </p:sp>
-      <p:sp>
-        <p:nvSpPr>
-          <p:cNvPr id="17" name="Oval 16"/>
+              <a:t>Чем тема дополняет обзорный осмотр</a:t>
+            </a:r>
+          </a:p>
+        </p:txBody>
+      </p:sp>
+      <p:sp>
+        <p:nvSpPr>
+          <p:cNvPr id="13" name="Oval 12"/>
           <p:cNvSpPr/>
           <p:nvPr/>
         </p:nvSpPr>
         <p:spPr>
           <a:xfrm>
-            <a:off x="700000" y="3840000"/>
-            <a:ext cx="500000" cy="500000"/>
+            <a:off x="700000" y="2400000"/>
+            <a:ext cx="520000" cy="520000"/>
           </a:xfrm>
           <a:prstGeom prst="ellipse">
             <a:avLst/>
           </a:prstGeom>
           <a:solidFill>
-            <a:srgbClr val="555555"/>
+            <a:srgbClr val="8DDBCD"/>
           </a:solidFill>
-          <a:ln>
-            <a:noFill/>
+          <a:ln w="12700">
+            <a:solidFill>
+              <a:srgbClr val="1AA090"/>
+            </a:solidFill>
           </a:ln>
         </p:spPr>
         <p:style>
@@ -6369,14 +6155,14 @@
       </p:sp>
       <p:sp>
         <p:nvSpPr>
-          <p:cNvPr id="18" name="TextBox 17"/>
+          <p:cNvPr id="14" name="TextBox 13"/>
           <p:cNvSpPr txBox="1"/>
           <p:nvPr/>
         </p:nvSpPr>
         <p:spPr>
           <a:xfrm>
-            <a:off x="700000" y="3840000"/>
-            <a:ext cx="500000" cy="500000"/>
+            <a:off x="700000" y="2400000"/>
+            <a:ext cx="520000" cy="520000"/>
           </a:xfrm>
           <a:prstGeom prst="rect">
             <a:avLst/>
@@ -6393,70 +6179,33 @@
             <a:r>
               <a:rPr sz="1500" b="1">
                 <a:solidFill>
-                  <a:srgbClr val="FFFFFF"/>
-                </a:solidFill>
-                <a:latin typeface="Open Sans"/>
-                <a:ea typeface="Open Sans"/>
-                <a:cs typeface="Open Sans"/>
+                  <a:srgbClr val="0D6B60"/>
+                </a:solidFill>
+                <a:latin typeface="Calibri"/>
+                <a:ea typeface="Calibri"/>
+                <a:cs typeface="Calibri"/>
               </a:rPr>
-              <a:t>4</a:t>
-            </a:r>
-          </a:p>
-        </p:txBody>
-      </p:sp>
-      <p:sp>
-        <p:nvSpPr>
-          <p:cNvPr id="19" name="TextBox 18"/>
-          <p:cNvSpPr txBox="1"/>
-          <p:nvPr/>
-        </p:nvSpPr>
-        <p:spPr>
-          <a:xfrm>
-            <a:off x="1400000" y="3840000"/>
-            <a:ext cx="10000000" cy="500000"/>
-          </a:xfrm>
-          <a:prstGeom prst="rect">
-            <a:avLst/>
-          </a:prstGeom>
-          <a:noFill/>
-        </p:spPr>
-        <p:txBody>
-          <a:bodyPr wrap="square" anchor="ctr">
-            <a:spAutoFit/>
-          </a:bodyPr>
-          <a:lstStyle/>
-          <a:p>
-            <a:pPr algn="l"/>
-            <a:r>
-              <a:rPr sz="1600" b="0">
-                <a:solidFill>
-                  <a:srgbClr val="333333"/>
-                </a:solidFill>
-                <a:latin typeface="Open Sans"/>
-                <a:ea typeface="Open Sans"/>
-                <a:cs typeface="Open Sans"/>
-              </a:rPr>
-              <a:t>Оценка интенсивности и сравнение видов</a:t>
-            </a:r>
-          </a:p>
-        </p:txBody>
-      </p:sp>
-      <p:sp>
-        <p:nvSpPr>
-          <p:cNvPr id="20" name="Oval 19"/>
+              <a:t>2</a:t>
+            </a:r>
+          </a:p>
+        </p:txBody>
+      </p:sp>
+      <p:sp>
+        <p:nvSpPr>
+          <p:cNvPr id="15" name="Rounded Rectangle 14"/>
           <p:cNvSpPr/>
           <p:nvPr/>
         </p:nvSpPr>
         <p:spPr>
           <a:xfrm>
-            <a:off x="700000" y="4620000"/>
-            <a:ext cx="500000" cy="500000"/>
-          </a:xfrm>
-          <a:prstGeom prst="ellipse">
+            <a:off x="1400000" y="2400000"/>
+            <a:ext cx="10000000" cy="520000"/>
+          </a:xfrm>
+          <a:prstGeom prst="roundRect">
             <a:avLst/>
           </a:prstGeom>
           <a:solidFill>
-            <a:srgbClr val="555555"/>
+            <a:srgbClr val="F0F0F0"/>
           </a:solidFill>
           <a:ln>
             <a:noFill/>
@@ -6486,14 +6235,14 @@
       </p:sp>
       <p:sp>
         <p:nvSpPr>
-          <p:cNvPr id="21" name="TextBox 20"/>
+          <p:cNvPr id="16" name="TextBox 15"/>
           <p:cNvSpPr txBox="1"/>
           <p:nvPr/>
         </p:nvSpPr>
         <p:spPr>
           <a:xfrm>
-            <a:off x="700000" y="4620000"/>
-            <a:ext cx="500000" cy="500000"/>
+            <a:off x="1650000" y="2400000"/>
+            <a:ext cx="9500000" cy="520000"/>
           </a:xfrm>
           <a:prstGeom prst="rect">
             <a:avLst/>
@@ -6506,31 +6255,76 @@
           </a:bodyPr>
           <a:lstStyle/>
           <a:p>
+            <a:pPr algn="l"/>
+            <a:r>
+              <a:rPr sz="1500" b="0">
+                <a:solidFill>
+                  <a:srgbClr val="333333"/>
+                </a:solidFill>
+                <a:latin typeface="Calibri"/>
+                <a:ea typeface="Calibri"/>
+                <a:cs typeface="Calibri"/>
+              </a:rPr>
+              <a:t>Признаки кровопотери по группам</a:t>
+            </a:r>
+          </a:p>
+        </p:txBody>
+      </p:sp>
+      <p:sp>
+        <p:nvSpPr>
+          <p:cNvPr id="17" name="Oval 16"/>
+          <p:cNvSpPr/>
+          <p:nvPr/>
+        </p:nvSpPr>
+        <p:spPr>
+          <a:xfrm>
+            <a:off x="700000" y="3250000"/>
+            <a:ext cx="520000" cy="520000"/>
+          </a:xfrm>
+          <a:prstGeom prst="ellipse">
+            <a:avLst/>
+          </a:prstGeom>
+          <a:solidFill>
+            <a:srgbClr val="8DDBCD"/>
+          </a:solidFill>
+          <a:ln w="12700">
+            <a:solidFill>
+              <a:srgbClr val="1AA090"/>
+            </a:solidFill>
+          </a:ln>
+        </p:spPr>
+        <p:style>
+          <a:lnRef idx="1">
+            <a:schemeClr val="accent1"/>
+          </a:lnRef>
+          <a:fillRef idx="3">
+            <a:schemeClr val="accent1"/>
+          </a:fillRef>
+          <a:effectRef idx="2">
+            <a:schemeClr val="accent1"/>
+          </a:effectRef>
+          <a:fontRef idx="minor">
+            <a:schemeClr val="lt1"/>
+          </a:fontRef>
+        </p:style>
+        <p:txBody>
+          <a:bodyPr rtlCol="0" anchor="ctr"/>
+          <a:lstStyle/>
+          <a:p>
             <a:pPr algn="ctr"/>
-            <a:r>
-              <a:rPr sz="1500" b="1">
-                <a:solidFill>
-                  <a:srgbClr val="FFFFFF"/>
-                </a:solidFill>
-                <a:latin typeface="Open Sans"/>
-                <a:ea typeface="Open Sans"/>
-                <a:cs typeface="Open Sans"/>
-              </a:rPr>
-              <a:t>5</a:t>
-            </a:r>
-          </a:p>
-        </p:txBody>
-      </p:sp>
-      <p:sp>
-        <p:nvSpPr>
-          <p:cNvPr id="22" name="TextBox 21"/>
+          </a:p>
+        </p:txBody>
+      </p:sp>
+      <p:sp>
+        <p:nvSpPr>
+          <p:cNvPr id="18" name="TextBox 17"/>
           <p:cNvSpPr txBox="1"/>
           <p:nvPr/>
         </p:nvSpPr>
         <p:spPr>
           <a:xfrm>
-            <a:off x="1400000" y="4620000"/>
-            <a:ext cx="10000000" cy="500000"/>
+            <a:off x="700000" y="3250000"/>
+            <a:ext cx="520000" cy="520000"/>
           </a:xfrm>
           <a:prstGeom prst="rect">
             <a:avLst/>
@@ -6543,15 +6337,419 @@
           </a:bodyPr>
           <a:lstStyle/>
           <a:p>
+            <a:pPr algn="ctr"/>
+            <a:r>
+              <a:rPr sz="1500" b="1">
+                <a:solidFill>
+                  <a:srgbClr val="0D6B60"/>
+                </a:solidFill>
+                <a:latin typeface="Calibri"/>
+                <a:ea typeface="Calibri"/>
+                <a:cs typeface="Calibri"/>
+              </a:rPr>
+              <a:t>3</a:t>
+            </a:r>
+          </a:p>
+        </p:txBody>
+      </p:sp>
+      <p:sp>
+        <p:nvSpPr>
+          <p:cNvPr id="19" name="Rounded Rectangle 18"/>
+          <p:cNvSpPr/>
+          <p:nvPr/>
+        </p:nvSpPr>
+        <p:spPr>
+          <a:xfrm>
+            <a:off x="1400000" y="3250000"/>
+            <a:ext cx="10000000" cy="520000"/>
+          </a:xfrm>
+          <a:prstGeom prst="roundRect">
+            <a:avLst/>
+          </a:prstGeom>
+          <a:solidFill>
+            <a:srgbClr val="F0F0F0"/>
+          </a:solidFill>
+          <a:ln>
+            <a:noFill/>
+          </a:ln>
+        </p:spPr>
+        <p:style>
+          <a:lnRef idx="1">
+            <a:schemeClr val="accent1"/>
+          </a:lnRef>
+          <a:fillRef idx="3">
+            <a:schemeClr val="accent1"/>
+          </a:fillRef>
+          <a:effectRef idx="2">
+            <a:schemeClr val="accent1"/>
+          </a:effectRef>
+          <a:fontRef idx="minor">
+            <a:schemeClr val="lt1"/>
+          </a:fontRef>
+        </p:style>
+        <p:txBody>
+          <a:bodyPr rtlCol="0" anchor="ctr"/>
+          <a:lstStyle/>
+          <a:p>
+            <a:pPr algn="ctr"/>
+          </a:p>
+        </p:txBody>
+      </p:sp>
+      <p:sp>
+        <p:nvSpPr>
+          <p:cNvPr id="20" name="TextBox 19"/>
+          <p:cNvSpPr txBox="1"/>
+          <p:nvPr/>
+        </p:nvSpPr>
+        <p:spPr>
+          <a:xfrm>
+            <a:off x="1650000" y="3250000"/>
+            <a:ext cx="9500000" cy="520000"/>
+          </a:xfrm>
+          <a:prstGeom prst="rect">
+            <a:avLst/>
+          </a:prstGeom>
+          <a:noFill/>
+        </p:spPr>
+        <p:txBody>
+          <a:bodyPr wrap="square" anchor="ctr">
+            <a:spAutoFit/>
+          </a:bodyPr>
+          <a:lstStyle/>
+          <a:p>
             <a:pPr algn="l"/>
             <a:r>
-              <a:rPr sz="1600" b="0">
+              <a:rPr sz="1500" b="0">
                 <a:solidFill>
                   <a:srgbClr val="333333"/>
                 </a:solidFill>
-                <a:latin typeface="Open Sans"/>
-                <a:ea typeface="Open Sans"/>
-                <a:cs typeface="Open Sans"/>
+                <a:latin typeface="Calibri"/>
+                <a:ea typeface="Calibri"/>
+                <a:cs typeface="Calibri"/>
+              </a:rPr>
+              <a:t>Когда признаки есть без видимой крови</a:t>
+            </a:r>
+          </a:p>
+        </p:txBody>
+      </p:sp>
+      <p:sp>
+        <p:nvSpPr>
+          <p:cNvPr id="21" name="Oval 20"/>
+          <p:cNvSpPr/>
+          <p:nvPr/>
+        </p:nvSpPr>
+        <p:spPr>
+          <a:xfrm>
+            <a:off x="700000" y="4100000"/>
+            <a:ext cx="520000" cy="520000"/>
+          </a:xfrm>
+          <a:prstGeom prst="ellipse">
+            <a:avLst/>
+          </a:prstGeom>
+          <a:solidFill>
+            <a:srgbClr val="8DDBCD"/>
+          </a:solidFill>
+          <a:ln w="12700">
+            <a:solidFill>
+              <a:srgbClr val="1AA090"/>
+            </a:solidFill>
+          </a:ln>
+        </p:spPr>
+        <p:style>
+          <a:lnRef idx="1">
+            <a:schemeClr val="accent1"/>
+          </a:lnRef>
+          <a:fillRef idx="3">
+            <a:schemeClr val="accent1"/>
+          </a:fillRef>
+          <a:effectRef idx="2">
+            <a:schemeClr val="accent1"/>
+          </a:effectRef>
+          <a:fontRef idx="minor">
+            <a:schemeClr val="lt1"/>
+          </a:fontRef>
+        </p:style>
+        <p:txBody>
+          <a:bodyPr rtlCol="0" anchor="ctr"/>
+          <a:lstStyle/>
+          <a:p>
+            <a:pPr algn="ctr"/>
+          </a:p>
+        </p:txBody>
+      </p:sp>
+      <p:sp>
+        <p:nvSpPr>
+          <p:cNvPr id="22" name="TextBox 21"/>
+          <p:cNvSpPr txBox="1"/>
+          <p:nvPr/>
+        </p:nvSpPr>
+        <p:spPr>
+          <a:xfrm>
+            <a:off x="700000" y="4100000"/>
+            <a:ext cx="520000" cy="520000"/>
+          </a:xfrm>
+          <a:prstGeom prst="rect">
+            <a:avLst/>
+          </a:prstGeom>
+          <a:noFill/>
+        </p:spPr>
+        <p:txBody>
+          <a:bodyPr wrap="square" anchor="ctr">
+            <a:spAutoFit/>
+          </a:bodyPr>
+          <a:lstStyle/>
+          <a:p>
+            <a:pPr algn="ctr"/>
+            <a:r>
+              <a:rPr sz="1500" b="1">
+                <a:solidFill>
+                  <a:srgbClr val="0D6B60"/>
+                </a:solidFill>
+                <a:latin typeface="Calibri"/>
+                <a:ea typeface="Calibri"/>
+                <a:cs typeface="Calibri"/>
+              </a:rPr>
+              <a:t>4</a:t>
+            </a:r>
+          </a:p>
+        </p:txBody>
+      </p:sp>
+      <p:sp>
+        <p:nvSpPr>
+          <p:cNvPr id="23" name="Rounded Rectangle 22"/>
+          <p:cNvSpPr/>
+          <p:nvPr/>
+        </p:nvSpPr>
+        <p:spPr>
+          <a:xfrm>
+            <a:off x="1400000" y="4100000"/>
+            <a:ext cx="10000000" cy="520000"/>
+          </a:xfrm>
+          <a:prstGeom prst="roundRect">
+            <a:avLst/>
+          </a:prstGeom>
+          <a:solidFill>
+            <a:srgbClr val="F0F0F0"/>
+          </a:solidFill>
+          <a:ln>
+            <a:noFill/>
+          </a:ln>
+        </p:spPr>
+        <p:style>
+          <a:lnRef idx="1">
+            <a:schemeClr val="accent1"/>
+          </a:lnRef>
+          <a:fillRef idx="3">
+            <a:schemeClr val="accent1"/>
+          </a:fillRef>
+          <a:effectRef idx="2">
+            <a:schemeClr val="accent1"/>
+          </a:effectRef>
+          <a:fontRef idx="minor">
+            <a:schemeClr val="lt1"/>
+          </a:fontRef>
+        </p:style>
+        <p:txBody>
+          <a:bodyPr rtlCol="0" anchor="ctr"/>
+          <a:lstStyle/>
+          <a:p>
+            <a:pPr algn="ctr"/>
+          </a:p>
+        </p:txBody>
+      </p:sp>
+      <p:sp>
+        <p:nvSpPr>
+          <p:cNvPr id="24" name="TextBox 23"/>
+          <p:cNvSpPr txBox="1"/>
+          <p:nvPr/>
+        </p:nvSpPr>
+        <p:spPr>
+          <a:xfrm>
+            <a:off x="1650000" y="4100000"/>
+            <a:ext cx="9500000" cy="520000"/>
+          </a:xfrm>
+          <a:prstGeom prst="rect">
+            <a:avLst/>
+          </a:prstGeom>
+          <a:noFill/>
+        </p:spPr>
+        <p:txBody>
+          <a:bodyPr wrap="square" anchor="ctr">
+            <a:spAutoFit/>
+          </a:bodyPr>
+          <a:lstStyle/>
+          <a:p>
+            <a:pPr algn="l"/>
+            <a:r>
+              <a:rPr sz="1500" b="0">
+                <a:solidFill>
+                  <a:srgbClr val="333333"/>
+                </a:solidFill>
+                <a:latin typeface="Calibri"/>
+                <a:ea typeface="Calibri"/>
+                <a:cs typeface="Calibri"/>
+              </a:rPr>
+              <a:t>Оценка интенсивности и сравнение видов</a:t>
+            </a:r>
+          </a:p>
+        </p:txBody>
+      </p:sp>
+      <p:sp>
+        <p:nvSpPr>
+          <p:cNvPr id="25" name="Oval 24"/>
+          <p:cNvSpPr/>
+          <p:nvPr/>
+        </p:nvSpPr>
+        <p:spPr>
+          <a:xfrm>
+            <a:off x="700000" y="4950000"/>
+            <a:ext cx="520000" cy="520000"/>
+          </a:xfrm>
+          <a:prstGeom prst="ellipse">
+            <a:avLst/>
+          </a:prstGeom>
+          <a:solidFill>
+            <a:srgbClr val="8DDBCD"/>
+          </a:solidFill>
+          <a:ln w="12700">
+            <a:solidFill>
+              <a:srgbClr val="1AA090"/>
+            </a:solidFill>
+          </a:ln>
+        </p:spPr>
+        <p:style>
+          <a:lnRef idx="1">
+            <a:schemeClr val="accent1"/>
+          </a:lnRef>
+          <a:fillRef idx="3">
+            <a:schemeClr val="accent1"/>
+          </a:fillRef>
+          <a:effectRef idx="2">
+            <a:schemeClr val="accent1"/>
+          </a:effectRef>
+          <a:fontRef idx="minor">
+            <a:schemeClr val="lt1"/>
+          </a:fontRef>
+        </p:style>
+        <p:txBody>
+          <a:bodyPr rtlCol="0" anchor="ctr"/>
+          <a:lstStyle/>
+          <a:p>
+            <a:pPr algn="ctr"/>
+          </a:p>
+        </p:txBody>
+      </p:sp>
+      <p:sp>
+        <p:nvSpPr>
+          <p:cNvPr id="26" name="TextBox 25"/>
+          <p:cNvSpPr txBox="1"/>
+          <p:nvPr/>
+        </p:nvSpPr>
+        <p:spPr>
+          <a:xfrm>
+            <a:off x="700000" y="4950000"/>
+            <a:ext cx="520000" cy="520000"/>
+          </a:xfrm>
+          <a:prstGeom prst="rect">
+            <a:avLst/>
+          </a:prstGeom>
+          <a:noFill/>
+        </p:spPr>
+        <p:txBody>
+          <a:bodyPr wrap="square" anchor="ctr">
+            <a:spAutoFit/>
+          </a:bodyPr>
+          <a:lstStyle/>
+          <a:p>
+            <a:pPr algn="ctr"/>
+            <a:r>
+              <a:rPr sz="1500" b="1">
+                <a:solidFill>
+                  <a:srgbClr val="0D6B60"/>
+                </a:solidFill>
+                <a:latin typeface="Calibri"/>
+                <a:ea typeface="Calibri"/>
+                <a:cs typeface="Calibri"/>
+              </a:rPr>
+              <a:t>5</a:t>
+            </a:r>
+          </a:p>
+        </p:txBody>
+      </p:sp>
+      <p:sp>
+        <p:nvSpPr>
+          <p:cNvPr id="27" name="Rounded Rectangle 26"/>
+          <p:cNvSpPr/>
+          <p:nvPr/>
+        </p:nvSpPr>
+        <p:spPr>
+          <a:xfrm>
+            <a:off x="1400000" y="4950000"/>
+            <a:ext cx="10000000" cy="520000"/>
+          </a:xfrm>
+          <a:prstGeom prst="roundRect">
+            <a:avLst/>
+          </a:prstGeom>
+          <a:solidFill>
+            <a:srgbClr val="F0F0F0"/>
+          </a:solidFill>
+          <a:ln>
+            <a:noFill/>
+          </a:ln>
+        </p:spPr>
+        <p:style>
+          <a:lnRef idx="1">
+            <a:schemeClr val="accent1"/>
+          </a:lnRef>
+          <a:fillRef idx="3">
+            <a:schemeClr val="accent1"/>
+          </a:fillRef>
+          <a:effectRef idx="2">
+            <a:schemeClr val="accent1"/>
+          </a:effectRef>
+          <a:fontRef idx="minor">
+            <a:schemeClr val="lt1"/>
+          </a:fontRef>
+        </p:style>
+        <p:txBody>
+          <a:bodyPr rtlCol="0" anchor="ctr"/>
+          <a:lstStyle/>
+          <a:p>
+            <a:pPr algn="ctr"/>
+          </a:p>
+        </p:txBody>
+      </p:sp>
+      <p:sp>
+        <p:nvSpPr>
+          <p:cNvPr id="28" name="TextBox 27"/>
+          <p:cNvSpPr txBox="1"/>
+          <p:nvPr/>
+        </p:nvSpPr>
+        <p:spPr>
+          <a:xfrm>
+            <a:off x="1650000" y="4950000"/>
+            <a:ext cx="9500000" cy="520000"/>
+          </a:xfrm>
+          <a:prstGeom prst="rect">
+            <a:avLst/>
+          </a:prstGeom>
+          <a:noFill/>
+        </p:spPr>
+        <p:txBody>
+          <a:bodyPr wrap="square" anchor="ctr">
+            <a:spAutoFit/>
+          </a:bodyPr>
+          <a:lstStyle/>
+          <a:p>
+            <a:pPr algn="l"/>
+            <a:r>
+              <a:rPr sz="1500" b="0">
+                <a:solidFill>
+                  <a:srgbClr val="333333"/>
+                </a:solidFill>
+                <a:latin typeface="Calibri"/>
+                <a:ea typeface="Calibri"/>
+                <a:cs typeface="Calibri"/>
               </a:rPr>
               <a:t>Смешанное кровотечение, маскировка, объём</a:t>
             </a:r>
@@ -6621,57 +6819,20 @@
       </p:sp>
       <p:sp>
         <p:nvSpPr>
-          <p:cNvPr id="3" name="TextBox 2"/>
-          <p:cNvSpPr txBox="1"/>
-          <p:nvPr/>
-        </p:nvSpPr>
-        <p:spPr>
-          <a:xfrm>
-            <a:off x="700000" y="280000"/>
-            <a:ext cx="11000000" cy="550000"/>
-          </a:xfrm>
-          <a:prstGeom prst="rect">
-            <a:avLst/>
-          </a:prstGeom>
-          <a:noFill/>
-        </p:spPr>
-        <p:txBody>
-          <a:bodyPr wrap="square" anchor="t">
-            <a:spAutoFit/>
-          </a:bodyPr>
-          <a:lstStyle/>
-          <a:p>
-            <a:pPr algn="l"/>
-            <a:r>
-              <a:rPr sz="2200" b="1">
-                <a:solidFill>
-                  <a:srgbClr val="333333"/>
-                </a:solidFill>
-                <a:latin typeface="Open Sans"/>
-                <a:ea typeface="Open Sans"/>
-                <a:cs typeface="Open Sans"/>
-              </a:rPr>
-              <a:t>ЧЕМ ЭТА ТЕМА ДОПОЛНЯЕТ ОБЗОРНЫЙ ОСМОТР</a:t>
-            </a:r>
-          </a:p>
-        </p:txBody>
-      </p:sp>
-      <p:sp>
-        <p:nvSpPr>
-          <p:cNvPr id="4" name="Rectangle 3"/>
+          <p:cNvPr id="3" name="Rectangle 2"/>
           <p:cNvSpPr/>
           <p:nvPr/>
         </p:nvSpPr>
         <p:spPr>
           <a:xfrm>
-            <a:off x="700000" y="880000"/>
-            <a:ext cx="9000000" cy="25000"/>
+            <a:off x="0" y="0"/>
+            <a:ext cx="12191695" cy="1300000"/>
           </a:xfrm>
           <a:prstGeom prst="rect">
             <a:avLst/>
           </a:prstGeom>
           <a:solidFill>
-            <a:srgbClr val="555555"/>
+            <a:srgbClr val="F8F8F8"/>
           </a:solidFill>
           <a:ln>
             <a:noFill/>
@@ -6701,14 +6862,14 @@
       </p:sp>
       <p:sp>
         <p:nvSpPr>
-          <p:cNvPr id="5" name="TextBox 4"/>
+          <p:cNvPr id="4" name="TextBox 3"/>
           <p:cNvSpPr txBox="1"/>
           <p:nvPr/>
         </p:nvSpPr>
         <p:spPr>
           <a:xfrm>
-            <a:off x="700000" y="950000"/>
-            <a:ext cx="11000000" cy="350000"/>
+            <a:off x="700000" y="220000"/>
+            <a:ext cx="11200000" cy="550000"/>
           </a:xfrm>
           <a:prstGeom prst="rect">
             <a:avLst/>
@@ -6723,35 +6884,35 @@
           <a:p>
             <a:pPr algn="l"/>
             <a:r>
-              <a:rPr sz="1200" b="0">
-                <a:solidFill>
-                  <a:srgbClr val="666666"/>
-                </a:solidFill>
-                <a:latin typeface="Open Sans"/>
-                <a:ea typeface="Open Sans"/>
-                <a:cs typeface="Open Sans"/>
+              <a:rPr sz="2000" b="1">
+                <a:solidFill>
+                  <a:srgbClr val="333333"/>
+                </a:solidFill>
+                <a:latin typeface="Calibri"/>
+                <a:ea typeface="Calibri"/>
+                <a:cs typeface="Calibri"/>
               </a:rPr>
-              <a:t>Оказание первой помощи при наружных кровотечениях</a:t>
-            </a:r>
-          </a:p>
-        </p:txBody>
-      </p:sp>
-      <p:sp>
-        <p:nvSpPr>
-          <p:cNvPr id="6" name="Rectangle 5"/>
+              <a:t>ЧЕМ ЭТА ТЕМА ДОПОЛНЯЕТ ОБЗОРНЫЙ ОСМОТР</a:t>
+            </a:r>
+          </a:p>
+        </p:txBody>
+      </p:sp>
+      <p:sp>
+        <p:nvSpPr>
+          <p:cNvPr id="5" name="Rectangle 4"/>
           <p:cNvSpPr/>
           <p:nvPr/>
         </p:nvSpPr>
         <p:spPr>
           <a:xfrm>
-            <a:off x="0" y="2800000"/>
-            <a:ext cx="420000" cy="420000"/>
+            <a:off x="700000" y="820000"/>
+            <a:ext cx="8500000" cy="28000"/>
           </a:xfrm>
           <a:prstGeom prst="rect">
             <a:avLst/>
           </a:prstGeom>
           <a:solidFill>
-            <a:srgbClr val="555555"/>
+            <a:srgbClr val="606060"/>
           </a:solidFill>
           <a:ln>
             <a:noFill/>
@@ -6781,14 +6942,14 @@
       </p:sp>
       <p:sp>
         <p:nvSpPr>
-          <p:cNvPr id="7" name="TextBox 6"/>
+          <p:cNvPr id="6" name="TextBox 5"/>
           <p:cNvSpPr txBox="1"/>
           <p:nvPr/>
         </p:nvSpPr>
         <p:spPr>
           <a:xfrm>
-            <a:off x="0" y="2800000"/>
-            <a:ext cx="420000" cy="420000"/>
+            <a:off x="700000" y="880000"/>
+            <a:ext cx="11000000" cy="320000"/>
           </a:xfrm>
           <a:prstGeom prst="rect">
             <a:avLst/>
@@ -6796,47 +6957,45 @@
           <a:noFill/>
         </p:spPr>
         <p:txBody>
-          <a:bodyPr wrap="square" anchor="ctr">
+          <a:bodyPr wrap="square" anchor="t">
             <a:spAutoFit/>
           </a:bodyPr>
           <a:lstStyle/>
           <a:p>
-            <a:pPr algn="ctr"/>
-            <a:r>
-              <a:rPr sz="1400" b="1">
-                <a:solidFill>
-                  <a:srgbClr val="FFFFFF"/>
-                </a:solidFill>
-                <a:latin typeface="Open Sans"/>
-                <a:ea typeface="Open Sans"/>
-                <a:cs typeface="Open Sans"/>
+            <a:pPr algn="l"/>
+            <a:r>
+              <a:rPr sz="1100" b="0">
+                <a:solidFill>
+                  <a:srgbClr val="777777"/>
+                </a:solidFill>
+                <a:latin typeface="Calibri"/>
+                <a:ea typeface="Calibri"/>
+                <a:cs typeface="Calibri"/>
               </a:rPr>
-              <a:t>3</a:t>
-            </a:r>
-          </a:p>
-        </p:txBody>
-      </p:sp>
-      <p:sp>
-        <p:nvSpPr>
-          <p:cNvPr id="8" name="Rectangle 7"/>
+              <a:t>Оказание первой помощи при наружных кровотечениях</a:t>
+            </a:r>
+          </a:p>
+        </p:txBody>
+      </p:sp>
+      <p:sp>
+        <p:nvSpPr>
+          <p:cNvPr id="7" name="Rectangle 6"/>
           <p:cNvSpPr/>
           <p:nvPr/>
         </p:nvSpPr>
         <p:spPr>
           <a:xfrm>
-            <a:off x="700000" y="1500000"/>
-            <a:ext cx="5400000" cy="4800000"/>
+            <a:off x="0" y="2700000"/>
+            <a:ext cx="400000" cy="400000"/>
           </a:xfrm>
           <a:prstGeom prst="rect">
             <a:avLst/>
           </a:prstGeom>
           <a:solidFill>
-            <a:srgbClr val="FFFFFF"/>
+            <a:srgbClr val="606060"/>
           </a:solidFill>
-          <a:ln w="12700">
-            <a:solidFill>
-              <a:srgbClr val="999999"/>
-            </a:solidFill>
+          <a:ln>
+            <a:noFill/>
           </a:ln>
         </p:spPr>
         <p:style>
@@ -6863,23 +7022,62 @@
       </p:sp>
       <p:sp>
         <p:nvSpPr>
-          <p:cNvPr id="9" name="Rectangle 8"/>
+          <p:cNvPr id="8" name="TextBox 7"/>
+          <p:cNvSpPr txBox="1"/>
+          <p:nvPr/>
+        </p:nvSpPr>
+        <p:spPr>
+          <a:xfrm>
+            <a:off x="0" y="2700000"/>
+            <a:ext cx="400000" cy="400000"/>
+          </a:xfrm>
+          <a:prstGeom prst="rect">
+            <a:avLst/>
+          </a:prstGeom>
+          <a:noFill/>
+        </p:spPr>
+        <p:txBody>
+          <a:bodyPr wrap="square" anchor="ctr">
+            <a:spAutoFit/>
+          </a:bodyPr>
+          <a:lstStyle/>
+          <a:p>
+            <a:pPr algn="ctr"/>
+            <a:r>
+              <a:rPr sz="1300" b="1">
+                <a:solidFill>
+                  <a:srgbClr val="FFFFFF"/>
+                </a:solidFill>
+                <a:latin typeface="Calibri"/>
+                <a:ea typeface="Calibri"/>
+                <a:cs typeface="Calibri"/>
+              </a:rPr>
+              <a:t>3</a:t>
+            </a:r>
+          </a:p>
+        </p:txBody>
+      </p:sp>
+      <p:sp>
+        <p:nvSpPr>
+          <p:cNvPr id="9" name="Rounded Rectangle 8"/>
           <p:cNvSpPr/>
           <p:nvPr/>
         </p:nvSpPr>
         <p:spPr>
           <a:xfrm>
             <a:off x="700000" y="1500000"/>
-            <a:ext cx="5400000" cy="700000"/>
-          </a:xfrm>
-          <a:prstGeom prst="rect">
+            <a:ext cx="5400000" cy="4800000"/>
+          </a:xfrm>
+          <a:prstGeom prst="roundRect">
             <a:avLst/>
           </a:prstGeom>
           <a:solidFill>
-            <a:srgbClr val="DDDDDD"/>
+            <a:srgbClr val="FFFFFF"/>
           </a:solidFill>
-          <a:ln>
-            <a:noFill/>
+          <a:ln w="15875">
+            <a:solidFill>
+              <a:srgbClr val="999999"/>
+            </a:solidFill>
           </a:ln>
         </p:spPr>
         <p:style>
@@ -6906,157 +7104,23 @@
       </p:sp>
       <p:sp>
         <p:nvSpPr>
-          <p:cNvPr id="10" name="TextBox 9"/>
-          <p:cNvSpPr txBox="1"/>
-          <p:nvPr/>
-        </p:nvSpPr>
-        <p:spPr>
-          <a:xfrm>
-            <a:off x="900000" y="1600000"/>
-            <a:ext cx="5000000" cy="500000"/>
-          </a:xfrm>
-          <a:prstGeom prst="rect">
-            <a:avLst/>
-          </a:prstGeom>
-          <a:noFill/>
-        </p:spPr>
-        <p:txBody>
-          <a:bodyPr wrap="square" anchor="t">
-            <a:spAutoFit/>
-          </a:bodyPr>
-          <a:lstStyle/>
-          <a:p>
-            <a:pPr algn="ctr"/>
-            <a:r>
-              <a:rPr sz="1500" b="1">
-                <a:solidFill>
-                  <a:srgbClr val="333333"/>
-                </a:solidFill>
-                <a:latin typeface="Open Sans"/>
-                <a:ea typeface="Open Sans"/>
-                <a:cs typeface="Open Sans"/>
-              </a:rPr>
-              <a:t>Уже в теме «Обзорный осмотр»</a:t>
-            </a:r>
-          </a:p>
-        </p:txBody>
-      </p:sp>
-      <p:sp>
-        <p:nvSpPr>
-          <p:cNvPr id="11" name="TextBox 10"/>
-          <p:cNvSpPr txBox="1"/>
-          <p:nvPr/>
-        </p:nvSpPr>
-        <p:spPr>
-          <a:xfrm>
-            <a:off x="950000" y="2450000"/>
-            <a:ext cx="4900000" cy="3500000"/>
-          </a:xfrm>
-          <a:prstGeom prst="rect">
-            <a:avLst/>
-          </a:prstGeom>
-          <a:noFill/>
-        </p:spPr>
-        <p:txBody>
-          <a:bodyPr wrap="square">
-            <a:spAutoFit/>
-          </a:bodyPr>
-          <a:lstStyle/>
-          <a:p>
-            <a:pPr algn="l">
-              <a:spcAft>
-                <a:spcPts val="800"/>
-              </a:spcAft>
-            </a:pPr>
-            <a:r>
-              <a:rPr sz="1500" b="0">
-                <a:solidFill>
-                  <a:srgbClr val="333333"/>
-                </a:solidFill>
-                <a:latin typeface="Open Sans"/>
-                <a:ea typeface="Open Sans"/>
-                <a:cs typeface="Open Sans"/>
-              </a:rPr>
-              <a:t>•  понятие кровотечения;</a:t>
-            </a:r>
-          </a:p>
-          <a:p>
-            <a:pPr algn="l">
-              <a:spcAft>
-                <a:spcPts val="800"/>
-              </a:spcAft>
-            </a:pPr>
-            <a:r>
-              <a:rPr sz="1500" b="0">
-                <a:solidFill>
-                  <a:srgbClr val="333333"/>
-                </a:solidFill>
-                <a:latin typeface="Open Sans"/>
-                <a:ea typeface="Open Sans"/>
-                <a:cs typeface="Open Sans"/>
-              </a:rPr>
-              <a:t>•  как выглядят виды кровотечения;</a:t>
-            </a:r>
-          </a:p>
-          <a:p>
-            <a:pPr algn="l">
-              <a:spcAft>
-                <a:spcPts val="800"/>
-              </a:spcAft>
-            </a:pPr>
-            <a:r>
-              <a:rPr sz="1500" b="0">
-                <a:solidFill>
-                  <a:srgbClr val="333333"/>
-                </a:solidFill>
-                <a:latin typeface="Open Sans"/>
-                <a:ea typeface="Open Sans"/>
-                <a:cs typeface="Open Sans"/>
-              </a:rPr>
-              <a:t>•  как провести обзорный осмотр;</a:t>
-            </a:r>
-          </a:p>
-          <a:p>
-            <a:pPr algn="l">
-              <a:spcAft>
-                <a:spcPts val="800"/>
-              </a:spcAft>
-            </a:pPr>
-            <a:r>
-              <a:rPr sz="1500" b="0">
-                <a:solidFill>
-                  <a:srgbClr val="333333"/>
-                </a:solidFill>
-                <a:latin typeface="Open Sans"/>
-                <a:ea typeface="Open Sans"/>
-                <a:cs typeface="Open Sans"/>
-              </a:rPr>
-              <a:t>•  что делать при обнаружении крови.</a:t>
-            </a:r>
-          </a:p>
-        </p:txBody>
-      </p:sp>
-      <p:sp>
-        <p:nvSpPr>
-          <p:cNvPr id="12" name="Rectangle 11"/>
+          <p:cNvPr id="10" name="Rectangle 9"/>
           <p:cNvSpPr/>
           <p:nvPr/>
         </p:nvSpPr>
         <p:spPr>
           <a:xfrm>
-            <a:off x="6500000" y="1500000"/>
-            <a:ext cx="5400000" cy="4800000"/>
+            <a:off x="700000" y="1500000"/>
+            <a:ext cx="5400000" cy="700000"/>
           </a:xfrm>
           <a:prstGeom prst="rect">
             <a:avLst/>
           </a:prstGeom>
           <a:solidFill>
-            <a:srgbClr val="FFFFFF"/>
+            <a:srgbClr val="F0F0F0"/>
           </a:solidFill>
-          <a:ln w="12700">
-            <a:solidFill>
-              <a:srgbClr val="999999"/>
-            </a:solidFill>
+          <a:ln>
+            <a:noFill/>
           </a:ln>
         </p:spPr>
         <p:style>
@@ -7083,23 +7147,157 @@
       </p:sp>
       <p:sp>
         <p:nvSpPr>
-          <p:cNvPr id="13" name="Rectangle 12"/>
+          <p:cNvPr id="11" name="TextBox 10"/>
+          <p:cNvSpPr txBox="1"/>
+          <p:nvPr/>
+        </p:nvSpPr>
+        <p:spPr>
+          <a:xfrm>
+            <a:off x="900000" y="1600000"/>
+            <a:ext cx="5000000" cy="500000"/>
+          </a:xfrm>
+          <a:prstGeom prst="rect">
+            <a:avLst/>
+          </a:prstGeom>
+          <a:noFill/>
+        </p:spPr>
+        <p:txBody>
+          <a:bodyPr wrap="square" anchor="t">
+            <a:spAutoFit/>
+          </a:bodyPr>
+          <a:lstStyle/>
+          <a:p>
+            <a:pPr algn="ctr"/>
+            <a:r>
+              <a:rPr sz="1400" b="1">
+                <a:solidFill>
+                  <a:srgbClr val="333333"/>
+                </a:solidFill>
+                <a:latin typeface="Calibri"/>
+                <a:ea typeface="Calibri"/>
+                <a:cs typeface="Calibri"/>
+              </a:rPr>
+              <a:t>Уже в теме «Обзорный осмотр»</a:t>
+            </a:r>
+          </a:p>
+        </p:txBody>
+      </p:sp>
+      <p:sp>
+        <p:nvSpPr>
+          <p:cNvPr id="12" name="TextBox 11"/>
+          <p:cNvSpPr txBox="1"/>
+          <p:nvPr/>
+        </p:nvSpPr>
+        <p:spPr>
+          <a:xfrm>
+            <a:off x="950000" y="2450000"/>
+            <a:ext cx="4900000" cy="3500000"/>
+          </a:xfrm>
+          <a:prstGeom prst="rect">
+            <a:avLst/>
+          </a:prstGeom>
+          <a:noFill/>
+        </p:spPr>
+        <p:txBody>
+          <a:bodyPr wrap="square">
+            <a:spAutoFit/>
+          </a:bodyPr>
+          <a:lstStyle/>
+          <a:p>
+            <a:pPr algn="l">
+              <a:spcAft>
+                <a:spcPts val="700"/>
+              </a:spcAft>
+            </a:pPr>
+            <a:r>
+              <a:rPr sz="1400" b="0">
+                <a:solidFill>
+                  <a:srgbClr val="333333"/>
+                </a:solidFill>
+                <a:latin typeface="Calibri"/>
+                <a:ea typeface="Calibri"/>
+                <a:cs typeface="Calibri"/>
+              </a:rPr>
+              <a:t>•  понятие кровотечения;</a:t>
+            </a:r>
+          </a:p>
+          <a:p>
+            <a:pPr algn="l">
+              <a:spcAft>
+                <a:spcPts val="700"/>
+              </a:spcAft>
+            </a:pPr>
+            <a:r>
+              <a:rPr sz="1400" b="0">
+                <a:solidFill>
+                  <a:srgbClr val="333333"/>
+                </a:solidFill>
+                <a:latin typeface="Calibri"/>
+                <a:ea typeface="Calibri"/>
+                <a:cs typeface="Calibri"/>
+              </a:rPr>
+              <a:t>•  как выглядят виды кровотечения;</a:t>
+            </a:r>
+          </a:p>
+          <a:p>
+            <a:pPr algn="l">
+              <a:spcAft>
+                <a:spcPts val="700"/>
+              </a:spcAft>
+            </a:pPr>
+            <a:r>
+              <a:rPr sz="1400" b="0">
+                <a:solidFill>
+                  <a:srgbClr val="333333"/>
+                </a:solidFill>
+                <a:latin typeface="Calibri"/>
+                <a:ea typeface="Calibri"/>
+                <a:cs typeface="Calibri"/>
+              </a:rPr>
+              <a:t>•  как провести обзорный осмотр;</a:t>
+            </a:r>
+          </a:p>
+          <a:p>
+            <a:pPr algn="l">
+              <a:spcAft>
+                <a:spcPts val="700"/>
+              </a:spcAft>
+            </a:pPr>
+            <a:r>
+              <a:rPr sz="1400" b="0">
+                <a:solidFill>
+                  <a:srgbClr val="333333"/>
+                </a:solidFill>
+                <a:latin typeface="Calibri"/>
+                <a:ea typeface="Calibri"/>
+                <a:cs typeface="Calibri"/>
+              </a:rPr>
+              <a:t>•  что делать при обнаружении крови.</a:t>
+            </a:r>
+          </a:p>
+        </p:txBody>
+      </p:sp>
+      <p:sp>
+        <p:nvSpPr>
+          <p:cNvPr id="13" name="Rounded Rectangle 12"/>
           <p:cNvSpPr/>
           <p:nvPr/>
         </p:nvSpPr>
         <p:spPr>
           <a:xfrm>
             <a:off x="6500000" y="1500000"/>
-            <a:ext cx="5400000" cy="700000"/>
-          </a:xfrm>
-          <a:prstGeom prst="rect">
+            <a:ext cx="5400000" cy="4800000"/>
+          </a:xfrm>
+          <a:prstGeom prst="roundRect">
             <a:avLst/>
           </a:prstGeom>
           <a:solidFill>
-            <a:srgbClr val="555555"/>
+            <a:srgbClr val="FFFFFF"/>
           </a:solidFill>
-          <a:ln>
-            <a:noFill/>
+          <a:ln w="15875">
+            <a:solidFill>
+              <a:srgbClr val="8DDBCD"/>
+            </a:solidFill>
           </a:ln>
         </p:spPr>
         <p:style>
@@ -7126,7 +7324,50 @@
       </p:sp>
       <p:sp>
         <p:nvSpPr>
-          <p:cNvPr id="14" name="TextBox 13"/>
+          <p:cNvPr id="14" name="Rectangle 13"/>
+          <p:cNvSpPr/>
+          <p:nvPr/>
+        </p:nvSpPr>
+        <p:spPr>
+          <a:xfrm>
+            <a:off x="6500000" y="1500000"/>
+            <a:ext cx="5400000" cy="700000"/>
+          </a:xfrm>
+          <a:prstGeom prst="rect">
+            <a:avLst/>
+          </a:prstGeom>
+          <a:solidFill>
+            <a:srgbClr val="8DDBCD"/>
+          </a:solidFill>
+          <a:ln>
+            <a:noFill/>
+          </a:ln>
+        </p:spPr>
+        <p:style>
+          <a:lnRef idx="1">
+            <a:schemeClr val="accent1"/>
+          </a:lnRef>
+          <a:fillRef idx="3">
+            <a:schemeClr val="accent1"/>
+          </a:fillRef>
+          <a:effectRef idx="2">
+            <a:schemeClr val="accent1"/>
+          </a:effectRef>
+          <a:fontRef idx="minor">
+            <a:schemeClr val="lt1"/>
+          </a:fontRef>
+        </p:style>
+        <p:txBody>
+          <a:bodyPr rtlCol="0" anchor="ctr"/>
+          <a:lstStyle/>
+          <a:p>
+            <a:pPr algn="ctr"/>
+          </a:p>
+        </p:txBody>
+      </p:sp>
+      <p:sp>
+        <p:nvSpPr>
+          <p:cNvPr id="15" name="TextBox 14"/>
           <p:cNvSpPr txBox="1"/>
           <p:nvPr/>
         </p:nvSpPr>
@@ -7148,13 +7389,13 @@
           <a:p>
             <a:pPr algn="ctr"/>
             <a:r>
-              <a:rPr sz="1500" b="1">
-                <a:solidFill>
-                  <a:srgbClr val="FFFFFF"/>
-                </a:solidFill>
-                <a:latin typeface="Open Sans"/>
-                <a:ea typeface="Open Sans"/>
-                <a:cs typeface="Open Sans"/>
+              <a:rPr sz="1400" b="1">
+                <a:solidFill>
+                  <a:srgbClr val="0D6B60"/>
+                </a:solidFill>
+                <a:latin typeface="Calibri"/>
+                <a:ea typeface="Calibri"/>
+                <a:cs typeface="Calibri"/>
               </a:rPr>
               <a:t>Разбираем сейчас</a:t>
             </a:r>
@@ -7163,7 +7404,7 @@
       </p:sp>
       <p:sp>
         <p:nvSpPr>
-          <p:cNvPr id="15" name="TextBox 14"/>
+          <p:cNvPr id="16" name="TextBox 15"/>
           <p:cNvSpPr txBox="1"/>
           <p:nvPr/>
         </p:nvSpPr>
@@ -7185,17 +7426,17 @@
           <a:p>
             <a:pPr algn="l">
               <a:spcAft>
-                <a:spcPts val="800"/>
+                <a:spcPts val="700"/>
               </a:spcAft>
             </a:pPr>
             <a:r>
-              <a:rPr sz="1500" b="0">
+              <a:rPr sz="1400" b="0">
                 <a:solidFill>
                   <a:srgbClr val="333333"/>
                 </a:solidFill>
-                <a:latin typeface="Open Sans"/>
-                <a:ea typeface="Open Sans"/>
-                <a:cs typeface="Open Sans"/>
+                <a:latin typeface="Calibri"/>
+                <a:ea typeface="Calibri"/>
+                <a:cs typeface="Calibri"/>
               </a:rPr>
               <a:t>•  как читать признаки кровопотери;</a:t>
             </a:r>
@@ -7203,17 +7444,17 @@
           <a:p>
             <a:pPr algn="l">
               <a:spcAft>
-                <a:spcPts val="800"/>
+                <a:spcPts val="700"/>
               </a:spcAft>
             </a:pPr>
             <a:r>
-              <a:rPr sz="1500" b="0">
+              <a:rPr sz="1400" b="0">
                 <a:solidFill>
                   <a:srgbClr val="333333"/>
                 </a:solidFill>
-                <a:latin typeface="Open Sans"/>
-                <a:ea typeface="Open Sans"/>
-                <a:cs typeface="Open Sans"/>
+                <a:latin typeface="Calibri"/>
+                <a:ea typeface="Calibri"/>
+                <a:cs typeface="Calibri"/>
               </a:rPr>
               <a:t>•  когда крови «не видно», а угроза есть;</a:t>
             </a:r>
@@ -7221,17 +7462,17 @@
           <a:p>
             <a:pPr algn="l">
               <a:spcAft>
-                <a:spcPts val="800"/>
+                <a:spcPts val="700"/>
               </a:spcAft>
             </a:pPr>
             <a:r>
-              <a:rPr sz="1500" b="0">
+              <a:rPr sz="1400" b="0">
                 <a:solidFill>
                   <a:srgbClr val="333333"/>
                 </a:solidFill>
-                <a:latin typeface="Open Sans"/>
-                <a:ea typeface="Open Sans"/>
-                <a:cs typeface="Open Sans"/>
+                <a:latin typeface="Calibri"/>
+                <a:ea typeface="Calibri"/>
+                <a:cs typeface="Calibri"/>
               </a:rPr>
               <a:t>•  как оценить интенсивность;</a:t>
             </a:r>
@@ -7239,17 +7480,17 @@
           <a:p>
             <a:pPr algn="l">
               <a:spcAft>
-                <a:spcPts val="800"/>
+                <a:spcPts val="700"/>
               </a:spcAft>
             </a:pPr>
             <a:r>
-              <a:rPr sz="1500" b="0">
+              <a:rPr sz="1400" b="0">
                 <a:solidFill>
                   <a:srgbClr val="333333"/>
                 </a:solidFill>
-                <a:latin typeface="Open Sans"/>
-                <a:ea typeface="Open Sans"/>
-                <a:cs typeface="Open Sans"/>
+                <a:latin typeface="Calibri"/>
+                <a:ea typeface="Calibri"/>
+                <a:cs typeface="Calibri"/>
               </a:rPr>
               <a:t>•  сравнение видов и смешанное кровотечение;</a:t>
             </a:r>
@@ -7257,17 +7498,17 @@
           <a:p>
             <a:pPr algn="l">
               <a:spcAft>
-                <a:spcPts val="800"/>
+                <a:spcPts val="700"/>
               </a:spcAft>
             </a:pPr>
             <a:r>
-              <a:rPr sz="1500" b="0">
+              <a:rPr sz="1400" b="0">
                 <a:solidFill>
                   <a:srgbClr val="333333"/>
                 </a:solidFill>
-                <a:latin typeface="Open Sans"/>
-                <a:ea typeface="Open Sans"/>
-                <a:cs typeface="Open Sans"/>
+                <a:latin typeface="Calibri"/>
+                <a:ea typeface="Calibri"/>
+                <a:cs typeface="Calibri"/>
               </a:rPr>
               <a:t>•  что маскирует признаки.</a:t>
             </a:r>
@@ -7337,57 +7578,20 @@
       </p:sp>
       <p:sp>
         <p:nvSpPr>
-          <p:cNvPr id="3" name="TextBox 2"/>
-          <p:cNvSpPr txBox="1"/>
-          <p:nvPr/>
-        </p:nvSpPr>
-        <p:spPr>
-          <a:xfrm>
-            <a:off x="700000" y="280000"/>
-            <a:ext cx="11000000" cy="550000"/>
-          </a:xfrm>
-          <a:prstGeom prst="rect">
-            <a:avLst/>
-          </a:prstGeom>
-          <a:noFill/>
-        </p:spPr>
-        <p:txBody>
-          <a:bodyPr wrap="square" anchor="t">
-            <a:spAutoFit/>
-          </a:bodyPr>
-          <a:lstStyle/>
-          <a:p>
-            <a:pPr algn="l"/>
-            <a:r>
-              <a:rPr sz="2200" b="1">
-                <a:solidFill>
-                  <a:srgbClr val="333333"/>
-                </a:solidFill>
-                <a:latin typeface="Open Sans"/>
-                <a:ea typeface="Open Sans"/>
-                <a:cs typeface="Open Sans"/>
-              </a:rPr>
-              <a:t>ПРИЗНАКИ КРОВОПОТЕРИ — ПО ГРУППАМ</a:t>
-            </a:r>
-          </a:p>
-        </p:txBody>
-      </p:sp>
-      <p:sp>
-        <p:nvSpPr>
-          <p:cNvPr id="4" name="Rectangle 3"/>
+          <p:cNvPr id="3" name="Rectangle 2"/>
           <p:cNvSpPr/>
           <p:nvPr/>
         </p:nvSpPr>
         <p:spPr>
           <a:xfrm>
-            <a:off x="700000" y="880000"/>
-            <a:ext cx="9000000" cy="25000"/>
+            <a:off x="0" y="0"/>
+            <a:ext cx="12191695" cy="1300000"/>
           </a:xfrm>
           <a:prstGeom prst="rect">
             <a:avLst/>
           </a:prstGeom>
           <a:solidFill>
-            <a:srgbClr val="555555"/>
+            <a:srgbClr val="F8F8F8"/>
           </a:solidFill>
           <a:ln>
             <a:noFill/>
@@ -7417,14 +7621,14 @@
       </p:sp>
       <p:sp>
         <p:nvSpPr>
-          <p:cNvPr id="5" name="TextBox 4"/>
+          <p:cNvPr id="4" name="TextBox 3"/>
           <p:cNvSpPr txBox="1"/>
           <p:nvPr/>
         </p:nvSpPr>
         <p:spPr>
           <a:xfrm>
-            <a:off x="700000" y="950000"/>
-            <a:ext cx="11000000" cy="350000"/>
+            <a:off x="700000" y="220000"/>
+            <a:ext cx="11200000" cy="550000"/>
           </a:xfrm>
           <a:prstGeom prst="rect">
             <a:avLst/>
@@ -7439,35 +7643,35 @@
           <a:p>
             <a:pPr algn="l"/>
             <a:r>
-              <a:rPr sz="1200" b="0">
-                <a:solidFill>
-                  <a:srgbClr val="666666"/>
-                </a:solidFill>
-                <a:latin typeface="Open Sans"/>
-                <a:ea typeface="Open Sans"/>
-                <a:cs typeface="Open Sans"/>
+              <a:rPr sz="2000" b="1">
+                <a:solidFill>
+                  <a:srgbClr val="333333"/>
+                </a:solidFill>
+                <a:latin typeface="Calibri"/>
+                <a:ea typeface="Calibri"/>
+                <a:cs typeface="Calibri"/>
               </a:rPr>
-              <a:t>Оказание первой помощи при наружных кровотечениях</a:t>
-            </a:r>
-          </a:p>
-        </p:txBody>
-      </p:sp>
-      <p:sp>
-        <p:nvSpPr>
-          <p:cNvPr id="6" name="Rectangle 5"/>
+              <a:t>ПРИЗНАКИ КРОВОПОТЕРИ — ПО ГРУППАМ</a:t>
+            </a:r>
+          </a:p>
+        </p:txBody>
+      </p:sp>
+      <p:sp>
+        <p:nvSpPr>
+          <p:cNvPr id="5" name="Rectangle 4"/>
           <p:cNvSpPr/>
           <p:nvPr/>
         </p:nvSpPr>
         <p:spPr>
           <a:xfrm>
-            <a:off x="0" y="2800000"/>
-            <a:ext cx="420000" cy="420000"/>
+            <a:off x="700000" y="820000"/>
+            <a:ext cx="8500000" cy="28000"/>
           </a:xfrm>
           <a:prstGeom prst="rect">
             <a:avLst/>
           </a:prstGeom>
           <a:solidFill>
-            <a:srgbClr val="555555"/>
+            <a:srgbClr val="606060"/>
           </a:solidFill>
           <a:ln>
             <a:noFill/>
@@ -7497,14 +7701,14 @@
       </p:sp>
       <p:sp>
         <p:nvSpPr>
-          <p:cNvPr id="7" name="TextBox 6"/>
+          <p:cNvPr id="6" name="TextBox 5"/>
           <p:cNvSpPr txBox="1"/>
           <p:nvPr/>
         </p:nvSpPr>
         <p:spPr>
           <a:xfrm>
-            <a:off x="0" y="2800000"/>
-            <a:ext cx="420000" cy="420000"/>
+            <a:off x="700000" y="880000"/>
+            <a:ext cx="11000000" cy="320000"/>
           </a:xfrm>
           <a:prstGeom prst="rect">
             <a:avLst/>
@@ -7512,47 +7716,45 @@
           <a:noFill/>
         </p:spPr>
         <p:txBody>
-          <a:bodyPr wrap="square" anchor="ctr">
+          <a:bodyPr wrap="square" anchor="t">
             <a:spAutoFit/>
           </a:bodyPr>
           <a:lstStyle/>
           <a:p>
-            <a:pPr algn="ctr"/>
-            <a:r>
-              <a:rPr sz="1400" b="1">
-                <a:solidFill>
-                  <a:srgbClr val="FFFFFF"/>
-                </a:solidFill>
-                <a:latin typeface="Open Sans"/>
-                <a:ea typeface="Open Sans"/>
-                <a:cs typeface="Open Sans"/>
+            <a:pPr algn="l"/>
+            <a:r>
+              <a:rPr sz="1100" b="0">
+                <a:solidFill>
+                  <a:srgbClr val="777777"/>
+                </a:solidFill>
+                <a:latin typeface="Calibri"/>
+                <a:ea typeface="Calibri"/>
+                <a:cs typeface="Calibri"/>
               </a:rPr>
-              <a:t>4</a:t>
-            </a:r>
-          </a:p>
-        </p:txBody>
-      </p:sp>
-      <p:sp>
-        <p:nvSpPr>
-          <p:cNvPr id="8" name="Rectangle 7"/>
+              <a:t>Оказание первой помощи при наружных кровотечениях</a:t>
+            </a:r>
+          </a:p>
+        </p:txBody>
+      </p:sp>
+      <p:sp>
+        <p:nvSpPr>
+          <p:cNvPr id="7" name="Rectangle 6"/>
           <p:cNvSpPr/>
           <p:nvPr/>
         </p:nvSpPr>
         <p:spPr>
           <a:xfrm>
-            <a:off x="700000" y="1500000"/>
-            <a:ext cx="4000000" cy="4800000"/>
+            <a:off x="0" y="2700000"/>
+            <a:ext cx="400000" cy="400000"/>
           </a:xfrm>
           <a:prstGeom prst="rect">
             <a:avLst/>
           </a:prstGeom>
           <a:solidFill>
-            <a:srgbClr val="FFFFFF"/>
+            <a:srgbClr val="606060"/>
           </a:solidFill>
-          <a:ln w="12700">
-            <a:solidFill>
-              <a:srgbClr val="999999"/>
-            </a:solidFill>
+          <a:ln>
+            <a:noFill/>
           </a:ln>
         </p:spPr>
         <p:style>
@@ -7579,23 +7781,62 @@
       </p:sp>
       <p:sp>
         <p:nvSpPr>
-          <p:cNvPr id="9" name="Rectangle 8"/>
+          <p:cNvPr id="8" name="TextBox 7"/>
+          <p:cNvSpPr txBox="1"/>
+          <p:nvPr/>
+        </p:nvSpPr>
+        <p:spPr>
+          <a:xfrm>
+            <a:off x="0" y="2700000"/>
+            <a:ext cx="400000" cy="400000"/>
+          </a:xfrm>
+          <a:prstGeom prst="rect">
+            <a:avLst/>
+          </a:prstGeom>
+          <a:noFill/>
+        </p:spPr>
+        <p:txBody>
+          <a:bodyPr wrap="square" anchor="ctr">
+            <a:spAutoFit/>
+          </a:bodyPr>
+          <a:lstStyle/>
+          <a:p>
+            <a:pPr algn="ctr"/>
+            <a:r>
+              <a:rPr sz="1300" b="1">
+                <a:solidFill>
+                  <a:srgbClr val="FFFFFF"/>
+                </a:solidFill>
+                <a:latin typeface="Calibri"/>
+                <a:ea typeface="Calibri"/>
+                <a:cs typeface="Calibri"/>
+              </a:rPr>
+              <a:t>4</a:t>
+            </a:r>
+          </a:p>
+        </p:txBody>
+      </p:sp>
+      <p:sp>
+        <p:nvSpPr>
+          <p:cNvPr id="9" name="Rounded Rectangle 8"/>
           <p:cNvSpPr/>
           <p:nvPr/>
         </p:nvSpPr>
         <p:spPr>
           <a:xfrm>
             <a:off x="700000" y="1500000"/>
-            <a:ext cx="4000000" cy="700000"/>
-          </a:xfrm>
-          <a:prstGeom prst="rect">
+            <a:ext cx="4000000" cy="4800000"/>
+          </a:xfrm>
+          <a:prstGeom prst="roundRect">
             <a:avLst/>
           </a:prstGeom>
           <a:solidFill>
-            <a:srgbClr val="555555"/>
+            <a:srgbClr val="FFFFFF"/>
           </a:solidFill>
-          <a:ln>
-            <a:noFill/>
+          <a:ln w="15875">
+            <a:solidFill>
+              <a:srgbClr val="8DDBCD"/>
+            </a:solidFill>
           </a:ln>
         </p:spPr>
         <p:style>
@@ -7622,175 +7863,23 @@
       </p:sp>
       <p:sp>
         <p:nvSpPr>
-          <p:cNvPr id="10" name="TextBox 9"/>
-          <p:cNvSpPr txBox="1"/>
-          <p:nvPr/>
-        </p:nvSpPr>
-        <p:spPr>
-          <a:xfrm>
-            <a:off x="800000" y="1600000"/>
-            <a:ext cx="3800000" cy="500000"/>
-          </a:xfrm>
-          <a:prstGeom prst="rect">
-            <a:avLst/>
-          </a:prstGeom>
-          <a:noFill/>
-        </p:spPr>
-        <p:txBody>
-          <a:bodyPr wrap="square" anchor="t">
-            <a:spAutoFit/>
-          </a:bodyPr>
-          <a:lstStyle/>
-          <a:p>
-            <a:pPr algn="ctr"/>
-            <a:r>
-              <a:rPr sz="1500" b="1">
-                <a:solidFill>
-                  <a:srgbClr val="FFFFFF"/>
-                </a:solidFill>
-                <a:latin typeface="Open Sans"/>
-                <a:ea typeface="Open Sans"/>
-                <a:cs typeface="Open Sans"/>
-              </a:rPr>
-              <a:t>Самочувствие</a:t>
-            </a:r>
-          </a:p>
-        </p:txBody>
-      </p:sp>
-      <p:sp>
-        <p:nvSpPr>
-          <p:cNvPr id="11" name="TextBox 10"/>
-          <p:cNvSpPr txBox="1"/>
-          <p:nvPr/>
-        </p:nvSpPr>
-        <p:spPr>
-          <a:xfrm>
-            <a:off x="850000" y="2450000"/>
-            <a:ext cx="3700000" cy="3500000"/>
-          </a:xfrm>
-          <a:prstGeom prst="rect">
-            <a:avLst/>
-          </a:prstGeom>
-          <a:noFill/>
-        </p:spPr>
-        <p:txBody>
-          <a:bodyPr wrap="square">
-            <a:spAutoFit/>
-          </a:bodyPr>
-          <a:lstStyle/>
-          <a:p>
-            <a:pPr algn="l">
-              <a:spcAft>
-                <a:spcPts val="800"/>
-              </a:spcAft>
-            </a:pPr>
-            <a:r>
-              <a:rPr sz="1400" b="0">
-                <a:solidFill>
-                  <a:srgbClr val="333333"/>
-                </a:solidFill>
-                <a:latin typeface="Open Sans"/>
-                <a:ea typeface="Open Sans"/>
-                <a:cs typeface="Open Sans"/>
-              </a:rPr>
-              <a:t>☐  резкая общая слабость;</a:t>
-            </a:r>
-          </a:p>
-          <a:p>
-            <a:pPr algn="l">
-              <a:spcAft>
-                <a:spcPts val="800"/>
-              </a:spcAft>
-            </a:pPr>
-            <a:r>
-              <a:rPr sz="1400" b="0">
-                <a:solidFill>
-                  <a:srgbClr val="333333"/>
-                </a:solidFill>
-                <a:latin typeface="Open Sans"/>
-                <a:ea typeface="Open Sans"/>
-                <a:cs typeface="Open Sans"/>
-              </a:rPr>
-              <a:t>☐  чувство жажды;</a:t>
-            </a:r>
-          </a:p>
-          <a:p>
-            <a:pPr algn="l">
-              <a:spcAft>
-                <a:spcPts val="800"/>
-              </a:spcAft>
-            </a:pPr>
-            <a:r>
-              <a:rPr sz="1400" b="0">
-                <a:solidFill>
-                  <a:srgbClr val="333333"/>
-                </a:solidFill>
-                <a:latin typeface="Open Sans"/>
-                <a:ea typeface="Open Sans"/>
-                <a:cs typeface="Open Sans"/>
-              </a:rPr>
-              <a:t>☐  головокружение;</a:t>
-            </a:r>
-          </a:p>
-          <a:p>
-            <a:pPr algn="l">
-              <a:spcAft>
-                <a:spcPts val="800"/>
-              </a:spcAft>
-            </a:pPr>
-            <a:r>
-              <a:rPr sz="1400" b="0">
-                <a:solidFill>
-                  <a:srgbClr val="333333"/>
-                </a:solidFill>
-                <a:latin typeface="Open Sans"/>
-                <a:ea typeface="Open Sans"/>
-                <a:cs typeface="Open Sans"/>
-              </a:rPr>
-              <a:t>☐  мелькание «мушек» перед глазами;</a:t>
-            </a:r>
-          </a:p>
-          <a:p>
-            <a:pPr algn="l">
-              <a:spcAft>
-                <a:spcPts val="800"/>
-              </a:spcAft>
-            </a:pPr>
-            <a:r>
-              <a:rPr sz="1400" b="0">
-                <a:solidFill>
-                  <a:srgbClr val="333333"/>
-                </a:solidFill>
-                <a:latin typeface="Open Sans"/>
-                <a:ea typeface="Open Sans"/>
-                <a:cs typeface="Open Sans"/>
-              </a:rPr>
-              <a:t>☐  обморок (чаще при попытке встать).</a:t>
-            </a:r>
-          </a:p>
-        </p:txBody>
-      </p:sp>
-      <p:sp>
-        <p:nvSpPr>
-          <p:cNvPr id="12" name="Rectangle 11"/>
+          <p:cNvPr id="10" name="Rectangle 9"/>
           <p:cNvSpPr/>
           <p:nvPr/>
         </p:nvSpPr>
         <p:spPr>
           <a:xfrm>
-            <a:off x="4950000" y="1500000"/>
-            <a:ext cx="3200000" cy="4800000"/>
+            <a:off x="700000" y="1500000"/>
+            <a:ext cx="4000000" cy="700000"/>
           </a:xfrm>
           <a:prstGeom prst="rect">
             <a:avLst/>
           </a:prstGeom>
           <a:solidFill>
-            <a:srgbClr val="FFFFFF"/>
+            <a:srgbClr val="8DDBCD"/>
           </a:solidFill>
-          <a:ln w="12700">
-            <a:solidFill>
-              <a:srgbClr val="999999"/>
-            </a:solidFill>
+          <a:ln>
+            <a:noFill/>
           </a:ln>
         </p:spPr>
         <p:style>
@@ -7817,23 +7906,175 @@
       </p:sp>
       <p:sp>
         <p:nvSpPr>
-          <p:cNvPr id="13" name="Rectangle 12"/>
+          <p:cNvPr id="11" name="TextBox 10"/>
+          <p:cNvSpPr txBox="1"/>
+          <p:nvPr/>
+        </p:nvSpPr>
+        <p:spPr>
+          <a:xfrm>
+            <a:off x="800000" y="1600000"/>
+            <a:ext cx="3800000" cy="500000"/>
+          </a:xfrm>
+          <a:prstGeom prst="rect">
+            <a:avLst/>
+          </a:prstGeom>
+          <a:noFill/>
+        </p:spPr>
+        <p:txBody>
+          <a:bodyPr wrap="square" anchor="t">
+            <a:spAutoFit/>
+          </a:bodyPr>
+          <a:lstStyle/>
+          <a:p>
+            <a:pPr algn="ctr"/>
+            <a:r>
+              <a:rPr sz="1400" b="1">
+                <a:solidFill>
+                  <a:srgbClr val="0D6B60"/>
+                </a:solidFill>
+                <a:latin typeface="Calibri"/>
+                <a:ea typeface="Calibri"/>
+                <a:cs typeface="Calibri"/>
+              </a:rPr>
+              <a:t>Самочувствие</a:t>
+            </a:r>
+          </a:p>
+        </p:txBody>
+      </p:sp>
+      <p:sp>
+        <p:nvSpPr>
+          <p:cNvPr id="12" name="TextBox 11"/>
+          <p:cNvSpPr txBox="1"/>
+          <p:nvPr/>
+        </p:nvSpPr>
+        <p:spPr>
+          <a:xfrm>
+            <a:off x="850000" y="2450000"/>
+            <a:ext cx="3700000" cy="3500000"/>
+          </a:xfrm>
+          <a:prstGeom prst="rect">
+            <a:avLst/>
+          </a:prstGeom>
+          <a:noFill/>
+        </p:spPr>
+        <p:txBody>
+          <a:bodyPr wrap="square">
+            <a:spAutoFit/>
+          </a:bodyPr>
+          <a:lstStyle/>
+          <a:p>
+            <a:pPr algn="l">
+              <a:spcAft>
+                <a:spcPts val="700"/>
+              </a:spcAft>
+            </a:pPr>
+            <a:r>
+              <a:rPr sz="1300" b="0">
+                <a:solidFill>
+                  <a:srgbClr val="333333"/>
+                </a:solidFill>
+                <a:latin typeface="Calibri"/>
+                <a:ea typeface="Calibri"/>
+                <a:cs typeface="Calibri"/>
+              </a:rPr>
+              <a:t>☐  резкая общая слабость;</a:t>
+            </a:r>
+          </a:p>
+          <a:p>
+            <a:pPr algn="l">
+              <a:spcAft>
+                <a:spcPts val="700"/>
+              </a:spcAft>
+            </a:pPr>
+            <a:r>
+              <a:rPr sz="1300" b="0">
+                <a:solidFill>
+                  <a:srgbClr val="333333"/>
+                </a:solidFill>
+                <a:latin typeface="Calibri"/>
+                <a:ea typeface="Calibri"/>
+                <a:cs typeface="Calibri"/>
+              </a:rPr>
+              <a:t>☐  чувство жажды;</a:t>
+            </a:r>
+          </a:p>
+          <a:p>
+            <a:pPr algn="l">
+              <a:spcAft>
+                <a:spcPts val="700"/>
+              </a:spcAft>
+            </a:pPr>
+            <a:r>
+              <a:rPr sz="1300" b="0">
+                <a:solidFill>
+                  <a:srgbClr val="333333"/>
+                </a:solidFill>
+                <a:latin typeface="Calibri"/>
+                <a:ea typeface="Calibri"/>
+                <a:cs typeface="Calibri"/>
+              </a:rPr>
+              <a:t>☐  головокружение;</a:t>
+            </a:r>
+          </a:p>
+          <a:p>
+            <a:pPr algn="l">
+              <a:spcAft>
+                <a:spcPts val="700"/>
+              </a:spcAft>
+            </a:pPr>
+            <a:r>
+              <a:rPr sz="1300" b="0">
+                <a:solidFill>
+                  <a:srgbClr val="333333"/>
+                </a:solidFill>
+                <a:latin typeface="Calibri"/>
+                <a:ea typeface="Calibri"/>
+                <a:cs typeface="Calibri"/>
+              </a:rPr>
+              <a:t>☐  мелькание «мушек»;</a:t>
+            </a:r>
+          </a:p>
+          <a:p>
+            <a:pPr algn="l">
+              <a:spcAft>
+                <a:spcPts val="700"/>
+              </a:spcAft>
+            </a:pPr>
+            <a:r>
+              <a:rPr sz="1300" b="0">
+                <a:solidFill>
+                  <a:srgbClr val="333333"/>
+                </a:solidFill>
+                <a:latin typeface="Calibri"/>
+                <a:ea typeface="Calibri"/>
+                <a:cs typeface="Calibri"/>
+              </a:rPr>
+              <a:t>☐  обморок при попытке встать.</a:t>
+            </a:r>
+          </a:p>
+        </p:txBody>
+      </p:sp>
+      <p:sp>
+        <p:nvSpPr>
+          <p:cNvPr id="13" name="Rounded Rectangle 12"/>
           <p:cNvSpPr/>
           <p:nvPr/>
         </p:nvSpPr>
         <p:spPr>
           <a:xfrm>
             <a:off x="4950000" y="1500000"/>
-            <a:ext cx="3200000" cy="700000"/>
-          </a:xfrm>
-          <a:prstGeom prst="rect">
+            <a:ext cx="3200000" cy="4800000"/>
+          </a:xfrm>
+          <a:prstGeom prst="roundRect">
             <a:avLst/>
           </a:prstGeom>
           <a:solidFill>
-            <a:srgbClr val="555555"/>
+            <a:srgbClr val="FFFFFF"/>
           </a:solidFill>
-          <a:ln>
-            <a:noFill/>
+          <a:ln w="15875">
+            <a:solidFill>
+              <a:srgbClr val="8DDBCD"/>
+            </a:solidFill>
           </a:ln>
         </p:spPr>
         <p:style>
@@ -7860,139 +8101,23 @@
       </p:sp>
       <p:sp>
         <p:nvSpPr>
-          <p:cNvPr id="14" name="TextBox 13"/>
-          <p:cNvSpPr txBox="1"/>
-          <p:nvPr/>
-        </p:nvSpPr>
-        <p:spPr>
-          <a:xfrm>
-            <a:off x="5050000" y="1600000"/>
-            <a:ext cx="3000000" cy="500000"/>
-          </a:xfrm>
-          <a:prstGeom prst="rect">
-            <a:avLst/>
-          </a:prstGeom>
-          <a:noFill/>
-        </p:spPr>
-        <p:txBody>
-          <a:bodyPr wrap="square" anchor="t">
-            <a:spAutoFit/>
-          </a:bodyPr>
-          <a:lstStyle/>
-          <a:p>
-            <a:pPr algn="ctr"/>
-            <a:r>
-              <a:rPr sz="1500" b="1">
-                <a:solidFill>
-                  <a:srgbClr val="FFFFFF"/>
-                </a:solidFill>
-                <a:latin typeface="Open Sans"/>
-                <a:ea typeface="Open Sans"/>
-                <a:cs typeface="Open Sans"/>
-              </a:rPr>
-              <a:t>Кожа</a:t>
-            </a:r>
-          </a:p>
-        </p:txBody>
-      </p:sp>
-      <p:sp>
-        <p:nvSpPr>
-          <p:cNvPr id="15" name="TextBox 14"/>
-          <p:cNvSpPr txBox="1"/>
-          <p:nvPr/>
-        </p:nvSpPr>
-        <p:spPr>
-          <a:xfrm>
-            <a:off x="5100000" y="2450000"/>
-            <a:ext cx="2900000" cy="3500000"/>
-          </a:xfrm>
-          <a:prstGeom prst="rect">
-            <a:avLst/>
-          </a:prstGeom>
-          <a:noFill/>
-        </p:spPr>
-        <p:txBody>
-          <a:bodyPr wrap="square">
-            <a:spAutoFit/>
-          </a:bodyPr>
-          <a:lstStyle/>
-          <a:p>
-            <a:pPr algn="l">
-              <a:spcAft>
-                <a:spcPts val="800"/>
-              </a:spcAft>
-            </a:pPr>
-            <a:r>
-              <a:rPr sz="1400" b="0">
-                <a:solidFill>
-                  <a:srgbClr val="333333"/>
-                </a:solidFill>
-                <a:latin typeface="Open Sans"/>
-                <a:ea typeface="Open Sans"/>
-                <a:cs typeface="Open Sans"/>
-              </a:rPr>
-              <a:t>☐  бледная;</a:t>
-            </a:r>
-          </a:p>
-          <a:p>
-            <a:pPr algn="l">
-              <a:spcAft>
-                <a:spcPts val="800"/>
-              </a:spcAft>
-            </a:pPr>
-            <a:r>
-              <a:rPr sz="1400" b="0">
-                <a:solidFill>
-                  <a:srgbClr val="333333"/>
-                </a:solidFill>
-                <a:latin typeface="Open Sans"/>
-                <a:ea typeface="Open Sans"/>
-                <a:cs typeface="Open Sans"/>
-              </a:rPr>
-              <a:t>☐  влажная;</a:t>
-            </a:r>
-          </a:p>
-          <a:p>
-            <a:pPr algn="l">
-              <a:spcAft>
-                <a:spcPts val="800"/>
-              </a:spcAft>
-            </a:pPr>
-            <a:r>
-              <a:rPr sz="1400" b="0">
-                <a:solidFill>
-                  <a:srgbClr val="333333"/>
-                </a:solidFill>
-                <a:latin typeface="Open Sans"/>
-                <a:ea typeface="Open Sans"/>
-                <a:cs typeface="Open Sans"/>
-              </a:rPr>
-              <a:t>☐  холодная на ощупь.</a:t>
-            </a:r>
-          </a:p>
-        </p:txBody>
-      </p:sp>
-      <p:sp>
-        <p:nvSpPr>
-          <p:cNvPr id="16" name="Rectangle 15"/>
+          <p:cNvPr id="14" name="Rectangle 13"/>
           <p:cNvSpPr/>
           <p:nvPr/>
         </p:nvSpPr>
         <p:spPr>
           <a:xfrm>
-            <a:off x="8400000" y="1500000"/>
-            <a:ext cx="3400000" cy="4800000"/>
+            <a:off x="4950000" y="1500000"/>
+            <a:ext cx="3200000" cy="700000"/>
           </a:xfrm>
           <a:prstGeom prst="rect">
             <a:avLst/>
           </a:prstGeom>
           <a:solidFill>
-            <a:srgbClr val="FFFFFF"/>
+            <a:srgbClr val="8DDBCD"/>
           </a:solidFill>
-          <a:ln w="12700">
-            <a:solidFill>
-              <a:srgbClr val="999999"/>
-            </a:solidFill>
+          <a:ln>
+            <a:noFill/>
           </a:ln>
         </p:spPr>
         <p:style>
@@ -8019,23 +8144,139 @@
       </p:sp>
       <p:sp>
         <p:nvSpPr>
-          <p:cNvPr id="17" name="Rectangle 16"/>
+          <p:cNvPr id="15" name="TextBox 14"/>
+          <p:cNvSpPr txBox="1"/>
+          <p:nvPr/>
+        </p:nvSpPr>
+        <p:spPr>
+          <a:xfrm>
+            <a:off x="5050000" y="1600000"/>
+            <a:ext cx="3000000" cy="500000"/>
+          </a:xfrm>
+          <a:prstGeom prst="rect">
+            <a:avLst/>
+          </a:prstGeom>
+          <a:noFill/>
+        </p:spPr>
+        <p:txBody>
+          <a:bodyPr wrap="square" anchor="t">
+            <a:spAutoFit/>
+          </a:bodyPr>
+          <a:lstStyle/>
+          <a:p>
+            <a:pPr algn="ctr"/>
+            <a:r>
+              <a:rPr sz="1400" b="1">
+                <a:solidFill>
+                  <a:srgbClr val="0D6B60"/>
+                </a:solidFill>
+                <a:latin typeface="Calibri"/>
+                <a:ea typeface="Calibri"/>
+                <a:cs typeface="Calibri"/>
+              </a:rPr>
+              <a:t>Кожа</a:t>
+            </a:r>
+          </a:p>
+        </p:txBody>
+      </p:sp>
+      <p:sp>
+        <p:nvSpPr>
+          <p:cNvPr id="16" name="TextBox 15"/>
+          <p:cNvSpPr txBox="1"/>
+          <p:nvPr/>
+        </p:nvSpPr>
+        <p:spPr>
+          <a:xfrm>
+            <a:off x="5100000" y="2450000"/>
+            <a:ext cx="2900000" cy="3500000"/>
+          </a:xfrm>
+          <a:prstGeom prst="rect">
+            <a:avLst/>
+          </a:prstGeom>
+          <a:noFill/>
+        </p:spPr>
+        <p:txBody>
+          <a:bodyPr wrap="square">
+            <a:spAutoFit/>
+          </a:bodyPr>
+          <a:lstStyle/>
+          <a:p>
+            <a:pPr algn="l">
+              <a:spcAft>
+                <a:spcPts val="700"/>
+              </a:spcAft>
+            </a:pPr>
+            <a:r>
+              <a:rPr sz="1300" b="0">
+                <a:solidFill>
+                  <a:srgbClr val="333333"/>
+                </a:solidFill>
+                <a:latin typeface="Calibri"/>
+                <a:ea typeface="Calibri"/>
+                <a:cs typeface="Calibri"/>
+              </a:rPr>
+              <a:t>☐  бледная;</a:t>
+            </a:r>
+          </a:p>
+          <a:p>
+            <a:pPr algn="l">
+              <a:spcAft>
+                <a:spcPts val="700"/>
+              </a:spcAft>
+            </a:pPr>
+            <a:r>
+              <a:rPr sz="1300" b="0">
+                <a:solidFill>
+                  <a:srgbClr val="333333"/>
+                </a:solidFill>
+                <a:latin typeface="Calibri"/>
+                <a:ea typeface="Calibri"/>
+                <a:cs typeface="Calibri"/>
+              </a:rPr>
+              <a:t>☐  влажная;</a:t>
+            </a:r>
+          </a:p>
+          <a:p>
+            <a:pPr algn="l">
+              <a:spcAft>
+                <a:spcPts val="700"/>
+              </a:spcAft>
+            </a:pPr>
+            <a:r>
+              <a:rPr sz="1300" b="0">
+                <a:solidFill>
+                  <a:srgbClr val="333333"/>
+                </a:solidFill>
+                <a:latin typeface="Calibri"/>
+                <a:ea typeface="Calibri"/>
+                <a:cs typeface="Calibri"/>
+              </a:rPr>
+              <a:t>☐  холодная на ощупь.</a:t>
+            </a:r>
+          </a:p>
+        </p:txBody>
+      </p:sp>
+      <p:sp>
+        <p:nvSpPr>
+          <p:cNvPr id="17" name="Rounded Rectangle 16"/>
           <p:cNvSpPr/>
           <p:nvPr/>
         </p:nvSpPr>
         <p:spPr>
           <a:xfrm>
             <a:off x="8400000" y="1500000"/>
-            <a:ext cx="3400000" cy="700000"/>
-          </a:xfrm>
-          <a:prstGeom prst="rect">
+            <a:ext cx="3400000" cy="4800000"/>
+          </a:xfrm>
+          <a:prstGeom prst="roundRect">
             <a:avLst/>
           </a:prstGeom>
           <a:solidFill>
-            <a:srgbClr val="555555"/>
+            <a:srgbClr val="FFFFFF"/>
           </a:solidFill>
-          <a:ln>
-            <a:noFill/>
+          <a:ln w="15875">
+            <a:solidFill>
+              <a:srgbClr val="8DDBCD"/>
+            </a:solidFill>
           </a:ln>
         </p:spPr>
         <p:style>
@@ -8062,7 +8303,50 @@
       </p:sp>
       <p:sp>
         <p:nvSpPr>
-          <p:cNvPr id="18" name="TextBox 17"/>
+          <p:cNvPr id="18" name="Rectangle 17"/>
+          <p:cNvSpPr/>
+          <p:nvPr/>
+        </p:nvSpPr>
+        <p:spPr>
+          <a:xfrm>
+            <a:off x="8400000" y="1500000"/>
+            <a:ext cx="3400000" cy="700000"/>
+          </a:xfrm>
+          <a:prstGeom prst="rect">
+            <a:avLst/>
+          </a:prstGeom>
+          <a:solidFill>
+            <a:srgbClr val="8DDBCD"/>
+          </a:solidFill>
+          <a:ln>
+            <a:noFill/>
+          </a:ln>
+        </p:spPr>
+        <p:style>
+          <a:lnRef idx="1">
+            <a:schemeClr val="accent1"/>
+          </a:lnRef>
+          <a:fillRef idx="3">
+            <a:schemeClr val="accent1"/>
+          </a:fillRef>
+          <a:effectRef idx="2">
+            <a:schemeClr val="accent1"/>
+          </a:effectRef>
+          <a:fontRef idx="minor">
+            <a:schemeClr val="lt1"/>
+          </a:fontRef>
+        </p:style>
+        <p:txBody>
+          <a:bodyPr rtlCol="0" anchor="ctr"/>
+          <a:lstStyle/>
+          <a:p>
+            <a:pPr algn="ctr"/>
+          </a:p>
+        </p:txBody>
+      </p:sp>
+      <p:sp>
+        <p:nvSpPr>
+          <p:cNvPr id="19" name="TextBox 18"/>
           <p:cNvSpPr txBox="1"/>
           <p:nvPr/>
         </p:nvSpPr>
@@ -8084,13 +8368,13 @@
           <a:p>
             <a:pPr algn="ctr"/>
             <a:r>
-              <a:rPr sz="1500" b="1">
-                <a:solidFill>
-                  <a:srgbClr val="FFFFFF"/>
-                </a:solidFill>
-                <a:latin typeface="Open Sans"/>
-                <a:ea typeface="Open Sans"/>
-                <a:cs typeface="Open Sans"/>
+              <a:rPr sz="1400" b="1">
+                <a:solidFill>
+                  <a:srgbClr val="0D6B60"/>
+                </a:solidFill>
+                <a:latin typeface="Calibri"/>
+                <a:ea typeface="Calibri"/>
+                <a:cs typeface="Calibri"/>
               </a:rPr>
               <a:t>Дыхание и сердце</a:t>
             </a:r>
@@ -8099,7 +8383,7 @@
       </p:sp>
       <p:sp>
         <p:nvSpPr>
-          <p:cNvPr id="19" name="TextBox 18"/>
+          <p:cNvPr id="20" name="TextBox 19"/>
           <p:cNvSpPr txBox="1"/>
           <p:nvPr/>
         </p:nvSpPr>
@@ -8121,17 +8405,17 @@
           <a:p>
             <a:pPr algn="l">
               <a:spcAft>
-                <a:spcPts val="800"/>
+                <a:spcPts val="700"/>
               </a:spcAft>
             </a:pPr>
             <a:r>
-              <a:rPr sz="1400" b="0">
+              <a:rPr sz="1300" b="0">
                 <a:solidFill>
                   <a:srgbClr val="333333"/>
                 </a:solidFill>
-                <a:latin typeface="Open Sans"/>
-                <a:ea typeface="Open Sans"/>
-                <a:cs typeface="Open Sans"/>
+                <a:latin typeface="Calibri"/>
+                <a:ea typeface="Calibri"/>
+                <a:cs typeface="Calibri"/>
               </a:rPr>
               <a:t>☐  учащённое сердцебиение;</a:t>
             </a:r>
@@ -8139,17 +8423,17 @@
           <a:p>
             <a:pPr algn="l">
               <a:spcAft>
-                <a:spcPts val="800"/>
+                <a:spcPts val="700"/>
               </a:spcAft>
             </a:pPr>
             <a:r>
-              <a:rPr sz="1400" b="0">
+              <a:rPr sz="1300" b="0">
                 <a:solidFill>
                   <a:srgbClr val="333333"/>
                 </a:solidFill>
-                <a:latin typeface="Open Sans"/>
-                <a:ea typeface="Open Sans"/>
-                <a:cs typeface="Open Sans"/>
+                <a:latin typeface="Calibri"/>
+                <a:ea typeface="Calibri"/>
+                <a:cs typeface="Calibri"/>
               </a:rPr>
               <a:t>☐  частое дыхание.</a:t>
             </a:r>
@@ -8219,57 +8503,20 @@
       </p:sp>
       <p:sp>
         <p:nvSpPr>
-          <p:cNvPr id="3" name="TextBox 2"/>
-          <p:cNvSpPr txBox="1"/>
-          <p:nvPr/>
-        </p:nvSpPr>
-        <p:spPr>
-          <a:xfrm>
-            <a:off x="700000" y="280000"/>
-            <a:ext cx="11000000" cy="550000"/>
-          </a:xfrm>
-          <a:prstGeom prst="rect">
-            <a:avLst/>
-          </a:prstGeom>
-          <a:noFill/>
-        </p:spPr>
-        <p:txBody>
-          <a:bodyPr wrap="square" anchor="t">
-            <a:spAutoFit/>
-          </a:bodyPr>
-          <a:lstStyle/>
-          <a:p>
-            <a:pPr algn="l"/>
-            <a:r>
-              <a:rPr sz="2200" b="1">
-                <a:solidFill>
-                  <a:srgbClr val="333333"/>
-                </a:solidFill>
-                <a:latin typeface="Open Sans"/>
-                <a:ea typeface="Open Sans"/>
-                <a:cs typeface="Open Sans"/>
-              </a:rPr>
-              <a:t>КОГДА ПОЯВЛЯЮТСЯ ПРИЗНАКИ КРОВОПОТЕРИ</a:t>
-            </a:r>
-          </a:p>
-        </p:txBody>
-      </p:sp>
-      <p:sp>
-        <p:nvSpPr>
-          <p:cNvPr id="4" name="Rectangle 3"/>
+          <p:cNvPr id="3" name="Rectangle 2"/>
           <p:cNvSpPr/>
           <p:nvPr/>
         </p:nvSpPr>
         <p:spPr>
           <a:xfrm>
-            <a:off x="700000" y="880000"/>
-            <a:ext cx="9000000" cy="25000"/>
+            <a:off x="0" y="0"/>
+            <a:ext cx="12191695" cy="1300000"/>
           </a:xfrm>
           <a:prstGeom prst="rect">
             <a:avLst/>
           </a:prstGeom>
           <a:solidFill>
-            <a:srgbClr val="555555"/>
+            <a:srgbClr val="F8F8F8"/>
           </a:solidFill>
           <a:ln>
             <a:noFill/>
@@ -8299,14 +8546,14 @@
       </p:sp>
       <p:sp>
         <p:nvSpPr>
-          <p:cNvPr id="5" name="TextBox 4"/>
+          <p:cNvPr id="4" name="TextBox 3"/>
           <p:cNvSpPr txBox="1"/>
           <p:nvPr/>
         </p:nvSpPr>
         <p:spPr>
           <a:xfrm>
-            <a:off x="700000" y="950000"/>
-            <a:ext cx="11000000" cy="350000"/>
+            <a:off x="700000" y="220000"/>
+            <a:ext cx="11200000" cy="550000"/>
           </a:xfrm>
           <a:prstGeom prst="rect">
             <a:avLst/>
@@ -8321,35 +8568,35 @@
           <a:p>
             <a:pPr algn="l"/>
             <a:r>
-              <a:rPr sz="1200" b="0">
-                <a:solidFill>
-                  <a:srgbClr val="666666"/>
-                </a:solidFill>
-                <a:latin typeface="Open Sans"/>
-                <a:ea typeface="Open Sans"/>
-                <a:cs typeface="Open Sans"/>
+              <a:rPr sz="2000" b="1">
+                <a:solidFill>
+                  <a:srgbClr val="333333"/>
+                </a:solidFill>
+                <a:latin typeface="Calibri"/>
+                <a:ea typeface="Calibri"/>
+                <a:cs typeface="Calibri"/>
               </a:rPr>
-              <a:t>Оказание первой помощи при наружных кровотечениях</a:t>
-            </a:r>
-          </a:p>
-        </p:txBody>
-      </p:sp>
-      <p:sp>
-        <p:nvSpPr>
-          <p:cNvPr id="6" name="Rectangle 5"/>
+              <a:t>КОГДА ПОЯВЛЯЮТСЯ ПРИЗНАКИ КРОВОПОТЕРИ</a:t>
+            </a:r>
+          </a:p>
+        </p:txBody>
+      </p:sp>
+      <p:sp>
+        <p:nvSpPr>
+          <p:cNvPr id="5" name="Rectangle 4"/>
           <p:cNvSpPr/>
           <p:nvPr/>
         </p:nvSpPr>
         <p:spPr>
           <a:xfrm>
-            <a:off x="0" y="2800000"/>
-            <a:ext cx="420000" cy="420000"/>
+            <a:off x="700000" y="820000"/>
+            <a:ext cx="8500000" cy="28000"/>
           </a:xfrm>
           <a:prstGeom prst="rect">
             <a:avLst/>
           </a:prstGeom>
           <a:solidFill>
-            <a:srgbClr val="555555"/>
+            <a:srgbClr val="606060"/>
           </a:solidFill>
           <a:ln>
             <a:noFill/>
@@ -8379,14 +8626,14 @@
       </p:sp>
       <p:sp>
         <p:nvSpPr>
-          <p:cNvPr id="7" name="TextBox 6"/>
+          <p:cNvPr id="6" name="TextBox 5"/>
           <p:cNvSpPr txBox="1"/>
           <p:nvPr/>
         </p:nvSpPr>
         <p:spPr>
           <a:xfrm>
-            <a:off x="0" y="2800000"/>
-            <a:ext cx="420000" cy="420000"/>
+            <a:off x="700000" y="880000"/>
+            <a:ext cx="11000000" cy="320000"/>
           </a:xfrm>
           <a:prstGeom prst="rect">
             <a:avLst/>
@@ -8394,47 +8641,45 @@
           <a:noFill/>
         </p:spPr>
         <p:txBody>
-          <a:bodyPr wrap="square" anchor="ctr">
+          <a:bodyPr wrap="square" anchor="t">
             <a:spAutoFit/>
           </a:bodyPr>
           <a:lstStyle/>
           <a:p>
-            <a:pPr algn="ctr"/>
-            <a:r>
-              <a:rPr sz="1400" b="1">
-                <a:solidFill>
-                  <a:srgbClr val="FFFFFF"/>
-                </a:solidFill>
-                <a:latin typeface="Open Sans"/>
-                <a:ea typeface="Open Sans"/>
-                <a:cs typeface="Open Sans"/>
+            <a:pPr algn="l"/>
+            <a:r>
+              <a:rPr sz="1100" b="0">
+                <a:solidFill>
+                  <a:srgbClr val="777777"/>
+                </a:solidFill>
+                <a:latin typeface="Calibri"/>
+                <a:ea typeface="Calibri"/>
+                <a:cs typeface="Calibri"/>
               </a:rPr>
-              <a:t>5</a:t>
-            </a:r>
-          </a:p>
-        </p:txBody>
-      </p:sp>
-      <p:sp>
-        <p:nvSpPr>
-          <p:cNvPr id="8" name="Rectangle 7"/>
+              <a:t>Оказание первой помощи при наружных кровотечениях</a:t>
+            </a:r>
+          </a:p>
+        </p:txBody>
+      </p:sp>
+      <p:sp>
+        <p:nvSpPr>
+          <p:cNvPr id="7" name="Rectangle 6"/>
           <p:cNvSpPr/>
           <p:nvPr/>
         </p:nvSpPr>
         <p:spPr>
           <a:xfrm>
-            <a:off x="700000" y="1550000"/>
-            <a:ext cx="11000000" cy="1300000"/>
+            <a:off x="0" y="2700000"/>
+            <a:ext cx="400000" cy="400000"/>
           </a:xfrm>
           <a:prstGeom prst="rect">
             <a:avLst/>
           </a:prstGeom>
           <a:solidFill>
-            <a:srgbClr val="FFFFFF"/>
+            <a:srgbClr val="606060"/>
           </a:solidFill>
-          <a:ln w="12700">
-            <a:solidFill>
-              <a:srgbClr val="999999"/>
-            </a:solidFill>
+          <a:ln>
+            <a:noFill/>
           </a:ln>
         </p:spPr>
         <p:style>
@@ -8461,20 +8706,57 @@
       </p:sp>
       <p:sp>
         <p:nvSpPr>
-          <p:cNvPr id="9" name="Rectangle 8"/>
+          <p:cNvPr id="8" name="TextBox 7"/>
+          <p:cNvSpPr txBox="1"/>
+          <p:nvPr/>
+        </p:nvSpPr>
+        <p:spPr>
+          <a:xfrm>
+            <a:off x="0" y="2700000"/>
+            <a:ext cx="400000" cy="400000"/>
+          </a:xfrm>
+          <a:prstGeom prst="rect">
+            <a:avLst/>
+          </a:prstGeom>
+          <a:noFill/>
+        </p:spPr>
+        <p:txBody>
+          <a:bodyPr wrap="square" anchor="ctr">
+            <a:spAutoFit/>
+          </a:bodyPr>
+          <a:lstStyle/>
+          <a:p>
+            <a:pPr algn="ctr"/>
+            <a:r>
+              <a:rPr sz="1300" b="1">
+                <a:solidFill>
+                  <a:srgbClr val="FFFFFF"/>
+                </a:solidFill>
+                <a:latin typeface="Calibri"/>
+                <a:ea typeface="Calibri"/>
+                <a:cs typeface="Calibri"/>
+              </a:rPr>
+              <a:t>5</a:t>
+            </a:r>
+          </a:p>
+        </p:txBody>
+      </p:sp>
+      <p:sp>
+        <p:nvSpPr>
+          <p:cNvPr id="9" name="Rounded Rectangle 8"/>
           <p:cNvSpPr/>
           <p:nvPr/>
         </p:nvSpPr>
         <p:spPr>
           <a:xfrm>
             <a:off x="700000" y="1550000"/>
-            <a:ext cx="90000" cy="1300000"/>
-          </a:xfrm>
-          <a:prstGeom prst="rect">
+            <a:ext cx="11000000" cy="1300000"/>
+          </a:xfrm>
+          <a:prstGeom prst="roundRect">
             <a:avLst/>
           </a:prstGeom>
           <a:solidFill>
-            <a:srgbClr val="ED1C24"/>
+            <a:srgbClr val="F0F0F0"/>
           </a:solidFill>
           <a:ln>
             <a:noFill/>
@@ -8504,99 +8786,23 @@
       </p:sp>
       <p:sp>
         <p:nvSpPr>
-          <p:cNvPr id="10" name="TextBox 9"/>
-          <p:cNvSpPr txBox="1"/>
-          <p:nvPr/>
-        </p:nvSpPr>
-        <p:spPr>
-          <a:xfrm>
-            <a:off x="1000000" y="1700000"/>
-            <a:ext cx="10400000" cy="400000"/>
-          </a:xfrm>
-          <a:prstGeom prst="rect">
-            <a:avLst/>
-          </a:prstGeom>
-          <a:noFill/>
-        </p:spPr>
-        <p:txBody>
-          <a:bodyPr wrap="square" anchor="t">
-            <a:spAutoFit/>
-          </a:bodyPr>
-          <a:lstStyle/>
-          <a:p>
-            <a:pPr algn="l"/>
-            <a:r>
-              <a:rPr sz="1600" b="1">
-                <a:solidFill>
-                  <a:srgbClr val="333333"/>
-                </a:solidFill>
-                <a:latin typeface="Open Sans"/>
-                <a:ea typeface="Open Sans"/>
-                <a:cs typeface="Open Sans"/>
-              </a:rPr>
-              <a:t>Кровотечение продолжается</a:t>
-            </a:r>
-          </a:p>
-        </p:txBody>
-      </p:sp>
-      <p:sp>
-        <p:nvSpPr>
-          <p:cNvPr id="11" name="TextBox 10"/>
-          <p:cNvSpPr txBox="1"/>
-          <p:nvPr/>
-        </p:nvSpPr>
-        <p:spPr>
-          <a:xfrm>
-            <a:off x="1000000" y="2150000"/>
-            <a:ext cx="10400000" cy="500000"/>
-          </a:xfrm>
-          <a:prstGeom prst="rect">
-            <a:avLst/>
-          </a:prstGeom>
-          <a:noFill/>
-        </p:spPr>
-        <p:txBody>
-          <a:bodyPr wrap="square" anchor="t">
-            <a:spAutoFit/>
-          </a:bodyPr>
-          <a:lstStyle/>
-          <a:p>
-            <a:pPr algn="l"/>
-            <a:r>
-              <a:rPr sz="1400" b="0">
-                <a:solidFill>
-                  <a:srgbClr val="666666"/>
-                </a:solidFill>
-                <a:latin typeface="Open Sans"/>
-                <a:ea typeface="Open Sans"/>
-                <a:cs typeface="Open Sans"/>
-              </a:rPr>
-              <a:t>Признаки нарастают на фоне видимой крови.</a:t>
-            </a:r>
-          </a:p>
-        </p:txBody>
-      </p:sp>
-      <p:sp>
-        <p:nvSpPr>
-          <p:cNvPr id="12" name="Rectangle 11"/>
+          <p:cNvPr id="10" name="Oval 9"/>
           <p:cNvSpPr/>
           <p:nvPr/>
         </p:nvSpPr>
         <p:spPr>
           <a:xfrm>
-            <a:off x="700000" y="3050000"/>
-            <a:ext cx="11000000" cy="1300000"/>
-          </a:xfrm>
-          <a:prstGeom prst="rect">
+            <a:off x="900000" y="1900000"/>
+            <a:ext cx="550000" cy="550000"/>
+          </a:xfrm>
+          <a:prstGeom prst="ellipse">
             <a:avLst/>
           </a:prstGeom>
           <a:solidFill>
-            <a:srgbClr val="FFFFFF"/>
+            <a:srgbClr val="8DDBCD"/>
           </a:solidFill>
-          <a:ln w="12700">
-            <a:solidFill>
-              <a:srgbClr val="999999"/>
-            </a:solidFill>
+          <a:ln>
+            <a:noFill/>
           </a:ln>
         </p:spPr>
         <p:style>
@@ -8623,20 +8829,94 @@
       </p:sp>
       <p:sp>
         <p:nvSpPr>
-          <p:cNvPr id="13" name="Rectangle 12"/>
+          <p:cNvPr id="11" name="TextBox 10"/>
+          <p:cNvSpPr txBox="1"/>
+          <p:nvPr/>
+        </p:nvSpPr>
+        <p:spPr>
+          <a:xfrm>
+            <a:off x="1700000" y="1750000"/>
+            <a:ext cx="9600000" cy="400000"/>
+          </a:xfrm>
+          <a:prstGeom prst="rect">
+            <a:avLst/>
+          </a:prstGeom>
+          <a:noFill/>
+        </p:spPr>
+        <p:txBody>
+          <a:bodyPr wrap="square" anchor="t">
+            <a:spAutoFit/>
+          </a:bodyPr>
+          <a:lstStyle/>
+          <a:p>
+            <a:pPr algn="l"/>
+            <a:r>
+              <a:rPr sz="1500" b="1">
+                <a:solidFill>
+                  <a:srgbClr val="1AA090"/>
+                </a:solidFill>
+                <a:latin typeface="Calibri"/>
+                <a:ea typeface="Calibri"/>
+                <a:cs typeface="Calibri"/>
+              </a:rPr>
+              <a:t>Кровотечение продолжается</a:t>
+            </a:r>
+          </a:p>
+        </p:txBody>
+      </p:sp>
+      <p:sp>
+        <p:nvSpPr>
+          <p:cNvPr id="12" name="TextBox 11"/>
+          <p:cNvSpPr txBox="1"/>
+          <p:nvPr/>
+        </p:nvSpPr>
+        <p:spPr>
+          <a:xfrm>
+            <a:off x="1700000" y="2200000"/>
+            <a:ext cx="9600000" cy="450000"/>
+          </a:xfrm>
+          <a:prstGeom prst="rect">
+            <a:avLst/>
+          </a:prstGeom>
+          <a:noFill/>
+        </p:spPr>
+        <p:txBody>
+          <a:bodyPr wrap="square" anchor="t">
+            <a:spAutoFit/>
+          </a:bodyPr>
+          <a:lstStyle/>
+          <a:p>
+            <a:pPr algn="l"/>
+            <a:r>
+              <a:rPr sz="1300" b="0">
+                <a:solidFill>
+                  <a:srgbClr val="777777"/>
+                </a:solidFill>
+                <a:latin typeface="Calibri"/>
+                <a:ea typeface="Calibri"/>
+                <a:cs typeface="Calibri"/>
+              </a:rPr>
+              <a:t>Признаки нарастают на фоне видимой крови.</a:t>
+            </a:r>
+          </a:p>
+        </p:txBody>
+      </p:sp>
+      <p:sp>
+        <p:nvSpPr>
+          <p:cNvPr id="13" name="Rounded Rectangle 12"/>
           <p:cNvSpPr/>
           <p:nvPr/>
         </p:nvSpPr>
         <p:spPr>
           <a:xfrm>
             <a:off x="700000" y="3050000"/>
-            <a:ext cx="90000" cy="1300000"/>
-          </a:xfrm>
-          <a:prstGeom prst="rect">
+            <a:ext cx="11000000" cy="1300000"/>
+          </a:xfrm>
+          <a:prstGeom prst="roundRect">
             <a:avLst/>
           </a:prstGeom>
           <a:solidFill>
-            <a:srgbClr val="ED1C24"/>
+            <a:srgbClr val="F0F0F0"/>
           </a:solidFill>
           <a:ln>
             <a:noFill/>
@@ -8666,99 +8946,23 @@
       </p:sp>
       <p:sp>
         <p:nvSpPr>
-          <p:cNvPr id="14" name="TextBox 13"/>
-          <p:cNvSpPr txBox="1"/>
-          <p:nvPr/>
-        </p:nvSpPr>
-        <p:spPr>
-          <a:xfrm>
-            <a:off x="1000000" y="3200000"/>
-            <a:ext cx="10400000" cy="400000"/>
-          </a:xfrm>
-          <a:prstGeom prst="rect">
-            <a:avLst/>
-          </a:prstGeom>
-          <a:noFill/>
-        </p:spPr>
-        <p:txBody>
-          <a:bodyPr wrap="square" anchor="t">
-            <a:spAutoFit/>
-          </a:bodyPr>
-          <a:lstStyle/>
-          <a:p>
-            <a:pPr algn="l"/>
-            <a:r>
-              <a:rPr sz="1600" b="1">
-                <a:solidFill>
-                  <a:srgbClr val="333333"/>
-                </a:solidFill>
-                <a:latin typeface="Open Sans"/>
-                <a:ea typeface="Open Sans"/>
-                <a:cs typeface="Open Sans"/>
-              </a:rPr>
-              <a:t>Кровотечение уже остановлено</a:t>
-            </a:r>
-          </a:p>
-        </p:txBody>
-      </p:sp>
-      <p:sp>
-        <p:nvSpPr>
-          <p:cNvPr id="15" name="TextBox 14"/>
-          <p:cNvSpPr txBox="1"/>
-          <p:nvPr/>
-        </p:nvSpPr>
-        <p:spPr>
-          <a:xfrm>
-            <a:off x="1000000" y="3650000"/>
-            <a:ext cx="10400000" cy="500000"/>
-          </a:xfrm>
-          <a:prstGeom prst="rect">
-            <a:avLst/>
-          </a:prstGeom>
-          <a:noFill/>
-        </p:spPr>
-        <p:txBody>
-          <a:bodyPr wrap="square" anchor="t">
-            <a:spAutoFit/>
-          </a:bodyPr>
-          <a:lstStyle/>
-          <a:p>
-            <a:pPr algn="l"/>
-            <a:r>
-              <a:rPr sz="1400" b="0">
-                <a:solidFill>
-                  <a:srgbClr val="666666"/>
-                </a:solidFill>
-                <a:latin typeface="Open Sans"/>
-                <a:ea typeface="Open Sans"/>
-                <a:cs typeface="Open Sans"/>
-              </a:rPr>
-              <a:t>Признаки могут сохраняться — потерянная кровь не возвращается сразу.</a:t>
-            </a:r>
-          </a:p>
-        </p:txBody>
-      </p:sp>
-      <p:sp>
-        <p:nvSpPr>
-          <p:cNvPr id="16" name="Rectangle 15"/>
+          <p:cNvPr id="14" name="Oval 13"/>
           <p:cNvSpPr/>
           <p:nvPr/>
         </p:nvSpPr>
         <p:spPr>
           <a:xfrm>
-            <a:off x="700000" y="4550000"/>
-            <a:ext cx="11000000" cy="1300000"/>
-          </a:xfrm>
-          <a:prstGeom prst="rect">
+            <a:off x="900000" y="3400000"/>
+            <a:ext cx="550000" cy="550000"/>
+          </a:xfrm>
+          <a:prstGeom prst="ellipse">
             <a:avLst/>
           </a:prstGeom>
           <a:solidFill>
-            <a:srgbClr val="FFFFFF"/>
+            <a:srgbClr val="8DDBCD"/>
           </a:solidFill>
-          <a:ln w="12700">
-            <a:solidFill>
-              <a:srgbClr val="999999"/>
-            </a:solidFill>
+          <a:ln>
+            <a:noFill/>
           </a:ln>
         </p:spPr>
         <p:style>
@@ -8785,20 +8989,94 @@
       </p:sp>
       <p:sp>
         <p:nvSpPr>
-          <p:cNvPr id="17" name="Rectangle 16"/>
+          <p:cNvPr id="15" name="TextBox 14"/>
+          <p:cNvSpPr txBox="1"/>
+          <p:nvPr/>
+        </p:nvSpPr>
+        <p:spPr>
+          <a:xfrm>
+            <a:off x="1700000" y="3250000"/>
+            <a:ext cx="9600000" cy="400000"/>
+          </a:xfrm>
+          <a:prstGeom prst="rect">
+            <a:avLst/>
+          </a:prstGeom>
+          <a:noFill/>
+        </p:spPr>
+        <p:txBody>
+          <a:bodyPr wrap="square" anchor="t">
+            <a:spAutoFit/>
+          </a:bodyPr>
+          <a:lstStyle/>
+          <a:p>
+            <a:pPr algn="l"/>
+            <a:r>
+              <a:rPr sz="1500" b="1">
+                <a:solidFill>
+                  <a:srgbClr val="1AA090"/>
+                </a:solidFill>
+                <a:latin typeface="Calibri"/>
+                <a:ea typeface="Calibri"/>
+                <a:cs typeface="Calibri"/>
+              </a:rPr>
+              <a:t>Кровотечение уже остановлено</a:t>
+            </a:r>
+          </a:p>
+        </p:txBody>
+      </p:sp>
+      <p:sp>
+        <p:nvSpPr>
+          <p:cNvPr id="16" name="TextBox 15"/>
+          <p:cNvSpPr txBox="1"/>
+          <p:nvPr/>
+        </p:nvSpPr>
+        <p:spPr>
+          <a:xfrm>
+            <a:off x="1700000" y="3700000"/>
+            <a:ext cx="9600000" cy="450000"/>
+          </a:xfrm>
+          <a:prstGeom prst="rect">
+            <a:avLst/>
+          </a:prstGeom>
+          <a:noFill/>
+        </p:spPr>
+        <p:txBody>
+          <a:bodyPr wrap="square" anchor="t">
+            <a:spAutoFit/>
+          </a:bodyPr>
+          <a:lstStyle/>
+          <a:p>
+            <a:pPr algn="l"/>
+            <a:r>
+              <a:rPr sz="1300" b="0">
+                <a:solidFill>
+                  <a:srgbClr val="777777"/>
+                </a:solidFill>
+                <a:latin typeface="Calibri"/>
+                <a:ea typeface="Calibri"/>
+                <a:cs typeface="Calibri"/>
+              </a:rPr>
+              <a:t>Признаки могут сохраняться — потерянная кровь не возвращается сразу.</a:t>
+            </a:r>
+          </a:p>
+        </p:txBody>
+      </p:sp>
+      <p:sp>
+        <p:nvSpPr>
+          <p:cNvPr id="17" name="Rounded Rectangle 16"/>
           <p:cNvSpPr/>
           <p:nvPr/>
         </p:nvSpPr>
         <p:spPr>
           <a:xfrm>
             <a:off x="700000" y="4550000"/>
-            <a:ext cx="90000" cy="1300000"/>
-          </a:xfrm>
-          <a:prstGeom prst="rect">
+            <a:ext cx="11000000" cy="1300000"/>
+          </a:xfrm>
+          <a:prstGeom prst="roundRect">
             <a:avLst/>
           </a:prstGeom>
           <a:solidFill>
-            <a:srgbClr val="ED1C24"/>
+            <a:srgbClr val="F0F0F0"/>
           </a:solidFill>
           <a:ln>
             <a:noFill/>
@@ -8828,14 +9106,57 @@
       </p:sp>
       <p:sp>
         <p:nvSpPr>
-          <p:cNvPr id="18" name="TextBox 17"/>
+          <p:cNvPr id="18" name="Oval 17"/>
+          <p:cNvSpPr/>
+          <p:nvPr/>
+        </p:nvSpPr>
+        <p:spPr>
+          <a:xfrm>
+            <a:off x="900000" y="4900000"/>
+            <a:ext cx="550000" cy="550000"/>
+          </a:xfrm>
+          <a:prstGeom prst="ellipse">
+            <a:avLst/>
+          </a:prstGeom>
+          <a:solidFill>
+            <a:srgbClr val="8DDBCD"/>
+          </a:solidFill>
+          <a:ln>
+            <a:noFill/>
+          </a:ln>
+        </p:spPr>
+        <p:style>
+          <a:lnRef idx="1">
+            <a:schemeClr val="accent1"/>
+          </a:lnRef>
+          <a:fillRef idx="3">
+            <a:schemeClr val="accent1"/>
+          </a:fillRef>
+          <a:effectRef idx="2">
+            <a:schemeClr val="accent1"/>
+          </a:effectRef>
+          <a:fontRef idx="minor">
+            <a:schemeClr val="lt1"/>
+          </a:fontRef>
+        </p:style>
+        <p:txBody>
+          <a:bodyPr rtlCol="0" anchor="ctr"/>
+          <a:lstStyle/>
+          <a:p>
+            <a:pPr algn="ctr"/>
+          </a:p>
+        </p:txBody>
+      </p:sp>
+      <p:sp>
+        <p:nvSpPr>
+          <p:cNvPr id="19" name="TextBox 18"/>
           <p:cNvSpPr txBox="1"/>
           <p:nvPr/>
         </p:nvSpPr>
         <p:spPr>
           <a:xfrm>
-            <a:off x="1000000" y="4700000"/>
-            <a:ext cx="10400000" cy="400000"/>
+            <a:off x="1700000" y="4750000"/>
+            <a:ext cx="9600000" cy="400000"/>
           </a:xfrm>
           <a:prstGeom prst="rect">
             <a:avLst/>
@@ -8850,13 +9171,13 @@
           <a:p>
             <a:pPr algn="l"/>
             <a:r>
-              <a:rPr sz="1600" b="1">
-                <a:solidFill>
-                  <a:srgbClr val="333333"/>
-                </a:solidFill>
-                <a:latin typeface="Open Sans"/>
-                <a:ea typeface="Open Sans"/>
-                <a:cs typeface="Open Sans"/>
+              <a:rPr sz="1500" b="1">
+                <a:solidFill>
+                  <a:srgbClr val="1AA090"/>
+                </a:solidFill>
+                <a:latin typeface="Calibri"/>
+                <a:ea typeface="Calibri"/>
+                <a:cs typeface="Calibri"/>
               </a:rPr>
               <a:t>Видимой крови нет</a:t>
             </a:r>
@@ -8865,14 +9186,14 @@
       </p:sp>
       <p:sp>
         <p:nvSpPr>
-          <p:cNvPr id="19" name="TextBox 18"/>
+          <p:cNvPr id="20" name="TextBox 19"/>
           <p:cNvSpPr txBox="1"/>
           <p:nvPr/>
         </p:nvSpPr>
         <p:spPr>
           <a:xfrm>
-            <a:off x="1000000" y="5150000"/>
-            <a:ext cx="10400000" cy="500000"/>
+            <a:off x="1700000" y="5200000"/>
+            <a:ext cx="9600000" cy="450000"/>
           </a:xfrm>
           <a:prstGeom prst="rect">
             <a:avLst/>
@@ -8887,13 +9208,13 @@
           <a:p>
             <a:pPr algn="l"/>
             <a:r>
-              <a:rPr sz="1400" b="0">
-                <a:solidFill>
-                  <a:srgbClr val="666666"/>
-                </a:solidFill>
-                <a:latin typeface="Open Sans"/>
-                <a:ea typeface="Open Sans"/>
-                <a:cs typeface="Open Sans"/>
+              <a:rPr sz="1300" b="0">
+                <a:solidFill>
+                  <a:srgbClr val="777777"/>
+                </a:solidFill>
+                <a:latin typeface="Calibri"/>
+                <a:ea typeface="Calibri"/>
+                <a:cs typeface="Calibri"/>
               </a:rPr>
               <a:t>Возможно внутреннее (скрытое) кровотечение — оценивайте состояние.</a:t>
             </a:r>
@@ -8963,57 +9284,20 @@
       </p:sp>
       <p:sp>
         <p:nvSpPr>
-          <p:cNvPr id="3" name="TextBox 2"/>
-          <p:cNvSpPr txBox="1"/>
-          <p:nvPr/>
-        </p:nvSpPr>
-        <p:spPr>
-          <a:xfrm>
-            <a:off x="700000" y="280000"/>
-            <a:ext cx="11000000" cy="550000"/>
-          </a:xfrm>
-          <a:prstGeom prst="rect">
-            <a:avLst/>
-          </a:prstGeom>
-          <a:noFill/>
-        </p:spPr>
-        <p:txBody>
-          <a:bodyPr wrap="square" anchor="t">
-            <a:spAutoFit/>
-          </a:bodyPr>
-          <a:lstStyle/>
-          <a:p>
-            <a:pPr algn="l"/>
-            <a:r>
-              <a:rPr sz="2200" b="1">
-                <a:solidFill>
-                  <a:srgbClr val="333333"/>
-                </a:solidFill>
-                <a:latin typeface="Open Sans"/>
-                <a:ea typeface="Open Sans"/>
-                <a:cs typeface="Open Sans"/>
-              </a:rPr>
-              <a:t>СКРЫТАЯ (ВНУТРЕННЯЯ) КРОВОПОТЕРЯ</a:t>
-            </a:r>
-          </a:p>
-        </p:txBody>
-      </p:sp>
-      <p:sp>
-        <p:nvSpPr>
-          <p:cNvPr id="4" name="Rectangle 3"/>
+          <p:cNvPr id="3" name="Rectangle 2"/>
           <p:cNvSpPr/>
           <p:nvPr/>
         </p:nvSpPr>
         <p:spPr>
           <a:xfrm>
-            <a:off x="700000" y="880000"/>
-            <a:ext cx="9000000" cy="25000"/>
+            <a:off x="0" y="0"/>
+            <a:ext cx="12191695" cy="1300000"/>
           </a:xfrm>
           <a:prstGeom prst="rect">
             <a:avLst/>
           </a:prstGeom>
           <a:solidFill>
-            <a:srgbClr val="555555"/>
+            <a:srgbClr val="F8F8F8"/>
           </a:solidFill>
           <a:ln>
             <a:noFill/>
@@ -9043,14 +9327,14 @@
       </p:sp>
       <p:sp>
         <p:nvSpPr>
-          <p:cNvPr id="5" name="TextBox 4"/>
+          <p:cNvPr id="4" name="TextBox 3"/>
           <p:cNvSpPr txBox="1"/>
           <p:nvPr/>
         </p:nvSpPr>
         <p:spPr>
           <a:xfrm>
-            <a:off x="700000" y="950000"/>
-            <a:ext cx="11000000" cy="350000"/>
+            <a:off x="700000" y="220000"/>
+            <a:ext cx="11200000" cy="550000"/>
           </a:xfrm>
           <a:prstGeom prst="rect">
             <a:avLst/>
@@ -9065,35 +9349,35 @@
           <a:p>
             <a:pPr algn="l"/>
             <a:r>
-              <a:rPr sz="1200" b="0">
-                <a:solidFill>
-                  <a:srgbClr val="666666"/>
-                </a:solidFill>
-                <a:latin typeface="Open Sans"/>
-                <a:ea typeface="Open Sans"/>
-                <a:cs typeface="Open Sans"/>
+              <a:rPr sz="2000" b="1">
+                <a:solidFill>
+                  <a:srgbClr val="333333"/>
+                </a:solidFill>
+                <a:latin typeface="Calibri"/>
+                <a:ea typeface="Calibri"/>
+                <a:cs typeface="Calibri"/>
               </a:rPr>
-              <a:t>Оказание первой помощи при наружных кровотечениях</a:t>
-            </a:r>
-          </a:p>
-        </p:txBody>
-      </p:sp>
-      <p:sp>
-        <p:nvSpPr>
-          <p:cNvPr id="6" name="Rectangle 5"/>
+              <a:t>СКРЫТАЯ (ВНУТРЕННЯЯ) КРОВОПОТЕРЯ</a:t>
+            </a:r>
+          </a:p>
+        </p:txBody>
+      </p:sp>
+      <p:sp>
+        <p:nvSpPr>
+          <p:cNvPr id="5" name="Rectangle 4"/>
           <p:cNvSpPr/>
           <p:nvPr/>
         </p:nvSpPr>
         <p:spPr>
           <a:xfrm>
-            <a:off x="0" y="2800000"/>
-            <a:ext cx="420000" cy="420000"/>
+            <a:off x="700000" y="820000"/>
+            <a:ext cx="8500000" cy="28000"/>
           </a:xfrm>
           <a:prstGeom prst="rect">
             <a:avLst/>
           </a:prstGeom>
           <a:solidFill>
-            <a:srgbClr val="555555"/>
+            <a:srgbClr val="606060"/>
           </a:solidFill>
           <a:ln>
             <a:noFill/>
@@ -9123,51 +9407,14 @@
       </p:sp>
       <p:sp>
         <p:nvSpPr>
-          <p:cNvPr id="7" name="TextBox 6"/>
+          <p:cNvPr id="6" name="TextBox 5"/>
           <p:cNvSpPr txBox="1"/>
           <p:nvPr/>
         </p:nvSpPr>
         <p:spPr>
           <a:xfrm>
-            <a:off x="0" y="2800000"/>
-            <a:ext cx="420000" cy="420000"/>
-          </a:xfrm>
-          <a:prstGeom prst="rect">
-            <a:avLst/>
-          </a:prstGeom>
-          <a:noFill/>
-        </p:spPr>
-        <p:txBody>
-          <a:bodyPr wrap="square" anchor="ctr">
-            <a:spAutoFit/>
-          </a:bodyPr>
-          <a:lstStyle/>
-          <a:p>
-            <a:pPr algn="ctr"/>
-            <a:r>
-              <a:rPr sz="1400" b="1">
-                <a:solidFill>
-                  <a:srgbClr val="FFFFFF"/>
-                </a:solidFill>
-                <a:latin typeface="Open Sans"/>
-                <a:ea typeface="Open Sans"/>
-                <a:cs typeface="Open Sans"/>
-              </a:rPr>
-              <a:t>6</a:t>
-            </a:r>
-          </a:p>
-        </p:txBody>
-      </p:sp>
-      <p:sp>
-        <p:nvSpPr>
-          <p:cNvPr id="8" name="TextBox 7"/>
-          <p:cNvSpPr txBox="1"/>
-          <p:nvPr/>
-        </p:nvSpPr>
-        <p:spPr>
-          <a:xfrm>
-            <a:off x="700000" y="1500000"/>
-            <a:ext cx="11000000" cy="900000"/>
+            <a:off x="700000" y="880000"/>
+            <a:ext cx="11000000" cy="320000"/>
           </a:xfrm>
           <a:prstGeom prst="rect">
             <a:avLst/>
@@ -9182,112 +9429,35 @@
           <a:p>
             <a:pPr algn="l"/>
             <a:r>
-              <a:rPr sz="1600" b="0">
-                <a:solidFill>
-                  <a:srgbClr val="333333"/>
-                </a:solidFill>
-                <a:latin typeface="Open Sans"/>
-                <a:ea typeface="Open Sans"/>
-                <a:cs typeface="Open Sans"/>
+              <a:rPr sz="1100" b="0">
+                <a:solidFill>
+                  <a:srgbClr val="777777"/>
+                </a:solidFill>
+                <a:latin typeface="Calibri"/>
+                <a:ea typeface="Calibri"/>
+                <a:cs typeface="Calibri"/>
               </a:rPr>
-              <a:t>Снаружи крови может не быть видно, но состояние ухудшается. Ориентируйтесь на признаки кровопотери и механизм травмы.</a:t>
-            </a:r>
-          </a:p>
-        </p:txBody>
-      </p:sp>
-      <p:sp>
-        <p:nvSpPr>
-          <p:cNvPr id="9" name="TextBox 8"/>
-          <p:cNvSpPr txBox="1"/>
-          <p:nvPr/>
-        </p:nvSpPr>
-        <p:spPr>
-          <a:xfrm>
-            <a:off x="700000" y="2600000"/>
-            <a:ext cx="11000000" cy="2800000"/>
-          </a:xfrm>
-          <a:prstGeom prst="rect">
-            <a:avLst/>
-          </a:prstGeom>
-          <a:noFill/>
-        </p:spPr>
-        <p:txBody>
-          <a:bodyPr wrap="square">
-            <a:spAutoFit/>
-          </a:bodyPr>
-          <a:lstStyle/>
-          <a:p>
-            <a:pPr algn="l">
-              <a:spcAft>
-                <a:spcPts val="800"/>
-              </a:spcAft>
-            </a:pPr>
-            <a:r>
-              <a:rPr sz="1500" b="0">
-                <a:solidFill>
-                  <a:srgbClr val="333333"/>
-                </a:solidFill>
-                <a:latin typeface="Open Sans"/>
-                <a:ea typeface="Open Sans"/>
-                <a:cs typeface="Open Sans"/>
-              </a:rPr>
-              <a:t>•  Настораживающие ситуации: удар в живот / грудь, падение с высоты, ДТП.</a:t>
-            </a:r>
-          </a:p>
-          <a:p>
-            <a:pPr algn="l">
-              <a:spcAft>
-                <a:spcPts val="800"/>
-              </a:spcAft>
-            </a:pPr>
-            <a:r>
-              <a:rPr sz="1500" b="0">
-                <a:solidFill>
-                  <a:srgbClr val="333333"/>
-                </a:solidFill>
-                <a:latin typeface="Open Sans"/>
-                <a:ea typeface="Open Sans"/>
-                <a:cs typeface="Open Sans"/>
-              </a:rPr>
-              <a:t>•  Боль и напряжение живота, нарастающая слабость, холодный пот, жажда.</a:t>
-            </a:r>
-          </a:p>
-          <a:p>
-            <a:pPr algn="l">
-              <a:spcAft>
-                <a:spcPts val="800"/>
-              </a:spcAft>
-            </a:pPr>
-            <a:r>
-              <a:rPr sz="1500" b="0">
-                <a:solidFill>
-                  <a:srgbClr val="333333"/>
-                </a:solidFill>
-                <a:latin typeface="Open Sans"/>
-                <a:ea typeface="Open Sans"/>
-                <a:cs typeface="Open Sans"/>
-              </a:rPr>
-              <a:t>•  На месте происшествия внутреннее кровотечение не останавливают — нужны вызов СМП, покой, положение, контроль состояния.</a:t>
-            </a:r>
-          </a:p>
-        </p:txBody>
-      </p:sp>
-      <p:sp>
-        <p:nvSpPr>
-          <p:cNvPr id="10" name="Rounded Rectangle 9"/>
+              <a:t>Оказание первой помощи при наружных кровотечениях</a:t>
+            </a:r>
+          </a:p>
+        </p:txBody>
+      </p:sp>
+      <p:sp>
+        <p:nvSpPr>
+          <p:cNvPr id="7" name="Rectangle 6"/>
           <p:cNvSpPr/>
           <p:nvPr/>
         </p:nvSpPr>
         <p:spPr>
           <a:xfrm>
-            <a:off x="700000" y="5600000"/>
-            <a:ext cx="11000000" cy="900000"/>
-          </a:xfrm>
-          <a:prstGeom prst="roundRect">
+            <a:off x="0" y="2700000"/>
+            <a:ext cx="400000" cy="400000"/>
+          </a:xfrm>
+          <a:prstGeom prst="rect">
             <a:avLst/>
           </a:prstGeom>
           <a:solidFill>
-            <a:srgbClr val="F5F0E1"/>
+            <a:srgbClr val="606060"/>
           </a:solidFill>
           <a:ln>
             <a:noFill/>
@@ -9317,14 +9487,14 @@
       </p:sp>
       <p:sp>
         <p:nvSpPr>
-          <p:cNvPr id="11" name="TextBox 10"/>
+          <p:cNvPr id="8" name="TextBox 7"/>
           <p:cNvSpPr txBox="1"/>
           <p:nvPr/>
         </p:nvSpPr>
         <p:spPr>
           <a:xfrm>
-            <a:off x="950000" y="5750000"/>
-            <a:ext cx="10500000" cy="600000"/>
+            <a:off x="0" y="2700000"/>
+            <a:ext cx="400000" cy="400000"/>
           </a:xfrm>
           <a:prstGeom prst="rect">
             <a:avLst/>
@@ -9337,15 +9507,211 @@
           </a:bodyPr>
           <a:lstStyle/>
           <a:p>
+            <a:pPr algn="ctr"/>
+            <a:r>
+              <a:rPr sz="1300" b="1">
+                <a:solidFill>
+                  <a:srgbClr val="FFFFFF"/>
+                </a:solidFill>
+                <a:latin typeface="Calibri"/>
+                <a:ea typeface="Calibri"/>
+                <a:cs typeface="Calibri"/>
+              </a:rPr>
+              <a:t>6</a:t>
+            </a:r>
+          </a:p>
+        </p:txBody>
+      </p:sp>
+      <p:sp>
+        <p:nvSpPr>
+          <p:cNvPr id="9" name="TextBox 8"/>
+          <p:cNvSpPr txBox="1"/>
+          <p:nvPr/>
+        </p:nvSpPr>
+        <p:spPr>
+          <a:xfrm>
+            <a:off x="700000" y="1500000"/>
+            <a:ext cx="11000000" cy="900000"/>
+          </a:xfrm>
+          <a:prstGeom prst="rect">
+            <a:avLst/>
+          </a:prstGeom>
+          <a:noFill/>
+        </p:spPr>
+        <p:txBody>
+          <a:bodyPr wrap="square" anchor="t">
+            <a:spAutoFit/>
+          </a:bodyPr>
+          <a:lstStyle/>
+          <a:p>
             <a:pPr algn="l"/>
             <a:r>
-              <a:rPr sz="1500" b="1">
-                <a:solidFill>
-                  <a:srgbClr val="ED1C24"/>
-                </a:solidFill>
-                <a:latin typeface="Open Sans"/>
-                <a:ea typeface="Open Sans"/>
-                <a:cs typeface="Open Sans"/>
+              <a:rPr sz="1500" b="0">
+                <a:solidFill>
+                  <a:srgbClr val="333333"/>
+                </a:solidFill>
+                <a:latin typeface="Calibri"/>
+                <a:ea typeface="Calibri"/>
+                <a:cs typeface="Calibri"/>
+              </a:rPr>
+              <a:t>Снаружи крови может не быть видно, но состояние ухудшается. Ориентируйтесь на признаки кровопотери и механизм травмы.</a:t>
+            </a:r>
+          </a:p>
+        </p:txBody>
+      </p:sp>
+      <p:sp>
+        <p:nvSpPr>
+          <p:cNvPr id="10" name="TextBox 9"/>
+          <p:cNvSpPr txBox="1"/>
+          <p:nvPr/>
+        </p:nvSpPr>
+        <p:spPr>
+          <a:xfrm>
+            <a:off x="700000" y="2600000"/>
+            <a:ext cx="11000000" cy="2400000"/>
+          </a:xfrm>
+          <a:prstGeom prst="rect">
+            <a:avLst/>
+          </a:prstGeom>
+          <a:noFill/>
+        </p:spPr>
+        <p:txBody>
+          <a:bodyPr wrap="square">
+            <a:spAutoFit/>
+          </a:bodyPr>
+          <a:lstStyle/>
+          <a:p>
+            <a:pPr algn="l">
+              <a:spcAft>
+                <a:spcPts val="700"/>
+              </a:spcAft>
+            </a:pPr>
+            <a:r>
+              <a:rPr sz="1400" b="0">
+                <a:solidFill>
+                  <a:srgbClr val="333333"/>
+                </a:solidFill>
+                <a:latin typeface="Calibri"/>
+                <a:ea typeface="Calibri"/>
+                <a:cs typeface="Calibri"/>
+              </a:rPr>
+              <a:t>•  Настораживающие ситуации: удар в живот / грудь, падение с высоты, ДТП.</a:t>
+            </a:r>
+          </a:p>
+          <a:p>
+            <a:pPr algn="l">
+              <a:spcAft>
+                <a:spcPts val="700"/>
+              </a:spcAft>
+            </a:pPr>
+            <a:r>
+              <a:rPr sz="1400" b="0">
+                <a:solidFill>
+                  <a:srgbClr val="333333"/>
+                </a:solidFill>
+                <a:latin typeface="Calibri"/>
+                <a:ea typeface="Calibri"/>
+                <a:cs typeface="Calibri"/>
+              </a:rPr>
+              <a:t>•  Боль и напряжение живота, нарастающая слабость, холодный пот, жажда.</a:t>
+            </a:r>
+          </a:p>
+          <a:p>
+            <a:pPr algn="l">
+              <a:spcAft>
+                <a:spcPts val="700"/>
+              </a:spcAft>
+            </a:pPr>
+            <a:r>
+              <a:rPr sz="1400" b="0">
+                <a:solidFill>
+                  <a:srgbClr val="333333"/>
+                </a:solidFill>
+                <a:latin typeface="Calibri"/>
+                <a:ea typeface="Calibri"/>
+                <a:cs typeface="Calibri"/>
+              </a:rPr>
+              <a:t>•  На месте внутреннее кровотечение не останавливают — СМП, покой, контроль.</a:t>
+            </a:r>
+          </a:p>
+        </p:txBody>
+      </p:sp>
+      <p:sp>
+        <p:nvSpPr>
+          <p:cNvPr id="11" name="Rounded Rectangle 10"/>
+          <p:cNvSpPr/>
+          <p:nvPr/>
+        </p:nvSpPr>
+        <p:spPr>
+          <a:xfrm>
+            <a:off x="700000" y="5300000"/>
+            <a:ext cx="11000000" cy="1100000"/>
+          </a:xfrm>
+          <a:prstGeom prst="roundRect">
+            <a:avLst/>
+          </a:prstGeom>
+          <a:solidFill>
+            <a:srgbClr val="8DDBCD"/>
+          </a:solidFill>
+          <a:ln w="15875">
+            <a:solidFill>
+              <a:srgbClr val="1AA090"/>
+            </a:solidFill>
+          </a:ln>
+        </p:spPr>
+        <p:style>
+          <a:lnRef idx="1">
+            <a:schemeClr val="accent1"/>
+          </a:lnRef>
+          <a:fillRef idx="3">
+            <a:schemeClr val="accent1"/>
+          </a:fillRef>
+          <a:effectRef idx="2">
+            <a:schemeClr val="accent1"/>
+          </a:effectRef>
+          <a:fontRef idx="minor">
+            <a:schemeClr val="lt1"/>
+          </a:fontRef>
+        </p:style>
+        <p:txBody>
+          <a:bodyPr rtlCol="0" anchor="ctr"/>
+          <a:lstStyle/>
+          <a:p>
+            <a:pPr algn="ctr"/>
+          </a:p>
+        </p:txBody>
+      </p:sp>
+      <p:sp>
+        <p:nvSpPr>
+          <p:cNvPr id="12" name="TextBox 11"/>
+          <p:cNvSpPr txBox="1"/>
+          <p:nvPr/>
+        </p:nvSpPr>
+        <p:spPr>
+          <a:xfrm>
+            <a:off x="900000" y="5480000"/>
+            <a:ext cx="10600000" cy="740000"/>
+          </a:xfrm>
+          <a:prstGeom prst="rect">
+            <a:avLst/>
+          </a:prstGeom>
+          <a:noFill/>
+        </p:spPr>
+        <p:txBody>
+          <a:bodyPr wrap="square" anchor="ctr">
+            <a:spAutoFit/>
+          </a:bodyPr>
+          <a:lstStyle/>
+          <a:p>
+            <a:pPr algn="l"/>
+            <a:r>
+              <a:rPr sz="1400" b="0">
+                <a:solidFill>
+                  <a:srgbClr val="0D6B60"/>
+                </a:solidFill>
+                <a:latin typeface="Calibri"/>
+                <a:ea typeface="Calibri"/>
+                <a:cs typeface="Calibri"/>
               </a:rPr>
               <a:t>Нет видимой крови ≠ нет угрозы. Смотрите на состояние пострадавшего.</a:t>
             </a:r>
@@ -9415,57 +9781,20 @@
       </p:sp>
       <p:sp>
         <p:nvSpPr>
-          <p:cNvPr id="3" name="TextBox 2"/>
-          <p:cNvSpPr txBox="1"/>
-          <p:nvPr/>
-        </p:nvSpPr>
-        <p:spPr>
-          <a:xfrm>
-            <a:off x="700000" y="280000"/>
-            <a:ext cx="11000000" cy="550000"/>
-          </a:xfrm>
-          <a:prstGeom prst="rect">
-            <a:avLst/>
-          </a:prstGeom>
-          <a:noFill/>
-        </p:spPr>
-        <p:txBody>
-          <a:bodyPr wrap="square" anchor="t">
-            <a:spAutoFit/>
-          </a:bodyPr>
-          <a:lstStyle/>
-          <a:p>
-            <a:pPr algn="l"/>
-            <a:r>
-              <a:rPr sz="2200" b="1">
-                <a:solidFill>
-                  <a:srgbClr val="333333"/>
-                </a:solidFill>
-                <a:latin typeface="Open Sans"/>
-                <a:ea typeface="Open Sans"/>
-                <a:cs typeface="Open Sans"/>
-              </a:rPr>
-              <a:t>КАК ОЦЕНИТЬ ИНТЕНСИВНОСТЬ КРОВОТЕЧЕНИЯ</a:t>
-            </a:r>
-          </a:p>
-        </p:txBody>
-      </p:sp>
-      <p:sp>
-        <p:nvSpPr>
-          <p:cNvPr id="4" name="Rectangle 3"/>
+          <p:cNvPr id="3" name="Rectangle 2"/>
           <p:cNvSpPr/>
           <p:nvPr/>
         </p:nvSpPr>
         <p:spPr>
           <a:xfrm>
-            <a:off x="700000" y="880000"/>
-            <a:ext cx="9000000" cy="25000"/>
+            <a:off x="0" y="0"/>
+            <a:ext cx="12191695" cy="1300000"/>
           </a:xfrm>
           <a:prstGeom prst="rect">
             <a:avLst/>
           </a:prstGeom>
           <a:solidFill>
-            <a:srgbClr val="555555"/>
+            <a:srgbClr val="F8F8F8"/>
           </a:solidFill>
           <a:ln>
             <a:noFill/>
@@ -9495,14 +9824,14 @@
       </p:sp>
       <p:sp>
         <p:nvSpPr>
-          <p:cNvPr id="5" name="TextBox 4"/>
+          <p:cNvPr id="4" name="TextBox 3"/>
           <p:cNvSpPr txBox="1"/>
           <p:nvPr/>
         </p:nvSpPr>
         <p:spPr>
           <a:xfrm>
-            <a:off x="700000" y="950000"/>
-            <a:ext cx="11000000" cy="350000"/>
+            <a:off x="700000" y="220000"/>
+            <a:ext cx="11200000" cy="550000"/>
           </a:xfrm>
           <a:prstGeom prst="rect">
             <a:avLst/>
@@ -9517,35 +9846,35 @@
           <a:p>
             <a:pPr algn="l"/>
             <a:r>
-              <a:rPr sz="1200" b="0">
-                <a:solidFill>
-                  <a:srgbClr val="666666"/>
-                </a:solidFill>
-                <a:latin typeface="Open Sans"/>
-                <a:ea typeface="Open Sans"/>
-                <a:cs typeface="Open Sans"/>
+              <a:rPr sz="2000" b="1">
+                <a:solidFill>
+                  <a:srgbClr val="333333"/>
+                </a:solidFill>
+                <a:latin typeface="Calibri"/>
+                <a:ea typeface="Calibri"/>
+                <a:cs typeface="Calibri"/>
               </a:rPr>
-              <a:t>Оказание первой помощи при наружных кровотечениях</a:t>
-            </a:r>
-          </a:p>
-        </p:txBody>
-      </p:sp>
-      <p:sp>
-        <p:nvSpPr>
-          <p:cNvPr id="6" name="Rectangle 5"/>
+              <a:t>КАК ОЦЕНИТЬ ИНТЕНСИВНОСТЬ КРОВОТЕЧЕНИЯ</a:t>
+            </a:r>
+          </a:p>
+        </p:txBody>
+      </p:sp>
+      <p:sp>
+        <p:nvSpPr>
+          <p:cNvPr id="5" name="Rectangle 4"/>
           <p:cNvSpPr/>
           <p:nvPr/>
         </p:nvSpPr>
         <p:spPr>
           <a:xfrm>
-            <a:off x="0" y="2800000"/>
-            <a:ext cx="420000" cy="420000"/>
+            <a:off x="700000" y="820000"/>
+            <a:ext cx="8500000" cy="28000"/>
           </a:xfrm>
           <a:prstGeom prst="rect">
             <a:avLst/>
           </a:prstGeom>
           <a:solidFill>
-            <a:srgbClr val="555555"/>
+            <a:srgbClr val="606060"/>
           </a:solidFill>
           <a:ln>
             <a:noFill/>
@@ -9575,14 +9904,14 @@
       </p:sp>
       <p:sp>
         <p:nvSpPr>
-          <p:cNvPr id="7" name="TextBox 6"/>
+          <p:cNvPr id="6" name="TextBox 5"/>
           <p:cNvSpPr txBox="1"/>
           <p:nvPr/>
         </p:nvSpPr>
         <p:spPr>
           <a:xfrm>
-            <a:off x="0" y="2800000"/>
-            <a:ext cx="420000" cy="420000"/>
+            <a:off x="700000" y="880000"/>
+            <a:ext cx="11000000" cy="320000"/>
           </a:xfrm>
           <a:prstGeom prst="rect">
             <a:avLst/>
@@ -9590,42 +9919,42 @@
           <a:noFill/>
         </p:spPr>
         <p:txBody>
-          <a:bodyPr wrap="square" anchor="ctr">
+          <a:bodyPr wrap="square" anchor="t">
             <a:spAutoFit/>
           </a:bodyPr>
           <a:lstStyle/>
           <a:p>
-            <a:pPr algn="ctr"/>
-            <a:r>
-              <a:rPr sz="1400" b="1">
-                <a:solidFill>
-                  <a:srgbClr val="FFFFFF"/>
-                </a:solidFill>
-                <a:latin typeface="Open Sans"/>
-                <a:ea typeface="Open Sans"/>
-                <a:cs typeface="Open Sans"/>
+            <a:pPr algn="l"/>
+            <a:r>
+              <a:rPr sz="1100" b="0">
+                <a:solidFill>
+                  <a:srgbClr val="777777"/>
+                </a:solidFill>
+                <a:latin typeface="Calibri"/>
+                <a:ea typeface="Calibri"/>
+                <a:cs typeface="Calibri"/>
               </a:rPr>
-              <a:t>7</a:t>
-            </a:r>
-          </a:p>
-        </p:txBody>
-      </p:sp>
-      <p:sp>
-        <p:nvSpPr>
-          <p:cNvPr id="8" name="Oval 7"/>
+              <a:t>Оказание первой помощи при наружных кровотечениях</a:t>
+            </a:r>
+          </a:p>
+        </p:txBody>
+      </p:sp>
+      <p:sp>
+        <p:nvSpPr>
+          <p:cNvPr id="7" name="Rectangle 6"/>
           <p:cNvSpPr/>
           <p:nvPr/>
         </p:nvSpPr>
         <p:spPr>
           <a:xfrm>
-            <a:off x="700000" y="1650000"/>
-            <a:ext cx="550000" cy="550000"/>
-          </a:xfrm>
-          <a:prstGeom prst="ellipse">
+            <a:off x="0" y="2700000"/>
+            <a:ext cx="400000" cy="400000"/>
+          </a:xfrm>
+          <a:prstGeom prst="rect">
             <a:avLst/>
           </a:prstGeom>
           <a:solidFill>
-            <a:srgbClr val="0055AA"/>
+            <a:srgbClr val="606060"/>
           </a:solidFill>
           <a:ln>
             <a:noFill/>
@@ -9655,14 +9984,14 @@
       </p:sp>
       <p:sp>
         <p:nvSpPr>
-          <p:cNvPr id="9" name="TextBox 8"/>
+          <p:cNvPr id="8" name="TextBox 7"/>
           <p:cNvSpPr txBox="1"/>
           <p:nvPr/>
         </p:nvSpPr>
         <p:spPr>
           <a:xfrm>
-            <a:off x="700000" y="1650000"/>
-            <a:ext cx="550000" cy="550000"/>
+            <a:off x="0" y="2700000"/>
+            <a:ext cx="400000" cy="400000"/>
           </a:xfrm>
           <a:prstGeom prst="rect">
             <a:avLst/>
@@ -9677,109 +10006,35 @@
           <a:p>
             <a:pPr algn="ctr"/>
             <a:r>
-              <a:rPr sz="1600" b="1">
+              <a:rPr sz="1300" b="1">
                 <a:solidFill>
                   <a:srgbClr val="FFFFFF"/>
                 </a:solidFill>
-                <a:latin typeface="Open Sans"/>
-                <a:ea typeface="Open Sans"/>
-                <a:cs typeface="Open Sans"/>
+                <a:latin typeface="Calibri"/>
+                <a:ea typeface="Calibri"/>
+                <a:cs typeface="Calibri"/>
               </a:rPr>
-              <a:t>С</a:t>
-            </a:r>
-          </a:p>
-        </p:txBody>
-      </p:sp>
-      <p:sp>
-        <p:nvSpPr>
-          <p:cNvPr id="10" name="TextBox 9"/>
-          <p:cNvSpPr txBox="1"/>
-          <p:nvPr/>
-        </p:nvSpPr>
-        <p:spPr>
-          <a:xfrm>
-            <a:off x="1450000" y="1500000"/>
-            <a:ext cx="10000000" cy="400000"/>
-          </a:xfrm>
-          <a:prstGeom prst="rect">
-            <a:avLst/>
-          </a:prstGeom>
-          <a:noFill/>
-        </p:spPr>
-        <p:txBody>
-          <a:bodyPr wrap="square" anchor="t">
-            <a:spAutoFit/>
-          </a:bodyPr>
-          <a:lstStyle/>
-          <a:p>
-            <a:pPr algn="l"/>
-            <a:r>
-              <a:rPr sz="1600" b="1">
-                <a:solidFill>
-                  <a:srgbClr val="333333"/>
-                </a:solidFill>
-                <a:latin typeface="Open Sans"/>
-                <a:ea typeface="Open Sans"/>
-                <a:cs typeface="Open Sans"/>
-              </a:rPr>
-              <a:t>Слабая</a:t>
-            </a:r>
-          </a:p>
-        </p:txBody>
-      </p:sp>
-      <p:sp>
-        <p:nvSpPr>
-          <p:cNvPr id="11" name="TextBox 10"/>
-          <p:cNvSpPr txBox="1"/>
-          <p:nvPr/>
-        </p:nvSpPr>
-        <p:spPr>
-          <a:xfrm>
-            <a:off x="1450000" y="1950000"/>
-            <a:ext cx="10000000" cy="700000"/>
-          </a:xfrm>
-          <a:prstGeom prst="rect">
-            <a:avLst/>
-          </a:prstGeom>
-          <a:noFill/>
-        </p:spPr>
-        <p:txBody>
-          <a:bodyPr wrap="square" anchor="t">
-            <a:spAutoFit/>
-          </a:bodyPr>
-          <a:lstStyle/>
-          <a:p>
-            <a:pPr algn="l"/>
-            <a:r>
-              <a:rPr sz="1400" b="0">
-                <a:solidFill>
-                  <a:srgbClr val="666666"/>
-                </a:solidFill>
-                <a:latin typeface="Open Sans"/>
-                <a:ea typeface="Open Sans"/>
-                <a:cs typeface="Open Sans"/>
-              </a:rPr>
-              <a:t>Капиллярное сочение, небольшие ссадины/порезы. Угрозы жизни обычно нет, но остановить нужно.</a:t>
-            </a:r>
-          </a:p>
-        </p:txBody>
-      </p:sp>
-      <p:sp>
-        <p:nvSpPr>
-          <p:cNvPr id="12" name="Oval 11"/>
+              <a:t>7</a:t>
+            </a:r>
+          </a:p>
+        </p:txBody>
+      </p:sp>
+      <p:sp>
+        <p:nvSpPr>
+          <p:cNvPr id="9" name="Oval 8"/>
           <p:cNvSpPr/>
           <p:nvPr/>
         </p:nvSpPr>
         <p:spPr>
           <a:xfrm>
-            <a:off x="700000" y="3100000"/>
+            <a:off x="700000" y="1650000"/>
             <a:ext cx="550000" cy="550000"/>
           </a:xfrm>
           <a:prstGeom prst="ellipse">
             <a:avLst/>
           </a:prstGeom>
           <a:solidFill>
-            <a:srgbClr val="555555"/>
+            <a:srgbClr val="8DDBCD"/>
           </a:solidFill>
           <a:ln>
             <a:noFill/>
@@ -9809,13 +10064,13 @@
       </p:sp>
       <p:sp>
         <p:nvSpPr>
-          <p:cNvPr id="13" name="TextBox 12"/>
+          <p:cNvPr id="10" name="TextBox 9"/>
           <p:cNvSpPr txBox="1"/>
           <p:nvPr/>
         </p:nvSpPr>
         <p:spPr>
           <a:xfrm>
-            <a:off x="700000" y="3100000"/>
+            <a:off x="700000" y="1650000"/>
             <a:ext cx="550000" cy="550000"/>
           </a:xfrm>
           <a:prstGeom prst="rect">
@@ -9831,13 +10086,13 @@
           <a:p>
             <a:pPr algn="ctr"/>
             <a:r>
-              <a:rPr sz="1600" b="1">
+              <a:rPr sz="1500" b="1">
                 <a:solidFill>
                   <a:srgbClr val="FFFFFF"/>
                 </a:solidFill>
-                <a:latin typeface="Open Sans"/>
-                <a:ea typeface="Open Sans"/>
-                <a:cs typeface="Open Sans"/>
+                <a:latin typeface="Calibri"/>
+                <a:ea typeface="Calibri"/>
+                <a:cs typeface="Calibri"/>
               </a:rPr>
               <a:t>С</a:t>
             </a:r>
@@ -9846,13 +10101,13 @@
       </p:sp>
       <p:sp>
         <p:nvSpPr>
-          <p:cNvPr id="14" name="TextBox 13"/>
+          <p:cNvPr id="11" name="TextBox 10"/>
           <p:cNvSpPr txBox="1"/>
           <p:nvPr/>
         </p:nvSpPr>
         <p:spPr>
           <a:xfrm>
-            <a:off x="1450000" y="2950000"/>
+            <a:off x="1450000" y="1500000"/>
             <a:ext cx="10000000" cy="400000"/>
           </a:xfrm>
           <a:prstGeom prst="rect">
@@ -9868,28 +10123,28 @@
           <a:p>
             <a:pPr algn="l"/>
             <a:r>
-              <a:rPr sz="1600" b="1">
+              <a:rPr sz="1500" b="1">
                 <a:solidFill>
                   <a:srgbClr val="333333"/>
                 </a:solidFill>
-                <a:latin typeface="Open Sans"/>
-                <a:ea typeface="Open Sans"/>
-                <a:cs typeface="Open Sans"/>
+                <a:latin typeface="Calibri"/>
+                <a:ea typeface="Calibri"/>
+                <a:cs typeface="Calibri"/>
               </a:rPr>
-              <a:t>Средняя</a:t>
-            </a:r>
-          </a:p>
-        </p:txBody>
-      </p:sp>
-      <p:sp>
-        <p:nvSpPr>
-          <p:cNvPr id="15" name="TextBox 14"/>
+              <a:t>Слабая</a:t>
+            </a:r>
+          </a:p>
+        </p:txBody>
+      </p:sp>
+      <p:sp>
+        <p:nvSpPr>
+          <p:cNvPr id="12" name="TextBox 11"/>
           <p:cNvSpPr txBox="1"/>
           <p:nvPr/>
         </p:nvSpPr>
         <p:spPr>
           <a:xfrm>
-            <a:off x="1450000" y="3400000"/>
+            <a:off x="1450000" y="1950000"/>
             <a:ext cx="10000000" cy="700000"/>
           </a:xfrm>
           <a:prstGeom prst="rect">
@@ -9905,22 +10160,176 @@
           <a:p>
             <a:pPr algn="l"/>
             <a:r>
-              <a:rPr sz="1400" b="0">
-                <a:solidFill>
-                  <a:srgbClr val="666666"/>
-                </a:solidFill>
-                <a:latin typeface="Open Sans"/>
-                <a:ea typeface="Open Sans"/>
-                <a:cs typeface="Open Sans"/>
+              <a:rPr sz="1300" b="0">
+                <a:solidFill>
+                  <a:srgbClr val="777777"/>
+                </a:solidFill>
+                <a:latin typeface="Calibri"/>
+                <a:ea typeface="Calibri"/>
+                <a:cs typeface="Calibri"/>
               </a:rPr>
-              <a:t>Стойкий «ручей», пропитывание повязки/ткани. Без остановки возможна значительная кровопотеря.</a:t>
-            </a:r>
-          </a:p>
-        </p:txBody>
-      </p:sp>
-      <p:sp>
-        <p:nvSpPr>
-          <p:cNvPr id="16" name="Oval 15"/>
+              <a:t>Капиллярное сочение, небольшие ссадины/порезы. Угрозы жизни обычно нет.</a:t>
+            </a:r>
+          </a:p>
+        </p:txBody>
+      </p:sp>
+      <p:sp>
+        <p:nvSpPr>
+          <p:cNvPr id="13" name="Oval 12"/>
+          <p:cNvSpPr/>
+          <p:nvPr/>
+        </p:nvSpPr>
+        <p:spPr>
+          <a:xfrm>
+            <a:off x="700000" y="3100000"/>
+            <a:ext cx="550000" cy="550000"/>
+          </a:xfrm>
+          <a:prstGeom prst="ellipse">
+            <a:avLst/>
+          </a:prstGeom>
+          <a:solidFill>
+            <a:srgbClr val="1AA090"/>
+          </a:solidFill>
+          <a:ln>
+            <a:noFill/>
+          </a:ln>
+        </p:spPr>
+        <p:style>
+          <a:lnRef idx="1">
+            <a:schemeClr val="accent1"/>
+          </a:lnRef>
+          <a:fillRef idx="3">
+            <a:schemeClr val="accent1"/>
+          </a:fillRef>
+          <a:effectRef idx="2">
+            <a:schemeClr val="accent1"/>
+          </a:effectRef>
+          <a:fontRef idx="minor">
+            <a:schemeClr val="lt1"/>
+          </a:fontRef>
+        </p:style>
+        <p:txBody>
+          <a:bodyPr rtlCol="0" anchor="ctr"/>
+          <a:lstStyle/>
+          <a:p>
+            <a:pPr algn="ctr"/>
+          </a:p>
+        </p:txBody>
+      </p:sp>
+      <p:sp>
+        <p:nvSpPr>
+          <p:cNvPr id="14" name="TextBox 13"/>
+          <p:cNvSpPr txBox="1"/>
+          <p:nvPr/>
+        </p:nvSpPr>
+        <p:spPr>
+          <a:xfrm>
+            <a:off x="700000" y="3100000"/>
+            <a:ext cx="550000" cy="550000"/>
+          </a:xfrm>
+          <a:prstGeom prst="rect">
+            <a:avLst/>
+          </a:prstGeom>
+          <a:noFill/>
+        </p:spPr>
+        <p:txBody>
+          <a:bodyPr wrap="square" anchor="ctr">
+            <a:spAutoFit/>
+          </a:bodyPr>
+          <a:lstStyle/>
+          <a:p>
+            <a:pPr algn="ctr"/>
+            <a:r>
+              <a:rPr sz="1500" b="1">
+                <a:solidFill>
+                  <a:srgbClr val="FFFFFF"/>
+                </a:solidFill>
+                <a:latin typeface="Calibri"/>
+                <a:ea typeface="Calibri"/>
+                <a:cs typeface="Calibri"/>
+              </a:rPr>
+              <a:t>С</a:t>
+            </a:r>
+          </a:p>
+        </p:txBody>
+      </p:sp>
+      <p:sp>
+        <p:nvSpPr>
+          <p:cNvPr id="15" name="TextBox 14"/>
+          <p:cNvSpPr txBox="1"/>
+          <p:nvPr/>
+        </p:nvSpPr>
+        <p:spPr>
+          <a:xfrm>
+            <a:off x="1450000" y="2950000"/>
+            <a:ext cx="10000000" cy="400000"/>
+          </a:xfrm>
+          <a:prstGeom prst="rect">
+            <a:avLst/>
+          </a:prstGeom>
+          <a:noFill/>
+        </p:spPr>
+        <p:txBody>
+          <a:bodyPr wrap="square" anchor="t">
+            <a:spAutoFit/>
+          </a:bodyPr>
+          <a:lstStyle/>
+          <a:p>
+            <a:pPr algn="l"/>
+            <a:r>
+              <a:rPr sz="1500" b="1">
+                <a:solidFill>
+                  <a:srgbClr val="333333"/>
+                </a:solidFill>
+                <a:latin typeface="Calibri"/>
+                <a:ea typeface="Calibri"/>
+                <a:cs typeface="Calibri"/>
+              </a:rPr>
+              <a:t>Средняя</a:t>
+            </a:r>
+          </a:p>
+        </p:txBody>
+      </p:sp>
+      <p:sp>
+        <p:nvSpPr>
+          <p:cNvPr id="16" name="TextBox 15"/>
+          <p:cNvSpPr txBox="1"/>
+          <p:nvPr/>
+        </p:nvSpPr>
+        <p:spPr>
+          <a:xfrm>
+            <a:off x="1450000" y="3400000"/>
+            <a:ext cx="10000000" cy="700000"/>
+          </a:xfrm>
+          <a:prstGeom prst="rect">
+            <a:avLst/>
+          </a:prstGeom>
+          <a:noFill/>
+        </p:spPr>
+        <p:txBody>
+          <a:bodyPr wrap="square" anchor="t">
+            <a:spAutoFit/>
+          </a:bodyPr>
+          <a:lstStyle/>
+          <a:p>
+            <a:pPr algn="l"/>
+            <a:r>
+              <a:rPr sz="1300" b="0">
+                <a:solidFill>
+                  <a:srgbClr val="777777"/>
+                </a:solidFill>
+                <a:latin typeface="Calibri"/>
+                <a:ea typeface="Calibri"/>
+                <a:cs typeface="Calibri"/>
+              </a:rPr>
+              <a:t>Стойкий «ручей», пропитывание повязки/ткани. Без остановки — значительная потеря.</a:t>
+            </a:r>
+          </a:p>
+        </p:txBody>
+      </p:sp>
+      <p:sp>
+        <p:nvSpPr>
+          <p:cNvPr id="17" name="Oval 16"/>
           <p:cNvSpPr/>
           <p:nvPr/>
         </p:nvSpPr>
@@ -9963,7 +10372,7 @@
       </p:sp>
       <p:sp>
         <p:nvSpPr>
-          <p:cNvPr id="17" name="TextBox 16"/>
+          <p:cNvPr id="18" name="TextBox 17"/>
           <p:cNvSpPr txBox="1"/>
           <p:nvPr/>
         </p:nvSpPr>
@@ -9985,13 +10394,13 @@
           <a:p>
             <a:pPr algn="ctr"/>
             <a:r>
-              <a:rPr sz="1600" b="1">
+              <a:rPr sz="1500" b="1">
                 <a:solidFill>
                   <a:srgbClr val="FFFFFF"/>
                 </a:solidFill>
-                <a:latin typeface="Open Sans"/>
-                <a:ea typeface="Open Sans"/>
-                <a:cs typeface="Open Sans"/>
+                <a:latin typeface="Calibri"/>
+                <a:ea typeface="Calibri"/>
+                <a:cs typeface="Calibri"/>
               </a:rPr>
               <a:t>И</a:t>
             </a:r>
@@ -10000,7 +10409,7 @@
       </p:sp>
       <p:sp>
         <p:nvSpPr>
-          <p:cNvPr id="18" name="TextBox 17"/>
+          <p:cNvPr id="19" name="TextBox 18"/>
           <p:cNvSpPr txBox="1"/>
           <p:nvPr/>
         </p:nvSpPr>
@@ -10022,13 +10431,13 @@
           <a:p>
             <a:pPr algn="l"/>
             <a:r>
-              <a:rPr sz="1600" b="1">
+              <a:rPr sz="1500" b="1">
                 <a:solidFill>
                   <a:srgbClr val="333333"/>
                 </a:solidFill>
-                <a:latin typeface="Open Sans"/>
-                <a:ea typeface="Open Sans"/>
-                <a:cs typeface="Open Sans"/>
+                <a:latin typeface="Calibri"/>
+                <a:ea typeface="Calibri"/>
+                <a:cs typeface="Calibri"/>
               </a:rPr>
               <a:t>Интенсивная</a:t>
             </a:r>
@@ -10037,7 +10446,7 @@
       </p:sp>
       <p:sp>
         <p:nvSpPr>
-          <p:cNvPr id="19" name="TextBox 18"/>
+          <p:cNvPr id="20" name="TextBox 19"/>
           <p:cNvSpPr txBox="1"/>
           <p:nvPr/>
         </p:nvSpPr>
@@ -10059,15 +10468,15 @@
           <a:p>
             <a:pPr algn="l"/>
             <a:r>
-              <a:rPr sz="1400" b="0">
-                <a:solidFill>
-                  <a:srgbClr val="666666"/>
-                </a:solidFill>
-                <a:latin typeface="Open Sans"/>
-                <a:ea typeface="Open Sans"/>
-                <a:cs typeface="Open Sans"/>
+              <a:rPr sz="1300" b="0">
+                <a:solidFill>
+                  <a:srgbClr val="777777"/>
+                </a:solidFill>
+                <a:latin typeface="Calibri"/>
+                <a:ea typeface="Calibri"/>
+                <a:cs typeface="Calibri"/>
               </a:rPr>
-              <a:t>Струя / быстрое пропитывание одежды, лужа крови, рана с сильным истечением — останавливать немедленно.</a:t>
+              <a:t>Струя / быстрое пропитывание одежды, лужа крови — останавливать немедленно.</a:t>
             </a:r>
           </a:p>
         </p:txBody>
@@ -10135,57 +10544,20 @@
       </p:sp>
       <p:sp>
         <p:nvSpPr>
-          <p:cNvPr id="3" name="TextBox 2"/>
-          <p:cNvSpPr txBox="1"/>
-          <p:nvPr/>
-        </p:nvSpPr>
-        <p:spPr>
-          <a:xfrm>
-            <a:off x="700000" y="280000"/>
-            <a:ext cx="11000000" cy="550000"/>
-          </a:xfrm>
-          <a:prstGeom prst="rect">
-            <a:avLst/>
-          </a:prstGeom>
-          <a:noFill/>
-        </p:spPr>
-        <p:txBody>
-          <a:bodyPr wrap="square" anchor="t">
-            <a:spAutoFit/>
-          </a:bodyPr>
-          <a:lstStyle/>
-          <a:p>
-            <a:pPr algn="l"/>
-            <a:r>
-              <a:rPr sz="2200" b="1">
-                <a:solidFill>
-                  <a:srgbClr val="333333"/>
-                </a:solidFill>
-                <a:latin typeface="Open Sans"/>
-                <a:ea typeface="Open Sans"/>
-                <a:cs typeface="Open Sans"/>
-              </a:rPr>
-              <a:t>СРАВНЕНИЕ ПРИЗНАКОВ ПО ВИДАМ</a:t>
-            </a:r>
-          </a:p>
-        </p:txBody>
-      </p:sp>
-      <p:sp>
-        <p:nvSpPr>
-          <p:cNvPr id="4" name="Rectangle 3"/>
+          <p:cNvPr id="3" name="Rectangle 2"/>
           <p:cNvSpPr/>
           <p:nvPr/>
         </p:nvSpPr>
         <p:spPr>
           <a:xfrm>
-            <a:off x="700000" y="880000"/>
-            <a:ext cx="9000000" cy="25000"/>
+            <a:off x="0" y="0"/>
+            <a:ext cx="12191695" cy="1300000"/>
           </a:xfrm>
           <a:prstGeom prst="rect">
             <a:avLst/>
           </a:prstGeom>
           <a:solidFill>
-            <a:srgbClr val="555555"/>
+            <a:srgbClr val="F8F8F8"/>
           </a:solidFill>
           <a:ln>
             <a:noFill/>
@@ -10215,14 +10587,14 @@
       </p:sp>
       <p:sp>
         <p:nvSpPr>
-          <p:cNvPr id="5" name="TextBox 4"/>
+          <p:cNvPr id="4" name="TextBox 3"/>
           <p:cNvSpPr txBox="1"/>
           <p:nvPr/>
         </p:nvSpPr>
         <p:spPr>
           <a:xfrm>
-            <a:off x="700000" y="950000"/>
-            <a:ext cx="11000000" cy="350000"/>
+            <a:off x="700000" y="220000"/>
+            <a:ext cx="11200000" cy="550000"/>
           </a:xfrm>
           <a:prstGeom prst="rect">
             <a:avLst/>
@@ -10237,35 +10609,35 @@
           <a:p>
             <a:pPr algn="l"/>
             <a:r>
-              <a:rPr sz="1200" b="0">
-                <a:solidFill>
-                  <a:srgbClr val="666666"/>
-                </a:solidFill>
-                <a:latin typeface="Open Sans"/>
-                <a:ea typeface="Open Sans"/>
-                <a:cs typeface="Open Sans"/>
+              <a:rPr sz="2000" b="1">
+                <a:solidFill>
+                  <a:srgbClr val="333333"/>
+                </a:solidFill>
+                <a:latin typeface="Calibri"/>
+                <a:ea typeface="Calibri"/>
+                <a:cs typeface="Calibri"/>
               </a:rPr>
-              <a:t>Оказание первой помощи при наружных кровотечениях</a:t>
-            </a:r>
-          </a:p>
-        </p:txBody>
-      </p:sp>
-      <p:sp>
-        <p:nvSpPr>
-          <p:cNvPr id="6" name="Rectangle 5"/>
+              <a:t>СРАВНЕНИЕ ПРИЗНАКОВ ПО ВИДАМ</a:t>
+            </a:r>
+          </a:p>
+        </p:txBody>
+      </p:sp>
+      <p:sp>
+        <p:nvSpPr>
+          <p:cNvPr id="5" name="Rectangle 4"/>
           <p:cNvSpPr/>
           <p:nvPr/>
         </p:nvSpPr>
         <p:spPr>
           <a:xfrm>
-            <a:off x="0" y="2800000"/>
-            <a:ext cx="420000" cy="420000"/>
+            <a:off x="700000" y="820000"/>
+            <a:ext cx="8500000" cy="28000"/>
           </a:xfrm>
           <a:prstGeom prst="rect">
             <a:avLst/>
           </a:prstGeom>
           <a:solidFill>
-            <a:srgbClr val="555555"/>
+            <a:srgbClr val="606060"/>
           </a:solidFill>
           <a:ln>
             <a:noFill/>
@@ -10295,14 +10667,94 @@
       </p:sp>
       <p:sp>
         <p:nvSpPr>
-          <p:cNvPr id="7" name="TextBox 6"/>
+          <p:cNvPr id="6" name="TextBox 5"/>
           <p:cNvSpPr txBox="1"/>
           <p:nvPr/>
         </p:nvSpPr>
         <p:spPr>
           <a:xfrm>
-            <a:off x="0" y="2800000"/>
-            <a:ext cx="420000" cy="420000"/>
+            <a:off x="700000" y="880000"/>
+            <a:ext cx="11000000" cy="320000"/>
+          </a:xfrm>
+          <a:prstGeom prst="rect">
+            <a:avLst/>
+          </a:prstGeom>
+          <a:noFill/>
+        </p:spPr>
+        <p:txBody>
+          <a:bodyPr wrap="square" anchor="t">
+            <a:spAutoFit/>
+          </a:bodyPr>
+          <a:lstStyle/>
+          <a:p>
+            <a:pPr algn="l"/>
+            <a:r>
+              <a:rPr sz="1100" b="0">
+                <a:solidFill>
+                  <a:srgbClr val="777777"/>
+                </a:solidFill>
+                <a:latin typeface="Calibri"/>
+                <a:ea typeface="Calibri"/>
+                <a:cs typeface="Calibri"/>
+              </a:rPr>
+              <a:t>Оказание первой помощи при наружных кровотечениях</a:t>
+            </a:r>
+          </a:p>
+        </p:txBody>
+      </p:sp>
+      <p:sp>
+        <p:nvSpPr>
+          <p:cNvPr id="7" name="Rectangle 6"/>
+          <p:cNvSpPr/>
+          <p:nvPr/>
+        </p:nvSpPr>
+        <p:spPr>
+          <a:xfrm>
+            <a:off x="0" y="2700000"/>
+            <a:ext cx="400000" cy="400000"/>
+          </a:xfrm>
+          <a:prstGeom prst="rect">
+            <a:avLst/>
+          </a:prstGeom>
+          <a:solidFill>
+            <a:srgbClr val="606060"/>
+          </a:solidFill>
+          <a:ln>
+            <a:noFill/>
+          </a:ln>
+        </p:spPr>
+        <p:style>
+          <a:lnRef idx="1">
+            <a:schemeClr val="accent1"/>
+          </a:lnRef>
+          <a:fillRef idx="3">
+            <a:schemeClr val="accent1"/>
+          </a:fillRef>
+          <a:effectRef idx="2">
+            <a:schemeClr val="accent1"/>
+          </a:effectRef>
+          <a:fontRef idx="minor">
+            <a:schemeClr val="lt1"/>
+          </a:fontRef>
+        </p:style>
+        <p:txBody>
+          <a:bodyPr rtlCol="0" anchor="ctr"/>
+          <a:lstStyle/>
+          <a:p>
+            <a:pPr algn="ctr"/>
+          </a:p>
+        </p:txBody>
+      </p:sp>
+      <p:sp>
+        <p:nvSpPr>
+          <p:cNvPr id="8" name="TextBox 7"/>
+          <p:cNvSpPr txBox="1"/>
+          <p:nvPr/>
+        </p:nvSpPr>
+        <p:spPr>
+          <a:xfrm>
+            <a:off x="0" y="2700000"/>
+            <a:ext cx="400000" cy="400000"/>
           </a:xfrm>
           <a:prstGeom prst="rect">
             <a:avLst/>
@@ -10317,13 +10769,13 @@
           <a:p>
             <a:pPr algn="ctr"/>
             <a:r>
-              <a:rPr sz="1400" b="1">
+              <a:rPr sz="1300" b="1">
                 <a:solidFill>
                   <a:srgbClr val="FFFFFF"/>
                 </a:solidFill>
-                <a:latin typeface="Open Sans"/>
-                <a:ea typeface="Open Sans"/>
-                <a:cs typeface="Open Sans"/>
+                <a:latin typeface="Calibri"/>
+                <a:ea typeface="Calibri"/>
+                <a:cs typeface="Calibri"/>
               </a:rPr>
               <a:t>8</a:t>
             </a:r>
@@ -10332,14 +10784,14 @@
       </p:sp>
       <p:sp>
         <p:nvSpPr>
-          <p:cNvPr id="8" name="TextBox 7"/>
+          <p:cNvPr id="9" name="TextBox 8"/>
           <p:cNvSpPr txBox="1"/>
           <p:nvPr/>
         </p:nvSpPr>
         <p:spPr>
           <a:xfrm>
             <a:off x="700000" y="1400000"/>
-            <a:ext cx="11000000" cy="400000"/>
+            <a:ext cx="11000000" cy="350000"/>
           </a:xfrm>
           <a:prstGeom prst="rect">
             <a:avLst/>
@@ -10354,29 +10806,29 @@
           <a:p>
             <a:pPr algn="l"/>
             <a:r>
-              <a:rPr sz="1300" b="0">
-                <a:solidFill>
-                  <a:srgbClr val="666666"/>
-                </a:solidFill>
-                <a:latin typeface="Open Sans"/>
-                <a:ea typeface="Open Sans"/>
-                <a:cs typeface="Open Sans"/>
+              <a:rPr sz="1200" b="0">
+                <a:solidFill>
+                  <a:srgbClr val="777777"/>
+                </a:solidFill>
+                <a:latin typeface="Calibri"/>
+                <a:ea typeface="Calibri"/>
+                <a:cs typeface="Calibri"/>
               </a:rPr>
-              <a:t>Детализация к уже известным видам (артериальное / венозное / капиллярное).</a:t>
+              <a:t>Детализация к видам из темы «Обзорный осмотр».</a:t>
             </a:r>
           </a:p>
         </p:txBody>
       </p:sp>
       <p:graphicFrame>
         <p:nvGraphicFramePr>
-          <p:cNvPr id="9" name="Table 8"/>
+          <p:cNvPr id="10" name="Table 9"/>
           <p:cNvGraphicFramePr>
             <a:graphicFrameLocks noGrp="1"/>
           </p:cNvGraphicFramePr>
           <p:nvPr/>
         </p:nvGraphicFramePr>
         <p:xfrm>
-          <a:off x="700000" y="1900000"/>
+          <a:off x="700000" y="1850000"/>
           <a:ext cx="11000000" cy="4300000"/>
         </p:xfrm>
         <a:graphic>
@@ -10402,9 +10854,9 @@
                           <a:solidFill>
                             <a:srgbClr val="FFFFFF"/>
                           </a:solidFill>
-                          <a:latin typeface="Open Sans"/>
-                          <a:ea typeface="Open Sans"/>
-                          <a:cs typeface="Open Sans"/>
+                          <a:latin typeface="Calibri"/>
+                          <a:ea typeface="Calibri"/>
+                          <a:cs typeface="Calibri"/>
                         </a:rPr>
                         <a:t>Признак</a:t>
                       </a:r>
@@ -10412,7 +10864,7 @@
                   </a:txBody>
                   <a:tcPr>
                     <a:solidFill>
-                      <a:srgbClr val="444444"/>
+                      <a:srgbClr val="1AA090"/>
                     </a:solidFill>
                   </a:tcPr>
                 </a:tc>
@@ -10426,9 +10878,9 @@
                           <a:solidFill>
                             <a:srgbClr val="FFFFFF"/>
                           </a:solidFill>
-                          <a:latin typeface="Open Sans"/>
-                          <a:ea typeface="Open Sans"/>
-                          <a:cs typeface="Open Sans"/>
+                          <a:latin typeface="Calibri"/>
+                          <a:ea typeface="Calibri"/>
+                          <a:cs typeface="Calibri"/>
                         </a:rPr>
                         <a:t>Артериальное</a:t>
                       </a:r>
@@ -10436,7 +10888,7 @@
                   </a:txBody>
                   <a:tcPr>
                     <a:solidFill>
-                      <a:srgbClr val="444444"/>
+                      <a:srgbClr val="1AA090"/>
                     </a:solidFill>
                   </a:tcPr>
                 </a:tc>
@@ -10450,9 +10902,9 @@
                           <a:solidFill>
                             <a:srgbClr val="FFFFFF"/>
                           </a:solidFill>
-                          <a:latin typeface="Open Sans"/>
-                          <a:ea typeface="Open Sans"/>
-                          <a:cs typeface="Open Sans"/>
+                          <a:latin typeface="Calibri"/>
+                          <a:ea typeface="Calibri"/>
+                          <a:cs typeface="Calibri"/>
                         </a:rPr>
                         <a:t>Венозное</a:t>
                       </a:r>
@@ -10460,7 +10912,7 @@
                   </a:txBody>
                   <a:tcPr>
                     <a:solidFill>
-                      <a:srgbClr val="444444"/>
+                      <a:srgbClr val="1AA090"/>
                     </a:solidFill>
                   </a:tcPr>
                 </a:tc>
@@ -10474,9 +10926,9 @@
                           <a:solidFill>
                             <a:srgbClr val="FFFFFF"/>
                           </a:solidFill>
-                          <a:latin typeface="Open Sans"/>
-                          <a:ea typeface="Open Sans"/>
-                          <a:cs typeface="Open Sans"/>
+                          <a:latin typeface="Calibri"/>
+                          <a:ea typeface="Calibri"/>
+                          <a:cs typeface="Calibri"/>
                         </a:rPr>
                         <a:t>Капиллярное</a:t>
                       </a:r>
@@ -10484,7 +10936,7 @@
                   </a:txBody>
                   <a:tcPr>
                     <a:solidFill>
-                      <a:srgbClr val="444444"/>
+                      <a:srgbClr val="1AA090"/>
                     </a:solidFill>
                   </a:tcPr>
                 </a:tc>
@@ -10500,9 +10952,9 @@
                           <a:solidFill>
                             <a:srgbClr val="333333"/>
                           </a:solidFill>
-                          <a:latin typeface="Open Sans"/>
-                          <a:ea typeface="Open Sans"/>
-                          <a:cs typeface="Open Sans"/>
+                          <a:latin typeface="Calibri"/>
+                          <a:ea typeface="Calibri"/>
+                          <a:cs typeface="Calibri"/>
                         </a:rPr>
                         <a:t>Цвет</a:t>
                       </a:r>
@@ -10524,9 +10976,9 @@
                           <a:solidFill>
                             <a:srgbClr val="ED1C24"/>
                           </a:solidFill>
-                          <a:latin typeface="Open Sans"/>
-                          <a:ea typeface="Open Sans"/>
-                          <a:cs typeface="Open Sans"/>
+                          <a:latin typeface="Calibri"/>
+                          <a:ea typeface="Calibri"/>
+                          <a:cs typeface="Calibri"/>
                         </a:rPr>
                         <a:t>Алый, яркий</a:t>
                       </a:r>
@@ -10548,9 +11000,9 @@
                           <a:solidFill>
                             <a:srgbClr val="333333"/>
                           </a:solidFill>
-                          <a:latin typeface="Open Sans"/>
-                          <a:ea typeface="Open Sans"/>
-                          <a:cs typeface="Open Sans"/>
+                          <a:latin typeface="Calibri"/>
+                          <a:ea typeface="Calibri"/>
+                          <a:cs typeface="Calibri"/>
                         </a:rPr>
                         <a:t>Тёмный, вишнёвый</a:t>
                       </a:r>
@@ -10572,9 +11024,9 @@
                           <a:solidFill>
                             <a:srgbClr val="333333"/>
                           </a:solidFill>
-                          <a:latin typeface="Open Sans"/>
-                          <a:ea typeface="Open Sans"/>
-                          <a:cs typeface="Open Sans"/>
+                          <a:latin typeface="Calibri"/>
+                          <a:ea typeface="Calibri"/>
+                          <a:cs typeface="Calibri"/>
                         </a:rPr>
                         <a:t>Красный</a:t>
                       </a:r>
@@ -10598,9 +11050,9 @@
                           <a:solidFill>
                             <a:srgbClr val="333333"/>
                           </a:solidFill>
-                          <a:latin typeface="Open Sans"/>
-                          <a:ea typeface="Open Sans"/>
-                          <a:cs typeface="Open Sans"/>
+                          <a:latin typeface="Calibri"/>
+                          <a:ea typeface="Calibri"/>
+                          <a:cs typeface="Calibri"/>
                         </a:rPr>
                         <a:t>Характер</a:t>
                       </a:r>
@@ -10608,7 +11060,7 @@
                   </a:txBody>
                   <a:tcPr>
                     <a:solidFill>
-                      <a:srgbClr val="F5F5F5"/>
+                      <a:srgbClr val="F0FAF8"/>
                     </a:solidFill>
                   </a:tcPr>
                 </a:tc>
@@ -10622,9 +11074,9 @@
                           <a:solidFill>
                             <a:srgbClr val="ED1C24"/>
                           </a:solidFill>
-                          <a:latin typeface="Open Sans"/>
-                          <a:ea typeface="Open Sans"/>
-                          <a:cs typeface="Open Sans"/>
+                          <a:latin typeface="Calibri"/>
+                          <a:ea typeface="Calibri"/>
+                          <a:cs typeface="Calibri"/>
                         </a:rPr>
                         <a:t>Пульсирующая струя</a:t>
                       </a:r>
@@ -10632,7 +11084,7 @@
                   </a:txBody>
                   <a:tcPr>
                     <a:solidFill>
-                      <a:srgbClr val="F5F5F5"/>
+                      <a:srgbClr val="F0FAF8"/>
                     </a:solidFill>
                   </a:tcPr>
                 </a:tc>
@@ -10646,9 +11098,9 @@
                           <a:solidFill>
                             <a:srgbClr val="333333"/>
                           </a:solidFill>
-                          <a:latin typeface="Open Sans"/>
-                          <a:ea typeface="Open Sans"/>
-                          <a:cs typeface="Open Sans"/>
+                          <a:latin typeface="Calibri"/>
+                          <a:ea typeface="Calibri"/>
+                          <a:cs typeface="Calibri"/>
                         </a:rPr>
                         <a:t>Равномерный «ручей»</a:t>
                       </a:r>
@@ -10656,7 +11108,7 @@
                   </a:txBody>
                   <a:tcPr>
                     <a:solidFill>
-                      <a:srgbClr val="F5F5F5"/>
+                      <a:srgbClr val="F0FAF8"/>
                     </a:solidFill>
                   </a:tcPr>
                 </a:tc>
@@ -10670,9 +11122,9 @@
                           <a:solidFill>
                             <a:srgbClr val="333333"/>
                           </a:solidFill>
-                          <a:latin typeface="Open Sans"/>
-                          <a:ea typeface="Open Sans"/>
-                          <a:cs typeface="Open Sans"/>
+                          <a:latin typeface="Calibri"/>
+                          <a:ea typeface="Calibri"/>
+                          <a:cs typeface="Calibri"/>
                         </a:rPr>
                         <a:t>Сочится</a:t>
                       </a:r>
@@ -10680,7 +11132,7 @@
                   </a:txBody>
                   <a:tcPr>
                     <a:solidFill>
-                      <a:srgbClr val="F5F5F5"/>
+                      <a:srgbClr val="F0FAF8"/>
                     </a:solidFill>
                   </a:tcPr>
                 </a:tc>
@@ -10696,11 +11148,11 @@
                           <a:solidFill>
                             <a:srgbClr val="333333"/>
                           </a:solidFill>
-                          <a:latin typeface="Open Sans"/>
-                          <a:ea typeface="Open Sans"/>
-                          <a:cs typeface="Open Sans"/>
+                          <a:latin typeface="Calibri"/>
+                          <a:ea typeface="Calibri"/>
+                          <a:cs typeface="Calibri"/>
                         </a:rPr>
-                        <a:t>Скорость потери</a:t>
+                        <a:t>Скорость</a:t>
                       </a:r>
                     </a:p>
                   </a:txBody>
@@ -10720,9 +11172,9 @@
                           <a:solidFill>
                             <a:srgbClr val="ED1C24"/>
                           </a:solidFill>
-                          <a:latin typeface="Open Sans"/>
-                          <a:ea typeface="Open Sans"/>
-                          <a:cs typeface="Open Sans"/>
+                          <a:latin typeface="Calibri"/>
+                          <a:ea typeface="Calibri"/>
+                          <a:cs typeface="Calibri"/>
                         </a:rPr>
                         <a:t>Очень быстрая</a:t>
                       </a:r>
@@ -10744,9 +11196,9 @@
                           <a:solidFill>
                             <a:srgbClr val="333333"/>
                           </a:solidFill>
-                          <a:latin typeface="Open Sans"/>
-                          <a:ea typeface="Open Sans"/>
-                          <a:cs typeface="Open Sans"/>
+                          <a:latin typeface="Calibri"/>
+                          <a:ea typeface="Calibri"/>
+                          <a:cs typeface="Calibri"/>
                         </a:rPr>
                         <a:t>Умеренная / быстрая</a:t>
                       </a:r>
@@ -10768,9 +11220,9 @@
                           <a:solidFill>
                             <a:srgbClr val="333333"/>
                           </a:solidFill>
-                          <a:latin typeface="Open Sans"/>
-                          <a:ea typeface="Open Sans"/>
-                          <a:cs typeface="Open Sans"/>
+                          <a:latin typeface="Calibri"/>
+                          <a:ea typeface="Calibri"/>
+                          <a:cs typeface="Calibri"/>
                         </a:rPr>
                         <a:t>Медленная</a:t>
                       </a:r>
@@ -10794,9 +11246,9 @@
                           <a:solidFill>
                             <a:srgbClr val="333333"/>
                           </a:solidFill>
-                          <a:latin typeface="Open Sans"/>
-                          <a:ea typeface="Open Sans"/>
-                          <a:cs typeface="Open Sans"/>
+                          <a:latin typeface="Calibri"/>
+                          <a:ea typeface="Calibri"/>
+                          <a:cs typeface="Calibri"/>
                         </a:rPr>
                         <a:t>Опасность</a:t>
                       </a:r>
@@ -10804,7 +11256,7 @@
                   </a:txBody>
                   <a:tcPr>
                     <a:solidFill>
-                      <a:srgbClr val="F5F5F5"/>
+                      <a:srgbClr val="F0FAF8"/>
                     </a:solidFill>
                   </a:tcPr>
                 </a:tc>
@@ -10818,9 +11270,9 @@
                           <a:solidFill>
                             <a:srgbClr val="ED1C24"/>
                           </a:solidFill>
-                          <a:latin typeface="Open Sans"/>
-                          <a:ea typeface="Open Sans"/>
-                          <a:cs typeface="Open Sans"/>
+                          <a:latin typeface="Calibri"/>
+                          <a:ea typeface="Calibri"/>
+                          <a:cs typeface="Calibri"/>
                         </a:rPr>
                         <a:t>Критическая — минуты</a:t>
                       </a:r>
@@ -10828,7 +11280,7 @@
                   </a:txBody>
                   <a:tcPr>
                     <a:solidFill>
-                      <a:srgbClr val="F5F5F5"/>
+                      <a:srgbClr val="F0FAF8"/>
                     </a:solidFill>
                   </a:tcPr>
                 </a:tc>
@@ -10842,9 +11294,9 @@
                           <a:solidFill>
                             <a:srgbClr val="333333"/>
                           </a:solidFill>
-                          <a:latin typeface="Open Sans"/>
-                          <a:ea typeface="Open Sans"/>
-                          <a:cs typeface="Open Sans"/>
+                          <a:latin typeface="Calibri"/>
+                          <a:ea typeface="Calibri"/>
+                          <a:cs typeface="Calibri"/>
                         </a:rPr>
                         <a:t>Высокая</a:t>
                       </a:r>
@@ -10852,7 +11304,7 @@
                   </a:txBody>
                   <a:tcPr>
                     <a:solidFill>
-                      <a:srgbClr val="F5F5F5"/>
+                      <a:srgbClr val="F0FAF8"/>
                     </a:solidFill>
                   </a:tcPr>
                 </a:tc>
@@ -10866,9 +11318,9 @@
                           <a:solidFill>
                             <a:srgbClr val="333333"/>
                           </a:solidFill>
-                          <a:latin typeface="Open Sans"/>
-                          <a:ea typeface="Open Sans"/>
-                          <a:cs typeface="Open Sans"/>
+                          <a:latin typeface="Calibri"/>
+                          <a:ea typeface="Calibri"/>
+                          <a:cs typeface="Calibri"/>
                         </a:rPr>
                         <a:t>Обычно низкая</a:t>
                       </a:r>
@@ -10876,7 +11328,7 @@
                   </a:txBody>
                   <a:tcPr>
                     <a:solidFill>
-                      <a:srgbClr val="F5F5F5"/>
+                      <a:srgbClr val="F0FAF8"/>
                     </a:solidFill>
                   </a:tcPr>
                 </a:tc>
@@ -10892,11 +11344,11 @@
                           <a:solidFill>
                             <a:srgbClr val="333333"/>
                           </a:solidFill>
-                          <a:latin typeface="Open Sans"/>
-                          <a:ea typeface="Open Sans"/>
-                          <a:cs typeface="Open Sans"/>
+                          <a:latin typeface="Calibri"/>
+                          <a:ea typeface="Calibri"/>
+                          <a:cs typeface="Calibri"/>
                         </a:rPr>
-                        <a:t>Типичная картина</a:t>
+                        <a:t>Картина</a:t>
                       </a:r>
                     </a:p>
                   </a:txBody>
@@ -10916,11 +11368,11 @@
                           <a:solidFill>
                             <a:srgbClr val="333333"/>
                           </a:solidFill>
-                          <a:latin typeface="Open Sans"/>
-                          <a:ea typeface="Open Sans"/>
-                          <a:cs typeface="Open Sans"/>
+                          <a:latin typeface="Calibri"/>
+                          <a:ea typeface="Calibri"/>
+                          <a:cs typeface="Calibri"/>
                         </a:rPr>
-                        <a:t>Лужа алого цвета, одежда быстро мокнет</a:t>
+                        <a:t>Лужа алого, одежда мокнет</a:t>
                       </a:r>
                     </a:p>
                   </a:txBody>
@@ -10940,11 +11392,11 @@
                           <a:solidFill>
                             <a:srgbClr val="333333"/>
                           </a:solidFill>
-                          <a:latin typeface="Open Sans"/>
-                          <a:ea typeface="Open Sans"/>
-                          <a:cs typeface="Open Sans"/>
+                          <a:latin typeface="Calibri"/>
+                          <a:ea typeface="Calibri"/>
+                          <a:cs typeface="Calibri"/>
                         </a:rPr>
-                        <a:t>Стойкое истечение без пульсации</a:t>
+                        <a:t>Стойкое истечение</a:t>
                       </a:r>
                     </a:p>
                   </a:txBody>
@@ -10964,11 +11416,11 @@
                           <a:solidFill>
                             <a:srgbClr val="333333"/>
                           </a:solidFill>
-                          <a:latin typeface="Open Sans"/>
-                          <a:ea typeface="Open Sans"/>
-                          <a:cs typeface="Open Sans"/>
+                          <a:latin typeface="Calibri"/>
+                          <a:ea typeface="Calibri"/>
+                          <a:cs typeface="Calibri"/>
                         </a:rPr>
-                        <a:t>Ссадина, порез, царапина</a:t>
+                        <a:t>Ссадина, порез</a:t>
                       </a:r>
                     </a:p>
                   </a:txBody>
@@ -11046,57 +11498,20 @@
       </p:sp>
       <p:sp>
         <p:nvSpPr>
-          <p:cNvPr id="3" name="TextBox 2"/>
-          <p:cNvSpPr txBox="1"/>
-          <p:nvPr/>
-        </p:nvSpPr>
-        <p:spPr>
-          <a:xfrm>
-            <a:off x="700000" y="280000"/>
-            <a:ext cx="11000000" cy="550000"/>
-          </a:xfrm>
-          <a:prstGeom prst="rect">
-            <a:avLst/>
-          </a:prstGeom>
-          <a:noFill/>
-        </p:spPr>
-        <p:txBody>
-          <a:bodyPr wrap="square" anchor="t">
-            <a:spAutoFit/>
-          </a:bodyPr>
-          <a:lstStyle/>
-          <a:p>
-            <a:pPr algn="l"/>
-            <a:r>
-              <a:rPr sz="2200" b="1">
-                <a:solidFill>
-                  <a:srgbClr val="333333"/>
-                </a:solidFill>
-                <a:latin typeface="Open Sans"/>
-                <a:ea typeface="Open Sans"/>
-                <a:cs typeface="Open Sans"/>
-              </a:rPr>
-              <a:t>СМЕШАННОЕ КРОВОТЕЧЕНИЕ — КОГДА ПОДОЗРЕВАТЬ</a:t>
-            </a:r>
-          </a:p>
-        </p:txBody>
-      </p:sp>
-      <p:sp>
-        <p:nvSpPr>
-          <p:cNvPr id="4" name="Rectangle 3"/>
+          <p:cNvPr id="3" name="Rectangle 2"/>
           <p:cNvSpPr/>
           <p:nvPr/>
         </p:nvSpPr>
         <p:spPr>
           <a:xfrm>
-            <a:off x="700000" y="880000"/>
-            <a:ext cx="9000000" cy="25000"/>
+            <a:off x="0" y="0"/>
+            <a:ext cx="12191695" cy="1300000"/>
           </a:xfrm>
           <a:prstGeom prst="rect">
             <a:avLst/>
           </a:prstGeom>
           <a:solidFill>
-            <a:srgbClr val="555555"/>
+            <a:srgbClr val="F8F8F8"/>
           </a:solidFill>
           <a:ln>
             <a:noFill/>
@@ -11126,14 +11541,14 @@
       </p:sp>
       <p:sp>
         <p:nvSpPr>
-          <p:cNvPr id="5" name="TextBox 4"/>
+          <p:cNvPr id="4" name="TextBox 3"/>
           <p:cNvSpPr txBox="1"/>
           <p:nvPr/>
         </p:nvSpPr>
         <p:spPr>
           <a:xfrm>
-            <a:off x="700000" y="950000"/>
-            <a:ext cx="11000000" cy="350000"/>
+            <a:off x="700000" y="220000"/>
+            <a:ext cx="11200000" cy="550000"/>
           </a:xfrm>
           <a:prstGeom prst="rect">
             <a:avLst/>
@@ -11148,35 +11563,35 @@
           <a:p>
             <a:pPr algn="l"/>
             <a:r>
-              <a:rPr sz="1200" b="0">
-                <a:solidFill>
-                  <a:srgbClr val="666666"/>
-                </a:solidFill>
-                <a:latin typeface="Open Sans"/>
-                <a:ea typeface="Open Sans"/>
-                <a:cs typeface="Open Sans"/>
+              <a:rPr sz="2000" b="1">
+                <a:solidFill>
+                  <a:srgbClr val="333333"/>
+                </a:solidFill>
+                <a:latin typeface="Calibri"/>
+                <a:ea typeface="Calibri"/>
+                <a:cs typeface="Calibri"/>
               </a:rPr>
-              <a:t>Оказание первой помощи при наружных кровотечениях</a:t>
-            </a:r>
-          </a:p>
-        </p:txBody>
-      </p:sp>
-      <p:sp>
-        <p:nvSpPr>
-          <p:cNvPr id="6" name="Rectangle 5"/>
+              <a:t>СМЕШАННОЕ КРОВОТЕЧЕНИЕ — КОГДА ПОДОЗРЕВАТЬ</a:t>
+            </a:r>
+          </a:p>
+        </p:txBody>
+      </p:sp>
+      <p:sp>
+        <p:nvSpPr>
+          <p:cNvPr id="5" name="Rectangle 4"/>
           <p:cNvSpPr/>
           <p:nvPr/>
         </p:nvSpPr>
         <p:spPr>
           <a:xfrm>
-            <a:off x="0" y="2800000"/>
-            <a:ext cx="420000" cy="420000"/>
+            <a:off x="700000" y="820000"/>
+            <a:ext cx="8500000" cy="28000"/>
           </a:xfrm>
           <a:prstGeom prst="rect">
             <a:avLst/>
           </a:prstGeom>
           <a:solidFill>
-            <a:srgbClr val="555555"/>
+            <a:srgbClr val="606060"/>
           </a:solidFill>
           <a:ln>
             <a:noFill/>
@@ -11206,14 +11621,14 @@
       </p:sp>
       <p:sp>
         <p:nvSpPr>
-          <p:cNvPr id="7" name="TextBox 6"/>
+          <p:cNvPr id="6" name="TextBox 5"/>
           <p:cNvSpPr txBox="1"/>
           <p:nvPr/>
         </p:nvSpPr>
         <p:spPr>
           <a:xfrm>
-            <a:off x="0" y="2800000"/>
-            <a:ext cx="420000" cy="420000"/>
+            <a:off x="700000" y="880000"/>
+            <a:ext cx="11000000" cy="320000"/>
           </a:xfrm>
           <a:prstGeom prst="rect">
             <a:avLst/>
@@ -11221,137 +11636,42 @@
           <a:noFill/>
         </p:spPr>
         <p:txBody>
-          <a:bodyPr wrap="square" anchor="ctr">
+          <a:bodyPr wrap="square" anchor="t">
             <a:spAutoFit/>
           </a:bodyPr>
           <a:lstStyle/>
           <a:p>
-            <a:pPr algn="ctr"/>
-            <a:r>
-              <a:rPr sz="1400" b="1">
-                <a:solidFill>
-                  <a:srgbClr val="FFFFFF"/>
-                </a:solidFill>
-                <a:latin typeface="Open Sans"/>
-                <a:ea typeface="Open Sans"/>
-                <a:cs typeface="Open Sans"/>
+            <a:pPr algn="l"/>
+            <a:r>
+              <a:rPr sz="1100" b="0">
+                <a:solidFill>
+                  <a:srgbClr val="777777"/>
+                </a:solidFill>
+                <a:latin typeface="Calibri"/>
+                <a:ea typeface="Calibri"/>
+                <a:cs typeface="Calibri"/>
               </a:rPr>
-              <a:t>9</a:t>
-            </a:r>
-          </a:p>
-        </p:txBody>
-      </p:sp>
-      <p:sp>
-        <p:nvSpPr>
-          <p:cNvPr id="8" name="TextBox 7"/>
-          <p:cNvSpPr txBox="1"/>
-          <p:nvPr/>
-        </p:nvSpPr>
-        <p:spPr>
-          <a:xfrm>
-            <a:off x="700000" y="1550000"/>
-            <a:ext cx="11000000" cy="2800000"/>
-          </a:xfrm>
-          <a:prstGeom prst="rect">
-            <a:avLst/>
-          </a:prstGeom>
-          <a:noFill/>
-        </p:spPr>
-        <p:txBody>
-          <a:bodyPr wrap="square">
-            <a:spAutoFit/>
-          </a:bodyPr>
-          <a:lstStyle/>
-          <a:p>
-            <a:pPr algn="l">
-              <a:spcAft>
-                <a:spcPts val="800"/>
-              </a:spcAft>
-            </a:pPr>
-            <a:r>
-              <a:rPr sz="1500" b="0">
-                <a:solidFill>
-                  <a:srgbClr val="333333"/>
-                </a:solidFill>
-                <a:latin typeface="Open Sans"/>
-                <a:ea typeface="Open Sans"/>
-                <a:cs typeface="Open Sans"/>
-              </a:rPr>
-              <a:t>•  Одновременно признаки артериального, венозного и капиллярного кровотечения.</a:t>
-            </a:r>
-          </a:p>
-          <a:p>
-            <a:pPr algn="l">
-              <a:spcAft>
-                <a:spcPts val="800"/>
-              </a:spcAft>
-            </a:pPr>
-            <a:r>
-              <a:rPr sz="1500" b="0">
-                <a:solidFill>
-                  <a:srgbClr val="333333"/>
-                </a:solidFill>
-                <a:latin typeface="Open Sans"/>
-                <a:ea typeface="Open Sans"/>
-                <a:cs typeface="Open Sans"/>
-              </a:rPr>
-              <a:t>•  Частый пример — отрыв (ампутация) конечности или обширное размозжение.</a:t>
-            </a:r>
-          </a:p>
-          <a:p>
-            <a:pPr algn="l">
-              <a:spcAft>
-                <a:spcPts val="800"/>
-              </a:spcAft>
-            </a:pPr>
-            <a:r>
-              <a:rPr sz="1500" b="0">
-                <a:solidFill>
-                  <a:srgbClr val="333333"/>
-                </a:solidFill>
-                <a:latin typeface="Open Sans"/>
-                <a:ea typeface="Open Sans"/>
-                <a:cs typeface="Open Sans"/>
-              </a:rPr>
-              <a:t>•  Опасно из‑за артериального компонента: быстрая массивная кровопотеря.</a:t>
-            </a:r>
-          </a:p>
-          <a:p>
-            <a:pPr algn="l">
-              <a:spcAft>
-                <a:spcPts val="800"/>
-              </a:spcAft>
-            </a:pPr>
-            <a:r>
-              <a:rPr sz="1500" b="0">
-                <a:solidFill>
-                  <a:srgbClr val="333333"/>
-                </a:solidFill>
-                <a:latin typeface="Open Sans"/>
-                <a:ea typeface="Open Sans"/>
-                <a:cs typeface="Open Sans"/>
-              </a:rPr>
-              <a:t>•  Не тратьте время на «точную классификацию» — останавливайте по интенсивности.</a:t>
-            </a:r>
-          </a:p>
-        </p:txBody>
-      </p:sp>
-      <p:sp>
-        <p:nvSpPr>
-          <p:cNvPr id="9" name="Rounded Rectangle 8"/>
+              <a:t>Оказание первой помощи при наружных кровотечениях</a:t>
+            </a:r>
+          </a:p>
+        </p:txBody>
+      </p:sp>
+      <p:sp>
+        <p:nvSpPr>
+          <p:cNvPr id="7" name="Rectangle 6"/>
           <p:cNvSpPr/>
           <p:nvPr/>
         </p:nvSpPr>
         <p:spPr>
           <a:xfrm>
-            <a:off x="700000" y="4700000"/>
-            <a:ext cx="11000000" cy="1500000"/>
-          </a:xfrm>
-          <a:prstGeom prst="roundRect">
+            <a:off x="0" y="2700000"/>
+            <a:ext cx="400000" cy="400000"/>
+          </a:xfrm>
+          <a:prstGeom prst="rect">
             <a:avLst/>
           </a:prstGeom>
           <a:solidFill>
-            <a:srgbClr val="F5F0E1"/>
+            <a:srgbClr val="606060"/>
           </a:solidFill>
           <a:ln>
             <a:noFill/>
@@ -11381,23 +11701,157 @@
       </p:sp>
       <p:sp>
         <p:nvSpPr>
-          <p:cNvPr id="10" name="Rectangle 9"/>
+          <p:cNvPr id="8" name="TextBox 7"/>
+          <p:cNvSpPr txBox="1"/>
+          <p:nvPr/>
+        </p:nvSpPr>
+        <p:spPr>
+          <a:xfrm>
+            <a:off x="0" y="2700000"/>
+            <a:ext cx="400000" cy="400000"/>
+          </a:xfrm>
+          <a:prstGeom prst="rect">
+            <a:avLst/>
+          </a:prstGeom>
+          <a:noFill/>
+        </p:spPr>
+        <p:txBody>
+          <a:bodyPr wrap="square" anchor="ctr">
+            <a:spAutoFit/>
+          </a:bodyPr>
+          <a:lstStyle/>
+          <a:p>
+            <a:pPr algn="ctr"/>
+            <a:r>
+              <a:rPr sz="1300" b="1">
+                <a:solidFill>
+                  <a:srgbClr val="FFFFFF"/>
+                </a:solidFill>
+                <a:latin typeface="Calibri"/>
+                <a:ea typeface="Calibri"/>
+                <a:cs typeface="Calibri"/>
+              </a:rPr>
+              <a:t>9</a:t>
+            </a:r>
+          </a:p>
+        </p:txBody>
+      </p:sp>
+      <p:sp>
+        <p:nvSpPr>
+          <p:cNvPr id="9" name="TextBox 8"/>
+          <p:cNvSpPr txBox="1"/>
+          <p:nvPr/>
+        </p:nvSpPr>
+        <p:spPr>
+          <a:xfrm>
+            <a:off x="700000" y="1550000"/>
+            <a:ext cx="11000000" cy="2800000"/>
+          </a:xfrm>
+          <a:prstGeom prst="rect">
+            <a:avLst/>
+          </a:prstGeom>
+          <a:noFill/>
+        </p:spPr>
+        <p:txBody>
+          <a:bodyPr wrap="square">
+            <a:spAutoFit/>
+          </a:bodyPr>
+          <a:lstStyle/>
+          <a:p>
+            <a:pPr algn="l">
+              <a:spcAft>
+                <a:spcPts val="700"/>
+              </a:spcAft>
+            </a:pPr>
+            <a:r>
+              <a:rPr sz="1400" b="0">
+                <a:solidFill>
+                  <a:srgbClr val="333333"/>
+                </a:solidFill>
+                <a:latin typeface="Calibri"/>
+                <a:ea typeface="Calibri"/>
+                <a:cs typeface="Calibri"/>
+              </a:rPr>
+              <a:t>•  Одновременно признаки артериального, венозного и капиллярного кровотечения.</a:t>
+            </a:r>
+          </a:p>
+          <a:p>
+            <a:pPr algn="l">
+              <a:spcAft>
+                <a:spcPts val="700"/>
+              </a:spcAft>
+            </a:pPr>
+            <a:r>
+              <a:rPr sz="1400" b="0">
+                <a:solidFill>
+                  <a:srgbClr val="333333"/>
+                </a:solidFill>
+                <a:latin typeface="Calibri"/>
+                <a:ea typeface="Calibri"/>
+                <a:cs typeface="Calibri"/>
+              </a:rPr>
+              <a:t>•  Частый пример — отрыв конечности или обширное размозжение.</a:t>
+            </a:r>
+          </a:p>
+          <a:p>
+            <a:pPr algn="l">
+              <a:spcAft>
+                <a:spcPts val="700"/>
+              </a:spcAft>
+            </a:pPr>
+            <a:r>
+              <a:rPr sz="1400" b="0">
+                <a:solidFill>
+                  <a:srgbClr val="333333"/>
+                </a:solidFill>
+                <a:latin typeface="Calibri"/>
+                <a:ea typeface="Calibri"/>
+                <a:cs typeface="Calibri"/>
+              </a:rPr>
+              <a:t>•  Опасно из‑за артериального компонента: быстрая массивная кровопотеря.</a:t>
+            </a:r>
+          </a:p>
+          <a:p>
+            <a:pPr algn="l">
+              <a:spcAft>
+                <a:spcPts val="700"/>
+              </a:spcAft>
+            </a:pPr>
+            <a:r>
+              <a:rPr sz="1400" b="0">
+                <a:solidFill>
+                  <a:srgbClr val="333333"/>
+                </a:solidFill>
+                <a:latin typeface="Calibri"/>
+                <a:ea typeface="Calibri"/>
+                <a:cs typeface="Calibri"/>
+              </a:rPr>
+              <a:t>•  Не тратьте время на «точную классификацию» — останавливайте по интенсивности.</a:t>
+            </a:r>
+          </a:p>
+        </p:txBody>
+      </p:sp>
+      <p:sp>
+        <p:nvSpPr>
+          <p:cNvPr id="10" name="Rounded Rectangle 9"/>
           <p:cNvSpPr/>
           <p:nvPr/>
         </p:nvSpPr>
         <p:spPr>
           <a:xfrm>
             <a:off x="700000" y="4700000"/>
-            <a:ext cx="100000" cy="1500000"/>
-          </a:xfrm>
-          <a:prstGeom prst="rect">
+            <a:ext cx="11000000" cy="1500000"/>
+          </a:xfrm>
+          <a:prstGeom prst="roundRect">
             <a:avLst/>
           </a:prstGeom>
           <a:solidFill>
-            <a:srgbClr val="ED1C24"/>
+            <a:srgbClr val="8DDBCD"/>
           </a:solidFill>
-          <a:ln>
-            <a:noFill/>
+          <a:ln w="15875">
+            <a:solidFill>
+              <a:srgbClr val="1AA090"/>
+            </a:solidFill>
           </a:ln>
         </p:spPr>
         <p:style>
@@ -11430,8 +11884,8 @@
         </p:nvSpPr>
         <p:spPr>
           <a:xfrm>
-            <a:off x="1000000" y="4950000"/>
-            <a:ext cx="10400000" cy="1000000"/>
+            <a:off x="900000" y="4880000"/>
+            <a:ext cx="10600000" cy="1140000"/>
           </a:xfrm>
           <a:prstGeom prst="rect">
             <a:avLst/>
@@ -11446,13 +11900,13 @@
           <a:p>
             <a:pPr algn="l"/>
             <a:r>
-              <a:rPr sz="1600" b="1">
-                <a:solidFill>
-                  <a:srgbClr val="333333"/>
-                </a:solidFill>
-                <a:latin typeface="Open Sans"/>
-                <a:ea typeface="Open Sans"/>
-                <a:cs typeface="Open Sans"/>
+              <a:rPr sz="1500" b="0">
+                <a:solidFill>
+                  <a:srgbClr val="0D6B60"/>
+                </a:solidFill>
+                <a:latin typeface="Calibri"/>
+                <a:ea typeface="Calibri"/>
+                <a:cs typeface="Calibri"/>
               </a:rPr>
               <a:t>Правило: есть интенсивное истечение крови — действуйте как при угрозе жизни.</a:t>
             </a:r>

--- a/presentations/Признаки_наружного_кровотечения_и_кровопотери.pptx
+++ b/presentations/Признаки_наружного_кровотечения_и_кровопотери.pptx
@@ -3577,7 +3577,7 @@
             <a:r>
               <a:rPr sz="1400" b="1">
                 <a:solidFill>
-                  <a:srgbClr val="1AA090"/>
+                  <a:srgbClr val="606060"/>
                 </a:solidFill>
                 <a:latin typeface="Calibri"/>
                 <a:ea typeface="Calibri"/>
@@ -3694,7 +3694,7 @@
             <a:r>
               <a:rPr sz="1400" b="1">
                 <a:solidFill>
-                  <a:srgbClr val="1AA090"/>
+                  <a:srgbClr val="606060"/>
                 </a:solidFill>
                 <a:latin typeface="Calibri"/>
                 <a:ea typeface="Calibri"/>
@@ -3811,7 +3811,7 @@
             <a:r>
               <a:rPr sz="1400" b="1">
                 <a:solidFill>
-                  <a:srgbClr val="1AA090"/>
+                  <a:srgbClr val="606060"/>
                 </a:solidFill>
                 <a:latin typeface="Calibri"/>
                 <a:ea typeface="Calibri"/>
@@ -3928,7 +3928,7 @@
             <a:r>
               <a:rPr sz="1400" b="1">
                 <a:solidFill>
-                  <a:srgbClr val="1AA090"/>
+                  <a:srgbClr val="606060"/>
                 </a:solidFill>
                 <a:latin typeface="Calibri"/>
                 <a:ea typeface="Calibri"/>
@@ -4321,7 +4321,7 @@
                   </a:txBody>
                   <a:tcPr>
                     <a:solidFill>
-                      <a:srgbClr val="1AA090"/>
+                      <a:srgbClr val="555555"/>
                     </a:solidFill>
                   </a:tcPr>
                 </a:tc>
@@ -4345,7 +4345,7 @@
                   </a:txBody>
                   <a:tcPr>
                     <a:solidFill>
-                      <a:srgbClr val="1AA090"/>
+                      <a:srgbClr val="555555"/>
                     </a:solidFill>
                   </a:tcPr>
                 </a:tc>
@@ -4369,7 +4369,7 @@
                   </a:txBody>
                   <a:tcPr>
                     <a:solidFill>
-                      <a:srgbClr val="1AA090"/>
+                      <a:srgbClr val="555555"/>
                     </a:solidFill>
                   </a:tcPr>
                 </a:tc>
@@ -4469,7 +4469,7 @@
                   </a:txBody>
                   <a:tcPr>
                     <a:solidFill>
-                      <a:srgbClr val="F0FAF8"/>
+                      <a:srgbClr val="F2F2F2"/>
                     </a:solidFill>
                   </a:tcPr>
                 </a:tc>
@@ -4493,7 +4493,7 @@
                   </a:txBody>
                   <a:tcPr>
                     <a:solidFill>
-                      <a:srgbClr val="F0FAF8"/>
+                      <a:srgbClr val="F2F2F2"/>
                     </a:solidFill>
                   </a:tcPr>
                 </a:tc>
@@ -4517,7 +4517,7 @@
                   </a:txBody>
                   <a:tcPr>
                     <a:solidFill>
-                      <a:srgbClr val="F0FAF8"/>
+                      <a:srgbClr val="F2F2F2"/>
                     </a:solidFill>
                   </a:tcPr>
                 </a:tc>
@@ -4617,7 +4617,7 @@
                   </a:txBody>
                   <a:tcPr>
                     <a:solidFill>
-                      <a:srgbClr val="F0FAF8"/>
+                      <a:srgbClr val="F2F2F2"/>
                     </a:solidFill>
                   </a:tcPr>
                 </a:tc>
@@ -4641,7 +4641,7 @@
                   </a:txBody>
                   <a:tcPr>
                     <a:solidFill>
-                      <a:srgbClr val="F0FAF8"/>
+                      <a:srgbClr val="F2F2F2"/>
                     </a:solidFill>
                   </a:tcPr>
                 </a:tc>
@@ -4665,7 +4665,7 @@
                   </a:txBody>
                   <a:tcPr>
                     <a:solidFill>
-                      <a:srgbClr val="F0FAF8"/>
+                      <a:srgbClr val="F2F2F2"/>
                     </a:solidFill>
                   </a:tcPr>
                 </a:tc>
@@ -5070,7 +5070,7 @@
             <a:avLst/>
           </a:prstGeom>
           <a:solidFill>
-            <a:srgbClr val="8DDBCD"/>
+            <a:srgbClr val="DDDDDD"/>
           </a:solidFill>
           <a:ln>
             <a:noFill/>
@@ -5193,7 +5193,7 @@
             <a:avLst/>
           </a:prstGeom>
           <a:solidFill>
-            <a:srgbClr val="8DDBCD"/>
+            <a:srgbClr val="DDDDDD"/>
           </a:solidFill>
           <a:ln>
             <a:noFill/>
@@ -5316,7 +5316,7 @@
             <a:avLst/>
           </a:prstGeom>
           <a:solidFill>
-            <a:srgbClr val="8DDBCD"/>
+            <a:srgbClr val="DDDDDD"/>
           </a:solidFill>
           <a:ln>
             <a:noFill/>
@@ -5439,7 +5439,7 @@
             <a:avLst/>
           </a:prstGeom>
           <a:solidFill>
-            <a:srgbClr val="8DDBCD"/>
+            <a:srgbClr val="DDDDDD"/>
           </a:solidFill>
           <a:ln>
             <a:noFill/>
@@ -5961,11 +5961,11 @@
             <a:avLst/>
           </a:prstGeom>
           <a:solidFill>
-            <a:srgbClr val="8DDBCD"/>
+            <a:srgbClr val="DDDDDD"/>
           </a:solidFill>
           <a:ln w="12700">
             <a:solidFill>
-              <a:srgbClr val="1AA090"/>
+              <a:srgbClr val="606060"/>
             </a:solidFill>
           </a:ln>
         </p:spPr>
@@ -6017,7 +6017,7 @@
             <a:r>
               <a:rPr sz="1500" b="1">
                 <a:solidFill>
-                  <a:srgbClr val="0D6B60"/>
+                  <a:srgbClr val="333333"/>
                 </a:solidFill>
                 <a:latin typeface="Calibri"/>
                 <a:ea typeface="Calibri"/>
@@ -6123,11 +6123,11 @@
             <a:avLst/>
           </a:prstGeom>
           <a:solidFill>
-            <a:srgbClr val="8DDBCD"/>
+            <a:srgbClr val="DDDDDD"/>
           </a:solidFill>
           <a:ln w="12700">
             <a:solidFill>
-              <a:srgbClr val="1AA090"/>
+              <a:srgbClr val="606060"/>
             </a:solidFill>
           </a:ln>
         </p:spPr>
@@ -6179,7 +6179,7 @@
             <a:r>
               <a:rPr sz="1500" b="1">
                 <a:solidFill>
-                  <a:srgbClr val="0D6B60"/>
+                  <a:srgbClr val="333333"/>
                 </a:solidFill>
                 <a:latin typeface="Calibri"/>
                 <a:ea typeface="Calibri"/>
@@ -6285,11 +6285,11 @@
             <a:avLst/>
           </a:prstGeom>
           <a:solidFill>
-            <a:srgbClr val="8DDBCD"/>
+            <a:srgbClr val="DDDDDD"/>
           </a:solidFill>
           <a:ln w="12700">
             <a:solidFill>
-              <a:srgbClr val="1AA090"/>
+              <a:srgbClr val="606060"/>
             </a:solidFill>
           </a:ln>
         </p:spPr>
@@ -6341,7 +6341,7 @@
             <a:r>
               <a:rPr sz="1500" b="1">
                 <a:solidFill>
-                  <a:srgbClr val="0D6B60"/>
+                  <a:srgbClr val="333333"/>
                 </a:solidFill>
                 <a:latin typeface="Calibri"/>
                 <a:ea typeface="Calibri"/>
@@ -6447,11 +6447,11 @@
             <a:avLst/>
           </a:prstGeom>
           <a:solidFill>
-            <a:srgbClr val="8DDBCD"/>
+            <a:srgbClr val="DDDDDD"/>
           </a:solidFill>
           <a:ln w="12700">
             <a:solidFill>
-              <a:srgbClr val="1AA090"/>
+              <a:srgbClr val="606060"/>
             </a:solidFill>
           </a:ln>
         </p:spPr>
@@ -6503,7 +6503,7 @@
             <a:r>
               <a:rPr sz="1500" b="1">
                 <a:solidFill>
-                  <a:srgbClr val="0D6B60"/>
+                  <a:srgbClr val="333333"/>
                 </a:solidFill>
                 <a:latin typeface="Calibri"/>
                 <a:ea typeface="Calibri"/>
@@ -6609,11 +6609,11 @@
             <a:avLst/>
           </a:prstGeom>
           <a:solidFill>
-            <a:srgbClr val="8DDBCD"/>
+            <a:srgbClr val="DDDDDD"/>
           </a:solidFill>
           <a:ln w="12700">
             <a:solidFill>
-              <a:srgbClr val="1AA090"/>
+              <a:srgbClr val="606060"/>
             </a:solidFill>
           </a:ln>
         </p:spPr>
@@ -6665,7 +6665,7 @@
             <a:r>
               <a:rPr sz="1500" b="1">
                 <a:solidFill>
-                  <a:srgbClr val="0D6B60"/>
+                  <a:srgbClr val="333333"/>
                 </a:solidFill>
                 <a:latin typeface="Calibri"/>
                 <a:ea typeface="Calibri"/>
@@ -7296,7 +7296,7 @@
           </a:solidFill>
           <a:ln w="15875">
             <a:solidFill>
-              <a:srgbClr val="8DDBCD"/>
+              <a:srgbClr val="DDDDDD"/>
             </a:solidFill>
           </a:ln>
         </p:spPr>
@@ -7337,7 +7337,7 @@
             <a:avLst/>
           </a:prstGeom>
           <a:solidFill>
-            <a:srgbClr val="8DDBCD"/>
+            <a:srgbClr val="DDDDDD"/>
           </a:solidFill>
           <a:ln>
             <a:noFill/>
@@ -7391,7 +7391,7 @@
             <a:r>
               <a:rPr sz="1400" b="1">
                 <a:solidFill>
-                  <a:srgbClr val="0D6B60"/>
+                  <a:srgbClr val="333333"/>
                 </a:solidFill>
                 <a:latin typeface="Calibri"/>
                 <a:ea typeface="Calibri"/>
@@ -7835,7 +7835,7 @@
           </a:solidFill>
           <a:ln w="15875">
             <a:solidFill>
-              <a:srgbClr val="8DDBCD"/>
+              <a:srgbClr val="DDDDDD"/>
             </a:solidFill>
           </a:ln>
         </p:spPr>
@@ -7876,7 +7876,7 @@
             <a:avLst/>
           </a:prstGeom>
           <a:solidFill>
-            <a:srgbClr val="8DDBCD"/>
+            <a:srgbClr val="DDDDDD"/>
           </a:solidFill>
           <a:ln>
             <a:noFill/>
@@ -7930,7 +7930,7 @@
             <a:r>
               <a:rPr sz="1400" b="1">
                 <a:solidFill>
-                  <a:srgbClr val="0D6B60"/>
+                  <a:srgbClr val="333333"/>
                 </a:solidFill>
                 <a:latin typeface="Calibri"/>
                 <a:ea typeface="Calibri"/>
@@ -8073,7 +8073,7 @@
           </a:solidFill>
           <a:ln w="15875">
             <a:solidFill>
-              <a:srgbClr val="8DDBCD"/>
+              <a:srgbClr val="DDDDDD"/>
             </a:solidFill>
           </a:ln>
         </p:spPr>
@@ -8114,7 +8114,7 @@
             <a:avLst/>
           </a:prstGeom>
           <a:solidFill>
-            <a:srgbClr val="8DDBCD"/>
+            <a:srgbClr val="DDDDDD"/>
           </a:solidFill>
           <a:ln>
             <a:noFill/>
@@ -8168,7 +8168,7 @@
             <a:r>
               <a:rPr sz="1400" b="1">
                 <a:solidFill>
-                  <a:srgbClr val="0D6B60"/>
+                  <a:srgbClr val="333333"/>
                 </a:solidFill>
                 <a:latin typeface="Calibri"/>
                 <a:ea typeface="Calibri"/>
@@ -8275,7 +8275,7 @@
           </a:solidFill>
           <a:ln w="15875">
             <a:solidFill>
-              <a:srgbClr val="8DDBCD"/>
+              <a:srgbClr val="DDDDDD"/>
             </a:solidFill>
           </a:ln>
         </p:spPr>
@@ -8316,7 +8316,7 @@
             <a:avLst/>
           </a:prstGeom>
           <a:solidFill>
-            <a:srgbClr val="8DDBCD"/>
+            <a:srgbClr val="DDDDDD"/>
           </a:solidFill>
           <a:ln>
             <a:noFill/>
@@ -8370,7 +8370,7 @@
             <a:r>
               <a:rPr sz="1400" b="1">
                 <a:solidFill>
-                  <a:srgbClr val="0D6B60"/>
+                  <a:srgbClr val="333333"/>
                 </a:solidFill>
                 <a:latin typeface="Calibri"/>
                 <a:ea typeface="Calibri"/>
@@ -8799,7 +8799,7 @@
             <a:avLst/>
           </a:prstGeom>
           <a:solidFill>
-            <a:srgbClr val="8DDBCD"/>
+            <a:srgbClr val="DDDDDD"/>
           </a:solidFill>
           <a:ln>
             <a:noFill/>
@@ -8853,7 +8853,7 @@
             <a:r>
               <a:rPr sz="1500" b="1">
                 <a:solidFill>
-                  <a:srgbClr val="1AA090"/>
+                  <a:srgbClr val="606060"/>
                 </a:solidFill>
                 <a:latin typeface="Calibri"/>
                 <a:ea typeface="Calibri"/>
@@ -8959,7 +8959,7 @@
             <a:avLst/>
           </a:prstGeom>
           <a:solidFill>
-            <a:srgbClr val="8DDBCD"/>
+            <a:srgbClr val="DDDDDD"/>
           </a:solidFill>
           <a:ln>
             <a:noFill/>
@@ -9013,7 +9013,7 @@
             <a:r>
               <a:rPr sz="1500" b="1">
                 <a:solidFill>
-                  <a:srgbClr val="1AA090"/>
+                  <a:srgbClr val="606060"/>
                 </a:solidFill>
                 <a:latin typeface="Calibri"/>
                 <a:ea typeface="Calibri"/>
@@ -9119,7 +9119,7 @@
             <a:avLst/>
           </a:prstGeom>
           <a:solidFill>
-            <a:srgbClr val="8DDBCD"/>
+            <a:srgbClr val="DDDDDD"/>
           </a:solidFill>
           <a:ln>
             <a:noFill/>
@@ -9173,7 +9173,7 @@
             <a:r>
               <a:rPr sz="1500" b="1">
                 <a:solidFill>
-                  <a:srgbClr val="1AA090"/>
+                  <a:srgbClr val="606060"/>
                 </a:solidFill>
                 <a:latin typeface="Calibri"/>
                 <a:ea typeface="Calibri"/>
@@ -9651,11 +9651,11 @@
             <a:avLst/>
           </a:prstGeom>
           <a:solidFill>
-            <a:srgbClr val="8DDBCD"/>
+            <a:srgbClr val="DDDDDD"/>
           </a:solidFill>
           <a:ln w="15875">
             <a:solidFill>
-              <a:srgbClr val="1AA090"/>
+              <a:srgbClr val="606060"/>
             </a:solidFill>
           </a:ln>
         </p:spPr>
@@ -9707,7 +9707,7 @@
             <a:r>
               <a:rPr sz="1400" b="0">
                 <a:solidFill>
-                  <a:srgbClr val="0D6B60"/>
+                  <a:srgbClr val="333333"/>
                 </a:solidFill>
                 <a:latin typeface="Calibri"/>
                 <a:ea typeface="Calibri"/>
@@ -10034,7 +10034,7 @@
             <a:avLst/>
           </a:prstGeom>
           <a:solidFill>
-            <a:srgbClr val="8DDBCD"/>
+            <a:srgbClr val="DDDDDD"/>
           </a:solidFill>
           <a:ln>
             <a:noFill/>
@@ -10188,7 +10188,7 @@
             <a:avLst/>
           </a:prstGeom>
           <a:solidFill>
-            <a:srgbClr val="1AA090"/>
+            <a:srgbClr val="606060"/>
           </a:solidFill>
           <a:ln>
             <a:noFill/>
@@ -10864,7 +10864,7 @@
                   </a:txBody>
                   <a:tcPr>
                     <a:solidFill>
-                      <a:srgbClr val="1AA090"/>
+                      <a:srgbClr val="555555"/>
                     </a:solidFill>
                   </a:tcPr>
                 </a:tc>
@@ -10888,7 +10888,7 @@
                   </a:txBody>
                   <a:tcPr>
                     <a:solidFill>
-                      <a:srgbClr val="1AA090"/>
+                      <a:srgbClr val="555555"/>
                     </a:solidFill>
                   </a:tcPr>
                 </a:tc>
@@ -10912,7 +10912,7 @@
                   </a:txBody>
                   <a:tcPr>
                     <a:solidFill>
-                      <a:srgbClr val="1AA090"/>
+                      <a:srgbClr val="555555"/>
                     </a:solidFill>
                   </a:tcPr>
                 </a:tc>
@@ -10936,7 +10936,7 @@
                   </a:txBody>
                   <a:tcPr>
                     <a:solidFill>
-                      <a:srgbClr val="1AA090"/>
+                      <a:srgbClr val="555555"/>
                     </a:solidFill>
                   </a:tcPr>
                 </a:tc>
@@ -11060,7 +11060,7 @@
                   </a:txBody>
                   <a:tcPr>
                     <a:solidFill>
-                      <a:srgbClr val="F0FAF8"/>
+                      <a:srgbClr val="F2F2F2"/>
                     </a:solidFill>
                   </a:tcPr>
                 </a:tc>
@@ -11084,7 +11084,7 @@
                   </a:txBody>
                   <a:tcPr>
                     <a:solidFill>
-                      <a:srgbClr val="F0FAF8"/>
+                      <a:srgbClr val="F2F2F2"/>
                     </a:solidFill>
                   </a:tcPr>
                 </a:tc>
@@ -11108,7 +11108,7 @@
                   </a:txBody>
                   <a:tcPr>
                     <a:solidFill>
-                      <a:srgbClr val="F0FAF8"/>
+                      <a:srgbClr val="F2F2F2"/>
                     </a:solidFill>
                   </a:tcPr>
                 </a:tc>
@@ -11132,7 +11132,7 @@
                   </a:txBody>
                   <a:tcPr>
                     <a:solidFill>
-                      <a:srgbClr val="F0FAF8"/>
+                      <a:srgbClr val="F2F2F2"/>
                     </a:solidFill>
                   </a:tcPr>
                 </a:tc>
@@ -11256,7 +11256,7 @@
                   </a:txBody>
                   <a:tcPr>
                     <a:solidFill>
-                      <a:srgbClr val="F0FAF8"/>
+                      <a:srgbClr val="F2F2F2"/>
                     </a:solidFill>
                   </a:tcPr>
                 </a:tc>
@@ -11280,7 +11280,7 @@
                   </a:txBody>
                   <a:tcPr>
                     <a:solidFill>
-                      <a:srgbClr val="F0FAF8"/>
+                      <a:srgbClr val="F2F2F2"/>
                     </a:solidFill>
                   </a:tcPr>
                 </a:tc>
@@ -11304,7 +11304,7 @@
                   </a:txBody>
                   <a:tcPr>
                     <a:solidFill>
-                      <a:srgbClr val="F0FAF8"/>
+                      <a:srgbClr val="F2F2F2"/>
                     </a:solidFill>
                   </a:tcPr>
                 </a:tc>
@@ -11328,7 +11328,7 @@
                   </a:txBody>
                   <a:tcPr>
                     <a:solidFill>
-                      <a:srgbClr val="F0FAF8"/>
+                      <a:srgbClr val="F2F2F2"/>
                     </a:solidFill>
                   </a:tcPr>
                 </a:tc>
@@ -11846,11 +11846,11 @@
             <a:avLst/>
           </a:prstGeom>
           <a:solidFill>
-            <a:srgbClr val="8DDBCD"/>
+            <a:srgbClr val="DDDDDD"/>
           </a:solidFill>
           <a:ln w="15875">
             <a:solidFill>
-              <a:srgbClr val="1AA090"/>
+              <a:srgbClr val="606060"/>
             </a:solidFill>
           </a:ln>
         </p:spPr>
@@ -11902,7 +11902,7 @@
             <a:r>
               <a:rPr sz="1500" b="0">
                 <a:solidFill>
-                  <a:srgbClr val="0D6B60"/>
+                  <a:srgbClr val="333333"/>
                 </a:solidFill>
                 <a:latin typeface="Calibri"/>
                 <a:ea typeface="Calibri"/>
